--- a/docs/pptx/whole/jx-linsubhr-ratio-hosp4.pptx
+++ b/docs/pptx/whole/jx-linsubhr-ratio-hosp4.pptx
@@ -2271,7 +2271,7 @@
           </p:nvSpPr>
           <p:spPr>
             <a:xfrm>
-              <a:off x="817517" y="5114368"/>
+              <a:off x="817517" y="5142518"/>
               <a:ext cx="7799693" cy="0"/>
             </a:xfrm>
             <a:custGeom>
@@ -2314,7 +2314,7 @@
           </p:nvSpPr>
           <p:spPr>
             <a:xfrm>
-              <a:off x="817517" y="4244691"/>
+              <a:off x="817517" y="4313054"/>
               <a:ext cx="7799693" cy="0"/>
             </a:xfrm>
             <a:custGeom>
@@ -2357,7 +2357,7 @@
           </p:nvSpPr>
           <p:spPr>
             <a:xfrm>
-              <a:off x="817517" y="3375014"/>
+              <a:off x="817517" y="3483591"/>
               <a:ext cx="7799693" cy="0"/>
             </a:xfrm>
             <a:custGeom>
@@ -2400,7 +2400,7 @@
           </p:nvSpPr>
           <p:spPr>
             <a:xfrm>
-              <a:off x="817517" y="2505337"/>
+              <a:off x="817517" y="2654127"/>
               <a:ext cx="7799693" cy="0"/>
             </a:xfrm>
             <a:custGeom>
@@ -2443,15 +2443,15 @@
           </p:nvSpPr>
           <p:spPr>
             <a:xfrm>
-              <a:off x="1615213" y="1896563"/>
-              <a:ext cx="0" cy="3826579"/>
+              <a:off x="1615213" y="2073503"/>
+              <a:ext cx="0" cy="3649639"/>
             </a:xfrm>
             <a:custGeom>
               <a:avLst/>
               <a:pathLst>
-                <a:path w="0" h="3826579">
+                <a:path w="0" h="3649639">
                   <a:moveTo>
-                    <a:pt x="0" y="3826579"/>
+                    <a:pt x="0" y="3649639"/>
                   </a:moveTo>
                   <a:lnTo>
                     <a:pt x="0" y="0"/>
@@ -2486,15 +2486,15 @@
           </p:nvSpPr>
           <p:spPr>
             <a:xfrm>
-              <a:off x="3387871" y="1896563"/>
-              <a:ext cx="0" cy="3826579"/>
+              <a:off x="3387871" y="2073503"/>
+              <a:ext cx="0" cy="3649639"/>
             </a:xfrm>
             <a:custGeom>
               <a:avLst/>
               <a:pathLst>
-                <a:path w="0" h="3826579">
+                <a:path w="0" h="3649639">
                   <a:moveTo>
-                    <a:pt x="0" y="3826579"/>
+                    <a:pt x="0" y="3649639"/>
                   </a:moveTo>
                   <a:lnTo>
                     <a:pt x="0" y="0"/>
@@ -2529,15 +2529,15 @@
           </p:nvSpPr>
           <p:spPr>
             <a:xfrm>
-              <a:off x="5160528" y="1896563"/>
-              <a:ext cx="0" cy="3826579"/>
+              <a:off x="5160528" y="2073503"/>
+              <a:ext cx="0" cy="3649639"/>
             </a:xfrm>
             <a:custGeom>
               <a:avLst/>
               <a:pathLst>
-                <a:path w="0" h="3826579">
+                <a:path w="0" h="3649639">
                   <a:moveTo>
-                    <a:pt x="0" y="3826579"/>
+                    <a:pt x="0" y="3649639"/>
                   </a:moveTo>
                   <a:lnTo>
                     <a:pt x="0" y="0"/>
@@ -2572,15 +2572,15 @@
           </p:nvSpPr>
           <p:spPr>
             <a:xfrm>
-              <a:off x="6933186" y="1896563"/>
-              <a:ext cx="0" cy="3826579"/>
+              <a:off x="6933186" y="2073503"/>
+              <a:ext cx="0" cy="3649639"/>
             </a:xfrm>
             <a:custGeom>
               <a:avLst/>
               <a:pathLst>
-                <a:path w="0" h="3826579">
+                <a:path w="0" h="3649639">
                   <a:moveTo>
-                    <a:pt x="0" y="3826579"/>
+                    <a:pt x="0" y="3649639"/>
                   </a:moveTo>
                   <a:lnTo>
                     <a:pt x="0" y="0"/>
@@ -2615,7 +2615,7 @@
           </p:nvSpPr>
           <p:spPr>
             <a:xfrm>
-              <a:off x="817517" y="5549207"/>
+              <a:off x="817517" y="5557249"/>
               <a:ext cx="7799693" cy="0"/>
             </a:xfrm>
             <a:custGeom>
@@ -2658,7 +2658,7 @@
           </p:nvSpPr>
           <p:spPr>
             <a:xfrm>
-              <a:off x="817517" y="4679530"/>
+              <a:off x="817517" y="4727786"/>
               <a:ext cx="7799693" cy="0"/>
             </a:xfrm>
             <a:custGeom>
@@ -2701,7 +2701,7 @@
           </p:nvSpPr>
           <p:spPr>
             <a:xfrm>
-              <a:off x="817517" y="3809853"/>
+              <a:off x="817517" y="3898322"/>
               <a:ext cx="7799693" cy="0"/>
             </a:xfrm>
             <a:custGeom>
@@ -2744,7 +2744,7 @@
           </p:nvSpPr>
           <p:spPr>
             <a:xfrm>
-              <a:off x="817517" y="2940175"/>
+              <a:off x="817517" y="3068859"/>
               <a:ext cx="7799693" cy="0"/>
             </a:xfrm>
             <a:custGeom>
@@ -2787,7 +2787,7 @@
           </p:nvSpPr>
           <p:spPr>
             <a:xfrm>
-              <a:off x="817517" y="2070498"/>
+              <a:off x="817517" y="2239395"/>
               <a:ext cx="7799693" cy="0"/>
             </a:xfrm>
             <a:custGeom>
@@ -2830,15 +2830,15 @@
           </p:nvSpPr>
           <p:spPr>
             <a:xfrm>
-              <a:off x="2501542" y="1896563"/>
-              <a:ext cx="0" cy="3826579"/>
+              <a:off x="2501542" y="2073503"/>
+              <a:ext cx="0" cy="3649639"/>
             </a:xfrm>
             <a:custGeom>
               <a:avLst/>
               <a:pathLst>
-                <a:path w="0" h="3826579">
+                <a:path w="0" h="3649639">
                   <a:moveTo>
-                    <a:pt x="0" y="3826579"/>
+                    <a:pt x="0" y="3649639"/>
                   </a:moveTo>
                   <a:lnTo>
                     <a:pt x="0" y="0"/>
@@ -2873,15 +2873,15 @@
           </p:nvSpPr>
           <p:spPr>
             <a:xfrm>
-              <a:off x="4274200" y="1896563"/>
-              <a:ext cx="0" cy="3826579"/>
+              <a:off x="4274200" y="2073503"/>
+              <a:ext cx="0" cy="3649639"/>
             </a:xfrm>
             <a:custGeom>
               <a:avLst/>
               <a:pathLst>
-                <a:path w="0" h="3826579">
+                <a:path w="0" h="3649639">
                   <a:moveTo>
-                    <a:pt x="0" y="3826579"/>
+                    <a:pt x="0" y="3649639"/>
                   </a:moveTo>
                   <a:lnTo>
                     <a:pt x="0" y="0"/>
@@ -2916,15 +2916,15 @@
           </p:nvSpPr>
           <p:spPr>
             <a:xfrm>
-              <a:off x="6046857" y="1896563"/>
-              <a:ext cx="0" cy="3826579"/>
+              <a:off x="6046857" y="2073503"/>
+              <a:ext cx="0" cy="3649639"/>
             </a:xfrm>
             <a:custGeom>
               <a:avLst/>
               <a:pathLst>
-                <a:path w="0" h="3826579">
+                <a:path w="0" h="3649639">
                   <a:moveTo>
-                    <a:pt x="0" y="3826579"/>
+                    <a:pt x="0" y="3649639"/>
                   </a:moveTo>
                   <a:lnTo>
                     <a:pt x="0" y="0"/>
@@ -2959,15 +2959,15 @@
           </p:nvSpPr>
           <p:spPr>
             <a:xfrm>
-              <a:off x="7819515" y="1896563"/>
-              <a:ext cx="0" cy="3826579"/>
+              <a:off x="7819515" y="2073503"/>
+              <a:ext cx="0" cy="3649639"/>
             </a:xfrm>
             <a:custGeom>
               <a:avLst/>
               <a:pathLst>
-                <a:path w="0" h="3826579">
+                <a:path w="0" h="3649639">
                   <a:moveTo>
-                    <a:pt x="0" y="3826579"/>
+                    <a:pt x="0" y="3649639"/>
                   </a:moveTo>
                   <a:lnTo>
                     <a:pt x="0" y="0"/>
@@ -3002,543 +3002,543 @@
           </p:nvSpPr>
           <p:spPr>
             <a:xfrm>
-              <a:off x="817517" y="1896563"/>
-              <a:ext cx="7235830" cy="3613685"/>
+              <a:off x="817517" y="2073503"/>
+              <a:ext cx="7235830" cy="3446589"/>
             </a:xfrm>
             <a:custGeom>
               <a:avLst/>
               <a:pathLst>
-                <a:path w="7235830" h="3613685">
+                <a:path w="7235830" h="3446589">
                   <a:moveTo>
                     <a:pt x="1703018" y="0"/>
                   </a:moveTo>
                   <a:lnTo>
-                    <a:pt x="1703828" y="2499"/>
-                  </a:lnTo>
-                  <a:lnTo>
-                    <a:pt x="1777588" y="216901"/>
-                  </a:lnTo>
-                  <a:lnTo>
-                    <a:pt x="1851348" y="418709"/>
-                  </a:lnTo>
-                  <a:lnTo>
-                    <a:pt x="1925108" y="608664"/>
-                  </a:lnTo>
-                  <a:lnTo>
-                    <a:pt x="1998868" y="787461"/>
-                  </a:lnTo>
-                  <a:lnTo>
-                    <a:pt x="2072628" y="955755"/>
-                  </a:lnTo>
-                  <a:lnTo>
-                    <a:pt x="2146388" y="1114165"/>
-                  </a:lnTo>
-                  <a:lnTo>
-                    <a:pt x="2220148" y="1263270"/>
-                  </a:lnTo>
-                  <a:lnTo>
-                    <a:pt x="2293908" y="1403616"/>
-                  </a:lnTo>
-                  <a:lnTo>
-                    <a:pt x="2367668" y="1535720"/>
-                  </a:lnTo>
-                  <a:lnTo>
-                    <a:pt x="2441428" y="1660063"/>
-                  </a:lnTo>
-                  <a:lnTo>
-                    <a:pt x="2515188" y="1777103"/>
-                  </a:lnTo>
-                  <a:lnTo>
-                    <a:pt x="2588948" y="1887268"/>
-                  </a:lnTo>
-                  <a:lnTo>
-                    <a:pt x="2662708" y="1990963"/>
-                  </a:lnTo>
-                  <a:lnTo>
-                    <a:pt x="2736468" y="2088566"/>
-                  </a:lnTo>
-                  <a:lnTo>
-                    <a:pt x="2810228" y="2180437"/>
-                  </a:lnTo>
-                  <a:lnTo>
-                    <a:pt x="2883988" y="2266911"/>
-                  </a:lnTo>
-                  <a:lnTo>
-                    <a:pt x="2957748" y="2348306"/>
-                  </a:lnTo>
-                  <a:lnTo>
-                    <a:pt x="3031508" y="2424920"/>
-                  </a:lnTo>
-                  <a:lnTo>
-                    <a:pt x="3105268" y="2497034"/>
-                  </a:lnTo>
-                  <a:lnTo>
-                    <a:pt x="3179028" y="2564912"/>
-                  </a:lnTo>
-                  <a:lnTo>
-                    <a:pt x="3252788" y="2628803"/>
-                  </a:lnTo>
-                  <a:lnTo>
-                    <a:pt x="3326548" y="2688941"/>
-                  </a:lnTo>
-                  <a:lnTo>
-                    <a:pt x="3400308" y="2745547"/>
-                  </a:lnTo>
-                  <a:lnTo>
-                    <a:pt x="3474068" y="2783971"/>
-                  </a:lnTo>
-                  <a:lnTo>
-                    <a:pt x="3547828" y="2787268"/>
-                  </a:lnTo>
-                  <a:lnTo>
-                    <a:pt x="3621588" y="2790553"/>
-                  </a:lnTo>
-                  <a:lnTo>
-                    <a:pt x="3695348" y="2793825"/>
-                  </a:lnTo>
-                  <a:lnTo>
-                    <a:pt x="3769108" y="2797085"/>
-                  </a:lnTo>
-                  <a:lnTo>
-                    <a:pt x="3842868" y="2800332"/>
-                  </a:lnTo>
-                  <a:lnTo>
-                    <a:pt x="3916628" y="2803567"/>
-                  </a:lnTo>
-                  <a:lnTo>
-                    <a:pt x="3990388" y="2806790"/>
-                  </a:lnTo>
-                  <a:lnTo>
-                    <a:pt x="4064149" y="2810001"/>
-                  </a:lnTo>
-                  <a:lnTo>
-                    <a:pt x="4137909" y="2813199"/>
-                  </a:lnTo>
-                  <a:lnTo>
-                    <a:pt x="4211669" y="2816385"/>
-                  </a:lnTo>
-                  <a:lnTo>
-                    <a:pt x="4285429" y="2819559"/>
-                  </a:lnTo>
-                  <a:lnTo>
-                    <a:pt x="4359189" y="2822721"/>
-                  </a:lnTo>
-                  <a:lnTo>
-                    <a:pt x="4432949" y="2825872"/>
-                  </a:lnTo>
-                  <a:lnTo>
-                    <a:pt x="4506709" y="2829010"/>
-                  </a:lnTo>
-                  <a:lnTo>
-                    <a:pt x="4580469" y="2832136"/>
-                  </a:lnTo>
-                  <a:lnTo>
-                    <a:pt x="4654229" y="2835250"/>
-                  </a:lnTo>
-                  <a:lnTo>
-                    <a:pt x="4727989" y="2838353"/>
-                  </a:lnTo>
-                  <a:lnTo>
-                    <a:pt x="4801749" y="2841443"/>
-                  </a:lnTo>
-                  <a:lnTo>
-                    <a:pt x="4875509" y="2844522"/>
-                  </a:lnTo>
-                  <a:lnTo>
-                    <a:pt x="4949269" y="2847590"/>
-                  </a:lnTo>
-                  <a:lnTo>
-                    <a:pt x="5023029" y="2850645"/>
-                  </a:lnTo>
-                  <a:lnTo>
-                    <a:pt x="5096789" y="2853690"/>
-                  </a:lnTo>
-                  <a:lnTo>
-                    <a:pt x="5170549" y="2856722"/>
-                  </a:lnTo>
-                  <a:lnTo>
-                    <a:pt x="5244309" y="2859743"/>
-                  </a:lnTo>
-                  <a:lnTo>
-                    <a:pt x="5318069" y="2862753"/>
-                  </a:lnTo>
-                  <a:lnTo>
-                    <a:pt x="5391829" y="2865751"/>
-                  </a:lnTo>
-                  <a:lnTo>
-                    <a:pt x="5465589" y="2868737"/>
-                  </a:lnTo>
-                  <a:lnTo>
-                    <a:pt x="5539349" y="2871713"/>
-                  </a:lnTo>
-                  <a:lnTo>
-                    <a:pt x="5613109" y="2874677"/>
-                  </a:lnTo>
-                  <a:lnTo>
-                    <a:pt x="5686869" y="2877630"/>
-                  </a:lnTo>
-                  <a:lnTo>
-                    <a:pt x="5760629" y="2880572"/>
-                  </a:lnTo>
-                  <a:lnTo>
-                    <a:pt x="5834389" y="2883502"/>
-                  </a:lnTo>
-                  <a:lnTo>
-                    <a:pt x="5908149" y="2886421"/>
-                  </a:lnTo>
-                  <a:lnTo>
-                    <a:pt x="5981909" y="2889330"/>
-                  </a:lnTo>
-                  <a:lnTo>
-                    <a:pt x="6055669" y="2892227"/>
-                  </a:lnTo>
-                  <a:lnTo>
-                    <a:pt x="6129429" y="2895113"/>
-                  </a:lnTo>
-                  <a:lnTo>
-                    <a:pt x="6203189" y="2897988"/>
-                  </a:lnTo>
-                  <a:lnTo>
-                    <a:pt x="6276949" y="2900853"/>
-                  </a:lnTo>
-                  <a:lnTo>
-                    <a:pt x="6350709" y="2903706"/>
-                  </a:lnTo>
-                  <a:lnTo>
-                    <a:pt x="6424469" y="2906549"/>
-                  </a:lnTo>
-                  <a:lnTo>
-                    <a:pt x="6498229" y="2909381"/>
-                  </a:lnTo>
-                  <a:lnTo>
-                    <a:pt x="6571989" y="2912202"/>
-                  </a:lnTo>
-                  <a:lnTo>
-                    <a:pt x="6645749" y="2915013"/>
-                  </a:lnTo>
-                  <a:lnTo>
-                    <a:pt x="6719509" y="2917812"/>
-                  </a:lnTo>
-                  <a:lnTo>
-                    <a:pt x="6793269" y="2920601"/>
-                  </a:lnTo>
-                  <a:lnTo>
-                    <a:pt x="6867029" y="2923380"/>
-                  </a:lnTo>
-                  <a:lnTo>
-                    <a:pt x="6940789" y="2926148"/>
-                  </a:lnTo>
-                  <a:lnTo>
-                    <a:pt x="7014550" y="2928905"/>
-                  </a:lnTo>
-                  <a:lnTo>
-                    <a:pt x="7088310" y="2931653"/>
-                  </a:lnTo>
-                  <a:lnTo>
-                    <a:pt x="7162070" y="2934389"/>
-                  </a:lnTo>
-                  <a:lnTo>
-                    <a:pt x="7235830" y="2937115"/>
-                  </a:lnTo>
-                  <a:lnTo>
-                    <a:pt x="7235830" y="3613685"/>
-                  </a:lnTo>
-                  <a:lnTo>
-                    <a:pt x="7162070" y="3611254"/>
-                  </a:lnTo>
-                  <a:lnTo>
-                    <a:pt x="7088310" y="3608671"/>
-                  </a:lnTo>
-                  <a:lnTo>
-                    <a:pt x="7014550" y="3605927"/>
-                  </a:lnTo>
-                  <a:lnTo>
-                    <a:pt x="6940789" y="3603011"/>
-                  </a:lnTo>
-                  <a:lnTo>
-                    <a:pt x="6867029" y="3599914"/>
-                  </a:lnTo>
-                  <a:lnTo>
-                    <a:pt x="6793269" y="3596624"/>
-                  </a:lnTo>
-                  <a:lnTo>
-                    <a:pt x="6719509" y="3593128"/>
-                  </a:lnTo>
-                  <a:lnTo>
-                    <a:pt x="6645749" y="3589414"/>
-                  </a:lnTo>
-                  <a:lnTo>
-                    <a:pt x="6571989" y="3585468"/>
-                  </a:lnTo>
-                  <a:lnTo>
-                    <a:pt x="6498229" y="3581276"/>
-                  </a:lnTo>
-                  <a:lnTo>
-                    <a:pt x="6424469" y="3576823"/>
-                  </a:lnTo>
-                  <a:lnTo>
-                    <a:pt x="6350709" y="3572091"/>
-                  </a:lnTo>
-                  <a:lnTo>
-                    <a:pt x="6276949" y="3567065"/>
-                  </a:lnTo>
-                  <a:lnTo>
-                    <a:pt x="6203189" y="3561724"/>
-                  </a:lnTo>
-                  <a:lnTo>
-                    <a:pt x="6129429" y="3556050"/>
-                  </a:lnTo>
-                  <a:lnTo>
-                    <a:pt x="6055669" y="3550023"/>
-                  </a:lnTo>
-                  <a:lnTo>
-                    <a:pt x="5981909" y="3543619"/>
-                  </a:lnTo>
-                  <a:lnTo>
-                    <a:pt x="5908149" y="3536815"/>
-                  </a:lnTo>
-                  <a:lnTo>
-                    <a:pt x="5834389" y="3529587"/>
-                  </a:lnTo>
-                  <a:lnTo>
-                    <a:pt x="5760629" y="3521908"/>
-                  </a:lnTo>
-                  <a:lnTo>
-                    <a:pt x="5686869" y="3513750"/>
-                  </a:lnTo>
-                  <a:lnTo>
-                    <a:pt x="5613109" y="3505083"/>
-                  </a:lnTo>
-                  <a:lnTo>
-                    <a:pt x="5539349" y="3495874"/>
-                  </a:lnTo>
-                  <a:lnTo>
-                    <a:pt x="5465589" y="3486091"/>
-                  </a:lnTo>
-                  <a:lnTo>
-                    <a:pt x="5391829" y="3475698"/>
-                  </a:lnTo>
-                  <a:lnTo>
-                    <a:pt x="5318069" y="3464656"/>
-                  </a:lnTo>
-                  <a:lnTo>
-                    <a:pt x="5244309" y="3452925"/>
-                  </a:lnTo>
-                  <a:lnTo>
-                    <a:pt x="5170549" y="3440462"/>
-                  </a:lnTo>
-                  <a:lnTo>
-                    <a:pt x="5096789" y="3427221"/>
-                  </a:lnTo>
-                  <a:lnTo>
-                    <a:pt x="5023029" y="3413154"/>
-                  </a:lnTo>
-                  <a:lnTo>
-                    <a:pt x="4949269" y="3398209"/>
-                  </a:lnTo>
-                  <a:lnTo>
-                    <a:pt x="4875509" y="3382332"/>
-                  </a:lnTo>
-                  <a:lnTo>
-                    <a:pt x="4801749" y="3365463"/>
-                  </a:lnTo>
-                  <a:lnTo>
-                    <a:pt x="4727989" y="3347542"/>
-                  </a:lnTo>
-                  <a:lnTo>
-                    <a:pt x="4654229" y="3328503"/>
-                  </a:lnTo>
-                  <a:lnTo>
-                    <a:pt x="4580469" y="3308275"/>
-                  </a:lnTo>
-                  <a:lnTo>
-                    <a:pt x="4506709" y="3286786"/>
-                  </a:lnTo>
-                  <a:lnTo>
-                    <a:pt x="4432949" y="3263955"/>
-                  </a:lnTo>
-                  <a:lnTo>
-                    <a:pt x="4359189" y="3239700"/>
-                  </a:lnTo>
-                  <a:lnTo>
-                    <a:pt x="4285429" y="3213930"/>
-                  </a:lnTo>
-                  <a:lnTo>
-                    <a:pt x="4211669" y="3186553"/>
-                  </a:lnTo>
-                  <a:lnTo>
-                    <a:pt x="4137909" y="3157468"/>
-                  </a:lnTo>
-                  <a:lnTo>
-                    <a:pt x="4064149" y="3126567"/>
-                  </a:lnTo>
-                  <a:lnTo>
-                    <a:pt x="3990388" y="3093738"/>
-                  </a:lnTo>
-                  <a:lnTo>
-                    <a:pt x="3916628" y="3058861"/>
-                  </a:lnTo>
-                  <a:lnTo>
-                    <a:pt x="3842868" y="3021807"/>
-                  </a:lnTo>
-                  <a:lnTo>
-                    <a:pt x="3769108" y="2982440"/>
-                  </a:lnTo>
-                  <a:lnTo>
-                    <a:pt x="3695348" y="2940618"/>
-                  </a:lnTo>
-                  <a:lnTo>
-                    <a:pt x="3621588" y="2896185"/>
-                  </a:lnTo>
-                  <a:lnTo>
-                    <a:pt x="3547828" y="2848979"/>
-                  </a:lnTo>
-                  <a:lnTo>
-                    <a:pt x="3474068" y="2798828"/>
-                  </a:lnTo>
-                  <a:lnTo>
-                    <a:pt x="3400308" y="2780662"/>
-                  </a:lnTo>
-                  <a:lnTo>
-                    <a:pt x="3326548" y="2777339"/>
-                  </a:lnTo>
-                  <a:lnTo>
-                    <a:pt x="3252788" y="2774004"/>
-                  </a:lnTo>
-                  <a:lnTo>
-                    <a:pt x="3179028" y="2770657"/>
-                  </a:lnTo>
-                  <a:lnTo>
-                    <a:pt x="3105268" y="2767296"/>
-                  </a:lnTo>
-                  <a:lnTo>
-                    <a:pt x="3031508" y="2763923"/>
-                  </a:lnTo>
-                  <a:lnTo>
-                    <a:pt x="2957748" y="2760537"/>
-                  </a:lnTo>
-                  <a:lnTo>
-                    <a:pt x="2883988" y="2757138"/>
-                  </a:lnTo>
-                  <a:lnTo>
-                    <a:pt x="2810228" y="2753726"/>
-                  </a:lnTo>
-                  <a:lnTo>
-                    <a:pt x="2736468" y="2750301"/>
-                  </a:lnTo>
-                  <a:lnTo>
-                    <a:pt x="2662708" y="2746863"/>
-                  </a:lnTo>
-                  <a:lnTo>
-                    <a:pt x="2588948" y="2743412"/>
-                  </a:lnTo>
-                  <a:lnTo>
-                    <a:pt x="2515188" y="2739948"/>
-                  </a:lnTo>
-                  <a:lnTo>
-                    <a:pt x="2441428" y="2736470"/>
-                  </a:lnTo>
-                  <a:lnTo>
-                    <a:pt x="2367668" y="2732979"/>
-                  </a:lnTo>
-                  <a:lnTo>
-                    <a:pt x="2293908" y="2729475"/>
-                  </a:lnTo>
-                  <a:lnTo>
-                    <a:pt x="2220148" y="2725958"/>
-                  </a:lnTo>
-                  <a:lnTo>
-                    <a:pt x="2146388" y="2722427"/>
-                  </a:lnTo>
-                  <a:lnTo>
-                    <a:pt x="2072628" y="2718883"/>
-                  </a:lnTo>
-                  <a:lnTo>
-                    <a:pt x="1998868" y="2715325"/>
-                  </a:lnTo>
-                  <a:lnTo>
-                    <a:pt x="1925108" y="2711754"/>
-                  </a:lnTo>
-                  <a:lnTo>
-                    <a:pt x="1851348" y="2708169"/>
-                  </a:lnTo>
-                  <a:lnTo>
-                    <a:pt x="1777588" y="2704571"/>
-                  </a:lnTo>
-                  <a:lnTo>
-                    <a:pt x="1703828" y="2700959"/>
-                  </a:lnTo>
-                  <a:lnTo>
-                    <a:pt x="1630068" y="2697333"/>
-                  </a:lnTo>
-                  <a:lnTo>
-                    <a:pt x="1556308" y="2693693"/>
-                  </a:lnTo>
-                  <a:lnTo>
-                    <a:pt x="1482548" y="2690039"/>
-                  </a:lnTo>
-                  <a:lnTo>
-                    <a:pt x="1408788" y="2686371"/>
-                  </a:lnTo>
-                  <a:lnTo>
-                    <a:pt x="1335028" y="2682690"/>
-                  </a:lnTo>
-                  <a:lnTo>
-                    <a:pt x="1261268" y="2678994"/>
-                  </a:lnTo>
-                  <a:lnTo>
-                    <a:pt x="1187508" y="2675285"/>
-                  </a:lnTo>
-                  <a:lnTo>
-                    <a:pt x="1113747" y="2671561"/>
-                  </a:lnTo>
-                  <a:lnTo>
-                    <a:pt x="1039987" y="2667823"/>
-                  </a:lnTo>
-                  <a:lnTo>
-                    <a:pt x="966227" y="2664071"/>
-                  </a:lnTo>
-                  <a:lnTo>
-                    <a:pt x="892467" y="2660304"/>
-                  </a:lnTo>
-                  <a:lnTo>
-                    <a:pt x="818707" y="2656523"/>
-                  </a:lnTo>
-                  <a:lnTo>
-                    <a:pt x="744947" y="2652728"/>
-                  </a:lnTo>
-                  <a:lnTo>
-                    <a:pt x="671187" y="2648918"/>
-                  </a:lnTo>
-                  <a:lnTo>
-                    <a:pt x="597427" y="2645094"/>
-                  </a:lnTo>
-                  <a:lnTo>
-                    <a:pt x="523667" y="2641255"/>
-                  </a:lnTo>
-                  <a:lnTo>
-                    <a:pt x="449907" y="2637401"/>
-                  </a:lnTo>
-                  <a:lnTo>
-                    <a:pt x="376147" y="2633533"/>
-                  </a:lnTo>
-                  <a:lnTo>
-                    <a:pt x="302387" y="2629650"/>
-                  </a:lnTo>
-                  <a:lnTo>
-                    <a:pt x="228627" y="2625753"/>
-                  </a:lnTo>
-                  <a:lnTo>
-                    <a:pt x="154867" y="2621840"/>
-                  </a:lnTo>
-                  <a:lnTo>
-                    <a:pt x="81107" y="2617913"/>
-                  </a:lnTo>
-                  <a:lnTo>
-                    <a:pt x="7347" y="2613970"/>
-                  </a:lnTo>
-                  <a:lnTo>
-                    <a:pt x="0" y="2613576"/>
+                    <a:pt x="1703828" y="2384"/>
+                  </a:lnTo>
+                  <a:lnTo>
+                    <a:pt x="1777588" y="206872"/>
+                  </a:lnTo>
+                  <a:lnTo>
+                    <a:pt x="1851348" y="399348"/>
+                  </a:lnTo>
+                  <a:lnTo>
+                    <a:pt x="1925108" y="580519"/>
+                  </a:lnTo>
+                  <a:lnTo>
+                    <a:pt x="1998868" y="751049"/>
+                  </a:lnTo>
+                  <a:lnTo>
+                    <a:pt x="2072628" y="911562"/>
+                  </a:lnTo>
+                  <a:lnTo>
+                    <a:pt x="2146388" y="1062646"/>
+                  </a:lnTo>
+                  <a:lnTo>
+                    <a:pt x="2220148" y="1204857"/>
+                  </a:lnTo>
+                  <a:lnTo>
+                    <a:pt x="2293908" y="1338714"/>
+                  </a:lnTo>
+                  <a:lnTo>
+                    <a:pt x="2367668" y="1464708"/>
+                  </a:lnTo>
+                  <a:lnTo>
+                    <a:pt x="2441428" y="1583302"/>
+                  </a:lnTo>
+                  <a:lnTo>
+                    <a:pt x="2515188" y="1694930"/>
+                  </a:lnTo>
+                  <a:lnTo>
+                    <a:pt x="2588948" y="1800002"/>
+                  </a:lnTo>
+                  <a:lnTo>
+                    <a:pt x="2662708" y="1898901"/>
+                  </a:lnTo>
+                  <a:lnTo>
+                    <a:pt x="2736468" y="1991992"/>
+                  </a:lnTo>
+                  <a:lnTo>
+                    <a:pt x="2810228" y="2079614"/>
+                  </a:lnTo>
+                  <a:lnTo>
+                    <a:pt x="2883988" y="2162090"/>
+                  </a:lnTo>
+                  <a:lnTo>
+                    <a:pt x="2957748" y="2239721"/>
+                  </a:lnTo>
+                  <a:lnTo>
+                    <a:pt x="3031508" y="2312793"/>
+                  </a:lnTo>
+                  <a:lnTo>
+                    <a:pt x="3105268" y="2381572"/>
+                  </a:lnTo>
+                  <a:lnTo>
+                    <a:pt x="3179028" y="2446311"/>
+                  </a:lnTo>
+                  <a:lnTo>
+                    <a:pt x="3252788" y="2507248"/>
+                  </a:lnTo>
+                  <a:lnTo>
+                    <a:pt x="3326548" y="2564606"/>
+                  </a:lnTo>
+                  <a:lnTo>
+                    <a:pt x="3400308" y="2618594"/>
+                  </a:lnTo>
+                  <a:lnTo>
+                    <a:pt x="3474068" y="2655241"/>
+                  </a:lnTo>
+                  <a:lnTo>
+                    <a:pt x="3547828" y="2658386"/>
+                  </a:lnTo>
+                  <a:lnTo>
+                    <a:pt x="3621588" y="2661519"/>
+                  </a:lnTo>
+                  <a:lnTo>
+                    <a:pt x="3695348" y="2664640"/>
+                  </a:lnTo>
+                  <a:lnTo>
+                    <a:pt x="3769108" y="2667749"/>
+                  </a:lnTo>
+                  <a:lnTo>
+                    <a:pt x="3842868" y="2670846"/>
+                  </a:lnTo>
+                  <a:lnTo>
+                    <a:pt x="3916628" y="2673931"/>
+                  </a:lnTo>
+                  <a:lnTo>
+                    <a:pt x="3990388" y="2677005"/>
+                  </a:lnTo>
+                  <a:lnTo>
+                    <a:pt x="4064149" y="2680067"/>
+                  </a:lnTo>
+                  <a:lnTo>
+                    <a:pt x="4137909" y="2683118"/>
+                  </a:lnTo>
+                  <a:lnTo>
+                    <a:pt x="4211669" y="2686157"/>
+                  </a:lnTo>
+                  <a:lnTo>
+                    <a:pt x="4285429" y="2689184"/>
+                  </a:lnTo>
+                  <a:lnTo>
+                    <a:pt x="4359189" y="2692200"/>
+                  </a:lnTo>
+                  <a:lnTo>
+                    <a:pt x="4432949" y="2695204"/>
+                  </a:lnTo>
+                  <a:lnTo>
+                    <a:pt x="4506709" y="2698197"/>
+                  </a:lnTo>
+                  <a:lnTo>
+                    <a:pt x="4580469" y="2701179"/>
+                  </a:lnTo>
+                  <a:lnTo>
+                    <a:pt x="4654229" y="2704149"/>
+                  </a:lnTo>
+                  <a:lnTo>
+                    <a:pt x="4727989" y="2707108"/>
+                  </a:lnTo>
+                  <a:lnTo>
+                    <a:pt x="4801749" y="2710056"/>
+                  </a:lnTo>
+                  <a:lnTo>
+                    <a:pt x="4875509" y="2712993"/>
+                  </a:lnTo>
+                  <a:lnTo>
+                    <a:pt x="4949269" y="2715918"/>
+                  </a:lnTo>
+                  <a:lnTo>
+                    <a:pt x="5023029" y="2718833"/>
+                  </a:lnTo>
+                  <a:lnTo>
+                    <a:pt x="5096789" y="2721736"/>
+                  </a:lnTo>
+                  <a:lnTo>
+                    <a:pt x="5170549" y="2724628"/>
+                  </a:lnTo>
+                  <a:lnTo>
+                    <a:pt x="5244309" y="2727510"/>
+                  </a:lnTo>
+                  <a:lnTo>
+                    <a:pt x="5318069" y="2730380"/>
+                  </a:lnTo>
+                  <a:lnTo>
+                    <a:pt x="5391829" y="2733239"/>
+                  </a:lnTo>
+                  <a:lnTo>
+                    <a:pt x="5465589" y="2736088"/>
+                  </a:lnTo>
+                  <a:lnTo>
+                    <a:pt x="5539349" y="2738926"/>
+                  </a:lnTo>
+                  <a:lnTo>
+                    <a:pt x="5613109" y="2741753"/>
+                  </a:lnTo>
+                  <a:lnTo>
+                    <a:pt x="5686869" y="2744569"/>
+                  </a:lnTo>
+                  <a:lnTo>
+                    <a:pt x="5760629" y="2747375"/>
+                  </a:lnTo>
+                  <a:lnTo>
+                    <a:pt x="5834389" y="2750170"/>
+                  </a:lnTo>
+                  <a:lnTo>
+                    <a:pt x="5908149" y="2752954"/>
+                  </a:lnTo>
+                  <a:lnTo>
+                    <a:pt x="5981909" y="2755728"/>
+                  </a:lnTo>
+                  <a:lnTo>
+                    <a:pt x="6055669" y="2758491"/>
+                  </a:lnTo>
+                  <a:lnTo>
+                    <a:pt x="6129429" y="2761244"/>
+                  </a:lnTo>
+                  <a:lnTo>
+                    <a:pt x="6203189" y="2763987"/>
+                  </a:lnTo>
+                  <a:lnTo>
+                    <a:pt x="6276949" y="2766718"/>
+                  </a:lnTo>
+                  <a:lnTo>
+                    <a:pt x="6350709" y="2769440"/>
+                  </a:lnTo>
+                  <a:lnTo>
+                    <a:pt x="6424469" y="2772151"/>
+                  </a:lnTo>
+                  <a:lnTo>
+                    <a:pt x="6498229" y="2774852"/>
+                  </a:lnTo>
+                  <a:lnTo>
+                    <a:pt x="6571989" y="2777543"/>
+                  </a:lnTo>
+                  <a:lnTo>
+                    <a:pt x="6645749" y="2780223"/>
+                  </a:lnTo>
+                  <a:lnTo>
+                    <a:pt x="6719509" y="2782894"/>
+                  </a:lnTo>
+                  <a:lnTo>
+                    <a:pt x="6793269" y="2785554"/>
+                  </a:lnTo>
+                  <a:lnTo>
+                    <a:pt x="6867029" y="2788204"/>
+                  </a:lnTo>
+                  <a:lnTo>
+                    <a:pt x="6940789" y="2790844"/>
+                  </a:lnTo>
+                  <a:lnTo>
+                    <a:pt x="7014550" y="2793474"/>
+                  </a:lnTo>
+                  <a:lnTo>
+                    <a:pt x="7088310" y="2796094"/>
+                  </a:lnTo>
+                  <a:lnTo>
+                    <a:pt x="7162070" y="2798704"/>
+                  </a:lnTo>
+                  <a:lnTo>
+                    <a:pt x="7235830" y="2801304"/>
+                  </a:lnTo>
+                  <a:lnTo>
+                    <a:pt x="7235830" y="3446589"/>
+                  </a:lnTo>
+                  <a:lnTo>
+                    <a:pt x="7162070" y="3444270"/>
+                  </a:lnTo>
+                  <a:lnTo>
+                    <a:pt x="7088310" y="3441807"/>
+                  </a:lnTo>
+                  <a:lnTo>
+                    <a:pt x="7014550" y="3439190"/>
+                  </a:lnTo>
+                  <a:lnTo>
+                    <a:pt x="6940789" y="3436409"/>
+                  </a:lnTo>
+                  <a:lnTo>
+                    <a:pt x="6867029" y="3433455"/>
+                  </a:lnTo>
+                  <a:lnTo>
+                    <a:pt x="6793269" y="3430317"/>
+                  </a:lnTo>
+                  <a:lnTo>
+                    <a:pt x="6719509" y="3426983"/>
+                  </a:lnTo>
+                  <a:lnTo>
+                    <a:pt x="6645749" y="3423441"/>
+                  </a:lnTo>
+                  <a:lnTo>
+                    <a:pt x="6571989" y="3419677"/>
+                  </a:lnTo>
+                  <a:lnTo>
+                    <a:pt x="6498229" y="3415679"/>
+                  </a:lnTo>
+                  <a:lnTo>
+                    <a:pt x="6424469" y="3411432"/>
+                  </a:lnTo>
+                  <a:lnTo>
+                    <a:pt x="6350709" y="3406919"/>
+                  </a:lnTo>
+                  <a:lnTo>
+                    <a:pt x="6276949" y="3402125"/>
+                  </a:lnTo>
+                  <a:lnTo>
+                    <a:pt x="6203189" y="3397031"/>
+                  </a:lnTo>
+                  <a:lnTo>
+                    <a:pt x="6129429" y="3391620"/>
+                  </a:lnTo>
+                  <a:lnTo>
+                    <a:pt x="6055669" y="3385871"/>
+                  </a:lnTo>
+                  <a:lnTo>
+                    <a:pt x="5981909" y="3379763"/>
+                  </a:lnTo>
+                  <a:lnTo>
+                    <a:pt x="5908149" y="3373274"/>
+                  </a:lnTo>
+                  <a:lnTo>
+                    <a:pt x="5834389" y="3366381"/>
+                  </a:lnTo>
+                  <a:lnTo>
+                    <a:pt x="5760629" y="3359057"/>
+                  </a:lnTo>
+                  <a:lnTo>
+                    <a:pt x="5686869" y="3351275"/>
+                  </a:lnTo>
+                  <a:lnTo>
+                    <a:pt x="5613109" y="3343009"/>
+                  </a:lnTo>
+                  <a:lnTo>
+                    <a:pt x="5539349" y="3334226"/>
+                  </a:lnTo>
+                  <a:lnTo>
+                    <a:pt x="5465589" y="3324896"/>
+                  </a:lnTo>
+                  <a:lnTo>
+                    <a:pt x="5391829" y="3314983"/>
+                  </a:lnTo>
+                  <a:lnTo>
+                    <a:pt x="5318069" y="3304452"/>
+                  </a:lnTo>
+                  <a:lnTo>
+                    <a:pt x="5244309" y="3293263"/>
+                  </a:lnTo>
+                  <a:lnTo>
+                    <a:pt x="5170549" y="3281376"/>
+                  </a:lnTo>
+                  <a:lnTo>
+                    <a:pt x="5096789" y="3268748"/>
+                  </a:lnTo>
+                  <a:lnTo>
+                    <a:pt x="5023029" y="3255331"/>
+                  </a:lnTo>
+                  <a:lnTo>
+                    <a:pt x="4949269" y="3241077"/>
+                  </a:lnTo>
+                  <a:lnTo>
+                    <a:pt x="4875509" y="3225934"/>
+                  </a:lnTo>
+                  <a:lnTo>
+                    <a:pt x="4801749" y="3209845"/>
+                  </a:lnTo>
+                  <a:lnTo>
+                    <a:pt x="4727989" y="3192753"/>
+                  </a:lnTo>
+                  <a:lnTo>
+                    <a:pt x="4654229" y="3174594"/>
+                  </a:lnTo>
+                  <a:lnTo>
+                    <a:pt x="4580469" y="3155302"/>
+                  </a:lnTo>
+                  <a:lnTo>
+                    <a:pt x="4506709" y="3134806"/>
+                  </a:lnTo>
+                  <a:lnTo>
+                    <a:pt x="4432949" y="3113031"/>
+                  </a:lnTo>
+                  <a:lnTo>
+                    <a:pt x="4359189" y="3089897"/>
+                  </a:lnTo>
+                  <a:lnTo>
+                    <a:pt x="4285429" y="3065319"/>
+                  </a:lnTo>
+                  <a:lnTo>
+                    <a:pt x="4211669" y="3039208"/>
+                  </a:lnTo>
+                  <a:lnTo>
+                    <a:pt x="4137909" y="3011468"/>
+                  </a:lnTo>
+                  <a:lnTo>
+                    <a:pt x="4064149" y="2981996"/>
+                  </a:lnTo>
+                  <a:lnTo>
+                    <a:pt x="3990388" y="2950685"/>
+                  </a:lnTo>
+                  <a:lnTo>
+                    <a:pt x="3916628" y="2917420"/>
+                  </a:lnTo>
+                  <a:lnTo>
+                    <a:pt x="3842868" y="2882080"/>
+                  </a:lnTo>
+                  <a:lnTo>
+                    <a:pt x="3769108" y="2844533"/>
+                  </a:lnTo>
+                  <a:lnTo>
+                    <a:pt x="3695348" y="2804644"/>
+                  </a:lnTo>
+                  <a:lnTo>
+                    <a:pt x="3621588" y="2762266"/>
+                  </a:lnTo>
+                  <a:lnTo>
+                    <a:pt x="3547828" y="2717244"/>
+                  </a:lnTo>
+                  <a:lnTo>
+                    <a:pt x="3474068" y="2669411"/>
+                  </a:lnTo>
+                  <a:lnTo>
+                    <a:pt x="3400308" y="2652085"/>
+                  </a:lnTo>
+                  <a:lnTo>
+                    <a:pt x="3326548" y="2648916"/>
+                  </a:lnTo>
+                  <a:lnTo>
+                    <a:pt x="3252788" y="2645735"/>
+                  </a:lnTo>
+                  <a:lnTo>
+                    <a:pt x="3179028" y="2642542"/>
+                  </a:lnTo>
+                  <a:lnTo>
+                    <a:pt x="3105268" y="2639337"/>
+                  </a:lnTo>
+                  <a:lnTo>
+                    <a:pt x="3031508" y="2636120"/>
+                  </a:lnTo>
+                  <a:lnTo>
+                    <a:pt x="2957748" y="2632891"/>
+                  </a:lnTo>
+                  <a:lnTo>
+                    <a:pt x="2883988" y="2629649"/>
+                  </a:lnTo>
+                  <a:lnTo>
+                    <a:pt x="2810228" y="2626395"/>
+                  </a:lnTo>
+                  <a:lnTo>
+                    <a:pt x="2736468" y="2623128"/>
+                  </a:lnTo>
+                  <a:lnTo>
+                    <a:pt x="2662708" y="2619849"/>
+                  </a:lnTo>
+                  <a:lnTo>
+                    <a:pt x="2588948" y="2616557"/>
+                  </a:lnTo>
+                  <a:lnTo>
+                    <a:pt x="2515188" y="2613253"/>
+                  </a:lnTo>
+                  <a:lnTo>
+                    <a:pt x="2441428" y="2609937"/>
+                  </a:lnTo>
+                  <a:lnTo>
+                    <a:pt x="2367668" y="2606607"/>
+                  </a:lnTo>
+                  <a:lnTo>
+                    <a:pt x="2293908" y="2603265"/>
+                  </a:lnTo>
+                  <a:lnTo>
+                    <a:pt x="2220148" y="2599911"/>
+                  </a:lnTo>
+                  <a:lnTo>
+                    <a:pt x="2146388" y="2596543"/>
+                  </a:lnTo>
+                  <a:lnTo>
+                    <a:pt x="2072628" y="2593163"/>
+                  </a:lnTo>
+                  <a:lnTo>
+                    <a:pt x="1998868" y="2589770"/>
+                  </a:lnTo>
+                  <a:lnTo>
+                    <a:pt x="1925108" y="2586364"/>
+                  </a:lnTo>
+                  <a:lnTo>
+                    <a:pt x="1851348" y="2582945"/>
+                  </a:lnTo>
+                  <a:lnTo>
+                    <a:pt x="1777588" y="2579512"/>
+                  </a:lnTo>
+                  <a:lnTo>
+                    <a:pt x="1703828" y="2576067"/>
+                  </a:lnTo>
+                  <a:lnTo>
+                    <a:pt x="1630068" y="2572609"/>
+                  </a:lnTo>
+                  <a:lnTo>
+                    <a:pt x="1556308" y="2569137"/>
+                  </a:lnTo>
+                  <a:lnTo>
+                    <a:pt x="1482548" y="2565653"/>
+                  </a:lnTo>
+                  <a:lnTo>
+                    <a:pt x="1408788" y="2562155"/>
+                  </a:lnTo>
+                  <a:lnTo>
+                    <a:pt x="1335028" y="2558643"/>
+                  </a:lnTo>
+                  <a:lnTo>
+                    <a:pt x="1261268" y="2555119"/>
+                  </a:lnTo>
+                  <a:lnTo>
+                    <a:pt x="1187508" y="2551580"/>
+                  </a:lnTo>
+                  <a:lnTo>
+                    <a:pt x="1113747" y="2548029"/>
+                  </a:lnTo>
+                  <a:lnTo>
+                    <a:pt x="1039987" y="2544464"/>
+                  </a:lnTo>
+                  <a:lnTo>
+                    <a:pt x="966227" y="2540885"/>
+                  </a:lnTo>
+                  <a:lnTo>
+                    <a:pt x="892467" y="2537293"/>
+                  </a:lnTo>
+                  <a:lnTo>
+                    <a:pt x="818707" y="2533686"/>
+                  </a:lnTo>
+                  <a:lnTo>
+                    <a:pt x="744947" y="2530067"/>
+                  </a:lnTo>
+                  <a:lnTo>
+                    <a:pt x="671187" y="2526433"/>
+                  </a:lnTo>
+                  <a:lnTo>
+                    <a:pt x="597427" y="2522786"/>
+                  </a:lnTo>
+                  <a:lnTo>
+                    <a:pt x="523667" y="2519124"/>
+                  </a:lnTo>
+                  <a:lnTo>
+                    <a:pt x="449907" y="2515449"/>
+                  </a:lnTo>
+                  <a:lnTo>
+                    <a:pt x="376147" y="2511760"/>
+                  </a:lnTo>
+                  <a:lnTo>
+                    <a:pt x="302387" y="2508056"/>
+                  </a:lnTo>
+                  <a:lnTo>
+                    <a:pt x="228627" y="2504339"/>
+                  </a:lnTo>
+                  <a:lnTo>
+                    <a:pt x="154867" y="2500607"/>
+                  </a:lnTo>
+                  <a:lnTo>
+                    <a:pt x="81107" y="2496861"/>
+                  </a:lnTo>
+                  <a:lnTo>
+                    <a:pt x="7347" y="2493101"/>
+                  </a:lnTo>
+                  <a:lnTo>
+                    <a:pt x="0" y="2492725"/>
                   </a:lnTo>
                   <a:close/>
                 </a:path>
@@ -3564,243 +3564,243 @@
           </p:nvSpPr>
           <p:spPr>
             <a:xfrm>
-              <a:off x="2520536" y="1896563"/>
-              <a:ext cx="5532811" cy="2937115"/>
+              <a:off x="2520536" y="2073503"/>
+              <a:ext cx="5532811" cy="2801304"/>
             </a:xfrm>
             <a:custGeom>
               <a:avLst/>
               <a:pathLst>
-                <a:path w="5532811" h="2937115">
+                <a:path w="5532811" h="2801304">
                   <a:moveTo>
                     <a:pt x="0" y="0"/>
                   </a:moveTo>
                   <a:lnTo>
-                    <a:pt x="809" y="2499"/>
-                  </a:lnTo>
-                  <a:lnTo>
-                    <a:pt x="74569" y="216901"/>
-                  </a:lnTo>
-                  <a:lnTo>
-                    <a:pt x="148329" y="418709"/>
-                  </a:lnTo>
-                  <a:lnTo>
-                    <a:pt x="222089" y="608664"/>
-                  </a:lnTo>
-                  <a:lnTo>
-                    <a:pt x="295849" y="787461"/>
-                  </a:lnTo>
-                  <a:lnTo>
-                    <a:pt x="369609" y="955755"/>
-                  </a:lnTo>
-                  <a:lnTo>
-                    <a:pt x="443369" y="1114165"/>
-                  </a:lnTo>
-                  <a:lnTo>
-                    <a:pt x="517129" y="1263270"/>
-                  </a:lnTo>
-                  <a:lnTo>
-                    <a:pt x="590889" y="1403616"/>
-                  </a:lnTo>
-                  <a:lnTo>
-                    <a:pt x="664649" y="1535720"/>
-                  </a:lnTo>
-                  <a:lnTo>
-                    <a:pt x="738409" y="1660063"/>
-                  </a:lnTo>
-                  <a:lnTo>
-                    <a:pt x="812169" y="1777103"/>
-                  </a:lnTo>
-                  <a:lnTo>
-                    <a:pt x="885929" y="1887268"/>
-                  </a:lnTo>
-                  <a:lnTo>
-                    <a:pt x="959689" y="1990963"/>
-                  </a:lnTo>
-                  <a:lnTo>
-                    <a:pt x="1033449" y="2088566"/>
-                  </a:lnTo>
-                  <a:lnTo>
-                    <a:pt x="1107209" y="2180437"/>
-                  </a:lnTo>
-                  <a:lnTo>
-                    <a:pt x="1180969" y="2266911"/>
-                  </a:lnTo>
-                  <a:lnTo>
-                    <a:pt x="1254729" y="2348306"/>
-                  </a:lnTo>
-                  <a:lnTo>
-                    <a:pt x="1328489" y="2424920"/>
-                  </a:lnTo>
-                  <a:lnTo>
-                    <a:pt x="1402249" y="2497034"/>
-                  </a:lnTo>
-                  <a:lnTo>
-                    <a:pt x="1476010" y="2564912"/>
-                  </a:lnTo>
-                  <a:lnTo>
-                    <a:pt x="1549770" y="2628803"/>
-                  </a:lnTo>
-                  <a:lnTo>
-                    <a:pt x="1623530" y="2688941"/>
-                  </a:lnTo>
-                  <a:lnTo>
-                    <a:pt x="1697290" y="2745547"/>
-                  </a:lnTo>
-                  <a:lnTo>
-                    <a:pt x="1771050" y="2783971"/>
-                  </a:lnTo>
-                  <a:lnTo>
-                    <a:pt x="1844810" y="2787268"/>
-                  </a:lnTo>
-                  <a:lnTo>
-                    <a:pt x="1918570" y="2790553"/>
-                  </a:lnTo>
-                  <a:lnTo>
-                    <a:pt x="1992330" y="2793825"/>
-                  </a:lnTo>
-                  <a:lnTo>
-                    <a:pt x="2066090" y="2797085"/>
-                  </a:lnTo>
-                  <a:lnTo>
-                    <a:pt x="2139850" y="2800332"/>
-                  </a:lnTo>
-                  <a:lnTo>
-                    <a:pt x="2213610" y="2803567"/>
-                  </a:lnTo>
-                  <a:lnTo>
-                    <a:pt x="2287370" y="2806790"/>
-                  </a:lnTo>
-                  <a:lnTo>
-                    <a:pt x="2361130" y="2810001"/>
-                  </a:lnTo>
-                  <a:lnTo>
-                    <a:pt x="2434890" y="2813199"/>
-                  </a:lnTo>
-                  <a:lnTo>
-                    <a:pt x="2508650" y="2816385"/>
-                  </a:lnTo>
-                  <a:lnTo>
-                    <a:pt x="2582410" y="2819559"/>
-                  </a:lnTo>
-                  <a:lnTo>
-                    <a:pt x="2656170" y="2822721"/>
-                  </a:lnTo>
-                  <a:lnTo>
-                    <a:pt x="2729930" y="2825872"/>
-                  </a:lnTo>
-                  <a:lnTo>
-                    <a:pt x="2803690" y="2829010"/>
-                  </a:lnTo>
-                  <a:lnTo>
-                    <a:pt x="2877450" y="2832136"/>
-                  </a:lnTo>
-                  <a:lnTo>
-                    <a:pt x="2951210" y="2835250"/>
-                  </a:lnTo>
-                  <a:lnTo>
-                    <a:pt x="3024970" y="2838353"/>
-                  </a:lnTo>
-                  <a:lnTo>
-                    <a:pt x="3098730" y="2841443"/>
-                  </a:lnTo>
-                  <a:lnTo>
-                    <a:pt x="3172490" y="2844522"/>
-                  </a:lnTo>
-                  <a:lnTo>
-                    <a:pt x="3246250" y="2847590"/>
-                  </a:lnTo>
-                  <a:lnTo>
-                    <a:pt x="3320010" y="2850645"/>
-                  </a:lnTo>
-                  <a:lnTo>
-                    <a:pt x="3393770" y="2853690"/>
-                  </a:lnTo>
-                  <a:lnTo>
-                    <a:pt x="3467530" y="2856722"/>
-                  </a:lnTo>
-                  <a:lnTo>
-                    <a:pt x="3541290" y="2859743"/>
-                  </a:lnTo>
-                  <a:lnTo>
-                    <a:pt x="3615050" y="2862753"/>
-                  </a:lnTo>
-                  <a:lnTo>
-                    <a:pt x="3688810" y="2865751"/>
-                  </a:lnTo>
-                  <a:lnTo>
-                    <a:pt x="3762570" y="2868737"/>
-                  </a:lnTo>
-                  <a:lnTo>
-                    <a:pt x="3836330" y="2871713"/>
-                  </a:lnTo>
-                  <a:lnTo>
-                    <a:pt x="3910090" y="2874677"/>
-                  </a:lnTo>
-                  <a:lnTo>
-                    <a:pt x="3983850" y="2877630"/>
-                  </a:lnTo>
-                  <a:lnTo>
-                    <a:pt x="4057610" y="2880572"/>
-                  </a:lnTo>
-                  <a:lnTo>
-                    <a:pt x="4131370" y="2883502"/>
-                  </a:lnTo>
-                  <a:lnTo>
-                    <a:pt x="4205130" y="2886421"/>
-                  </a:lnTo>
-                  <a:lnTo>
-                    <a:pt x="4278890" y="2889330"/>
-                  </a:lnTo>
-                  <a:lnTo>
-                    <a:pt x="4352651" y="2892227"/>
-                  </a:lnTo>
-                  <a:lnTo>
-                    <a:pt x="4426411" y="2895113"/>
-                  </a:lnTo>
-                  <a:lnTo>
-                    <a:pt x="4500171" y="2897988"/>
-                  </a:lnTo>
-                  <a:lnTo>
-                    <a:pt x="4573931" y="2900853"/>
-                  </a:lnTo>
-                  <a:lnTo>
-                    <a:pt x="4647691" y="2903706"/>
-                  </a:lnTo>
-                  <a:lnTo>
-                    <a:pt x="4721451" y="2906549"/>
-                  </a:lnTo>
-                  <a:lnTo>
-                    <a:pt x="4795211" y="2909381"/>
-                  </a:lnTo>
-                  <a:lnTo>
-                    <a:pt x="4868971" y="2912202"/>
-                  </a:lnTo>
-                  <a:lnTo>
-                    <a:pt x="4942731" y="2915013"/>
-                  </a:lnTo>
-                  <a:lnTo>
-                    <a:pt x="5016491" y="2917812"/>
-                  </a:lnTo>
-                  <a:lnTo>
-                    <a:pt x="5090251" y="2920601"/>
-                  </a:lnTo>
-                  <a:lnTo>
-                    <a:pt x="5164011" y="2923380"/>
-                  </a:lnTo>
-                  <a:lnTo>
-                    <a:pt x="5237771" y="2926148"/>
-                  </a:lnTo>
-                  <a:lnTo>
-                    <a:pt x="5311531" y="2928905"/>
-                  </a:lnTo>
-                  <a:lnTo>
-                    <a:pt x="5385291" y="2931653"/>
-                  </a:lnTo>
-                  <a:lnTo>
-                    <a:pt x="5459051" y="2934389"/>
-                  </a:lnTo>
-                  <a:lnTo>
-                    <a:pt x="5532811" y="2937115"/>
+                    <a:pt x="809" y="2384"/>
+                  </a:lnTo>
+                  <a:lnTo>
+                    <a:pt x="74569" y="206872"/>
+                  </a:lnTo>
+                  <a:lnTo>
+                    <a:pt x="148329" y="399348"/>
+                  </a:lnTo>
+                  <a:lnTo>
+                    <a:pt x="222089" y="580519"/>
+                  </a:lnTo>
+                  <a:lnTo>
+                    <a:pt x="295849" y="751049"/>
+                  </a:lnTo>
+                  <a:lnTo>
+                    <a:pt x="369609" y="911562"/>
+                  </a:lnTo>
+                  <a:lnTo>
+                    <a:pt x="443369" y="1062646"/>
+                  </a:lnTo>
+                  <a:lnTo>
+                    <a:pt x="517129" y="1204857"/>
+                  </a:lnTo>
+                  <a:lnTo>
+                    <a:pt x="590889" y="1338714"/>
+                  </a:lnTo>
+                  <a:lnTo>
+                    <a:pt x="664649" y="1464708"/>
+                  </a:lnTo>
+                  <a:lnTo>
+                    <a:pt x="738409" y="1583302"/>
+                  </a:lnTo>
+                  <a:lnTo>
+                    <a:pt x="812169" y="1694930"/>
+                  </a:lnTo>
+                  <a:lnTo>
+                    <a:pt x="885929" y="1800002"/>
+                  </a:lnTo>
+                  <a:lnTo>
+                    <a:pt x="959689" y="1898901"/>
+                  </a:lnTo>
+                  <a:lnTo>
+                    <a:pt x="1033449" y="1991992"/>
+                  </a:lnTo>
+                  <a:lnTo>
+                    <a:pt x="1107209" y="2079614"/>
+                  </a:lnTo>
+                  <a:lnTo>
+                    <a:pt x="1180969" y="2162090"/>
+                  </a:lnTo>
+                  <a:lnTo>
+                    <a:pt x="1254729" y="2239721"/>
+                  </a:lnTo>
+                  <a:lnTo>
+                    <a:pt x="1328489" y="2312793"/>
+                  </a:lnTo>
+                  <a:lnTo>
+                    <a:pt x="1402249" y="2381572"/>
+                  </a:lnTo>
+                  <a:lnTo>
+                    <a:pt x="1476010" y="2446311"/>
+                  </a:lnTo>
+                  <a:lnTo>
+                    <a:pt x="1549770" y="2507248"/>
+                  </a:lnTo>
+                  <a:lnTo>
+                    <a:pt x="1623530" y="2564606"/>
+                  </a:lnTo>
+                  <a:lnTo>
+                    <a:pt x="1697290" y="2618594"/>
+                  </a:lnTo>
+                  <a:lnTo>
+                    <a:pt x="1771050" y="2655241"/>
+                  </a:lnTo>
+                  <a:lnTo>
+                    <a:pt x="1844810" y="2658386"/>
+                  </a:lnTo>
+                  <a:lnTo>
+                    <a:pt x="1918570" y="2661519"/>
+                  </a:lnTo>
+                  <a:lnTo>
+                    <a:pt x="1992330" y="2664640"/>
+                  </a:lnTo>
+                  <a:lnTo>
+                    <a:pt x="2066090" y="2667749"/>
+                  </a:lnTo>
+                  <a:lnTo>
+                    <a:pt x="2139850" y="2670846"/>
+                  </a:lnTo>
+                  <a:lnTo>
+                    <a:pt x="2213610" y="2673931"/>
+                  </a:lnTo>
+                  <a:lnTo>
+                    <a:pt x="2287370" y="2677005"/>
+                  </a:lnTo>
+                  <a:lnTo>
+                    <a:pt x="2361130" y="2680067"/>
+                  </a:lnTo>
+                  <a:lnTo>
+                    <a:pt x="2434890" y="2683118"/>
+                  </a:lnTo>
+                  <a:lnTo>
+                    <a:pt x="2508650" y="2686157"/>
+                  </a:lnTo>
+                  <a:lnTo>
+                    <a:pt x="2582410" y="2689184"/>
+                  </a:lnTo>
+                  <a:lnTo>
+                    <a:pt x="2656170" y="2692200"/>
+                  </a:lnTo>
+                  <a:lnTo>
+                    <a:pt x="2729930" y="2695204"/>
+                  </a:lnTo>
+                  <a:lnTo>
+                    <a:pt x="2803690" y="2698197"/>
+                  </a:lnTo>
+                  <a:lnTo>
+                    <a:pt x="2877450" y="2701179"/>
+                  </a:lnTo>
+                  <a:lnTo>
+                    <a:pt x="2951210" y="2704149"/>
+                  </a:lnTo>
+                  <a:lnTo>
+                    <a:pt x="3024970" y="2707108"/>
+                  </a:lnTo>
+                  <a:lnTo>
+                    <a:pt x="3098730" y="2710056"/>
+                  </a:lnTo>
+                  <a:lnTo>
+                    <a:pt x="3172490" y="2712993"/>
+                  </a:lnTo>
+                  <a:lnTo>
+                    <a:pt x="3246250" y="2715918"/>
+                  </a:lnTo>
+                  <a:lnTo>
+                    <a:pt x="3320010" y="2718833"/>
+                  </a:lnTo>
+                  <a:lnTo>
+                    <a:pt x="3393770" y="2721736"/>
+                  </a:lnTo>
+                  <a:lnTo>
+                    <a:pt x="3467530" y="2724628"/>
+                  </a:lnTo>
+                  <a:lnTo>
+                    <a:pt x="3541290" y="2727510"/>
+                  </a:lnTo>
+                  <a:lnTo>
+                    <a:pt x="3615050" y="2730380"/>
+                  </a:lnTo>
+                  <a:lnTo>
+                    <a:pt x="3688810" y="2733239"/>
+                  </a:lnTo>
+                  <a:lnTo>
+                    <a:pt x="3762570" y="2736088"/>
+                  </a:lnTo>
+                  <a:lnTo>
+                    <a:pt x="3836330" y="2738926"/>
+                  </a:lnTo>
+                  <a:lnTo>
+                    <a:pt x="3910090" y="2741753"/>
+                  </a:lnTo>
+                  <a:lnTo>
+                    <a:pt x="3983850" y="2744569"/>
+                  </a:lnTo>
+                  <a:lnTo>
+                    <a:pt x="4057610" y="2747375"/>
+                  </a:lnTo>
+                  <a:lnTo>
+                    <a:pt x="4131370" y="2750170"/>
+                  </a:lnTo>
+                  <a:lnTo>
+                    <a:pt x="4205130" y="2752954"/>
+                  </a:lnTo>
+                  <a:lnTo>
+                    <a:pt x="4278890" y="2755728"/>
+                  </a:lnTo>
+                  <a:lnTo>
+                    <a:pt x="4352651" y="2758491"/>
+                  </a:lnTo>
+                  <a:lnTo>
+                    <a:pt x="4426411" y="2761244"/>
+                  </a:lnTo>
+                  <a:lnTo>
+                    <a:pt x="4500171" y="2763987"/>
+                  </a:lnTo>
+                  <a:lnTo>
+                    <a:pt x="4573931" y="2766718"/>
+                  </a:lnTo>
+                  <a:lnTo>
+                    <a:pt x="4647691" y="2769440"/>
+                  </a:lnTo>
+                  <a:lnTo>
+                    <a:pt x="4721451" y="2772151"/>
+                  </a:lnTo>
+                  <a:lnTo>
+                    <a:pt x="4795211" y="2774852"/>
+                  </a:lnTo>
+                  <a:lnTo>
+                    <a:pt x="4868971" y="2777543"/>
+                  </a:lnTo>
+                  <a:lnTo>
+                    <a:pt x="4942731" y="2780223"/>
+                  </a:lnTo>
+                  <a:lnTo>
+                    <a:pt x="5016491" y="2782894"/>
+                  </a:lnTo>
+                  <a:lnTo>
+                    <a:pt x="5090251" y="2785554"/>
+                  </a:lnTo>
+                  <a:lnTo>
+                    <a:pt x="5164011" y="2788204"/>
+                  </a:lnTo>
+                  <a:lnTo>
+                    <a:pt x="5237771" y="2790844"/>
+                  </a:lnTo>
+                  <a:lnTo>
+                    <a:pt x="5311531" y="2793474"/>
+                  </a:lnTo>
+                  <a:lnTo>
+                    <a:pt x="5385291" y="2796094"/>
+                  </a:lnTo>
+                  <a:lnTo>
+                    <a:pt x="5459051" y="2798704"/>
+                  </a:lnTo>
+                  <a:lnTo>
+                    <a:pt x="5532811" y="2801304"/>
                   </a:lnTo>
                 </a:path>
               </a:pathLst>
@@ -3820,309 +3820,309 @@
           </p:nvSpPr>
           <p:spPr>
             <a:xfrm>
-              <a:off x="817517" y="4510140"/>
-              <a:ext cx="7235830" cy="1000108"/>
+              <a:off x="817517" y="4566228"/>
+              <a:ext cx="7235830" cy="953863"/>
             </a:xfrm>
             <a:custGeom>
               <a:avLst/>
               <a:pathLst>
-                <a:path w="7235830" h="1000108">
+                <a:path w="7235830" h="953863">
                   <a:moveTo>
-                    <a:pt x="7235830" y="1000108"/>
+                    <a:pt x="7235830" y="953863"/>
                   </a:moveTo>
                   <a:lnTo>
-                    <a:pt x="7162070" y="997677"/>
-                  </a:lnTo>
-                  <a:lnTo>
-                    <a:pt x="7088310" y="995094"/>
-                  </a:lnTo>
-                  <a:lnTo>
-                    <a:pt x="7014550" y="992350"/>
-                  </a:lnTo>
-                  <a:lnTo>
-                    <a:pt x="6940789" y="989435"/>
-                  </a:lnTo>
-                  <a:lnTo>
-                    <a:pt x="6867029" y="986338"/>
-                  </a:lnTo>
-                  <a:lnTo>
-                    <a:pt x="6793269" y="983047"/>
-                  </a:lnTo>
-                  <a:lnTo>
-                    <a:pt x="6719509" y="979551"/>
-                  </a:lnTo>
-                  <a:lnTo>
-                    <a:pt x="6645749" y="975837"/>
-                  </a:lnTo>
-                  <a:lnTo>
-                    <a:pt x="6571989" y="971892"/>
-                  </a:lnTo>
-                  <a:lnTo>
-                    <a:pt x="6498229" y="967700"/>
-                  </a:lnTo>
-                  <a:lnTo>
-                    <a:pt x="6424469" y="963246"/>
-                  </a:lnTo>
-                  <a:lnTo>
-                    <a:pt x="6350709" y="958515"/>
-                  </a:lnTo>
-                  <a:lnTo>
-                    <a:pt x="6276949" y="953488"/>
-                  </a:lnTo>
-                  <a:lnTo>
-                    <a:pt x="6203189" y="948148"/>
-                  </a:lnTo>
-                  <a:lnTo>
-                    <a:pt x="6129429" y="942474"/>
-                  </a:lnTo>
-                  <a:lnTo>
-                    <a:pt x="6055669" y="936446"/>
-                  </a:lnTo>
-                  <a:lnTo>
-                    <a:pt x="5981909" y="930042"/>
-                  </a:lnTo>
-                  <a:lnTo>
-                    <a:pt x="5908149" y="923239"/>
-                  </a:lnTo>
-                  <a:lnTo>
-                    <a:pt x="5834389" y="916011"/>
-                  </a:lnTo>
-                  <a:lnTo>
-                    <a:pt x="5760629" y="908332"/>
-                  </a:lnTo>
-                  <a:lnTo>
-                    <a:pt x="5686869" y="900173"/>
-                  </a:lnTo>
-                  <a:lnTo>
-                    <a:pt x="5613109" y="891506"/>
-                  </a:lnTo>
-                  <a:lnTo>
-                    <a:pt x="5539349" y="882298"/>
-                  </a:lnTo>
-                  <a:lnTo>
-                    <a:pt x="5465589" y="872515"/>
-                  </a:lnTo>
-                  <a:lnTo>
-                    <a:pt x="5391829" y="862121"/>
-                  </a:lnTo>
-                  <a:lnTo>
-                    <a:pt x="5318069" y="851079"/>
-                  </a:lnTo>
-                  <a:lnTo>
-                    <a:pt x="5244309" y="839348"/>
-                  </a:lnTo>
-                  <a:lnTo>
-                    <a:pt x="5170549" y="826885"/>
-                  </a:lnTo>
-                  <a:lnTo>
-                    <a:pt x="5096789" y="813644"/>
-                  </a:lnTo>
-                  <a:lnTo>
-                    <a:pt x="5023029" y="799577"/>
-                  </a:lnTo>
-                  <a:lnTo>
-                    <a:pt x="4949269" y="784632"/>
-                  </a:lnTo>
-                  <a:lnTo>
-                    <a:pt x="4875509" y="768755"/>
-                  </a:lnTo>
-                  <a:lnTo>
-                    <a:pt x="4801749" y="751887"/>
-                  </a:lnTo>
-                  <a:lnTo>
-                    <a:pt x="4727989" y="733966"/>
-                  </a:lnTo>
-                  <a:lnTo>
-                    <a:pt x="4654229" y="714926"/>
-                  </a:lnTo>
-                  <a:lnTo>
-                    <a:pt x="4580469" y="694699"/>
-                  </a:lnTo>
-                  <a:lnTo>
-                    <a:pt x="4506709" y="673209"/>
-                  </a:lnTo>
-                  <a:lnTo>
-                    <a:pt x="4432949" y="650378"/>
-                  </a:lnTo>
-                  <a:lnTo>
-                    <a:pt x="4359189" y="626123"/>
-                  </a:lnTo>
-                  <a:lnTo>
-                    <a:pt x="4285429" y="600354"/>
-                  </a:lnTo>
-                  <a:lnTo>
-                    <a:pt x="4211669" y="572977"/>
-                  </a:lnTo>
-                  <a:lnTo>
-                    <a:pt x="4137909" y="543891"/>
-                  </a:lnTo>
-                  <a:lnTo>
-                    <a:pt x="4064149" y="512991"/>
-                  </a:lnTo>
-                  <a:lnTo>
-                    <a:pt x="3990388" y="480162"/>
-                  </a:lnTo>
-                  <a:lnTo>
-                    <a:pt x="3916628" y="445284"/>
-                  </a:lnTo>
-                  <a:lnTo>
-                    <a:pt x="3842868" y="408230"/>
-                  </a:lnTo>
-                  <a:lnTo>
-                    <a:pt x="3769108" y="368864"/>
-                  </a:lnTo>
-                  <a:lnTo>
-                    <a:pt x="3695348" y="327041"/>
-                  </a:lnTo>
-                  <a:lnTo>
-                    <a:pt x="3621588" y="282608"/>
-                  </a:lnTo>
-                  <a:lnTo>
-                    <a:pt x="3547828" y="235403"/>
-                  </a:lnTo>
-                  <a:lnTo>
-                    <a:pt x="3474068" y="185251"/>
-                  </a:lnTo>
-                  <a:lnTo>
-                    <a:pt x="3400308" y="167085"/>
-                  </a:lnTo>
-                  <a:lnTo>
-                    <a:pt x="3326548" y="163763"/>
-                  </a:lnTo>
-                  <a:lnTo>
-                    <a:pt x="3252788" y="160428"/>
-                  </a:lnTo>
-                  <a:lnTo>
-                    <a:pt x="3179028" y="157080"/>
-                  </a:lnTo>
-                  <a:lnTo>
-                    <a:pt x="3105268" y="153720"/>
-                  </a:lnTo>
-                  <a:lnTo>
-                    <a:pt x="3031508" y="150346"/>
-                  </a:lnTo>
-                  <a:lnTo>
-                    <a:pt x="2957748" y="146960"/>
-                  </a:lnTo>
-                  <a:lnTo>
-                    <a:pt x="2883988" y="143561"/>
-                  </a:lnTo>
-                  <a:lnTo>
-                    <a:pt x="2810228" y="140149"/>
-                  </a:lnTo>
-                  <a:lnTo>
-                    <a:pt x="2736468" y="136724"/>
-                  </a:lnTo>
-                  <a:lnTo>
-                    <a:pt x="2662708" y="133286"/>
-                  </a:lnTo>
-                  <a:lnTo>
-                    <a:pt x="2588948" y="129835"/>
-                  </a:lnTo>
-                  <a:lnTo>
-                    <a:pt x="2515188" y="126371"/>
-                  </a:lnTo>
-                  <a:lnTo>
-                    <a:pt x="2441428" y="122894"/>
-                  </a:lnTo>
-                  <a:lnTo>
-                    <a:pt x="2367668" y="119403"/>
-                  </a:lnTo>
-                  <a:lnTo>
-                    <a:pt x="2293908" y="115899"/>
-                  </a:lnTo>
-                  <a:lnTo>
-                    <a:pt x="2220148" y="112381"/>
-                  </a:lnTo>
-                  <a:lnTo>
-                    <a:pt x="2146388" y="108851"/>
-                  </a:lnTo>
-                  <a:lnTo>
-                    <a:pt x="2072628" y="105307"/>
-                  </a:lnTo>
-                  <a:lnTo>
-                    <a:pt x="1998868" y="101749"/>
-                  </a:lnTo>
-                  <a:lnTo>
-                    <a:pt x="1925108" y="98178"/>
-                  </a:lnTo>
-                  <a:lnTo>
-                    <a:pt x="1851348" y="94593"/>
-                  </a:lnTo>
-                  <a:lnTo>
-                    <a:pt x="1777588" y="90994"/>
-                  </a:lnTo>
-                  <a:lnTo>
-                    <a:pt x="1703828" y="87382"/>
-                  </a:lnTo>
-                  <a:lnTo>
-                    <a:pt x="1630068" y="83756"/>
-                  </a:lnTo>
-                  <a:lnTo>
-                    <a:pt x="1556308" y="80116"/>
-                  </a:lnTo>
-                  <a:lnTo>
-                    <a:pt x="1482548" y="76462"/>
-                  </a:lnTo>
-                  <a:lnTo>
-                    <a:pt x="1408788" y="72795"/>
-                  </a:lnTo>
-                  <a:lnTo>
-                    <a:pt x="1335028" y="69113"/>
-                  </a:lnTo>
-                  <a:lnTo>
-                    <a:pt x="1261268" y="65418"/>
-                  </a:lnTo>
-                  <a:lnTo>
-                    <a:pt x="1187508" y="61708"/>
-                  </a:lnTo>
-                  <a:lnTo>
-                    <a:pt x="1113747" y="57984"/>
-                  </a:lnTo>
-                  <a:lnTo>
-                    <a:pt x="1039987" y="54246"/>
-                  </a:lnTo>
-                  <a:lnTo>
-                    <a:pt x="966227" y="50494"/>
-                  </a:lnTo>
-                  <a:lnTo>
-                    <a:pt x="892467" y="46727"/>
-                  </a:lnTo>
-                  <a:lnTo>
-                    <a:pt x="818707" y="42946"/>
-                  </a:lnTo>
-                  <a:lnTo>
-                    <a:pt x="744947" y="39151"/>
-                  </a:lnTo>
-                  <a:lnTo>
-                    <a:pt x="671187" y="35341"/>
-                  </a:lnTo>
-                  <a:lnTo>
-                    <a:pt x="597427" y="31517"/>
-                  </a:lnTo>
-                  <a:lnTo>
-                    <a:pt x="523667" y="27678"/>
-                  </a:lnTo>
-                  <a:lnTo>
-                    <a:pt x="449907" y="23825"/>
-                  </a:lnTo>
-                  <a:lnTo>
-                    <a:pt x="376147" y="19957"/>
-                  </a:lnTo>
-                  <a:lnTo>
-                    <a:pt x="302387" y="16074"/>
-                  </a:lnTo>
-                  <a:lnTo>
-                    <a:pt x="228627" y="12176"/>
-                  </a:lnTo>
-                  <a:lnTo>
-                    <a:pt x="154867" y="8264"/>
-                  </a:lnTo>
-                  <a:lnTo>
-                    <a:pt x="81107" y="4336"/>
-                  </a:lnTo>
-                  <a:lnTo>
-                    <a:pt x="7347" y="394"/>
+                    <a:pt x="7162070" y="951545"/>
+                  </a:lnTo>
+                  <a:lnTo>
+                    <a:pt x="7088310" y="949081"/>
+                  </a:lnTo>
+                  <a:lnTo>
+                    <a:pt x="7014550" y="946464"/>
+                  </a:lnTo>
+                  <a:lnTo>
+                    <a:pt x="6940789" y="943684"/>
+                  </a:lnTo>
+                  <a:lnTo>
+                    <a:pt x="6867029" y="940730"/>
+                  </a:lnTo>
+                  <a:lnTo>
+                    <a:pt x="6793269" y="937591"/>
+                  </a:lnTo>
+                  <a:lnTo>
+                    <a:pt x="6719509" y="934257"/>
+                  </a:lnTo>
+                  <a:lnTo>
+                    <a:pt x="6645749" y="930715"/>
+                  </a:lnTo>
+                  <a:lnTo>
+                    <a:pt x="6571989" y="926952"/>
+                  </a:lnTo>
+                  <a:lnTo>
+                    <a:pt x="6498229" y="922954"/>
+                  </a:lnTo>
+                  <a:lnTo>
+                    <a:pt x="6424469" y="918706"/>
+                  </a:lnTo>
+                  <a:lnTo>
+                    <a:pt x="6350709" y="914193"/>
+                  </a:lnTo>
+                  <a:lnTo>
+                    <a:pt x="6276949" y="909399"/>
+                  </a:lnTo>
+                  <a:lnTo>
+                    <a:pt x="6203189" y="904306"/>
+                  </a:lnTo>
+                  <a:lnTo>
+                    <a:pt x="6129429" y="898894"/>
+                  </a:lnTo>
+                  <a:lnTo>
+                    <a:pt x="6055669" y="893145"/>
+                  </a:lnTo>
+                  <a:lnTo>
+                    <a:pt x="5981909" y="887037"/>
+                  </a:lnTo>
+                  <a:lnTo>
+                    <a:pt x="5908149" y="880549"/>
+                  </a:lnTo>
+                  <a:lnTo>
+                    <a:pt x="5834389" y="873655"/>
+                  </a:lnTo>
+                  <a:lnTo>
+                    <a:pt x="5760629" y="866331"/>
+                  </a:lnTo>
+                  <a:lnTo>
+                    <a:pt x="5686869" y="858550"/>
+                  </a:lnTo>
+                  <a:lnTo>
+                    <a:pt x="5613109" y="850283"/>
+                  </a:lnTo>
+                  <a:lnTo>
+                    <a:pt x="5539349" y="841501"/>
+                  </a:lnTo>
+                  <a:lnTo>
+                    <a:pt x="5465589" y="832170"/>
+                  </a:lnTo>
+                  <a:lnTo>
+                    <a:pt x="5391829" y="822257"/>
+                  </a:lnTo>
+                  <a:lnTo>
+                    <a:pt x="5318069" y="811726"/>
+                  </a:lnTo>
+                  <a:lnTo>
+                    <a:pt x="5244309" y="800537"/>
+                  </a:lnTo>
+                  <a:lnTo>
+                    <a:pt x="5170549" y="788650"/>
+                  </a:lnTo>
+                  <a:lnTo>
+                    <a:pt x="5096789" y="776022"/>
+                  </a:lnTo>
+                  <a:lnTo>
+                    <a:pt x="5023029" y="762605"/>
+                  </a:lnTo>
+                  <a:lnTo>
+                    <a:pt x="4949269" y="748351"/>
+                  </a:lnTo>
+                  <a:lnTo>
+                    <a:pt x="4875509" y="733208"/>
+                  </a:lnTo>
+                  <a:lnTo>
+                    <a:pt x="4801749" y="717120"/>
+                  </a:lnTo>
+                  <a:lnTo>
+                    <a:pt x="4727989" y="700027"/>
+                  </a:lnTo>
+                  <a:lnTo>
+                    <a:pt x="4654229" y="681868"/>
+                  </a:lnTo>
+                  <a:lnTo>
+                    <a:pt x="4580469" y="662576"/>
+                  </a:lnTo>
+                  <a:lnTo>
+                    <a:pt x="4506709" y="642080"/>
+                  </a:lnTo>
+                  <a:lnTo>
+                    <a:pt x="4432949" y="620305"/>
+                  </a:lnTo>
+                  <a:lnTo>
+                    <a:pt x="4359189" y="597171"/>
+                  </a:lnTo>
+                  <a:lnTo>
+                    <a:pt x="4285429" y="572594"/>
+                  </a:lnTo>
+                  <a:lnTo>
+                    <a:pt x="4211669" y="546482"/>
+                  </a:lnTo>
+                  <a:lnTo>
+                    <a:pt x="4137909" y="518742"/>
+                  </a:lnTo>
+                  <a:lnTo>
+                    <a:pt x="4064149" y="489270"/>
+                  </a:lnTo>
+                  <a:lnTo>
+                    <a:pt x="3990388" y="457959"/>
+                  </a:lnTo>
+                  <a:lnTo>
+                    <a:pt x="3916628" y="424694"/>
+                  </a:lnTo>
+                  <a:lnTo>
+                    <a:pt x="3842868" y="389354"/>
+                  </a:lnTo>
+                  <a:lnTo>
+                    <a:pt x="3769108" y="351808"/>
+                  </a:lnTo>
+                  <a:lnTo>
+                    <a:pt x="3695348" y="311919"/>
+                  </a:lnTo>
+                  <a:lnTo>
+                    <a:pt x="3621588" y="269540"/>
+                  </a:lnTo>
+                  <a:lnTo>
+                    <a:pt x="3547828" y="224518"/>
+                  </a:lnTo>
+                  <a:lnTo>
+                    <a:pt x="3474068" y="176685"/>
+                  </a:lnTo>
+                  <a:lnTo>
+                    <a:pt x="3400308" y="159359"/>
+                  </a:lnTo>
+                  <a:lnTo>
+                    <a:pt x="3326548" y="156190"/>
+                  </a:lnTo>
+                  <a:lnTo>
+                    <a:pt x="3252788" y="153010"/>
+                  </a:lnTo>
+                  <a:lnTo>
+                    <a:pt x="3179028" y="149817"/>
+                  </a:lnTo>
+                  <a:lnTo>
+                    <a:pt x="3105268" y="146612"/>
+                  </a:lnTo>
+                  <a:lnTo>
+                    <a:pt x="3031508" y="143394"/>
+                  </a:lnTo>
+                  <a:lnTo>
+                    <a:pt x="2957748" y="140165"/>
+                  </a:lnTo>
+                  <a:lnTo>
+                    <a:pt x="2883988" y="136923"/>
+                  </a:lnTo>
+                  <a:lnTo>
+                    <a:pt x="2810228" y="133669"/>
+                  </a:lnTo>
+                  <a:lnTo>
+                    <a:pt x="2736468" y="130402"/>
+                  </a:lnTo>
+                  <a:lnTo>
+                    <a:pt x="2662708" y="127123"/>
+                  </a:lnTo>
+                  <a:lnTo>
+                    <a:pt x="2588948" y="123832"/>
+                  </a:lnTo>
+                  <a:lnTo>
+                    <a:pt x="2515188" y="120528"/>
+                  </a:lnTo>
+                  <a:lnTo>
+                    <a:pt x="2441428" y="117211"/>
+                  </a:lnTo>
+                  <a:lnTo>
+                    <a:pt x="2367668" y="113882"/>
+                  </a:lnTo>
+                  <a:lnTo>
+                    <a:pt x="2293908" y="110540"/>
+                  </a:lnTo>
+                  <a:lnTo>
+                    <a:pt x="2220148" y="107185"/>
+                  </a:lnTo>
+                  <a:lnTo>
+                    <a:pt x="2146388" y="103817"/>
+                  </a:lnTo>
+                  <a:lnTo>
+                    <a:pt x="2072628" y="100437"/>
+                  </a:lnTo>
+                  <a:lnTo>
+                    <a:pt x="1998868" y="97044"/>
+                  </a:lnTo>
+                  <a:lnTo>
+                    <a:pt x="1925108" y="93638"/>
+                  </a:lnTo>
+                  <a:lnTo>
+                    <a:pt x="1851348" y="90219"/>
+                  </a:lnTo>
+                  <a:lnTo>
+                    <a:pt x="1777588" y="86787"/>
+                  </a:lnTo>
+                  <a:lnTo>
+                    <a:pt x="1703828" y="83341"/>
+                  </a:lnTo>
+                  <a:lnTo>
+                    <a:pt x="1630068" y="79883"/>
+                  </a:lnTo>
+                  <a:lnTo>
+                    <a:pt x="1556308" y="76412"/>
+                  </a:lnTo>
+                  <a:lnTo>
+                    <a:pt x="1482548" y="72927"/>
+                  </a:lnTo>
+                  <a:lnTo>
+                    <a:pt x="1408788" y="69429"/>
+                  </a:lnTo>
+                  <a:lnTo>
+                    <a:pt x="1335028" y="65917"/>
+                  </a:lnTo>
+                  <a:lnTo>
+                    <a:pt x="1261268" y="62393"/>
+                  </a:lnTo>
+                  <a:lnTo>
+                    <a:pt x="1187508" y="58855"/>
+                  </a:lnTo>
+                  <a:lnTo>
+                    <a:pt x="1113747" y="55303"/>
+                  </a:lnTo>
+                  <a:lnTo>
+                    <a:pt x="1039987" y="51738"/>
+                  </a:lnTo>
+                  <a:lnTo>
+                    <a:pt x="966227" y="48159"/>
+                  </a:lnTo>
+                  <a:lnTo>
+                    <a:pt x="892467" y="44567"/>
+                  </a:lnTo>
+                  <a:lnTo>
+                    <a:pt x="818707" y="40961"/>
+                  </a:lnTo>
+                  <a:lnTo>
+                    <a:pt x="744947" y="37341"/>
+                  </a:lnTo>
+                  <a:lnTo>
+                    <a:pt x="671187" y="33707"/>
+                  </a:lnTo>
+                  <a:lnTo>
+                    <a:pt x="597427" y="30060"/>
+                  </a:lnTo>
+                  <a:lnTo>
+                    <a:pt x="523667" y="26398"/>
+                  </a:lnTo>
+                  <a:lnTo>
+                    <a:pt x="449907" y="22723"/>
+                  </a:lnTo>
+                  <a:lnTo>
+                    <a:pt x="376147" y="19034"/>
+                  </a:lnTo>
+                  <a:lnTo>
+                    <a:pt x="302387" y="15331"/>
+                  </a:lnTo>
+                  <a:lnTo>
+                    <a:pt x="228627" y="11613"/>
+                  </a:lnTo>
+                  <a:lnTo>
+                    <a:pt x="154867" y="7881"/>
+                  </a:lnTo>
+                  <a:lnTo>
+                    <a:pt x="81107" y="4136"/>
+                  </a:lnTo>
+                  <a:lnTo>
+                    <a:pt x="7347" y="375"/>
                   </a:lnTo>
                   <a:lnTo>
                     <a:pt x="0" y="0"/>
@@ -4145,303 +4145,303 @@
           </p:nvSpPr>
           <p:spPr>
             <a:xfrm>
-              <a:off x="978677" y="1896563"/>
-              <a:ext cx="7074670" cy="3485682"/>
+              <a:off x="978677" y="2073503"/>
+              <a:ext cx="7074670" cy="3324506"/>
             </a:xfrm>
             <a:custGeom>
               <a:avLst/>
               <a:pathLst>
-                <a:path w="7074670" h="3485682">
+                <a:path w="7074670" h="3324506">
                   <a:moveTo>
                     <a:pt x="0" y="0"/>
                   </a:moveTo>
                   <a:lnTo>
-                    <a:pt x="67467" y="106051"/>
-                  </a:lnTo>
-                  <a:lnTo>
-                    <a:pt x="141227" y="218323"/>
-                  </a:lnTo>
-                  <a:lnTo>
-                    <a:pt x="214987" y="327041"/>
-                  </a:lnTo>
-                  <a:lnTo>
-                    <a:pt x="288747" y="432318"/>
-                  </a:lnTo>
-                  <a:lnTo>
-                    <a:pt x="362507" y="534261"/>
-                  </a:lnTo>
-                  <a:lnTo>
-                    <a:pt x="436267" y="632978"/>
-                  </a:lnTo>
-                  <a:lnTo>
-                    <a:pt x="510027" y="728569"/>
-                  </a:lnTo>
-                  <a:lnTo>
-                    <a:pt x="583787" y="821135"/>
-                  </a:lnTo>
-                  <a:lnTo>
-                    <a:pt x="657547" y="910770"/>
-                  </a:lnTo>
-                  <a:lnTo>
-                    <a:pt x="731307" y="997568"/>
-                  </a:lnTo>
-                  <a:lnTo>
-                    <a:pt x="805067" y="1081618"/>
-                  </a:lnTo>
-                  <a:lnTo>
-                    <a:pt x="878827" y="1163007"/>
-                  </a:lnTo>
-                  <a:lnTo>
-                    <a:pt x="952587" y="1241820"/>
-                  </a:lnTo>
-                  <a:lnTo>
-                    <a:pt x="1026347" y="1318138"/>
-                  </a:lnTo>
-                  <a:lnTo>
-                    <a:pt x="1100108" y="1392039"/>
-                  </a:lnTo>
-                  <a:lnTo>
-                    <a:pt x="1173868" y="1463602"/>
-                  </a:lnTo>
-                  <a:lnTo>
-                    <a:pt x="1247628" y="1532899"/>
-                  </a:lnTo>
-                  <a:lnTo>
-                    <a:pt x="1321388" y="1600002"/>
-                  </a:lnTo>
-                  <a:lnTo>
-                    <a:pt x="1395148" y="1664981"/>
-                  </a:lnTo>
-                  <a:lnTo>
-                    <a:pt x="1468908" y="1727903"/>
-                  </a:lnTo>
-                  <a:lnTo>
-                    <a:pt x="1542668" y="1788834"/>
-                  </a:lnTo>
-                  <a:lnTo>
-                    <a:pt x="1616428" y="1847835"/>
-                  </a:lnTo>
-                  <a:lnTo>
-                    <a:pt x="1690188" y="1904969"/>
-                  </a:lnTo>
-                  <a:lnTo>
-                    <a:pt x="1763948" y="1960294"/>
-                  </a:lnTo>
-                  <a:lnTo>
-                    <a:pt x="1837708" y="2013867"/>
-                  </a:lnTo>
-                  <a:lnTo>
-                    <a:pt x="1911468" y="2065745"/>
-                  </a:lnTo>
-                  <a:lnTo>
-                    <a:pt x="1985228" y="2115980"/>
-                  </a:lnTo>
-                  <a:lnTo>
-                    <a:pt x="2058988" y="2164625"/>
-                  </a:lnTo>
-                  <a:lnTo>
-                    <a:pt x="2132748" y="2211731"/>
-                  </a:lnTo>
-                  <a:lnTo>
-                    <a:pt x="2206508" y="2257345"/>
-                  </a:lnTo>
-                  <a:lnTo>
-                    <a:pt x="2280268" y="2301515"/>
-                  </a:lnTo>
-                  <a:lnTo>
-                    <a:pt x="2354028" y="2344286"/>
-                  </a:lnTo>
-                  <a:lnTo>
-                    <a:pt x="2427788" y="2385704"/>
-                  </a:lnTo>
-                  <a:lnTo>
-                    <a:pt x="2501548" y="2425811"/>
-                  </a:lnTo>
-                  <a:lnTo>
-                    <a:pt x="2575308" y="2464648"/>
-                  </a:lnTo>
-                  <a:lnTo>
-                    <a:pt x="2649068" y="2502256"/>
-                  </a:lnTo>
-                  <a:lnTo>
-                    <a:pt x="2722828" y="2538673"/>
-                  </a:lnTo>
-                  <a:lnTo>
-                    <a:pt x="2796588" y="2573937"/>
-                  </a:lnTo>
-                  <a:lnTo>
-                    <a:pt x="2870348" y="2608085"/>
-                  </a:lnTo>
-                  <a:lnTo>
-                    <a:pt x="2944108" y="2641152"/>
-                  </a:lnTo>
-                  <a:lnTo>
-                    <a:pt x="3017868" y="2673172"/>
-                  </a:lnTo>
-                  <a:lnTo>
-                    <a:pt x="3091628" y="2704178"/>
-                  </a:lnTo>
-                  <a:lnTo>
-                    <a:pt x="3165388" y="2734203"/>
-                  </a:lnTo>
-                  <a:lnTo>
-                    <a:pt x="3239148" y="2763278"/>
-                  </a:lnTo>
-                  <a:lnTo>
-                    <a:pt x="3312908" y="2791432"/>
-                  </a:lnTo>
-                  <a:lnTo>
-                    <a:pt x="3386668" y="2818694"/>
-                  </a:lnTo>
-                  <a:lnTo>
-                    <a:pt x="3460428" y="2845094"/>
-                  </a:lnTo>
-                  <a:lnTo>
-                    <a:pt x="3534188" y="2870658"/>
-                  </a:lnTo>
-                  <a:lnTo>
-                    <a:pt x="3607948" y="2895413"/>
-                  </a:lnTo>
-                  <a:lnTo>
-                    <a:pt x="3681708" y="2919384"/>
-                  </a:lnTo>
-                  <a:lnTo>
-                    <a:pt x="3755468" y="2942597"/>
-                  </a:lnTo>
-                  <a:lnTo>
-                    <a:pt x="3829228" y="2965074"/>
-                  </a:lnTo>
-                  <a:lnTo>
-                    <a:pt x="3902988" y="2986840"/>
-                  </a:lnTo>
-                  <a:lnTo>
-                    <a:pt x="3976748" y="3007917"/>
-                  </a:lnTo>
-                  <a:lnTo>
-                    <a:pt x="4050509" y="3028326"/>
-                  </a:lnTo>
-                  <a:lnTo>
-                    <a:pt x="4124269" y="3048090"/>
-                  </a:lnTo>
-                  <a:lnTo>
-                    <a:pt x="4198029" y="3067228"/>
-                  </a:lnTo>
-                  <a:lnTo>
-                    <a:pt x="4271789" y="3085760"/>
-                  </a:lnTo>
-                  <a:lnTo>
-                    <a:pt x="4345549" y="3103706"/>
-                  </a:lnTo>
-                  <a:lnTo>
-                    <a:pt x="4419309" y="3121083"/>
-                  </a:lnTo>
-                  <a:lnTo>
-                    <a:pt x="4493069" y="3137910"/>
-                  </a:lnTo>
-                  <a:lnTo>
-                    <a:pt x="4566829" y="3154205"/>
-                  </a:lnTo>
-                  <a:lnTo>
-                    <a:pt x="4640589" y="3169983"/>
-                  </a:lnTo>
-                  <a:lnTo>
-                    <a:pt x="4714349" y="3185263"/>
-                  </a:lnTo>
-                  <a:lnTo>
-                    <a:pt x="4788109" y="3200058"/>
-                  </a:lnTo>
-                  <a:lnTo>
-                    <a:pt x="4861869" y="3214385"/>
-                  </a:lnTo>
-                  <a:lnTo>
-                    <a:pt x="4935629" y="3228259"/>
-                  </a:lnTo>
-                  <a:lnTo>
-                    <a:pt x="5009389" y="3241694"/>
-                  </a:lnTo>
-                  <a:lnTo>
-                    <a:pt x="5083149" y="3254703"/>
-                  </a:lnTo>
-                  <a:lnTo>
-                    <a:pt x="5156909" y="3267300"/>
-                  </a:lnTo>
-                  <a:lnTo>
-                    <a:pt x="5230669" y="3279499"/>
-                  </a:lnTo>
-                  <a:lnTo>
-                    <a:pt x="5304429" y="3291311"/>
-                  </a:lnTo>
-                  <a:lnTo>
-                    <a:pt x="5378189" y="3302749"/>
-                  </a:lnTo>
-                  <a:lnTo>
-                    <a:pt x="5451949" y="3313826"/>
-                  </a:lnTo>
-                  <a:lnTo>
-                    <a:pt x="5525709" y="3324552"/>
-                  </a:lnTo>
-                  <a:lnTo>
-                    <a:pt x="5599469" y="3334938"/>
-                  </a:lnTo>
-                  <a:lnTo>
-                    <a:pt x="5673229" y="3344995"/>
-                  </a:lnTo>
-                  <a:lnTo>
-                    <a:pt x="5746989" y="3354734"/>
-                  </a:lnTo>
-                  <a:lnTo>
-                    <a:pt x="5820749" y="3364165"/>
-                  </a:lnTo>
-                  <a:lnTo>
-                    <a:pt x="5894509" y="3373297"/>
-                  </a:lnTo>
-                  <a:lnTo>
-                    <a:pt x="5968269" y="3382140"/>
-                  </a:lnTo>
-                  <a:lnTo>
-                    <a:pt x="6042029" y="3390703"/>
-                  </a:lnTo>
-                  <a:lnTo>
-                    <a:pt x="6115789" y="3398995"/>
-                  </a:lnTo>
-                  <a:lnTo>
-                    <a:pt x="6189549" y="3407025"/>
-                  </a:lnTo>
-                  <a:lnTo>
-                    <a:pt x="6263309" y="3414800"/>
-                  </a:lnTo>
-                  <a:lnTo>
-                    <a:pt x="6337069" y="3422329"/>
-                  </a:lnTo>
-                  <a:lnTo>
-                    <a:pt x="6410829" y="3429620"/>
-                  </a:lnTo>
-                  <a:lnTo>
-                    <a:pt x="6484589" y="3436680"/>
-                  </a:lnTo>
-                  <a:lnTo>
-                    <a:pt x="6558349" y="3443517"/>
-                  </a:lnTo>
-                  <a:lnTo>
-                    <a:pt x="6632109" y="3450137"/>
-                  </a:lnTo>
-                  <a:lnTo>
-                    <a:pt x="6705869" y="3456548"/>
-                  </a:lnTo>
-                  <a:lnTo>
-                    <a:pt x="6779629" y="3462756"/>
-                  </a:lnTo>
-                  <a:lnTo>
-                    <a:pt x="6853389" y="3468767"/>
-                  </a:lnTo>
-                  <a:lnTo>
-                    <a:pt x="6927150" y="3474588"/>
-                  </a:lnTo>
-                  <a:lnTo>
-                    <a:pt x="7000910" y="3480224"/>
-                  </a:lnTo>
-                  <a:lnTo>
-                    <a:pt x="7074670" y="3485682"/>
+                    <a:pt x="67467" y="101147"/>
+                  </a:lnTo>
+                  <a:lnTo>
+                    <a:pt x="141227" y="208228"/>
+                  </a:lnTo>
+                  <a:lnTo>
+                    <a:pt x="214987" y="311919"/>
+                  </a:lnTo>
+                  <a:lnTo>
+                    <a:pt x="288747" y="412327"/>
+                  </a:lnTo>
+                  <a:lnTo>
+                    <a:pt x="362507" y="509557"/>
+                  </a:lnTo>
+                  <a:lnTo>
+                    <a:pt x="436267" y="603709"/>
+                  </a:lnTo>
+                  <a:lnTo>
+                    <a:pt x="510027" y="694881"/>
+                  </a:lnTo>
+                  <a:lnTo>
+                    <a:pt x="583787" y="783166"/>
+                  </a:lnTo>
+                  <a:lnTo>
+                    <a:pt x="657547" y="868656"/>
+                  </a:lnTo>
+                  <a:lnTo>
+                    <a:pt x="731307" y="951441"/>
+                  </a:lnTo>
+                  <a:lnTo>
+                    <a:pt x="805067" y="1031604"/>
+                  </a:lnTo>
+                  <a:lnTo>
+                    <a:pt x="878827" y="1109230"/>
+                  </a:lnTo>
+                  <a:lnTo>
+                    <a:pt x="952587" y="1184398"/>
+                  </a:lnTo>
+                  <a:lnTo>
+                    <a:pt x="1026347" y="1257187"/>
+                  </a:lnTo>
+                  <a:lnTo>
+                    <a:pt x="1100108" y="1327672"/>
+                  </a:lnTo>
+                  <a:lnTo>
+                    <a:pt x="1173868" y="1395925"/>
+                  </a:lnTo>
+                  <a:lnTo>
+                    <a:pt x="1247628" y="1462018"/>
+                  </a:lnTo>
+                  <a:lnTo>
+                    <a:pt x="1321388" y="1526019"/>
+                  </a:lnTo>
+                  <a:lnTo>
+                    <a:pt x="1395148" y="1587993"/>
+                  </a:lnTo>
+                  <a:lnTo>
+                    <a:pt x="1468908" y="1648006"/>
+                  </a:lnTo>
+                  <a:lnTo>
+                    <a:pt x="1542668" y="1706119"/>
+                  </a:lnTo>
+                  <a:lnTo>
+                    <a:pt x="1616428" y="1762392"/>
+                  </a:lnTo>
+                  <a:lnTo>
+                    <a:pt x="1690188" y="1816884"/>
+                  </a:lnTo>
+                  <a:lnTo>
+                    <a:pt x="1763948" y="1869650"/>
+                  </a:lnTo>
+                  <a:lnTo>
+                    <a:pt x="1837708" y="1920747"/>
+                  </a:lnTo>
+                  <a:lnTo>
+                    <a:pt x="1911468" y="1970226"/>
+                  </a:lnTo>
+                  <a:lnTo>
+                    <a:pt x="1985228" y="2018138"/>
+                  </a:lnTo>
+                  <a:lnTo>
+                    <a:pt x="2058988" y="2064534"/>
+                  </a:lnTo>
+                  <a:lnTo>
+                    <a:pt x="2132748" y="2109461"/>
+                  </a:lnTo>
+                  <a:lnTo>
+                    <a:pt x="2206508" y="2152966"/>
+                  </a:lnTo>
+                  <a:lnTo>
+                    <a:pt x="2280268" y="2195093"/>
+                  </a:lnTo>
+                  <a:lnTo>
+                    <a:pt x="2354028" y="2235888"/>
+                  </a:lnTo>
+                  <a:lnTo>
+                    <a:pt x="2427788" y="2275390"/>
+                  </a:lnTo>
+                  <a:lnTo>
+                    <a:pt x="2501548" y="2313642"/>
+                  </a:lnTo>
+                  <a:lnTo>
+                    <a:pt x="2575308" y="2350684"/>
+                  </a:lnTo>
+                  <a:lnTo>
+                    <a:pt x="2649068" y="2386552"/>
+                  </a:lnTo>
+                  <a:lnTo>
+                    <a:pt x="2722828" y="2421285"/>
+                  </a:lnTo>
+                  <a:lnTo>
+                    <a:pt x="2796588" y="2454919"/>
+                  </a:lnTo>
+                  <a:lnTo>
+                    <a:pt x="2870348" y="2487488"/>
+                  </a:lnTo>
+                  <a:lnTo>
+                    <a:pt x="2944108" y="2519026"/>
+                  </a:lnTo>
+                  <a:lnTo>
+                    <a:pt x="3017868" y="2549565"/>
+                  </a:lnTo>
+                  <a:lnTo>
+                    <a:pt x="3091628" y="2579138"/>
+                  </a:lnTo>
+                  <a:lnTo>
+                    <a:pt x="3165388" y="2607775"/>
+                  </a:lnTo>
+                  <a:lnTo>
+                    <a:pt x="3239148" y="2635505"/>
+                  </a:lnTo>
+                  <a:lnTo>
+                    <a:pt x="3312908" y="2662357"/>
+                  </a:lnTo>
+                  <a:lnTo>
+                    <a:pt x="3386668" y="2688359"/>
+                  </a:lnTo>
+                  <a:lnTo>
+                    <a:pt x="3460428" y="2713538"/>
+                  </a:lnTo>
+                  <a:lnTo>
+                    <a:pt x="3534188" y="2737920"/>
+                  </a:lnTo>
+                  <a:lnTo>
+                    <a:pt x="3607948" y="2761530"/>
+                  </a:lnTo>
+                  <a:lnTo>
+                    <a:pt x="3681708" y="2784393"/>
+                  </a:lnTo>
+                  <a:lnTo>
+                    <a:pt x="3755468" y="2806532"/>
+                  </a:lnTo>
+                  <a:lnTo>
+                    <a:pt x="3829228" y="2827970"/>
+                  </a:lnTo>
+                  <a:lnTo>
+                    <a:pt x="3902988" y="2848730"/>
+                  </a:lnTo>
+                  <a:lnTo>
+                    <a:pt x="3976748" y="2868832"/>
+                  </a:lnTo>
+                  <a:lnTo>
+                    <a:pt x="4050509" y="2888298"/>
+                  </a:lnTo>
+                  <a:lnTo>
+                    <a:pt x="4124269" y="2907148"/>
+                  </a:lnTo>
+                  <a:lnTo>
+                    <a:pt x="4198029" y="2925401"/>
+                  </a:lnTo>
+                  <a:lnTo>
+                    <a:pt x="4271789" y="2943076"/>
+                  </a:lnTo>
+                  <a:lnTo>
+                    <a:pt x="4345549" y="2960191"/>
+                  </a:lnTo>
+                  <a:lnTo>
+                    <a:pt x="4419309" y="2976765"/>
+                  </a:lnTo>
+                  <a:lnTo>
+                    <a:pt x="4493069" y="2992814"/>
+                  </a:lnTo>
+                  <a:lnTo>
+                    <a:pt x="4566829" y="3008355"/>
+                  </a:lnTo>
+                  <a:lnTo>
+                    <a:pt x="4640589" y="3023405"/>
+                  </a:lnTo>
+                  <a:lnTo>
+                    <a:pt x="4714349" y="3037977"/>
+                  </a:lnTo>
+                  <a:lnTo>
+                    <a:pt x="4788109" y="3052089"/>
+                  </a:lnTo>
+                  <a:lnTo>
+                    <a:pt x="4861869" y="3065753"/>
+                  </a:lnTo>
+                  <a:lnTo>
+                    <a:pt x="4935629" y="3078986"/>
+                  </a:lnTo>
+                  <a:lnTo>
+                    <a:pt x="5009389" y="3091799"/>
+                  </a:lnTo>
+                  <a:lnTo>
+                    <a:pt x="5083149" y="3104206"/>
+                  </a:lnTo>
+                  <a:lnTo>
+                    <a:pt x="5156909" y="3116221"/>
+                  </a:lnTo>
+                  <a:lnTo>
+                    <a:pt x="5230669" y="3127856"/>
+                  </a:lnTo>
+                  <a:lnTo>
+                    <a:pt x="5304429" y="3139122"/>
+                  </a:lnTo>
+                  <a:lnTo>
+                    <a:pt x="5378189" y="3150032"/>
+                  </a:lnTo>
+                  <a:lnTo>
+                    <a:pt x="5451949" y="3160596"/>
+                  </a:lnTo>
+                  <a:lnTo>
+                    <a:pt x="5525709" y="3170825"/>
+                  </a:lnTo>
+                  <a:lnTo>
+                    <a:pt x="5599469" y="3180731"/>
+                  </a:lnTo>
+                  <a:lnTo>
+                    <a:pt x="5673229" y="3190324"/>
+                  </a:lnTo>
+                  <a:lnTo>
+                    <a:pt x="5746989" y="3199612"/>
+                  </a:lnTo>
+                  <a:lnTo>
+                    <a:pt x="5820749" y="3208607"/>
+                  </a:lnTo>
+                  <a:lnTo>
+                    <a:pt x="5894509" y="3217317"/>
+                  </a:lnTo>
+                  <a:lnTo>
+                    <a:pt x="5968269" y="3225751"/>
+                  </a:lnTo>
+                  <a:lnTo>
+                    <a:pt x="6042029" y="3233918"/>
+                  </a:lnTo>
+                  <a:lnTo>
+                    <a:pt x="6115789" y="3241827"/>
+                  </a:lnTo>
+                  <a:lnTo>
+                    <a:pt x="6189549" y="3249485"/>
+                  </a:lnTo>
+                  <a:lnTo>
+                    <a:pt x="6263309" y="3256901"/>
+                  </a:lnTo>
+                  <a:lnTo>
+                    <a:pt x="6337069" y="3264082"/>
+                  </a:lnTo>
+                  <a:lnTo>
+                    <a:pt x="6410829" y="3271036"/>
+                  </a:lnTo>
+                  <a:lnTo>
+                    <a:pt x="6484589" y="3277770"/>
+                  </a:lnTo>
+                  <a:lnTo>
+                    <a:pt x="6558349" y="3284290"/>
+                  </a:lnTo>
+                  <a:lnTo>
+                    <a:pt x="6632109" y="3290604"/>
+                  </a:lnTo>
+                  <a:lnTo>
+                    <a:pt x="6705869" y="3296718"/>
+                  </a:lnTo>
+                  <a:lnTo>
+                    <a:pt x="6779629" y="3302639"/>
+                  </a:lnTo>
+                  <a:lnTo>
+                    <a:pt x="6853389" y="3308372"/>
+                  </a:lnTo>
+                  <a:lnTo>
+                    <a:pt x="6927150" y="3313924"/>
+                  </a:lnTo>
+                  <a:lnTo>
+                    <a:pt x="7000910" y="3319300"/>
+                  </a:lnTo>
+                  <a:lnTo>
+                    <a:pt x="7074670" y="3324506"/>
                   </a:lnTo>
                 </a:path>
               </a:pathLst>
@@ -4470,7 +4470,7 @@
           </p:nvSpPr>
           <p:spPr>
             <a:xfrm>
-              <a:off x="817517" y="4679530"/>
+              <a:off x="817517" y="4727786"/>
               <a:ext cx="7799693" cy="0"/>
             </a:xfrm>
             <a:custGeom>
@@ -4513,15 +4513,15 @@
           </p:nvSpPr>
           <p:spPr>
             <a:xfrm>
-              <a:off x="4269157" y="1896563"/>
-              <a:ext cx="0" cy="3826579"/>
+              <a:off x="4269157" y="2073503"/>
+              <a:ext cx="0" cy="3649639"/>
             </a:xfrm>
             <a:custGeom>
               <a:avLst/>
               <a:pathLst>
-                <a:path w="0" h="3826579">
+                <a:path w="0" h="3649639">
                   <a:moveTo>
-                    <a:pt x="0" y="3826579"/>
+                    <a:pt x="0" y="3649639"/>
                   </a:moveTo>
                   <a:lnTo>
                     <a:pt x="0" y="0"/>
@@ -4556,7 +4556,7 @@
           </p:nvSpPr>
           <p:spPr>
             <a:xfrm>
-              <a:off x="692708" y="5509156"/>
+              <a:off x="692708" y="5517199"/>
               <a:ext cx="62179" cy="80101"/>
             </a:xfrm>
             <a:prstGeom prst="rect">
@@ -4602,7 +4602,7 @@
           </p:nvSpPr>
           <p:spPr>
             <a:xfrm>
-              <a:off x="692708" y="4639479"/>
+              <a:off x="692708" y="4687735"/>
               <a:ext cx="62179" cy="80101"/>
             </a:xfrm>
             <a:prstGeom prst="rect">
@@ -4648,7 +4648,7 @@
           </p:nvSpPr>
           <p:spPr>
             <a:xfrm>
-              <a:off x="692708" y="3769802"/>
+              <a:off x="692708" y="3858272"/>
               <a:ext cx="62179" cy="80101"/>
             </a:xfrm>
             <a:prstGeom prst="rect">
@@ -4694,7 +4694,7 @@
           </p:nvSpPr>
           <p:spPr>
             <a:xfrm>
-              <a:off x="692708" y="2900125"/>
+              <a:off x="692708" y="3028808"/>
               <a:ext cx="62179" cy="80101"/>
             </a:xfrm>
             <a:prstGeom prst="rect">
@@ -4740,7 +4740,7 @@
           </p:nvSpPr>
           <p:spPr>
             <a:xfrm>
-              <a:off x="692708" y="2030448"/>
+              <a:off x="692708" y="2199345"/>
               <a:ext cx="62179" cy="80101"/>
             </a:xfrm>
             <a:prstGeom prst="rect">
@@ -5016,7 +5016,7 @@
           </p:nvSpPr>
           <p:spPr>
             <a:xfrm rot="-5400000">
-              <a:off x="68446" y="3759743"/>
+              <a:off x="68446" y="3848213"/>
               <a:ext cx="1016904" cy="100218"/>
             </a:xfrm>
             <a:prstGeom prst="rect">
@@ -5057,6 +5057,52 @@
         <p:sp>
           <p:nvSpPr>
             <p:cNvPr id="38" name="tx38"/>
+            <p:cNvSpPr/>
+            <p:nvPr/>
+          </p:nvSpPr>
+          <p:spPr>
+            <a:xfrm>
+              <a:off x="817517" y="1896563"/>
+              <a:ext cx="5626211" cy="82021"/>
+            </a:xfrm>
+            <a:prstGeom prst="rect">
+              <a:avLst/>
+            </a:prstGeom>
+            <a:noFill/>
+          </p:spPr>
+          <p:txBody>
+            <a:bodyPr lIns="0" rIns="0" tIns="0" bIns="0" anchorCtr="1" anchor="ctr" wrap="none"/>
+            <a:lstStyle/>
+            <a:p>
+              <a:pPr algn="l" marL="0" marR="0" indent="0">
+                <a:lnSpc>
+                  <a:spcPts val="900"/>
+                </a:lnSpc>
+                <a:spcBef>
+                  <a:spcPts val="0"/>
+                </a:spcBef>
+                <a:spcAft>
+                  <a:spcPts val="0"/>
+                </a:spcAft>
+              </a:pPr>
+              <a:r>
+                <a:rPr sz="900">
+                  <a:solidFill>
+                    <a:srgbClr val="404040">
+                      <a:alpha val="100000"/>
+                    </a:srgbClr>
+                  </a:solidFill>
+                  <a:latin typeface="Helvetica"/>
+                  <a:cs typeface="Helvetica"/>
+                </a:rPr>
+                <a:t>subHR per 0.1 ratio decline: 1.47 (1.05-2.07)  |  per IQR decline (Δ = 0.29): 3.10 (1.14-8.41)  |  IQR: [0.85, 1.15]</a:t>
+              </a:r>
+            </a:p>
+          </p:txBody>
+        </p:sp>
+        <p:sp>
+          <p:nvSpPr>
+            <p:cNvPr id="39" name="tx39"/>
             <p:cNvSpPr/>
             <p:nvPr/>
           </p:nvSpPr>

--- a/docs/pptx/whole/jx-linsubhr-ratio-hosp4.pptx
+++ b/docs/pptx/whole/jx-linsubhr-ratio-hosp4.pptx
@@ -5063,7 +5063,7 @@
           <p:spPr>
             <a:xfrm>
               <a:off x="817517" y="1896563"/>
-              <a:ext cx="5626211" cy="82021"/>
+              <a:ext cx="6169365" cy="82021"/>
             </a:xfrm>
             <a:prstGeom prst="rect">
               <a:avLst/>
@@ -5095,7 +5095,7 @@
                   <a:latin typeface="Helvetica"/>
                   <a:cs typeface="Helvetica"/>
                 </a:rPr>
-                <a:t>subHR per 0.1 ratio decline: 1.47 (1.05-2.07)  |  per IQR decline (Δ = 0.29): 3.10 (1.14-8.41)  |  IQR: [0.85, 1.15]</a:t>
+                <a:t>subHR per 0.1 ratio decline: 1.47 (1.05-2.07), p = 0.026  |  per IQR decline (Δ = 0.29): 3.10 (1.14-8.41)  |  IQR: [0.85, 1.15]</a:t>
               </a:r>
             </a:p>
           </p:txBody>

--- a/docs/pptx/whole/jx-linsubhr-ratio-hosp4.pptx
+++ b/docs/pptx/whole/jx-linsubhr-ratio-hosp4.pptx
@@ -2443,7 +2443,7 @@
           </p:nvSpPr>
           <p:spPr>
             <a:xfrm>
-              <a:off x="1615213" y="2073503"/>
+              <a:off x="1365633" y="2073503"/>
               <a:ext cx="0" cy="3649639"/>
             </a:xfrm>
             <a:custGeom>
@@ -2486,7 +2486,7 @@
           </p:nvSpPr>
           <p:spPr>
             <a:xfrm>
-              <a:off x="3387871" y="2073503"/>
+              <a:off x="3517243" y="2073503"/>
               <a:ext cx="0" cy="3649639"/>
             </a:xfrm>
             <a:custGeom>
@@ -2529,7 +2529,7 @@
           </p:nvSpPr>
           <p:spPr>
             <a:xfrm>
-              <a:off x="5160528" y="2073503"/>
+              <a:off x="5668852" y="2073503"/>
               <a:ext cx="0" cy="3649639"/>
             </a:xfrm>
             <a:custGeom>
@@ -2572,7 +2572,7 @@
           </p:nvSpPr>
           <p:spPr>
             <a:xfrm>
-              <a:off x="6933186" y="2073503"/>
+              <a:off x="7820461" y="2073503"/>
               <a:ext cx="0" cy="3649639"/>
             </a:xfrm>
             <a:custGeom>
@@ -2830,7 +2830,7 @@
           </p:nvSpPr>
           <p:spPr>
             <a:xfrm>
-              <a:off x="2501542" y="2073503"/>
+              <a:off x="2441438" y="2073503"/>
               <a:ext cx="0" cy="3649639"/>
             </a:xfrm>
             <a:custGeom>
@@ -2873,7 +2873,7 @@
           </p:nvSpPr>
           <p:spPr>
             <a:xfrm>
-              <a:off x="4274200" y="2073503"/>
+              <a:off x="4593047" y="2073503"/>
               <a:ext cx="0" cy="3649639"/>
             </a:xfrm>
             <a:custGeom>
@@ -2916,7 +2916,7 @@
           </p:nvSpPr>
           <p:spPr>
             <a:xfrm>
-              <a:off x="6046857" y="2073503"/>
+              <a:off x="6744657" y="2073503"/>
               <a:ext cx="0" cy="3649639"/>
             </a:xfrm>
             <a:custGeom>
@@ -2953,592 +2953,549 @@
         </p:sp>
         <p:sp>
           <p:nvSpPr>
-            <p:cNvPr id="20" name="pl20"/>
+            <p:cNvPr id="20" name="pg20"/>
             <p:cNvSpPr/>
             <p:nvPr/>
           </p:nvSpPr>
           <p:spPr>
             <a:xfrm>
-              <a:off x="7819515" y="2073503"/>
-              <a:ext cx="0" cy="3649639"/>
+              <a:off x="1172049" y="2073503"/>
+              <a:ext cx="7090630" cy="3446589"/>
             </a:xfrm>
             <a:custGeom>
               <a:avLst/>
               <a:pathLst>
-                <a:path w="0" h="3649639">
+                <a:path w="7090630" h="3446589">
                   <a:moveTo>
-                    <a:pt x="0" y="3649639"/>
+                    <a:pt x="1718154" y="0"/>
                   </a:moveTo>
                   <a:lnTo>
-                    <a:pt x="0" y="0"/>
-                  </a:lnTo>
-                  <a:lnTo>
-                    <a:pt x="0" y="0"/>
-                  </a:lnTo>
-                </a:path>
-              </a:pathLst>
-            </a:custGeom>
-            <a:ln w="13550" cap="flat">
-              <a:solidFill>
-                <a:srgbClr val="EBEBEB">
-                  <a:alpha val="100000"/>
-                </a:srgbClr>
-              </a:solidFill>
-              <a:prstDash val="solid"/>
-              <a:round/>
-            </a:ln>
-          </p:spPr>
-          <p:txBody>
-            <a:bodyPr/>
-            <a:lstStyle/>
-            <a:p/>
-          </p:txBody>
-        </p:sp>
-        <p:sp>
-          <p:nvSpPr>
-            <p:cNvPr id="21" name="pg21"/>
-            <p:cNvSpPr/>
-            <p:nvPr/>
-          </p:nvSpPr>
-          <p:spPr>
-            <a:xfrm>
-              <a:off x="817517" y="2073503"/>
-              <a:ext cx="7235830" cy="3446589"/>
-            </a:xfrm>
-            <a:custGeom>
-              <a:avLst/>
-              <a:pathLst>
-                <a:path w="7235830" h="3446589">
-                  <a:moveTo>
-                    <a:pt x="1703018" y="0"/>
-                  </a:moveTo>
-                  <a:lnTo>
-                    <a:pt x="1703828" y="2384"/>
-                  </a:lnTo>
-                  <a:lnTo>
-                    <a:pt x="1777588" y="206872"/>
-                  </a:lnTo>
-                  <a:lnTo>
-                    <a:pt x="1851348" y="399348"/>
-                  </a:lnTo>
-                  <a:lnTo>
-                    <a:pt x="1925108" y="580519"/>
-                  </a:lnTo>
-                  <a:lnTo>
-                    <a:pt x="1998868" y="751049"/>
-                  </a:lnTo>
-                  <a:lnTo>
-                    <a:pt x="2072628" y="911562"/>
-                  </a:lnTo>
-                  <a:lnTo>
-                    <a:pt x="2146388" y="1062646"/>
-                  </a:lnTo>
-                  <a:lnTo>
-                    <a:pt x="2220148" y="1204857"/>
-                  </a:lnTo>
-                  <a:lnTo>
-                    <a:pt x="2293908" y="1338714"/>
-                  </a:lnTo>
-                  <a:lnTo>
-                    <a:pt x="2367668" y="1464708"/>
-                  </a:lnTo>
-                  <a:lnTo>
-                    <a:pt x="2441428" y="1583302"/>
-                  </a:lnTo>
-                  <a:lnTo>
-                    <a:pt x="2515188" y="1694930"/>
-                  </a:lnTo>
-                  <a:lnTo>
-                    <a:pt x="2588948" y="1800002"/>
-                  </a:lnTo>
-                  <a:lnTo>
-                    <a:pt x="2662708" y="1898901"/>
-                  </a:lnTo>
-                  <a:lnTo>
-                    <a:pt x="2736468" y="1991992"/>
-                  </a:lnTo>
-                  <a:lnTo>
-                    <a:pt x="2810228" y="2079614"/>
-                  </a:lnTo>
-                  <a:lnTo>
-                    <a:pt x="2883988" y="2162090"/>
-                  </a:lnTo>
-                  <a:lnTo>
-                    <a:pt x="2957748" y="2239721"/>
-                  </a:lnTo>
-                  <a:lnTo>
-                    <a:pt x="3031508" y="2312793"/>
-                  </a:lnTo>
-                  <a:lnTo>
-                    <a:pt x="3105268" y="2381572"/>
-                  </a:lnTo>
-                  <a:lnTo>
-                    <a:pt x="3179028" y="2446311"/>
-                  </a:lnTo>
-                  <a:lnTo>
-                    <a:pt x="3252788" y="2507248"/>
-                  </a:lnTo>
-                  <a:lnTo>
-                    <a:pt x="3326548" y="2564606"/>
-                  </a:lnTo>
-                  <a:lnTo>
-                    <a:pt x="3400308" y="2618594"/>
-                  </a:lnTo>
-                  <a:lnTo>
-                    <a:pt x="3474068" y="2655241"/>
-                  </a:lnTo>
-                  <a:lnTo>
-                    <a:pt x="3547828" y="2658386"/>
-                  </a:lnTo>
-                  <a:lnTo>
-                    <a:pt x="3621588" y="2661519"/>
-                  </a:lnTo>
-                  <a:lnTo>
-                    <a:pt x="3695348" y="2664640"/>
-                  </a:lnTo>
-                  <a:lnTo>
-                    <a:pt x="3769108" y="2667749"/>
-                  </a:lnTo>
-                  <a:lnTo>
-                    <a:pt x="3842868" y="2670846"/>
-                  </a:lnTo>
-                  <a:lnTo>
-                    <a:pt x="3916628" y="2673931"/>
-                  </a:lnTo>
-                  <a:lnTo>
-                    <a:pt x="3990388" y="2677005"/>
-                  </a:lnTo>
-                  <a:lnTo>
-                    <a:pt x="4064149" y="2680067"/>
-                  </a:lnTo>
-                  <a:lnTo>
-                    <a:pt x="4137909" y="2683118"/>
-                  </a:lnTo>
-                  <a:lnTo>
-                    <a:pt x="4211669" y="2686157"/>
-                  </a:lnTo>
-                  <a:lnTo>
-                    <a:pt x="4285429" y="2689184"/>
-                  </a:lnTo>
-                  <a:lnTo>
-                    <a:pt x="4359189" y="2692200"/>
-                  </a:lnTo>
-                  <a:lnTo>
-                    <a:pt x="4432949" y="2695204"/>
-                  </a:lnTo>
-                  <a:lnTo>
-                    <a:pt x="4506709" y="2698197"/>
-                  </a:lnTo>
-                  <a:lnTo>
-                    <a:pt x="4580469" y="2701179"/>
-                  </a:lnTo>
-                  <a:lnTo>
-                    <a:pt x="4654229" y="2704149"/>
-                  </a:lnTo>
-                  <a:lnTo>
-                    <a:pt x="4727989" y="2707108"/>
-                  </a:lnTo>
-                  <a:lnTo>
-                    <a:pt x="4801749" y="2710056"/>
-                  </a:lnTo>
-                  <a:lnTo>
-                    <a:pt x="4875509" y="2712993"/>
-                  </a:lnTo>
-                  <a:lnTo>
-                    <a:pt x="4949269" y="2715918"/>
-                  </a:lnTo>
-                  <a:lnTo>
-                    <a:pt x="5023029" y="2718833"/>
-                  </a:lnTo>
-                  <a:lnTo>
-                    <a:pt x="5096789" y="2721736"/>
-                  </a:lnTo>
-                  <a:lnTo>
-                    <a:pt x="5170549" y="2724628"/>
-                  </a:lnTo>
-                  <a:lnTo>
-                    <a:pt x="5244309" y="2727510"/>
-                  </a:lnTo>
-                  <a:lnTo>
-                    <a:pt x="5318069" y="2730380"/>
-                  </a:lnTo>
-                  <a:lnTo>
-                    <a:pt x="5391829" y="2733239"/>
-                  </a:lnTo>
-                  <a:lnTo>
-                    <a:pt x="5465589" y="2736088"/>
-                  </a:lnTo>
-                  <a:lnTo>
-                    <a:pt x="5539349" y="2738926"/>
-                  </a:lnTo>
-                  <a:lnTo>
-                    <a:pt x="5613109" y="2741753"/>
-                  </a:lnTo>
-                  <a:lnTo>
-                    <a:pt x="5686869" y="2744569"/>
-                  </a:lnTo>
-                  <a:lnTo>
-                    <a:pt x="5760629" y="2747375"/>
-                  </a:lnTo>
-                  <a:lnTo>
-                    <a:pt x="5834389" y="2750170"/>
-                  </a:lnTo>
-                  <a:lnTo>
-                    <a:pt x="5908149" y="2752954"/>
-                  </a:lnTo>
-                  <a:lnTo>
-                    <a:pt x="5981909" y="2755728"/>
-                  </a:lnTo>
-                  <a:lnTo>
-                    <a:pt x="6055669" y="2758491"/>
-                  </a:lnTo>
-                  <a:lnTo>
-                    <a:pt x="6129429" y="2761244"/>
-                  </a:lnTo>
-                  <a:lnTo>
-                    <a:pt x="6203189" y="2763987"/>
-                  </a:lnTo>
-                  <a:lnTo>
-                    <a:pt x="6276949" y="2766718"/>
-                  </a:lnTo>
-                  <a:lnTo>
-                    <a:pt x="6350709" y="2769440"/>
-                  </a:lnTo>
-                  <a:lnTo>
-                    <a:pt x="6424469" y="2772151"/>
-                  </a:lnTo>
-                  <a:lnTo>
-                    <a:pt x="6498229" y="2774852"/>
-                  </a:lnTo>
-                  <a:lnTo>
-                    <a:pt x="6571989" y="2777543"/>
-                  </a:lnTo>
-                  <a:lnTo>
-                    <a:pt x="6645749" y="2780223"/>
-                  </a:lnTo>
-                  <a:lnTo>
-                    <a:pt x="6719509" y="2782894"/>
-                  </a:lnTo>
-                  <a:lnTo>
-                    <a:pt x="6793269" y="2785554"/>
-                  </a:lnTo>
-                  <a:lnTo>
-                    <a:pt x="6867029" y="2788204"/>
-                  </a:lnTo>
-                  <a:lnTo>
-                    <a:pt x="6940789" y="2790844"/>
-                  </a:lnTo>
-                  <a:lnTo>
-                    <a:pt x="7014550" y="2793474"/>
-                  </a:lnTo>
-                  <a:lnTo>
-                    <a:pt x="7088310" y="2796094"/>
-                  </a:lnTo>
-                  <a:lnTo>
-                    <a:pt x="7162070" y="2798704"/>
-                  </a:lnTo>
-                  <a:lnTo>
-                    <a:pt x="7235830" y="2801304"/>
-                  </a:lnTo>
-                  <a:lnTo>
-                    <a:pt x="7235830" y="3446589"/>
-                  </a:lnTo>
-                  <a:lnTo>
-                    <a:pt x="7162070" y="3444270"/>
-                  </a:lnTo>
-                  <a:lnTo>
-                    <a:pt x="7088310" y="3441807"/>
-                  </a:lnTo>
-                  <a:lnTo>
-                    <a:pt x="7014550" y="3439190"/>
-                  </a:lnTo>
-                  <a:lnTo>
-                    <a:pt x="6940789" y="3436409"/>
-                  </a:lnTo>
-                  <a:lnTo>
-                    <a:pt x="6867029" y="3433455"/>
-                  </a:lnTo>
-                  <a:lnTo>
-                    <a:pt x="6793269" y="3430317"/>
-                  </a:lnTo>
-                  <a:lnTo>
-                    <a:pt x="6719509" y="3426983"/>
-                  </a:lnTo>
-                  <a:lnTo>
-                    <a:pt x="6645749" y="3423441"/>
-                  </a:lnTo>
-                  <a:lnTo>
-                    <a:pt x="6571989" y="3419677"/>
-                  </a:lnTo>
-                  <a:lnTo>
-                    <a:pt x="6498229" y="3415679"/>
-                  </a:lnTo>
-                  <a:lnTo>
-                    <a:pt x="6424469" y="3411432"/>
-                  </a:lnTo>
-                  <a:lnTo>
-                    <a:pt x="6350709" y="3406919"/>
-                  </a:lnTo>
-                  <a:lnTo>
-                    <a:pt x="6276949" y="3402125"/>
-                  </a:lnTo>
-                  <a:lnTo>
-                    <a:pt x="6203189" y="3397031"/>
-                  </a:lnTo>
-                  <a:lnTo>
-                    <a:pt x="6129429" y="3391620"/>
-                  </a:lnTo>
-                  <a:lnTo>
-                    <a:pt x="6055669" y="3385871"/>
-                  </a:lnTo>
-                  <a:lnTo>
-                    <a:pt x="5981909" y="3379763"/>
-                  </a:lnTo>
-                  <a:lnTo>
-                    <a:pt x="5908149" y="3373274"/>
-                  </a:lnTo>
-                  <a:lnTo>
-                    <a:pt x="5834389" y="3366381"/>
-                  </a:lnTo>
-                  <a:lnTo>
-                    <a:pt x="5760629" y="3359057"/>
-                  </a:lnTo>
-                  <a:lnTo>
-                    <a:pt x="5686869" y="3351275"/>
-                  </a:lnTo>
-                  <a:lnTo>
-                    <a:pt x="5613109" y="3343009"/>
-                  </a:lnTo>
-                  <a:lnTo>
-                    <a:pt x="5539349" y="3334226"/>
-                  </a:lnTo>
-                  <a:lnTo>
-                    <a:pt x="5465589" y="3324896"/>
-                  </a:lnTo>
-                  <a:lnTo>
-                    <a:pt x="5391829" y="3314983"/>
-                  </a:lnTo>
-                  <a:lnTo>
-                    <a:pt x="5318069" y="3304452"/>
-                  </a:lnTo>
-                  <a:lnTo>
-                    <a:pt x="5244309" y="3293263"/>
-                  </a:lnTo>
-                  <a:lnTo>
-                    <a:pt x="5170549" y="3281376"/>
-                  </a:lnTo>
-                  <a:lnTo>
-                    <a:pt x="5096789" y="3268748"/>
-                  </a:lnTo>
-                  <a:lnTo>
-                    <a:pt x="5023029" y="3255331"/>
-                  </a:lnTo>
-                  <a:lnTo>
-                    <a:pt x="4949269" y="3241077"/>
-                  </a:lnTo>
-                  <a:lnTo>
-                    <a:pt x="4875509" y="3225934"/>
-                  </a:lnTo>
-                  <a:lnTo>
-                    <a:pt x="4801749" y="3209845"/>
-                  </a:lnTo>
-                  <a:lnTo>
-                    <a:pt x="4727989" y="3192753"/>
-                  </a:lnTo>
-                  <a:lnTo>
-                    <a:pt x="4654229" y="3174594"/>
-                  </a:lnTo>
-                  <a:lnTo>
-                    <a:pt x="4580469" y="3155302"/>
-                  </a:lnTo>
-                  <a:lnTo>
-                    <a:pt x="4506709" y="3134806"/>
-                  </a:lnTo>
-                  <a:lnTo>
-                    <a:pt x="4432949" y="3113031"/>
-                  </a:lnTo>
-                  <a:lnTo>
-                    <a:pt x="4359189" y="3089897"/>
-                  </a:lnTo>
-                  <a:lnTo>
-                    <a:pt x="4285429" y="3065319"/>
-                  </a:lnTo>
-                  <a:lnTo>
-                    <a:pt x="4211669" y="3039208"/>
-                  </a:lnTo>
-                  <a:lnTo>
-                    <a:pt x="4137909" y="3011468"/>
-                  </a:lnTo>
-                  <a:lnTo>
-                    <a:pt x="4064149" y="2981996"/>
-                  </a:lnTo>
-                  <a:lnTo>
-                    <a:pt x="3990388" y="2950685"/>
-                  </a:lnTo>
-                  <a:lnTo>
-                    <a:pt x="3916628" y="2917420"/>
-                  </a:lnTo>
-                  <a:lnTo>
-                    <a:pt x="3842868" y="2882080"/>
-                  </a:lnTo>
-                  <a:lnTo>
-                    <a:pt x="3769108" y="2844533"/>
-                  </a:lnTo>
-                  <a:lnTo>
-                    <a:pt x="3695348" y="2804644"/>
-                  </a:lnTo>
-                  <a:lnTo>
-                    <a:pt x="3621588" y="2762266"/>
-                  </a:lnTo>
-                  <a:lnTo>
-                    <a:pt x="3547828" y="2717244"/>
-                  </a:lnTo>
-                  <a:lnTo>
-                    <a:pt x="3474068" y="2669411"/>
-                  </a:lnTo>
-                  <a:lnTo>
-                    <a:pt x="3400308" y="2652085"/>
-                  </a:lnTo>
-                  <a:lnTo>
-                    <a:pt x="3326548" y="2648916"/>
-                  </a:lnTo>
-                  <a:lnTo>
-                    <a:pt x="3252788" y="2645735"/>
-                  </a:lnTo>
-                  <a:lnTo>
-                    <a:pt x="3179028" y="2642542"/>
-                  </a:lnTo>
-                  <a:lnTo>
-                    <a:pt x="3105268" y="2639337"/>
-                  </a:lnTo>
-                  <a:lnTo>
-                    <a:pt x="3031508" y="2636120"/>
-                  </a:lnTo>
-                  <a:lnTo>
-                    <a:pt x="2957748" y="2632891"/>
-                  </a:lnTo>
-                  <a:lnTo>
-                    <a:pt x="2883988" y="2629649"/>
-                  </a:lnTo>
-                  <a:lnTo>
-                    <a:pt x="2810228" y="2626395"/>
-                  </a:lnTo>
-                  <a:lnTo>
-                    <a:pt x="2736468" y="2623128"/>
-                  </a:lnTo>
-                  <a:lnTo>
-                    <a:pt x="2662708" y="2619849"/>
-                  </a:lnTo>
-                  <a:lnTo>
-                    <a:pt x="2588948" y="2616557"/>
-                  </a:lnTo>
-                  <a:lnTo>
-                    <a:pt x="2515188" y="2613253"/>
-                  </a:lnTo>
-                  <a:lnTo>
-                    <a:pt x="2441428" y="2609937"/>
-                  </a:lnTo>
-                  <a:lnTo>
-                    <a:pt x="2367668" y="2606607"/>
-                  </a:lnTo>
-                  <a:lnTo>
-                    <a:pt x="2293908" y="2603265"/>
-                  </a:lnTo>
-                  <a:lnTo>
-                    <a:pt x="2220148" y="2599911"/>
-                  </a:lnTo>
-                  <a:lnTo>
-                    <a:pt x="2146388" y="2596543"/>
-                  </a:lnTo>
-                  <a:lnTo>
-                    <a:pt x="2072628" y="2593163"/>
-                  </a:lnTo>
-                  <a:lnTo>
-                    <a:pt x="1998868" y="2589770"/>
-                  </a:lnTo>
-                  <a:lnTo>
-                    <a:pt x="1925108" y="2586364"/>
-                  </a:lnTo>
-                  <a:lnTo>
-                    <a:pt x="1851348" y="2582945"/>
-                  </a:lnTo>
-                  <a:lnTo>
-                    <a:pt x="1777588" y="2579512"/>
-                  </a:lnTo>
-                  <a:lnTo>
-                    <a:pt x="1703828" y="2576067"/>
-                  </a:lnTo>
-                  <a:lnTo>
-                    <a:pt x="1630068" y="2572609"/>
-                  </a:lnTo>
-                  <a:lnTo>
-                    <a:pt x="1556308" y="2569137"/>
-                  </a:lnTo>
-                  <a:lnTo>
-                    <a:pt x="1482548" y="2565653"/>
-                  </a:lnTo>
-                  <a:lnTo>
-                    <a:pt x="1408788" y="2562155"/>
-                  </a:lnTo>
-                  <a:lnTo>
-                    <a:pt x="1335028" y="2558643"/>
-                  </a:lnTo>
-                  <a:lnTo>
-                    <a:pt x="1261268" y="2555119"/>
-                  </a:lnTo>
-                  <a:lnTo>
-                    <a:pt x="1187508" y="2551580"/>
-                  </a:lnTo>
-                  <a:lnTo>
-                    <a:pt x="1113747" y="2548029"/>
-                  </a:lnTo>
-                  <a:lnTo>
-                    <a:pt x="1039987" y="2544464"/>
-                  </a:lnTo>
-                  <a:lnTo>
-                    <a:pt x="966227" y="2540885"/>
-                  </a:lnTo>
-                  <a:lnTo>
-                    <a:pt x="892467" y="2537293"/>
-                  </a:lnTo>
-                  <a:lnTo>
-                    <a:pt x="818707" y="2533686"/>
-                  </a:lnTo>
-                  <a:lnTo>
-                    <a:pt x="744947" y="2530067"/>
-                  </a:lnTo>
-                  <a:lnTo>
-                    <a:pt x="671187" y="2526433"/>
-                  </a:lnTo>
-                  <a:lnTo>
-                    <a:pt x="597427" y="2522786"/>
-                  </a:lnTo>
-                  <a:lnTo>
-                    <a:pt x="523667" y="2519124"/>
-                  </a:lnTo>
-                  <a:lnTo>
-                    <a:pt x="449907" y="2515449"/>
-                  </a:lnTo>
-                  <a:lnTo>
-                    <a:pt x="376147" y="2511760"/>
-                  </a:lnTo>
-                  <a:lnTo>
-                    <a:pt x="302387" y="2508056"/>
-                  </a:lnTo>
-                  <a:lnTo>
-                    <a:pt x="228627" y="2504339"/>
-                  </a:lnTo>
-                  <a:lnTo>
-                    <a:pt x="154867" y="2500607"/>
-                  </a:lnTo>
-                  <a:lnTo>
-                    <a:pt x="81107" y="2496861"/>
-                  </a:lnTo>
-                  <a:lnTo>
-                    <a:pt x="7347" y="2493101"/>
-                  </a:lnTo>
-                  <a:lnTo>
-                    <a:pt x="0" y="2492725"/>
+                    <a:pt x="1718940" y="2384"/>
+                  </a:lnTo>
+                  <a:lnTo>
+                    <a:pt x="1790563" y="206872"/>
+                  </a:lnTo>
+                  <a:lnTo>
+                    <a:pt x="1862185" y="399348"/>
+                  </a:lnTo>
+                  <a:lnTo>
+                    <a:pt x="1933808" y="580519"/>
+                  </a:lnTo>
+                  <a:lnTo>
+                    <a:pt x="2005430" y="751049"/>
+                  </a:lnTo>
+                  <a:lnTo>
+                    <a:pt x="2077053" y="911562"/>
+                  </a:lnTo>
+                  <a:lnTo>
+                    <a:pt x="2148675" y="1062646"/>
+                  </a:lnTo>
+                  <a:lnTo>
+                    <a:pt x="2220298" y="1204857"/>
+                  </a:lnTo>
+                  <a:lnTo>
+                    <a:pt x="2291920" y="1338714"/>
+                  </a:lnTo>
+                  <a:lnTo>
+                    <a:pt x="2363543" y="1464708"/>
+                  </a:lnTo>
+                  <a:lnTo>
+                    <a:pt x="2435165" y="1583302"/>
+                  </a:lnTo>
+                  <a:lnTo>
+                    <a:pt x="2506788" y="1694930"/>
+                  </a:lnTo>
+                  <a:lnTo>
+                    <a:pt x="2578410" y="1800002"/>
+                  </a:lnTo>
+                  <a:lnTo>
+                    <a:pt x="2650033" y="1898901"/>
+                  </a:lnTo>
+                  <a:lnTo>
+                    <a:pt x="2721655" y="1991992"/>
+                  </a:lnTo>
+                  <a:lnTo>
+                    <a:pt x="2793278" y="2079614"/>
+                  </a:lnTo>
+                  <a:lnTo>
+                    <a:pt x="2864901" y="2162090"/>
+                  </a:lnTo>
+                  <a:lnTo>
+                    <a:pt x="2936523" y="2239721"/>
+                  </a:lnTo>
+                  <a:lnTo>
+                    <a:pt x="3008146" y="2312793"/>
+                  </a:lnTo>
+                  <a:lnTo>
+                    <a:pt x="3079768" y="2381572"/>
+                  </a:lnTo>
+                  <a:lnTo>
+                    <a:pt x="3151391" y="2446311"/>
+                  </a:lnTo>
+                  <a:lnTo>
+                    <a:pt x="3223013" y="2507248"/>
+                  </a:lnTo>
+                  <a:lnTo>
+                    <a:pt x="3294636" y="2564606"/>
+                  </a:lnTo>
+                  <a:lnTo>
+                    <a:pt x="3366258" y="2618594"/>
+                  </a:lnTo>
+                  <a:lnTo>
+                    <a:pt x="3437881" y="2655241"/>
+                  </a:lnTo>
+                  <a:lnTo>
+                    <a:pt x="3509503" y="2658386"/>
+                  </a:lnTo>
+                  <a:lnTo>
+                    <a:pt x="3581126" y="2661519"/>
+                  </a:lnTo>
+                  <a:lnTo>
+                    <a:pt x="3652748" y="2664640"/>
+                  </a:lnTo>
+                  <a:lnTo>
+                    <a:pt x="3724371" y="2667749"/>
+                  </a:lnTo>
+                  <a:lnTo>
+                    <a:pt x="3795993" y="2670846"/>
+                  </a:lnTo>
+                  <a:lnTo>
+                    <a:pt x="3867616" y="2673931"/>
+                  </a:lnTo>
+                  <a:lnTo>
+                    <a:pt x="3939238" y="2677005"/>
+                  </a:lnTo>
+                  <a:lnTo>
+                    <a:pt x="4010861" y="2680067"/>
+                  </a:lnTo>
+                  <a:lnTo>
+                    <a:pt x="4082483" y="2683118"/>
+                  </a:lnTo>
+                  <a:lnTo>
+                    <a:pt x="4154106" y="2686157"/>
+                  </a:lnTo>
+                  <a:lnTo>
+                    <a:pt x="4225729" y="2689184"/>
+                  </a:lnTo>
+                  <a:lnTo>
+                    <a:pt x="4297351" y="2692200"/>
+                  </a:lnTo>
+                  <a:lnTo>
+                    <a:pt x="4368974" y="2695204"/>
+                  </a:lnTo>
+                  <a:lnTo>
+                    <a:pt x="4440596" y="2698197"/>
+                  </a:lnTo>
+                  <a:lnTo>
+                    <a:pt x="4512219" y="2701179"/>
+                  </a:lnTo>
+                  <a:lnTo>
+                    <a:pt x="4583841" y="2704149"/>
+                  </a:lnTo>
+                  <a:lnTo>
+                    <a:pt x="4655464" y="2707108"/>
+                  </a:lnTo>
+                  <a:lnTo>
+                    <a:pt x="4727086" y="2710056"/>
+                  </a:lnTo>
+                  <a:lnTo>
+                    <a:pt x="4798709" y="2712993"/>
+                  </a:lnTo>
+                  <a:lnTo>
+                    <a:pt x="4870331" y="2715918"/>
+                  </a:lnTo>
+                  <a:lnTo>
+                    <a:pt x="4941954" y="2718833"/>
+                  </a:lnTo>
+                  <a:lnTo>
+                    <a:pt x="5013576" y="2721736"/>
+                  </a:lnTo>
+                  <a:lnTo>
+                    <a:pt x="5085199" y="2724628"/>
+                  </a:lnTo>
+                  <a:lnTo>
+                    <a:pt x="5156821" y="2727510"/>
+                  </a:lnTo>
+                  <a:lnTo>
+                    <a:pt x="5228444" y="2730380"/>
+                  </a:lnTo>
+                  <a:lnTo>
+                    <a:pt x="5300066" y="2733239"/>
+                  </a:lnTo>
+                  <a:lnTo>
+                    <a:pt x="5371689" y="2736088"/>
+                  </a:lnTo>
+                  <a:lnTo>
+                    <a:pt x="5443311" y="2738926"/>
+                  </a:lnTo>
+                  <a:lnTo>
+                    <a:pt x="5514934" y="2741753"/>
+                  </a:lnTo>
+                  <a:lnTo>
+                    <a:pt x="5586557" y="2744569"/>
+                  </a:lnTo>
+                  <a:lnTo>
+                    <a:pt x="5658179" y="2747375"/>
+                  </a:lnTo>
+                  <a:lnTo>
+                    <a:pt x="5729802" y="2750170"/>
+                  </a:lnTo>
+                  <a:lnTo>
+                    <a:pt x="5801424" y="2752954"/>
+                  </a:lnTo>
+                  <a:lnTo>
+                    <a:pt x="5873047" y="2755728"/>
+                  </a:lnTo>
+                  <a:lnTo>
+                    <a:pt x="5944669" y="2758491"/>
+                  </a:lnTo>
+                  <a:lnTo>
+                    <a:pt x="6016292" y="2761244"/>
+                  </a:lnTo>
+                  <a:lnTo>
+                    <a:pt x="6087914" y="2763987"/>
+                  </a:lnTo>
+                  <a:lnTo>
+                    <a:pt x="6159537" y="2766718"/>
+                  </a:lnTo>
+                  <a:lnTo>
+                    <a:pt x="6231159" y="2769440"/>
+                  </a:lnTo>
+                  <a:lnTo>
+                    <a:pt x="6302782" y="2772151"/>
+                  </a:lnTo>
+                  <a:lnTo>
+                    <a:pt x="6374404" y="2774852"/>
+                  </a:lnTo>
+                  <a:lnTo>
+                    <a:pt x="6446027" y="2777543"/>
+                  </a:lnTo>
+                  <a:lnTo>
+                    <a:pt x="6517649" y="2780223"/>
+                  </a:lnTo>
+                  <a:lnTo>
+                    <a:pt x="6589272" y="2782894"/>
+                  </a:lnTo>
+                  <a:lnTo>
+                    <a:pt x="6660894" y="2785554"/>
+                  </a:lnTo>
+                  <a:lnTo>
+                    <a:pt x="6732517" y="2788204"/>
+                  </a:lnTo>
+                  <a:lnTo>
+                    <a:pt x="6804139" y="2790844"/>
+                  </a:lnTo>
+                  <a:lnTo>
+                    <a:pt x="6875762" y="2793474"/>
+                  </a:lnTo>
+                  <a:lnTo>
+                    <a:pt x="6947385" y="2796094"/>
+                  </a:lnTo>
+                  <a:lnTo>
+                    <a:pt x="7019007" y="2798704"/>
+                  </a:lnTo>
+                  <a:lnTo>
+                    <a:pt x="7090630" y="2801304"/>
+                  </a:lnTo>
+                  <a:lnTo>
+                    <a:pt x="7090630" y="3446589"/>
+                  </a:lnTo>
+                  <a:lnTo>
+                    <a:pt x="7019007" y="3444270"/>
+                  </a:lnTo>
+                  <a:lnTo>
+                    <a:pt x="6947385" y="3441807"/>
+                  </a:lnTo>
+                  <a:lnTo>
+                    <a:pt x="6875762" y="3439190"/>
+                  </a:lnTo>
+                  <a:lnTo>
+                    <a:pt x="6804139" y="3436409"/>
+                  </a:lnTo>
+                  <a:lnTo>
+                    <a:pt x="6732517" y="3433455"/>
+                  </a:lnTo>
+                  <a:lnTo>
+                    <a:pt x="6660894" y="3430317"/>
+                  </a:lnTo>
+                  <a:lnTo>
+                    <a:pt x="6589272" y="3426983"/>
+                  </a:lnTo>
+                  <a:lnTo>
+                    <a:pt x="6517649" y="3423441"/>
+                  </a:lnTo>
+                  <a:lnTo>
+                    <a:pt x="6446027" y="3419677"/>
+                  </a:lnTo>
+                  <a:lnTo>
+                    <a:pt x="6374404" y="3415679"/>
+                  </a:lnTo>
+                  <a:lnTo>
+                    <a:pt x="6302782" y="3411432"/>
+                  </a:lnTo>
+                  <a:lnTo>
+                    <a:pt x="6231159" y="3406919"/>
+                  </a:lnTo>
+                  <a:lnTo>
+                    <a:pt x="6159537" y="3402125"/>
+                  </a:lnTo>
+                  <a:lnTo>
+                    <a:pt x="6087914" y="3397031"/>
+                  </a:lnTo>
+                  <a:lnTo>
+                    <a:pt x="6016292" y="3391620"/>
+                  </a:lnTo>
+                  <a:lnTo>
+                    <a:pt x="5944669" y="3385871"/>
+                  </a:lnTo>
+                  <a:lnTo>
+                    <a:pt x="5873047" y="3379763"/>
+                  </a:lnTo>
+                  <a:lnTo>
+                    <a:pt x="5801424" y="3373274"/>
+                  </a:lnTo>
+                  <a:lnTo>
+                    <a:pt x="5729802" y="3366381"/>
+                  </a:lnTo>
+                  <a:lnTo>
+                    <a:pt x="5658179" y="3359057"/>
+                  </a:lnTo>
+                  <a:lnTo>
+                    <a:pt x="5586557" y="3351275"/>
+                  </a:lnTo>
+                  <a:lnTo>
+                    <a:pt x="5514934" y="3343009"/>
+                  </a:lnTo>
+                  <a:lnTo>
+                    <a:pt x="5443311" y="3334226"/>
+                  </a:lnTo>
+                  <a:lnTo>
+                    <a:pt x="5371689" y="3324896"/>
+                  </a:lnTo>
+                  <a:lnTo>
+                    <a:pt x="5300066" y="3314983"/>
+                  </a:lnTo>
+                  <a:lnTo>
+                    <a:pt x="5228444" y="3304452"/>
+                  </a:lnTo>
+                  <a:lnTo>
+                    <a:pt x="5156821" y="3293263"/>
+                  </a:lnTo>
+                  <a:lnTo>
+                    <a:pt x="5085199" y="3281376"/>
+                  </a:lnTo>
+                  <a:lnTo>
+                    <a:pt x="5013576" y="3268748"/>
+                  </a:lnTo>
+                  <a:lnTo>
+                    <a:pt x="4941954" y="3255331"/>
+                  </a:lnTo>
+                  <a:lnTo>
+                    <a:pt x="4870331" y="3241077"/>
+                  </a:lnTo>
+                  <a:lnTo>
+                    <a:pt x="4798709" y="3225934"/>
+                  </a:lnTo>
+                  <a:lnTo>
+                    <a:pt x="4727086" y="3209845"/>
+                  </a:lnTo>
+                  <a:lnTo>
+                    <a:pt x="4655464" y="3192753"/>
+                  </a:lnTo>
+                  <a:lnTo>
+                    <a:pt x="4583841" y="3174594"/>
+                  </a:lnTo>
+                  <a:lnTo>
+                    <a:pt x="4512219" y="3155302"/>
+                  </a:lnTo>
+                  <a:lnTo>
+                    <a:pt x="4440596" y="3134806"/>
+                  </a:lnTo>
+                  <a:lnTo>
+                    <a:pt x="4368974" y="3113031"/>
+                  </a:lnTo>
+                  <a:lnTo>
+                    <a:pt x="4297351" y="3089897"/>
+                  </a:lnTo>
+                  <a:lnTo>
+                    <a:pt x="4225729" y="3065319"/>
+                  </a:lnTo>
+                  <a:lnTo>
+                    <a:pt x="4154106" y="3039208"/>
+                  </a:lnTo>
+                  <a:lnTo>
+                    <a:pt x="4082483" y="3011468"/>
+                  </a:lnTo>
+                  <a:lnTo>
+                    <a:pt x="4010861" y="2981996"/>
+                  </a:lnTo>
+                  <a:lnTo>
+                    <a:pt x="3939238" y="2950685"/>
+                  </a:lnTo>
+                  <a:lnTo>
+                    <a:pt x="3867616" y="2917420"/>
+                  </a:lnTo>
+                  <a:lnTo>
+                    <a:pt x="3795993" y="2882080"/>
+                  </a:lnTo>
+                  <a:lnTo>
+                    <a:pt x="3724371" y="2844533"/>
+                  </a:lnTo>
+                  <a:lnTo>
+                    <a:pt x="3652748" y="2804644"/>
+                  </a:lnTo>
+                  <a:lnTo>
+                    <a:pt x="3581126" y="2762266"/>
+                  </a:lnTo>
+                  <a:lnTo>
+                    <a:pt x="3509503" y="2717244"/>
+                  </a:lnTo>
+                  <a:lnTo>
+                    <a:pt x="3437881" y="2669411"/>
+                  </a:lnTo>
+                  <a:lnTo>
+                    <a:pt x="3366258" y="2652085"/>
+                  </a:lnTo>
+                  <a:lnTo>
+                    <a:pt x="3294636" y="2648916"/>
+                  </a:lnTo>
+                  <a:lnTo>
+                    <a:pt x="3223013" y="2645735"/>
+                  </a:lnTo>
+                  <a:lnTo>
+                    <a:pt x="3151391" y="2642542"/>
+                  </a:lnTo>
+                  <a:lnTo>
+                    <a:pt x="3079768" y="2639337"/>
+                  </a:lnTo>
+                  <a:lnTo>
+                    <a:pt x="3008146" y="2636120"/>
+                  </a:lnTo>
+                  <a:lnTo>
+                    <a:pt x="2936523" y="2632891"/>
+                  </a:lnTo>
+                  <a:lnTo>
+                    <a:pt x="2864901" y="2629649"/>
+                  </a:lnTo>
+                  <a:lnTo>
+                    <a:pt x="2793278" y="2626395"/>
+                  </a:lnTo>
+                  <a:lnTo>
+                    <a:pt x="2721655" y="2623128"/>
+                  </a:lnTo>
+                  <a:lnTo>
+                    <a:pt x="2650033" y="2619849"/>
+                  </a:lnTo>
+                  <a:lnTo>
+                    <a:pt x="2578410" y="2616557"/>
+                  </a:lnTo>
+                  <a:lnTo>
+                    <a:pt x="2506788" y="2613253"/>
+                  </a:lnTo>
+                  <a:lnTo>
+                    <a:pt x="2435165" y="2609937"/>
+                  </a:lnTo>
+                  <a:lnTo>
+                    <a:pt x="2363543" y="2606607"/>
+                  </a:lnTo>
+                  <a:lnTo>
+                    <a:pt x="2291920" y="2603265"/>
+                  </a:lnTo>
+                  <a:lnTo>
+                    <a:pt x="2220298" y="2599911"/>
+                  </a:lnTo>
+                  <a:lnTo>
+                    <a:pt x="2148675" y="2596543"/>
+                  </a:lnTo>
+                  <a:lnTo>
+                    <a:pt x="2077053" y="2593163"/>
+                  </a:lnTo>
+                  <a:lnTo>
+                    <a:pt x="2005430" y="2589770"/>
+                  </a:lnTo>
+                  <a:lnTo>
+                    <a:pt x="1933808" y="2586364"/>
+                  </a:lnTo>
+                  <a:lnTo>
+                    <a:pt x="1862185" y="2582945"/>
+                  </a:lnTo>
+                  <a:lnTo>
+                    <a:pt x="1790563" y="2579512"/>
+                  </a:lnTo>
+                  <a:lnTo>
+                    <a:pt x="1718940" y="2576067"/>
+                  </a:lnTo>
+                  <a:lnTo>
+                    <a:pt x="1647318" y="2572609"/>
+                  </a:lnTo>
+                  <a:lnTo>
+                    <a:pt x="1575695" y="2569137"/>
+                  </a:lnTo>
+                  <a:lnTo>
+                    <a:pt x="1504073" y="2565653"/>
+                  </a:lnTo>
+                  <a:lnTo>
+                    <a:pt x="1432450" y="2562155"/>
+                  </a:lnTo>
+                  <a:lnTo>
+                    <a:pt x="1360827" y="2558643"/>
+                  </a:lnTo>
+                  <a:lnTo>
+                    <a:pt x="1289205" y="2555119"/>
+                  </a:lnTo>
+                  <a:lnTo>
+                    <a:pt x="1217582" y="2551580"/>
+                  </a:lnTo>
+                  <a:lnTo>
+                    <a:pt x="1145960" y="2548029"/>
+                  </a:lnTo>
+                  <a:lnTo>
+                    <a:pt x="1074337" y="2544464"/>
+                  </a:lnTo>
+                  <a:lnTo>
+                    <a:pt x="1002715" y="2540885"/>
+                  </a:lnTo>
+                  <a:lnTo>
+                    <a:pt x="931092" y="2537293"/>
+                  </a:lnTo>
+                  <a:lnTo>
+                    <a:pt x="859470" y="2533686"/>
+                  </a:lnTo>
+                  <a:lnTo>
+                    <a:pt x="787847" y="2530067"/>
+                  </a:lnTo>
+                  <a:lnTo>
+                    <a:pt x="716225" y="2526433"/>
+                  </a:lnTo>
+                  <a:lnTo>
+                    <a:pt x="644602" y="2522786"/>
+                  </a:lnTo>
+                  <a:lnTo>
+                    <a:pt x="572980" y="2519124"/>
+                  </a:lnTo>
+                  <a:lnTo>
+                    <a:pt x="501357" y="2515449"/>
+                  </a:lnTo>
+                  <a:lnTo>
+                    <a:pt x="429735" y="2511760"/>
+                  </a:lnTo>
+                  <a:lnTo>
+                    <a:pt x="358112" y="2508056"/>
+                  </a:lnTo>
+                  <a:lnTo>
+                    <a:pt x="286490" y="2504339"/>
+                  </a:lnTo>
+                  <a:lnTo>
+                    <a:pt x="214867" y="2500607"/>
+                  </a:lnTo>
+                  <a:lnTo>
+                    <a:pt x="143245" y="2496861"/>
+                  </a:lnTo>
+                  <a:lnTo>
+                    <a:pt x="71622" y="2493101"/>
+                  </a:lnTo>
+                  <a:lnTo>
+                    <a:pt x="0" y="2489327"/>
                   </a:lnTo>
                   <a:close/>
                 </a:path>
@@ -3558,249 +3515,574 @@
         </p:sp>
         <p:sp>
           <p:nvSpPr>
+            <p:cNvPr id="21" name="pl21"/>
+            <p:cNvSpPr/>
+            <p:nvPr/>
+          </p:nvSpPr>
+          <p:spPr>
+            <a:xfrm>
+              <a:off x="2890203" y="2073503"/>
+              <a:ext cx="5372475" cy="2801304"/>
+            </a:xfrm>
+            <a:custGeom>
+              <a:avLst/>
+              <a:pathLst>
+                <a:path w="5372475" h="2801304">
+                  <a:moveTo>
+                    <a:pt x="0" y="0"/>
+                  </a:moveTo>
+                  <a:lnTo>
+                    <a:pt x="786" y="2384"/>
+                  </a:lnTo>
+                  <a:lnTo>
+                    <a:pt x="72408" y="206872"/>
+                  </a:lnTo>
+                  <a:lnTo>
+                    <a:pt x="144031" y="399348"/>
+                  </a:lnTo>
+                  <a:lnTo>
+                    <a:pt x="215653" y="580519"/>
+                  </a:lnTo>
+                  <a:lnTo>
+                    <a:pt x="287276" y="751049"/>
+                  </a:lnTo>
+                  <a:lnTo>
+                    <a:pt x="358898" y="911562"/>
+                  </a:lnTo>
+                  <a:lnTo>
+                    <a:pt x="430521" y="1062646"/>
+                  </a:lnTo>
+                  <a:lnTo>
+                    <a:pt x="502143" y="1204857"/>
+                  </a:lnTo>
+                  <a:lnTo>
+                    <a:pt x="573766" y="1338714"/>
+                  </a:lnTo>
+                  <a:lnTo>
+                    <a:pt x="645388" y="1464708"/>
+                  </a:lnTo>
+                  <a:lnTo>
+                    <a:pt x="717011" y="1583302"/>
+                  </a:lnTo>
+                  <a:lnTo>
+                    <a:pt x="788633" y="1694930"/>
+                  </a:lnTo>
+                  <a:lnTo>
+                    <a:pt x="860256" y="1800002"/>
+                  </a:lnTo>
+                  <a:lnTo>
+                    <a:pt x="931878" y="1898901"/>
+                  </a:lnTo>
+                  <a:lnTo>
+                    <a:pt x="1003501" y="1991992"/>
+                  </a:lnTo>
+                  <a:lnTo>
+                    <a:pt x="1075123" y="2079614"/>
+                  </a:lnTo>
+                  <a:lnTo>
+                    <a:pt x="1146746" y="2162090"/>
+                  </a:lnTo>
+                  <a:lnTo>
+                    <a:pt x="1218369" y="2239721"/>
+                  </a:lnTo>
+                  <a:lnTo>
+                    <a:pt x="1289991" y="2312793"/>
+                  </a:lnTo>
+                  <a:lnTo>
+                    <a:pt x="1361614" y="2381572"/>
+                  </a:lnTo>
+                  <a:lnTo>
+                    <a:pt x="1433236" y="2446311"/>
+                  </a:lnTo>
+                  <a:lnTo>
+                    <a:pt x="1504859" y="2507248"/>
+                  </a:lnTo>
+                  <a:lnTo>
+                    <a:pt x="1576481" y="2564606"/>
+                  </a:lnTo>
+                  <a:lnTo>
+                    <a:pt x="1648104" y="2618594"/>
+                  </a:lnTo>
+                  <a:lnTo>
+                    <a:pt x="1719726" y="2655241"/>
+                  </a:lnTo>
+                  <a:lnTo>
+                    <a:pt x="1791349" y="2658386"/>
+                  </a:lnTo>
+                  <a:lnTo>
+                    <a:pt x="1862971" y="2661519"/>
+                  </a:lnTo>
+                  <a:lnTo>
+                    <a:pt x="1934594" y="2664640"/>
+                  </a:lnTo>
+                  <a:lnTo>
+                    <a:pt x="2006216" y="2667749"/>
+                  </a:lnTo>
+                  <a:lnTo>
+                    <a:pt x="2077839" y="2670846"/>
+                  </a:lnTo>
+                  <a:lnTo>
+                    <a:pt x="2149461" y="2673931"/>
+                  </a:lnTo>
+                  <a:lnTo>
+                    <a:pt x="2221084" y="2677005"/>
+                  </a:lnTo>
+                  <a:lnTo>
+                    <a:pt x="2292706" y="2680067"/>
+                  </a:lnTo>
+                  <a:lnTo>
+                    <a:pt x="2364329" y="2683118"/>
+                  </a:lnTo>
+                  <a:lnTo>
+                    <a:pt x="2435951" y="2686157"/>
+                  </a:lnTo>
+                  <a:lnTo>
+                    <a:pt x="2507574" y="2689184"/>
+                  </a:lnTo>
+                  <a:lnTo>
+                    <a:pt x="2579197" y="2692200"/>
+                  </a:lnTo>
+                  <a:lnTo>
+                    <a:pt x="2650819" y="2695204"/>
+                  </a:lnTo>
+                  <a:lnTo>
+                    <a:pt x="2722442" y="2698197"/>
+                  </a:lnTo>
+                  <a:lnTo>
+                    <a:pt x="2794064" y="2701179"/>
+                  </a:lnTo>
+                  <a:lnTo>
+                    <a:pt x="2865687" y="2704149"/>
+                  </a:lnTo>
+                  <a:lnTo>
+                    <a:pt x="2937309" y="2707108"/>
+                  </a:lnTo>
+                  <a:lnTo>
+                    <a:pt x="3008932" y="2710056"/>
+                  </a:lnTo>
+                  <a:lnTo>
+                    <a:pt x="3080554" y="2712993"/>
+                  </a:lnTo>
+                  <a:lnTo>
+                    <a:pt x="3152177" y="2715918"/>
+                  </a:lnTo>
+                  <a:lnTo>
+                    <a:pt x="3223799" y="2718833"/>
+                  </a:lnTo>
+                  <a:lnTo>
+                    <a:pt x="3295422" y="2721736"/>
+                  </a:lnTo>
+                  <a:lnTo>
+                    <a:pt x="3367044" y="2724628"/>
+                  </a:lnTo>
+                  <a:lnTo>
+                    <a:pt x="3438667" y="2727510"/>
+                  </a:lnTo>
+                  <a:lnTo>
+                    <a:pt x="3510289" y="2730380"/>
+                  </a:lnTo>
+                  <a:lnTo>
+                    <a:pt x="3581912" y="2733239"/>
+                  </a:lnTo>
+                  <a:lnTo>
+                    <a:pt x="3653534" y="2736088"/>
+                  </a:lnTo>
+                  <a:lnTo>
+                    <a:pt x="3725157" y="2738926"/>
+                  </a:lnTo>
+                  <a:lnTo>
+                    <a:pt x="3796779" y="2741753"/>
+                  </a:lnTo>
+                  <a:lnTo>
+                    <a:pt x="3868402" y="2744569"/>
+                  </a:lnTo>
+                  <a:lnTo>
+                    <a:pt x="3940024" y="2747375"/>
+                  </a:lnTo>
+                  <a:lnTo>
+                    <a:pt x="4011647" y="2750170"/>
+                  </a:lnTo>
+                  <a:lnTo>
+                    <a:pt x="4083270" y="2752954"/>
+                  </a:lnTo>
+                  <a:lnTo>
+                    <a:pt x="4154892" y="2755728"/>
+                  </a:lnTo>
+                  <a:lnTo>
+                    <a:pt x="4226515" y="2758491"/>
+                  </a:lnTo>
+                  <a:lnTo>
+                    <a:pt x="4298137" y="2761244"/>
+                  </a:lnTo>
+                  <a:lnTo>
+                    <a:pt x="4369760" y="2763987"/>
+                  </a:lnTo>
+                  <a:lnTo>
+                    <a:pt x="4441382" y="2766718"/>
+                  </a:lnTo>
+                  <a:lnTo>
+                    <a:pt x="4513005" y="2769440"/>
+                  </a:lnTo>
+                  <a:lnTo>
+                    <a:pt x="4584627" y="2772151"/>
+                  </a:lnTo>
+                  <a:lnTo>
+                    <a:pt x="4656250" y="2774852"/>
+                  </a:lnTo>
+                  <a:lnTo>
+                    <a:pt x="4727872" y="2777543"/>
+                  </a:lnTo>
+                  <a:lnTo>
+                    <a:pt x="4799495" y="2780223"/>
+                  </a:lnTo>
+                  <a:lnTo>
+                    <a:pt x="4871117" y="2782894"/>
+                  </a:lnTo>
+                  <a:lnTo>
+                    <a:pt x="4942740" y="2785554"/>
+                  </a:lnTo>
+                  <a:lnTo>
+                    <a:pt x="5014362" y="2788204"/>
+                  </a:lnTo>
+                  <a:lnTo>
+                    <a:pt x="5085985" y="2790844"/>
+                  </a:lnTo>
+                  <a:lnTo>
+                    <a:pt x="5157607" y="2793474"/>
+                  </a:lnTo>
+                  <a:lnTo>
+                    <a:pt x="5229230" y="2796094"/>
+                  </a:lnTo>
+                  <a:lnTo>
+                    <a:pt x="5300852" y="2798704"/>
+                  </a:lnTo>
+                  <a:lnTo>
+                    <a:pt x="5372475" y="2801304"/>
+                  </a:lnTo>
+                </a:path>
+              </a:pathLst>
+            </a:custGeom>
+          </p:spPr>
+          <p:txBody>
+            <a:bodyPr/>
+            <a:lstStyle/>
+            <a:p/>
+          </p:txBody>
+        </p:sp>
+        <p:sp>
+          <p:nvSpPr>
             <p:cNvPr id="22" name="pl22"/>
             <p:cNvSpPr/>
             <p:nvPr/>
           </p:nvSpPr>
           <p:spPr>
             <a:xfrm>
-              <a:off x="2520536" y="2073503"/>
-              <a:ext cx="5532811" cy="2801304"/>
+              <a:off x="1172049" y="4562830"/>
+              <a:ext cx="7090630" cy="957262"/>
             </a:xfrm>
             <a:custGeom>
               <a:avLst/>
               <a:pathLst>
-                <a:path w="5532811" h="2801304">
+                <a:path w="7090630" h="957262">
                   <a:moveTo>
+                    <a:pt x="7090630" y="957262"/>
+                  </a:moveTo>
+                  <a:lnTo>
+                    <a:pt x="7019007" y="954943"/>
+                  </a:lnTo>
+                  <a:lnTo>
+                    <a:pt x="6947385" y="952480"/>
+                  </a:lnTo>
+                  <a:lnTo>
+                    <a:pt x="6875762" y="949863"/>
+                  </a:lnTo>
+                  <a:lnTo>
+                    <a:pt x="6804139" y="947082"/>
+                  </a:lnTo>
+                  <a:lnTo>
+                    <a:pt x="6732517" y="944128"/>
+                  </a:lnTo>
+                  <a:lnTo>
+                    <a:pt x="6660894" y="940990"/>
+                  </a:lnTo>
+                  <a:lnTo>
+                    <a:pt x="6589272" y="937656"/>
+                  </a:lnTo>
+                  <a:lnTo>
+                    <a:pt x="6517649" y="934113"/>
+                  </a:lnTo>
+                  <a:lnTo>
+                    <a:pt x="6446027" y="930350"/>
+                  </a:lnTo>
+                  <a:lnTo>
+                    <a:pt x="6374404" y="926352"/>
+                  </a:lnTo>
+                  <a:lnTo>
+                    <a:pt x="6302782" y="922104"/>
+                  </a:lnTo>
+                  <a:lnTo>
+                    <a:pt x="6231159" y="917592"/>
+                  </a:lnTo>
+                  <a:lnTo>
+                    <a:pt x="6159537" y="912797"/>
+                  </a:lnTo>
+                  <a:lnTo>
+                    <a:pt x="6087914" y="907704"/>
+                  </a:lnTo>
+                  <a:lnTo>
+                    <a:pt x="6016292" y="902293"/>
+                  </a:lnTo>
+                  <a:lnTo>
+                    <a:pt x="5944669" y="896544"/>
+                  </a:lnTo>
+                  <a:lnTo>
+                    <a:pt x="5873047" y="890436"/>
+                  </a:lnTo>
+                  <a:lnTo>
+                    <a:pt x="5801424" y="883947"/>
+                  </a:lnTo>
+                  <a:lnTo>
+                    <a:pt x="5729802" y="877053"/>
+                  </a:lnTo>
+                  <a:lnTo>
+                    <a:pt x="5658179" y="869729"/>
+                  </a:lnTo>
+                  <a:lnTo>
+                    <a:pt x="5586557" y="861948"/>
+                  </a:lnTo>
+                  <a:lnTo>
+                    <a:pt x="5514934" y="853681"/>
+                  </a:lnTo>
+                  <a:lnTo>
+                    <a:pt x="5443311" y="844899"/>
+                  </a:lnTo>
+                  <a:lnTo>
+                    <a:pt x="5371689" y="835568"/>
+                  </a:lnTo>
+                  <a:lnTo>
+                    <a:pt x="5300066" y="825656"/>
+                  </a:lnTo>
+                  <a:lnTo>
+                    <a:pt x="5228444" y="815124"/>
+                  </a:lnTo>
+                  <a:lnTo>
+                    <a:pt x="5156821" y="803936"/>
+                  </a:lnTo>
+                  <a:lnTo>
+                    <a:pt x="5085199" y="792049"/>
+                  </a:lnTo>
+                  <a:lnTo>
+                    <a:pt x="5013576" y="779420"/>
+                  </a:lnTo>
+                  <a:lnTo>
+                    <a:pt x="4941954" y="766004"/>
+                  </a:lnTo>
+                  <a:lnTo>
+                    <a:pt x="4870331" y="751750"/>
+                  </a:lnTo>
+                  <a:lnTo>
+                    <a:pt x="4798709" y="736606"/>
+                  </a:lnTo>
+                  <a:lnTo>
+                    <a:pt x="4727086" y="720518"/>
+                  </a:lnTo>
+                  <a:lnTo>
+                    <a:pt x="4655464" y="703426"/>
+                  </a:lnTo>
+                  <a:lnTo>
+                    <a:pt x="4583841" y="685267"/>
+                  </a:lnTo>
+                  <a:lnTo>
+                    <a:pt x="4512219" y="665975"/>
+                  </a:lnTo>
+                  <a:lnTo>
+                    <a:pt x="4440596" y="645479"/>
+                  </a:lnTo>
+                  <a:lnTo>
+                    <a:pt x="4368974" y="623704"/>
+                  </a:lnTo>
+                  <a:lnTo>
+                    <a:pt x="4297351" y="600570"/>
+                  </a:lnTo>
+                  <a:lnTo>
+                    <a:pt x="4225729" y="575992"/>
+                  </a:lnTo>
+                  <a:lnTo>
+                    <a:pt x="4154106" y="549881"/>
+                  </a:lnTo>
+                  <a:lnTo>
+                    <a:pt x="4082483" y="522140"/>
+                  </a:lnTo>
+                  <a:lnTo>
+                    <a:pt x="4010861" y="492668"/>
+                  </a:lnTo>
+                  <a:lnTo>
+                    <a:pt x="3939238" y="461358"/>
+                  </a:lnTo>
+                  <a:lnTo>
+                    <a:pt x="3867616" y="428093"/>
+                  </a:lnTo>
+                  <a:lnTo>
+                    <a:pt x="3795993" y="392752"/>
+                  </a:lnTo>
+                  <a:lnTo>
+                    <a:pt x="3724371" y="355206"/>
+                  </a:lnTo>
+                  <a:lnTo>
+                    <a:pt x="3652748" y="315317"/>
+                  </a:lnTo>
+                  <a:lnTo>
+                    <a:pt x="3581126" y="272939"/>
+                  </a:lnTo>
+                  <a:lnTo>
+                    <a:pt x="3509503" y="227916"/>
+                  </a:lnTo>
+                  <a:lnTo>
+                    <a:pt x="3437881" y="180084"/>
+                  </a:lnTo>
+                  <a:lnTo>
+                    <a:pt x="3366258" y="162757"/>
+                  </a:lnTo>
+                  <a:lnTo>
+                    <a:pt x="3294636" y="159589"/>
+                  </a:lnTo>
+                  <a:lnTo>
+                    <a:pt x="3223013" y="156408"/>
+                  </a:lnTo>
+                  <a:lnTo>
+                    <a:pt x="3151391" y="153215"/>
+                  </a:lnTo>
+                  <a:lnTo>
+                    <a:pt x="3079768" y="150010"/>
+                  </a:lnTo>
+                  <a:lnTo>
+                    <a:pt x="3008146" y="146793"/>
+                  </a:lnTo>
+                  <a:lnTo>
+                    <a:pt x="2936523" y="143563"/>
+                  </a:lnTo>
+                  <a:lnTo>
+                    <a:pt x="2864901" y="140321"/>
+                  </a:lnTo>
+                  <a:lnTo>
+                    <a:pt x="2793278" y="137067"/>
+                  </a:lnTo>
+                  <a:lnTo>
+                    <a:pt x="2721655" y="133801"/>
+                  </a:lnTo>
+                  <a:lnTo>
+                    <a:pt x="2650033" y="130522"/>
+                  </a:lnTo>
+                  <a:lnTo>
+                    <a:pt x="2578410" y="127230"/>
+                  </a:lnTo>
+                  <a:lnTo>
+                    <a:pt x="2506788" y="123926"/>
+                  </a:lnTo>
+                  <a:lnTo>
+                    <a:pt x="2435165" y="120609"/>
+                  </a:lnTo>
+                  <a:lnTo>
+                    <a:pt x="2363543" y="117280"/>
+                  </a:lnTo>
+                  <a:lnTo>
+                    <a:pt x="2291920" y="113938"/>
+                  </a:lnTo>
+                  <a:lnTo>
+                    <a:pt x="2220298" y="110583"/>
+                  </a:lnTo>
+                  <a:lnTo>
+                    <a:pt x="2148675" y="107216"/>
+                  </a:lnTo>
+                  <a:lnTo>
+                    <a:pt x="2077053" y="103836"/>
+                  </a:lnTo>
+                  <a:lnTo>
+                    <a:pt x="2005430" y="100442"/>
+                  </a:lnTo>
+                  <a:lnTo>
+                    <a:pt x="1933808" y="97036"/>
+                  </a:lnTo>
+                  <a:lnTo>
+                    <a:pt x="1862185" y="93617"/>
+                  </a:lnTo>
+                  <a:lnTo>
+                    <a:pt x="1790563" y="90185"/>
+                  </a:lnTo>
+                  <a:lnTo>
+                    <a:pt x="1718940" y="86740"/>
+                  </a:lnTo>
+                  <a:lnTo>
+                    <a:pt x="1647318" y="83282"/>
+                  </a:lnTo>
+                  <a:lnTo>
+                    <a:pt x="1575695" y="79810"/>
+                  </a:lnTo>
+                  <a:lnTo>
+                    <a:pt x="1504073" y="76325"/>
+                  </a:lnTo>
+                  <a:lnTo>
+                    <a:pt x="1432450" y="72827"/>
+                  </a:lnTo>
+                  <a:lnTo>
+                    <a:pt x="1360827" y="69316"/>
+                  </a:lnTo>
+                  <a:lnTo>
+                    <a:pt x="1289205" y="65791"/>
+                  </a:lnTo>
+                  <a:lnTo>
+                    <a:pt x="1217582" y="62253"/>
+                  </a:lnTo>
+                  <a:lnTo>
+                    <a:pt x="1145960" y="58701"/>
+                  </a:lnTo>
+                  <a:lnTo>
+                    <a:pt x="1074337" y="55136"/>
+                  </a:lnTo>
+                  <a:lnTo>
+                    <a:pt x="1002715" y="51558"/>
+                  </a:lnTo>
+                  <a:lnTo>
+                    <a:pt x="931092" y="47965"/>
+                  </a:lnTo>
+                  <a:lnTo>
+                    <a:pt x="859470" y="44359"/>
+                  </a:lnTo>
+                  <a:lnTo>
+                    <a:pt x="787847" y="40739"/>
+                  </a:lnTo>
+                  <a:lnTo>
+                    <a:pt x="716225" y="37106"/>
+                  </a:lnTo>
+                  <a:lnTo>
+                    <a:pt x="644602" y="33458"/>
+                  </a:lnTo>
+                  <a:lnTo>
+                    <a:pt x="572980" y="29797"/>
+                  </a:lnTo>
+                  <a:lnTo>
+                    <a:pt x="501357" y="26122"/>
+                  </a:lnTo>
+                  <a:lnTo>
+                    <a:pt x="429735" y="22432"/>
+                  </a:lnTo>
+                  <a:lnTo>
+                    <a:pt x="358112" y="18729"/>
+                  </a:lnTo>
+                  <a:lnTo>
+                    <a:pt x="286490" y="15012"/>
+                  </a:lnTo>
+                  <a:lnTo>
+                    <a:pt x="214867" y="11280"/>
+                  </a:lnTo>
+                  <a:lnTo>
+                    <a:pt x="143245" y="7534"/>
+                  </a:lnTo>
+                  <a:lnTo>
+                    <a:pt x="71622" y="3774"/>
+                  </a:lnTo>
+                  <a:lnTo>
                     <a:pt x="0" y="0"/>
-                  </a:moveTo>
-                  <a:lnTo>
-                    <a:pt x="809" y="2384"/>
-                  </a:lnTo>
-                  <a:lnTo>
-                    <a:pt x="74569" y="206872"/>
-                  </a:lnTo>
-                  <a:lnTo>
-                    <a:pt x="148329" y="399348"/>
-                  </a:lnTo>
-                  <a:lnTo>
-                    <a:pt x="222089" y="580519"/>
-                  </a:lnTo>
-                  <a:lnTo>
-                    <a:pt x="295849" y="751049"/>
-                  </a:lnTo>
-                  <a:lnTo>
-                    <a:pt x="369609" y="911562"/>
-                  </a:lnTo>
-                  <a:lnTo>
-                    <a:pt x="443369" y="1062646"/>
-                  </a:lnTo>
-                  <a:lnTo>
-                    <a:pt x="517129" y="1204857"/>
-                  </a:lnTo>
-                  <a:lnTo>
-                    <a:pt x="590889" y="1338714"/>
-                  </a:lnTo>
-                  <a:lnTo>
-                    <a:pt x="664649" y="1464708"/>
-                  </a:lnTo>
-                  <a:lnTo>
-                    <a:pt x="738409" y="1583302"/>
-                  </a:lnTo>
-                  <a:lnTo>
-                    <a:pt x="812169" y="1694930"/>
-                  </a:lnTo>
-                  <a:lnTo>
-                    <a:pt x="885929" y="1800002"/>
-                  </a:lnTo>
-                  <a:lnTo>
-                    <a:pt x="959689" y="1898901"/>
-                  </a:lnTo>
-                  <a:lnTo>
-                    <a:pt x="1033449" y="1991992"/>
-                  </a:lnTo>
-                  <a:lnTo>
-                    <a:pt x="1107209" y="2079614"/>
-                  </a:lnTo>
-                  <a:lnTo>
-                    <a:pt x="1180969" y="2162090"/>
-                  </a:lnTo>
-                  <a:lnTo>
-                    <a:pt x="1254729" y="2239721"/>
-                  </a:lnTo>
-                  <a:lnTo>
-                    <a:pt x="1328489" y="2312793"/>
-                  </a:lnTo>
-                  <a:lnTo>
-                    <a:pt x="1402249" y="2381572"/>
-                  </a:lnTo>
-                  <a:lnTo>
-                    <a:pt x="1476010" y="2446311"/>
-                  </a:lnTo>
-                  <a:lnTo>
-                    <a:pt x="1549770" y="2507248"/>
-                  </a:lnTo>
-                  <a:lnTo>
-                    <a:pt x="1623530" y="2564606"/>
-                  </a:lnTo>
-                  <a:lnTo>
-                    <a:pt x="1697290" y="2618594"/>
-                  </a:lnTo>
-                  <a:lnTo>
-                    <a:pt x="1771050" y="2655241"/>
-                  </a:lnTo>
-                  <a:lnTo>
-                    <a:pt x="1844810" y="2658386"/>
-                  </a:lnTo>
-                  <a:lnTo>
-                    <a:pt x="1918570" y="2661519"/>
-                  </a:lnTo>
-                  <a:lnTo>
-                    <a:pt x="1992330" y="2664640"/>
-                  </a:lnTo>
-                  <a:lnTo>
-                    <a:pt x="2066090" y="2667749"/>
-                  </a:lnTo>
-                  <a:lnTo>
-                    <a:pt x="2139850" y="2670846"/>
-                  </a:lnTo>
-                  <a:lnTo>
-                    <a:pt x="2213610" y="2673931"/>
-                  </a:lnTo>
-                  <a:lnTo>
-                    <a:pt x="2287370" y="2677005"/>
-                  </a:lnTo>
-                  <a:lnTo>
-                    <a:pt x="2361130" y="2680067"/>
-                  </a:lnTo>
-                  <a:lnTo>
-                    <a:pt x="2434890" y="2683118"/>
-                  </a:lnTo>
-                  <a:lnTo>
-                    <a:pt x="2508650" y="2686157"/>
-                  </a:lnTo>
-                  <a:lnTo>
-                    <a:pt x="2582410" y="2689184"/>
-                  </a:lnTo>
-                  <a:lnTo>
-                    <a:pt x="2656170" y="2692200"/>
-                  </a:lnTo>
-                  <a:lnTo>
-                    <a:pt x="2729930" y="2695204"/>
-                  </a:lnTo>
-                  <a:lnTo>
-                    <a:pt x="2803690" y="2698197"/>
-                  </a:lnTo>
-                  <a:lnTo>
-                    <a:pt x="2877450" y="2701179"/>
-                  </a:lnTo>
-                  <a:lnTo>
-                    <a:pt x="2951210" y="2704149"/>
-                  </a:lnTo>
-                  <a:lnTo>
-                    <a:pt x="3024970" y="2707108"/>
-                  </a:lnTo>
-                  <a:lnTo>
-                    <a:pt x="3098730" y="2710056"/>
-                  </a:lnTo>
-                  <a:lnTo>
-                    <a:pt x="3172490" y="2712993"/>
-                  </a:lnTo>
-                  <a:lnTo>
-                    <a:pt x="3246250" y="2715918"/>
-                  </a:lnTo>
-                  <a:lnTo>
-                    <a:pt x="3320010" y="2718833"/>
-                  </a:lnTo>
-                  <a:lnTo>
-                    <a:pt x="3393770" y="2721736"/>
-                  </a:lnTo>
-                  <a:lnTo>
-                    <a:pt x="3467530" y="2724628"/>
-                  </a:lnTo>
-                  <a:lnTo>
-                    <a:pt x="3541290" y="2727510"/>
-                  </a:lnTo>
-                  <a:lnTo>
-                    <a:pt x="3615050" y="2730380"/>
-                  </a:lnTo>
-                  <a:lnTo>
-                    <a:pt x="3688810" y="2733239"/>
-                  </a:lnTo>
-                  <a:lnTo>
-                    <a:pt x="3762570" y="2736088"/>
-                  </a:lnTo>
-                  <a:lnTo>
-                    <a:pt x="3836330" y="2738926"/>
-                  </a:lnTo>
-                  <a:lnTo>
-                    <a:pt x="3910090" y="2741753"/>
-                  </a:lnTo>
-                  <a:lnTo>
-                    <a:pt x="3983850" y="2744569"/>
-                  </a:lnTo>
-                  <a:lnTo>
-                    <a:pt x="4057610" y="2747375"/>
-                  </a:lnTo>
-                  <a:lnTo>
-                    <a:pt x="4131370" y="2750170"/>
-                  </a:lnTo>
-                  <a:lnTo>
-                    <a:pt x="4205130" y="2752954"/>
-                  </a:lnTo>
-                  <a:lnTo>
-                    <a:pt x="4278890" y="2755728"/>
-                  </a:lnTo>
-                  <a:lnTo>
-                    <a:pt x="4352651" y="2758491"/>
-                  </a:lnTo>
-                  <a:lnTo>
-                    <a:pt x="4426411" y="2761244"/>
-                  </a:lnTo>
-                  <a:lnTo>
-                    <a:pt x="4500171" y="2763987"/>
-                  </a:lnTo>
-                  <a:lnTo>
-                    <a:pt x="4573931" y="2766718"/>
-                  </a:lnTo>
-                  <a:lnTo>
-                    <a:pt x="4647691" y="2769440"/>
-                  </a:lnTo>
-                  <a:lnTo>
-                    <a:pt x="4721451" y="2772151"/>
-                  </a:lnTo>
-                  <a:lnTo>
-                    <a:pt x="4795211" y="2774852"/>
-                  </a:lnTo>
-                  <a:lnTo>
-                    <a:pt x="4868971" y="2777543"/>
-                  </a:lnTo>
-                  <a:lnTo>
-                    <a:pt x="4942731" y="2780223"/>
-                  </a:lnTo>
-                  <a:lnTo>
-                    <a:pt x="5016491" y="2782894"/>
-                  </a:lnTo>
-                  <a:lnTo>
-                    <a:pt x="5090251" y="2785554"/>
-                  </a:lnTo>
-                  <a:lnTo>
-                    <a:pt x="5164011" y="2788204"/>
-                  </a:lnTo>
-                  <a:lnTo>
-                    <a:pt x="5237771" y="2790844"/>
-                  </a:lnTo>
-                  <a:lnTo>
-                    <a:pt x="5311531" y="2793474"/>
-                  </a:lnTo>
-                  <a:lnTo>
-                    <a:pt x="5385291" y="2796094"/>
-                  </a:lnTo>
-                  <a:lnTo>
-                    <a:pt x="5459051" y="2798704"/>
-                  </a:lnTo>
-                  <a:lnTo>
-                    <a:pt x="5532811" y="2801304"/>
                   </a:lnTo>
                 </a:path>
               </a:pathLst>
@@ -3820,628 +4102,303 @@
           </p:nvSpPr>
           <p:spPr>
             <a:xfrm>
-              <a:off x="817517" y="4566228"/>
-              <a:ext cx="7235830" cy="953863"/>
+              <a:off x="1393026" y="2073503"/>
+              <a:ext cx="6869652" cy="3324506"/>
             </a:xfrm>
             <a:custGeom>
               <a:avLst/>
               <a:pathLst>
-                <a:path w="7235830" h="953863">
-                  <a:moveTo>
-                    <a:pt x="7235830" y="953863"/>
-                  </a:moveTo>
-                  <a:lnTo>
-                    <a:pt x="7162070" y="951545"/>
-                  </a:lnTo>
-                  <a:lnTo>
-                    <a:pt x="7088310" y="949081"/>
-                  </a:lnTo>
-                  <a:lnTo>
-                    <a:pt x="7014550" y="946464"/>
-                  </a:lnTo>
-                  <a:lnTo>
-                    <a:pt x="6940789" y="943684"/>
-                  </a:lnTo>
-                  <a:lnTo>
-                    <a:pt x="6867029" y="940730"/>
-                  </a:lnTo>
-                  <a:lnTo>
-                    <a:pt x="6793269" y="937591"/>
-                  </a:lnTo>
-                  <a:lnTo>
-                    <a:pt x="6719509" y="934257"/>
-                  </a:lnTo>
-                  <a:lnTo>
-                    <a:pt x="6645749" y="930715"/>
-                  </a:lnTo>
-                  <a:lnTo>
-                    <a:pt x="6571989" y="926952"/>
-                  </a:lnTo>
-                  <a:lnTo>
-                    <a:pt x="6498229" y="922954"/>
-                  </a:lnTo>
-                  <a:lnTo>
-                    <a:pt x="6424469" y="918706"/>
-                  </a:lnTo>
-                  <a:lnTo>
-                    <a:pt x="6350709" y="914193"/>
-                  </a:lnTo>
-                  <a:lnTo>
-                    <a:pt x="6276949" y="909399"/>
-                  </a:lnTo>
-                  <a:lnTo>
-                    <a:pt x="6203189" y="904306"/>
-                  </a:lnTo>
-                  <a:lnTo>
-                    <a:pt x="6129429" y="898894"/>
-                  </a:lnTo>
-                  <a:lnTo>
-                    <a:pt x="6055669" y="893145"/>
-                  </a:lnTo>
-                  <a:lnTo>
-                    <a:pt x="5981909" y="887037"/>
-                  </a:lnTo>
-                  <a:lnTo>
-                    <a:pt x="5908149" y="880549"/>
-                  </a:lnTo>
-                  <a:lnTo>
-                    <a:pt x="5834389" y="873655"/>
-                  </a:lnTo>
-                  <a:lnTo>
-                    <a:pt x="5760629" y="866331"/>
-                  </a:lnTo>
-                  <a:lnTo>
-                    <a:pt x="5686869" y="858550"/>
-                  </a:lnTo>
-                  <a:lnTo>
-                    <a:pt x="5613109" y="850283"/>
-                  </a:lnTo>
-                  <a:lnTo>
-                    <a:pt x="5539349" y="841501"/>
-                  </a:lnTo>
-                  <a:lnTo>
-                    <a:pt x="5465589" y="832170"/>
-                  </a:lnTo>
-                  <a:lnTo>
-                    <a:pt x="5391829" y="822257"/>
-                  </a:lnTo>
-                  <a:lnTo>
-                    <a:pt x="5318069" y="811726"/>
-                  </a:lnTo>
-                  <a:lnTo>
-                    <a:pt x="5244309" y="800537"/>
-                  </a:lnTo>
-                  <a:lnTo>
-                    <a:pt x="5170549" y="788650"/>
-                  </a:lnTo>
-                  <a:lnTo>
-                    <a:pt x="5096789" y="776022"/>
-                  </a:lnTo>
-                  <a:lnTo>
-                    <a:pt x="5023029" y="762605"/>
-                  </a:lnTo>
-                  <a:lnTo>
-                    <a:pt x="4949269" y="748351"/>
-                  </a:lnTo>
-                  <a:lnTo>
-                    <a:pt x="4875509" y="733208"/>
-                  </a:lnTo>
-                  <a:lnTo>
-                    <a:pt x="4801749" y="717120"/>
-                  </a:lnTo>
-                  <a:lnTo>
-                    <a:pt x="4727989" y="700027"/>
-                  </a:lnTo>
-                  <a:lnTo>
-                    <a:pt x="4654229" y="681868"/>
-                  </a:lnTo>
-                  <a:lnTo>
-                    <a:pt x="4580469" y="662576"/>
-                  </a:lnTo>
-                  <a:lnTo>
-                    <a:pt x="4506709" y="642080"/>
-                  </a:lnTo>
-                  <a:lnTo>
-                    <a:pt x="4432949" y="620305"/>
-                  </a:lnTo>
-                  <a:lnTo>
-                    <a:pt x="4359189" y="597171"/>
-                  </a:lnTo>
-                  <a:lnTo>
-                    <a:pt x="4285429" y="572594"/>
-                  </a:lnTo>
-                  <a:lnTo>
-                    <a:pt x="4211669" y="546482"/>
-                  </a:lnTo>
-                  <a:lnTo>
-                    <a:pt x="4137909" y="518742"/>
-                  </a:lnTo>
-                  <a:lnTo>
-                    <a:pt x="4064149" y="489270"/>
-                  </a:lnTo>
-                  <a:lnTo>
-                    <a:pt x="3990388" y="457959"/>
-                  </a:lnTo>
-                  <a:lnTo>
-                    <a:pt x="3916628" y="424694"/>
-                  </a:lnTo>
-                  <a:lnTo>
-                    <a:pt x="3842868" y="389354"/>
-                  </a:lnTo>
-                  <a:lnTo>
-                    <a:pt x="3769108" y="351808"/>
-                  </a:lnTo>
-                  <a:lnTo>
-                    <a:pt x="3695348" y="311919"/>
-                  </a:lnTo>
-                  <a:lnTo>
-                    <a:pt x="3621588" y="269540"/>
-                  </a:lnTo>
-                  <a:lnTo>
-                    <a:pt x="3547828" y="224518"/>
-                  </a:lnTo>
-                  <a:lnTo>
-                    <a:pt x="3474068" y="176685"/>
-                  </a:lnTo>
-                  <a:lnTo>
-                    <a:pt x="3400308" y="159359"/>
-                  </a:lnTo>
-                  <a:lnTo>
-                    <a:pt x="3326548" y="156190"/>
-                  </a:lnTo>
-                  <a:lnTo>
-                    <a:pt x="3252788" y="153010"/>
-                  </a:lnTo>
-                  <a:lnTo>
-                    <a:pt x="3179028" y="149817"/>
-                  </a:lnTo>
-                  <a:lnTo>
-                    <a:pt x="3105268" y="146612"/>
-                  </a:lnTo>
-                  <a:lnTo>
-                    <a:pt x="3031508" y="143394"/>
-                  </a:lnTo>
-                  <a:lnTo>
-                    <a:pt x="2957748" y="140165"/>
-                  </a:lnTo>
-                  <a:lnTo>
-                    <a:pt x="2883988" y="136923"/>
-                  </a:lnTo>
-                  <a:lnTo>
-                    <a:pt x="2810228" y="133669"/>
-                  </a:lnTo>
-                  <a:lnTo>
-                    <a:pt x="2736468" y="130402"/>
-                  </a:lnTo>
-                  <a:lnTo>
-                    <a:pt x="2662708" y="127123"/>
-                  </a:lnTo>
-                  <a:lnTo>
-                    <a:pt x="2588948" y="123832"/>
-                  </a:lnTo>
-                  <a:lnTo>
-                    <a:pt x="2515188" y="120528"/>
-                  </a:lnTo>
-                  <a:lnTo>
-                    <a:pt x="2441428" y="117211"/>
-                  </a:lnTo>
-                  <a:lnTo>
-                    <a:pt x="2367668" y="113882"/>
-                  </a:lnTo>
-                  <a:lnTo>
-                    <a:pt x="2293908" y="110540"/>
-                  </a:lnTo>
-                  <a:lnTo>
-                    <a:pt x="2220148" y="107185"/>
-                  </a:lnTo>
-                  <a:lnTo>
-                    <a:pt x="2146388" y="103817"/>
-                  </a:lnTo>
-                  <a:lnTo>
-                    <a:pt x="2072628" y="100437"/>
-                  </a:lnTo>
-                  <a:lnTo>
-                    <a:pt x="1998868" y="97044"/>
-                  </a:lnTo>
-                  <a:lnTo>
-                    <a:pt x="1925108" y="93638"/>
-                  </a:lnTo>
-                  <a:lnTo>
-                    <a:pt x="1851348" y="90219"/>
-                  </a:lnTo>
-                  <a:lnTo>
-                    <a:pt x="1777588" y="86787"/>
-                  </a:lnTo>
-                  <a:lnTo>
-                    <a:pt x="1703828" y="83341"/>
-                  </a:lnTo>
-                  <a:lnTo>
-                    <a:pt x="1630068" y="79883"/>
-                  </a:lnTo>
-                  <a:lnTo>
-                    <a:pt x="1556308" y="76412"/>
-                  </a:lnTo>
-                  <a:lnTo>
-                    <a:pt x="1482548" y="72927"/>
-                  </a:lnTo>
-                  <a:lnTo>
-                    <a:pt x="1408788" y="69429"/>
-                  </a:lnTo>
-                  <a:lnTo>
-                    <a:pt x="1335028" y="65917"/>
-                  </a:lnTo>
-                  <a:lnTo>
-                    <a:pt x="1261268" y="62393"/>
-                  </a:lnTo>
-                  <a:lnTo>
-                    <a:pt x="1187508" y="58855"/>
-                  </a:lnTo>
-                  <a:lnTo>
-                    <a:pt x="1113747" y="55303"/>
-                  </a:lnTo>
-                  <a:lnTo>
-                    <a:pt x="1039987" y="51738"/>
-                  </a:lnTo>
-                  <a:lnTo>
-                    <a:pt x="966227" y="48159"/>
-                  </a:lnTo>
-                  <a:lnTo>
-                    <a:pt x="892467" y="44567"/>
-                  </a:lnTo>
-                  <a:lnTo>
-                    <a:pt x="818707" y="40961"/>
-                  </a:lnTo>
-                  <a:lnTo>
-                    <a:pt x="744947" y="37341"/>
-                  </a:lnTo>
-                  <a:lnTo>
-                    <a:pt x="671187" y="33707"/>
-                  </a:lnTo>
-                  <a:lnTo>
-                    <a:pt x="597427" y="30060"/>
-                  </a:lnTo>
-                  <a:lnTo>
-                    <a:pt x="523667" y="26398"/>
-                  </a:lnTo>
-                  <a:lnTo>
-                    <a:pt x="449907" y="22723"/>
-                  </a:lnTo>
-                  <a:lnTo>
-                    <a:pt x="376147" y="19034"/>
-                  </a:lnTo>
-                  <a:lnTo>
-                    <a:pt x="302387" y="15331"/>
-                  </a:lnTo>
-                  <a:lnTo>
-                    <a:pt x="228627" y="11613"/>
-                  </a:lnTo>
-                  <a:lnTo>
-                    <a:pt x="154867" y="7881"/>
-                  </a:lnTo>
-                  <a:lnTo>
-                    <a:pt x="81107" y="4136"/>
-                  </a:lnTo>
-                  <a:lnTo>
-                    <a:pt x="7347" y="375"/>
-                  </a:lnTo>
-                  <a:lnTo>
-                    <a:pt x="0" y="0"/>
-                  </a:lnTo>
-                </a:path>
-              </a:pathLst>
-            </a:custGeom>
-          </p:spPr>
-          <p:txBody>
-            <a:bodyPr/>
-            <a:lstStyle/>
-            <a:p/>
-          </p:txBody>
-        </p:sp>
-        <p:sp>
-          <p:nvSpPr>
-            <p:cNvPr id="24" name="pl24"/>
-            <p:cNvSpPr/>
-            <p:nvPr/>
-          </p:nvSpPr>
-          <p:spPr>
-            <a:xfrm>
-              <a:off x="978677" y="2073503"/>
-              <a:ext cx="7074670" cy="3324506"/>
-            </a:xfrm>
-            <a:custGeom>
-              <a:avLst/>
-              <a:pathLst>
-                <a:path w="7074670" h="3324506">
+                <a:path w="6869652" h="3324506">
                   <a:moveTo>
                     <a:pt x="0" y="0"/>
                   </a:moveTo>
                   <a:lnTo>
-                    <a:pt x="67467" y="101147"/>
-                  </a:lnTo>
-                  <a:lnTo>
-                    <a:pt x="141227" y="208228"/>
-                  </a:lnTo>
-                  <a:lnTo>
-                    <a:pt x="214987" y="311919"/>
-                  </a:lnTo>
-                  <a:lnTo>
-                    <a:pt x="288747" y="412327"/>
-                  </a:lnTo>
-                  <a:lnTo>
-                    <a:pt x="362507" y="509557"/>
-                  </a:lnTo>
-                  <a:lnTo>
-                    <a:pt x="436267" y="603709"/>
-                  </a:lnTo>
-                  <a:lnTo>
-                    <a:pt x="510027" y="694881"/>
-                  </a:lnTo>
-                  <a:lnTo>
-                    <a:pt x="583787" y="783166"/>
-                  </a:lnTo>
-                  <a:lnTo>
-                    <a:pt x="657547" y="868656"/>
-                  </a:lnTo>
-                  <a:lnTo>
-                    <a:pt x="731307" y="951441"/>
-                  </a:lnTo>
-                  <a:lnTo>
-                    <a:pt x="805067" y="1031604"/>
-                  </a:lnTo>
-                  <a:lnTo>
-                    <a:pt x="878827" y="1109230"/>
-                  </a:lnTo>
-                  <a:lnTo>
-                    <a:pt x="952587" y="1184398"/>
-                  </a:lnTo>
-                  <a:lnTo>
-                    <a:pt x="1026347" y="1257187"/>
-                  </a:lnTo>
-                  <a:lnTo>
-                    <a:pt x="1100108" y="1327672"/>
-                  </a:lnTo>
-                  <a:lnTo>
-                    <a:pt x="1173868" y="1395925"/>
-                  </a:lnTo>
-                  <a:lnTo>
-                    <a:pt x="1247628" y="1462018"/>
-                  </a:lnTo>
-                  <a:lnTo>
-                    <a:pt x="1321388" y="1526019"/>
-                  </a:lnTo>
-                  <a:lnTo>
-                    <a:pt x="1395148" y="1587993"/>
-                  </a:lnTo>
-                  <a:lnTo>
-                    <a:pt x="1468908" y="1648006"/>
-                  </a:lnTo>
-                  <a:lnTo>
-                    <a:pt x="1542668" y="1706119"/>
-                  </a:lnTo>
-                  <a:lnTo>
-                    <a:pt x="1616428" y="1762392"/>
-                  </a:lnTo>
-                  <a:lnTo>
-                    <a:pt x="1690188" y="1816884"/>
-                  </a:lnTo>
-                  <a:lnTo>
-                    <a:pt x="1763948" y="1869650"/>
-                  </a:lnTo>
-                  <a:lnTo>
-                    <a:pt x="1837708" y="1920747"/>
-                  </a:lnTo>
-                  <a:lnTo>
-                    <a:pt x="1911468" y="1970226"/>
-                  </a:lnTo>
-                  <a:lnTo>
-                    <a:pt x="1985228" y="2018138"/>
-                  </a:lnTo>
-                  <a:lnTo>
-                    <a:pt x="2058988" y="2064534"/>
-                  </a:lnTo>
-                  <a:lnTo>
-                    <a:pt x="2132748" y="2109461"/>
-                  </a:lnTo>
-                  <a:lnTo>
-                    <a:pt x="2206508" y="2152966"/>
-                  </a:lnTo>
-                  <a:lnTo>
-                    <a:pt x="2280268" y="2195093"/>
-                  </a:lnTo>
-                  <a:lnTo>
-                    <a:pt x="2354028" y="2235888"/>
-                  </a:lnTo>
-                  <a:lnTo>
-                    <a:pt x="2427788" y="2275390"/>
-                  </a:lnTo>
-                  <a:lnTo>
-                    <a:pt x="2501548" y="2313642"/>
-                  </a:lnTo>
-                  <a:lnTo>
-                    <a:pt x="2575308" y="2350684"/>
-                  </a:lnTo>
-                  <a:lnTo>
-                    <a:pt x="2649068" y="2386552"/>
-                  </a:lnTo>
-                  <a:lnTo>
-                    <a:pt x="2722828" y="2421285"/>
-                  </a:lnTo>
-                  <a:lnTo>
-                    <a:pt x="2796588" y="2454919"/>
-                  </a:lnTo>
-                  <a:lnTo>
-                    <a:pt x="2870348" y="2487488"/>
-                  </a:lnTo>
-                  <a:lnTo>
-                    <a:pt x="2944108" y="2519026"/>
-                  </a:lnTo>
-                  <a:lnTo>
-                    <a:pt x="3017868" y="2549565"/>
-                  </a:lnTo>
-                  <a:lnTo>
-                    <a:pt x="3091628" y="2579138"/>
-                  </a:lnTo>
-                  <a:lnTo>
-                    <a:pt x="3165388" y="2607775"/>
-                  </a:lnTo>
-                  <a:lnTo>
-                    <a:pt x="3239148" y="2635505"/>
-                  </a:lnTo>
-                  <a:lnTo>
-                    <a:pt x="3312908" y="2662357"/>
-                  </a:lnTo>
-                  <a:lnTo>
-                    <a:pt x="3386668" y="2688359"/>
-                  </a:lnTo>
-                  <a:lnTo>
-                    <a:pt x="3460428" y="2713538"/>
-                  </a:lnTo>
-                  <a:lnTo>
-                    <a:pt x="3534188" y="2737920"/>
-                  </a:lnTo>
-                  <a:lnTo>
-                    <a:pt x="3607948" y="2761530"/>
-                  </a:lnTo>
-                  <a:lnTo>
-                    <a:pt x="3681708" y="2784393"/>
-                  </a:lnTo>
-                  <a:lnTo>
-                    <a:pt x="3755468" y="2806532"/>
-                  </a:lnTo>
-                  <a:lnTo>
-                    <a:pt x="3829228" y="2827970"/>
-                  </a:lnTo>
-                  <a:lnTo>
-                    <a:pt x="3902988" y="2848730"/>
-                  </a:lnTo>
-                  <a:lnTo>
-                    <a:pt x="3976748" y="2868832"/>
-                  </a:lnTo>
-                  <a:lnTo>
-                    <a:pt x="4050509" y="2888298"/>
-                  </a:lnTo>
-                  <a:lnTo>
-                    <a:pt x="4124269" y="2907148"/>
-                  </a:lnTo>
-                  <a:lnTo>
-                    <a:pt x="4198029" y="2925401"/>
-                  </a:lnTo>
-                  <a:lnTo>
-                    <a:pt x="4271789" y="2943076"/>
-                  </a:lnTo>
-                  <a:lnTo>
-                    <a:pt x="4345549" y="2960191"/>
-                  </a:lnTo>
-                  <a:lnTo>
-                    <a:pt x="4419309" y="2976765"/>
-                  </a:lnTo>
-                  <a:lnTo>
-                    <a:pt x="4493069" y="2992814"/>
-                  </a:lnTo>
-                  <a:lnTo>
-                    <a:pt x="4566829" y="3008355"/>
-                  </a:lnTo>
-                  <a:lnTo>
-                    <a:pt x="4640589" y="3023405"/>
-                  </a:lnTo>
-                  <a:lnTo>
-                    <a:pt x="4714349" y="3037977"/>
-                  </a:lnTo>
-                  <a:lnTo>
-                    <a:pt x="4788109" y="3052089"/>
-                  </a:lnTo>
-                  <a:lnTo>
-                    <a:pt x="4861869" y="3065753"/>
-                  </a:lnTo>
-                  <a:lnTo>
-                    <a:pt x="4935629" y="3078986"/>
-                  </a:lnTo>
-                  <a:lnTo>
-                    <a:pt x="5009389" y="3091799"/>
-                  </a:lnTo>
-                  <a:lnTo>
-                    <a:pt x="5083149" y="3104206"/>
-                  </a:lnTo>
-                  <a:lnTo>
-                    <a:pt x="5156909" y="3116221"/>
-                  </a:lnTo>
-                  <a:lnTo>
-                    <a:pt x="5230669" y="3127856"/>
-                  </a:lnTo>
-                  <a:lnTo>
-                    <a:pt x="5304429" y="3139122"/>
-                  </a:lnTo>
-                  <a:lnTo>
-                    <a:pt x="5378189" y="3150032"/>
-                  </a:lnTo>
-                  <a:lnTo>
-                    <a:pt x="5451949" y="3160596"/>
-                  </a:lnTo>
-                  <a:lnTo>
-                    <a:pt x="5525709" y="3170825"/>
-                  </a:lnTo>
-                  <a:lnTo>
-                    <a:pt x="5599469" y="3180731"/>
-                  </a:lnTo>
-                  <a:lnTo>
-                    <a:pt x="5673229" y="3190324"/>
-                  </a:lnTo>
-                  <a:lnTo>
-                    <a:pt x="5746989" y="3199612"/>
-                  </a:lnTo>
-                  <a:lnTo>
-                    <a:pt x="5820749" y="3208607"/>
-                  </a:lnTo>
-                  <a:lnTo>
-                    <a:pt x="5894509" y="3217317"/>
-                  </a:lnTo>
-                  <a:lnTo>
-                    <a:pt x="5968269" y="3225751"/>
-                  </a:lnTo>
-                  <a:lnTo>
-                    <a:pt x="6042029" y="3233918"/>
-                  </a:lnTo>
-                  <a:lnTo>
-                    <a:pt x="6115789" y="3241827"/>
-                  </a:lnTo>
-                  <a:lnTo>
-                    <a:pt x="6189549" y="3249485"/>
-                  </a:lnTo>
-                  <a:lnTo>
-                    <a:pt x="6263309" y="3256901"/>
-                  </a:lnTo>
-                  <a:lnTo>
-                    <a:pt x="6337069" y="3264082"/>
-                  </a:lnTo>
-                  <a:lnTo>
-                    <a:pt x="6410829" y="3271036"/>
-                  </a:lnTo>
-                  <a:lnTo>
-                    <a:pt x="6484589" y="3277770"/>
-                  </a:lnTo>
-                  <a:lnTo>
-                    <a:pt x="6558349" y="3284290"/>
-                  </a:lnTo>
-                  <a:lnTo>
-                    <a:pt x="6632109" y="3290604"/>
-                  </a:lnTo>
-                  <a:lnTo>
-                    <a:pt x="6705869" y="3296718"/>
-                  </a:lnTo>
-                  <a:lnTo>
-                    <a:pt x="6779629" y="3302639"/>
-                  </a:lnTo>
-                  <a:lnTo>
-                    <a:pt x="6853389" y="3308372"/>
-                  </a:lnTo>
-                  <a:lnTo>
-                    <a:pt x="6927150" y="3313924"/>
-                  </a:lnTo>
-                  <a:lnTo>
-                    <a:pt x="7000910" y="3319300"/>
-                  </a:lnTo>
-                  <a:lnTo>
-                    <a:pt x="7074670" y="3324506"/>
+                    <a:pt x="65512" y="101147"/>
+                  </a:lnTo>
+                  <a:lnTo>
+                    <a:pt x="137135" y="208228"/>
+                  </a:lnTo>
+                  <a:lnTo>
+                    <a:pt x="208757" y="311919"/>
+                  </a:lnTo>
+                  <a:lnTo>
+                    <a:pt x="280380" y="412327"/>
+                  </a:lnTo>
+                  <a:lnTo>
+                    <a:pt x="352002" y="509557"/>
+                  </a:lnTo>
+                  <a:lnTo>
+                    <a:pt x="423625" y="603709"/>
+                  </a:lnTo>
+                  <a:lnTo>
+                    <a:pt x="495247" y="694881"/>
+                  </a:lnTo>
+                  <a:lnTo>
+                    <a:pt x="566870" y="783166"/>
+                  </a:lnTo>
+                  <a:lnTo>
+                    <a:pt x="638492" y="868656"/>
+                  </a:lnTo>
+                  <a:lnTo>
+                    <a:pt x="710115" y="951441"/>
+                  </a:lnTo>
+                  <a:lnTo>
+                    <a:pt x="781737" y="1031604"/>
+                  </a:lnTo>
+                  <a:lnTo>
+                    <a:pt x="853360" y="1109230"/>
+                  </a:lnTo>
+                  <a:lnTo>
+                    <a:pt x="924982" y="1184398"/>
+                  </a:lnTo>
+                  <a:lnTo>
+                    <a:pt x="996605" y="1257187"/>
+                  </a:lnTo>
+                  <a:lnTo>
+                    <a:pt x="1068227" y="1327672"/>
+                  </a:lnTo>
+                  <a:lnTo>
+                    <a:pt x="1139850" y="1395925"/>
+                  </a:lnTo>
+                  <a:lnTo>
+                    <a:pt x="1211472" y="1462018"/>
+                  </a:lnTo>
+                  <a:lnTo>
+                    <a:pt x="1283095" y="1526019"/>
+                  </a:lnTo>
+                  <a:lnTo>
+                    <a:pt x="1354717" y="1587993"/>
+                  </a:lnTo>
+                  <a:lnTo>
+                    <a:pt x="1426340" y="1648006"/>
+                  </a:lnTo>
+                  <a:lnTo>
+                    <a:pt x="1497963" y="1706119"/>
+                  </a:lnTo>
+                  <a:lnTo>
+                    <a:pt x="1569585" y="1762392"/>
+                  </a:lnTo>
+                  <a:lnTo>
+                    <a:pt x="1641208" y="1816884"/>
+                  </a:lnTo>
+                  <a:lnTo>
+                    <a:pt x="1712830" y="1869650"/>
+                  </a:lnTo>
+                  <a:lnTo>
+                    <a:pt x="1784453" y="1920747"/>
+                  </a:lnTo>
+                  <a:lnTo>
+                    <a:pt x="1856075" y="1970226"/>
+                  </a:lnTo>
+                  <a:lnTo>
+                    <a:pt x="1927698" y="2018138"/>
+                  </a:lnTo>
+                  <a:lnTo>
+                    <a:pt x="1999320" y="2064534"/>
+                  </a:lnTo>
+                  <a:lnTo>
+                    <a:pt x="2070943" y="2109461"/>
+                  </a:lnTo>
+                  <a:lnTo>
+                    <a:pt x="2142565" y="2152966"/>
+                  </a:lnTo>
+                  <a:lnTo>
+                    <a:pt x="2214188" y="2195093"/>
+                  </a:lnTo>
+                  <a:lnTo>
+                    <a:pt x="2285810" y="2235888"/>
+                  </a:lnTo>
+                  <a:lnTo>
+                    <a:pt x="2357433" y="2275390"/>
+                  </a:lnTo>
+                  <a:lnTo>
+                    <a:pt x="2429055" y="2313642"/>
+                  </a:lnTo>
+                  <a:lnTo>
+                    <a:pt x="2500678" y="2350684"/>
+                  </a:lnTo>
+                  <a:lnTo>
+                    <a:pt x="2572300" y="2386552"/>
+                  </a:lnTo>
+                  <a:lnTo>
+                    <a:pt x="2643923" y="2421285"/>
+                  </a:lnTo>
+                  <a:lnTo>
+                    <a:pt x="2715545" y="2454919"/>
+                  </a:lnTo>
+                  <a:lnTo>
+                    <a:pt x="2787168" y="2487488"/>
+                  </a:lnTo>
+                  <a:lnTo>
+                    <a:pt x="2858791" y="2519026"/>
+                  </a:lnTo>
+                  <a:lnTo>
+                    <a:pt x="2930413" y="2549565"/>
+                  </a:lnTo>
+                  <a:lnTo>
+                    <a:pt x="3002036" y="2579138"/>
+                  </a:lnTo>
+                  <a:lnTo>
+                    <a:pt x="3073658" y="2607775"/>
+                  </a:lnTo>
+                  <a:lnTo>
+                    <a:pt x="3145281" y="2635505"/>
+                  </a:lnTo>
+                  <a:lnTo>
+                    <a:pt x="3216903" y="2662357"/>
+                  </a:lnTo>
+                  <a:lnTo>
+                    <a:pt x="3288526" y="2688359"/>
+                  </a:lnTo>
+                  <a:lnTo>
+                    <a:pt x="3360148" y="2713538"/>
+                  </a:lnTo>
+                  <a:lnTo>
+                    <a:pt x="3431771" y="2737920"/>
+                  </a:lnTo>
+                  <a:lnTo>
+                    <a:pt x="3503393" y="2761530"/>
+                  </a:lnTo>
+                  <a:lnTo>
+                    <a:pt x="3575016" y="2784393"/>
+                  </a:lnTo>
+                  <a:lnTo>
+                    <a:pt x="3646638" y="2806532"/>
+                  </a:lnTo>
+                  <a:lnTo>
+                    <a:pt x="3718261" y="2827970"/>
+                  </a:lnTo>
+                  <a:lnTo>
+                    <a:pt x="3789883" y="2848730"/>
+                  </a:lnTo>
+                  <a:lnTo>
+                    <a:pt x="3861506" y="2868832"/>
+                  </a:lnTo>
+                  <a:lnTo>
+                    <a:pt x="3933128" y="2888298"/>
+                  </a:lnTo>
+                  <a:lnTo>
+                    <a:pt x="4004751" y="2907148"/>
+                  </a:lnTo>
+                  <a:lnTo>
+                    <a:pt x="4076373" y="2925401"/>
+                  </a:lnTo>
+                  <a:lnTo>
+                    <a:pt x="4147996" y="2943076"/>
+                  </a:lnTo>
+                  <a:lnTo>
+                    <a:pt x="4219619" y="2960191"/>
+                  </a:lnTo>
+                  <a:lnTo>
+                    <a:pt x="4291241" y="2976765"/>
+                  </a:lnTo>
+                  <a:lnTo>
+                    <a:pt x="4362864" y="2992814"/>
+                  </a:lnTo>
+                  <a:lnTo>
+                    <a:pt x="4434486" y="3008355"/>
+                  </a:lnTo>
+                  <a:lnTo>
+                    <a:pt x="4506109" y="3023405"/>
+                  </a:lnTo>
+                  <a:lnTo>
+                    <a:pt x="4577731" y="3037977"/>
+                  </a:lnTo>
+                  <a:lnTo>
+                    <a:pt x="4649354" y="3052089"/>
+                  </a:lnTo>
+                  <a:lnTo>
+                    <a:pt x="4720976" y="3065753"/>
+                  </a:lnTo>
+                  <a:lnTo>
+                    <a:pt x="4792599" y="3078986"/>
+                  </a:lnTo>
+                  <a:lnTo>
+                    <a:pt x="4864221" y="3091799"/>
+                  </a:lnTo>
+                  <a:lnTo>
+                    <a:pt x="4935844" y="3104206"/>
+                  </a:lnTo>
+                  <a:lnTo>
+                    <a:pt x="5007466" y="3116221"/>
+                  </a:lnTo>
+                  <a:lnTo>
+                    <a:pt x="5079089" y="3127856"/>
+                  </a:lnTo>
+                  <a:lnTo>
+                    <a:pt x="5150711" y="3139122"/>
+                  </a:lnTo>
+                  <a:lnTo>
+                    <a:pt x="5222334" y="3150032"/>
+                  </a:lnTo>
+                  <a:lnTo>
+                    <a:pt x="5293956" y="3160596"/>
+                  </a:lnTo>
+                  <a:lnTo>
+                    <a:pt x="5365579" y="3170825"/>
+                  </a:lnTo>
+                  <a:lnTo>
+                    <a:pt x="5437201" y="3180731"/>
+                  </a:lnTo>
+                  <a:lnTo>
+                    <a:pt x="5508824" y="3190324"/>
+                  </a:lnTo>
+                  <a:lnTo>
+                    <a:pt x="5580447" y="3199612"/>
+                  </a:lnTo>
+                  <a:lnTo>
+                    <a:pt x="5652069" y="3208607"/>
+                  </a:lnTo>
+                  <a:lnTo>
+                    <a:pt x="5723692" y="3217317"/>
+                  </a:lnTo>
+                  <a:lnTo>
+                    <a:pt x="5795314" y="3225751"/>
+                  </a:lnTo>
+                  <a:lnTo>
+                    <a:pt x="5866937" y="3233918"/>
+                  </a:lnTo>
+                  <a:lnTo>
+                    <a:pt x="5938559" y="3241827"/>
+                  </a:lnTo>
+                  <a:lnTo>
+                    <a:pt x="6010182" y="3249485"/>
+                  </a:lnTo>
+                  <a:lnTo>
+                    <a:pt x="6081804" y="3256901"/>
+                  </a:lnTo>
+                  <a:lnTo>
+                    <a:pt x="6153427" y="3264082"/>
+                  </a:lnTo>
+                  <a:lnTo>
+                    <a:pt x="6225049" y="3271036"/>
+                  </a:lnTo>
+                  <a:lnTo>
+                    <a:pt x="6296672" y="3277770"/>
+                  </a:lnTo>
+                  <a:lnTo>
+                    <a:pt x="6368294" y="3284290"/>
+                  </a:lnTo>
+                  <a:lnTo>
+                    <a:pt x="6439917" y="3290604"/>
+                  </a:lnTo>
+                  <a:lnTo>
+                    <a:pt x="6511539" y="3296718"/>
+                  </a:lnTo>
+                  <a:lnTo>
+                    <a:pt x="6583162" y="3302639"/>
+                  </a:lnTo>
+                  <a:lnTo>
+                    <a:pt x="6654784" y="3308372"/>
+                  </a:lnTo>
+                  <a:lnTo>
+                    <a:pt x="6726407" y="3313924"/>
+                  </a:lnTo>
+                  <a:lnTo>
+                    <a:pt x="6798029" y="3319300"/>
+                  </a:lnTo>
+                  <a:lnTo>
+                    <a:pt x="6869652" y="3324506"/>
                   </a:lnTo>
                 </a:path>
               </a:pathLst>
@@ -4464,7 +4421,7 @@
         </p:sp>
         <p:sp>
           <p:nvSpPr>
-            <p:cNvPr id="25" name="pl25"/>
+            <p:cNvPr id="24" name="pl24"/>
             <p:cNvSpPr/>
             <p:nvPr/>
           </p:nvSpPr>
@@ -4507,13 +4464,13 @@
         </p:sp>
         <p:sp>
           <p:nvSpPr>
-            <p:cNvPr id="26" name="pl26"/>
+            <p:cNvPr id="25" name="pl25"/>
             <p:cNvSpPr/>
             <p:nvPr/>
           </p:nvSpPr>
           <p:spPr>
             <a:xfrm>
-              <a:off x="4269157" y="2073503"/>
+              <a:off x="4588151" y="2073503"/>
               <a:ext cx="0" cy="3649639"/>
             </a:xfrm>
             <a:custGeom>
@@ -4550,7 +4507,7 @@
         </p:sp>
         <p:sp>
           <p:nvSpPr>
-            <p:cNvPr id="27" name="tx27"/>
+            <p:cNvPr id="26" name="tx26"/>
             <p:cNvSpPr/>
             <p:nvPr/>
           </p:nvSpPr>
@@ -4596,7 +4553,7 @@
         </p:sp>
         <p:sp>
           <p:nvSpPr>
-            <p:cNvPr id="28" name="tx28"/>
+            <p:cNvPr id="27" name="tx27"/>
             <p:cNvSpPr/>
             <p:nvPr/>
           </p:nvSpPr>
@@ -4642,7 +4599,7 @@
         </p:sp>
         <p:sp>
           <p:nvSpPr>
-            <p:cNvPr id="29" name="tx29"/>
+            <p:cNvPr id="28" name="tx28"/>
             <p:cNvSpPr/>
             <p:nvPr/>
           </p:nvSpPr>
@@ -4688,7 +4645,7 @@
         </p:sp>
         <p:sp>
           <p:nvSpPr>
-            <p:cNvPr id="30" name="tx30"/>
+            <p:cNvPr id="29" name="tx29"/>
             <p:cNvSpPr/>
             <p:nvPr/>
           </p:nvSpPr>
@@ -4734,7 +4691,7 @@
         </p:sp>
         <p:sp>
           <p:nvSpPr>
-            <p:cNvPr id="31" name="tx31"/>
+            <p:cNvPr id="30" name="tx30"/>
             <p:cNvSpPr/>
             <p:nvPr/>
           </p:nvSpPr>
@@ -4780,14 +4737,14 @@
         </p:sp>
         <p:sp>
           <p:nvSpPr>
-            <p:cNvPr id="32" name="tx32"/>
+            <p:cNvPr id="31" name="tx31"/>
             <p:cNvSpPr/>
             <p:nvPr/>
           </p:nvSpPr>
           <p:spPr>
             <a:xfrm>
-              <a:off x="2423864" y="5785772"/>
-              <a:ext cx="155356" cy="80101"/>
+              <a:off x="2360651" y="5785772"/>
+              <a:ext cx="161574" cy="80101"/>
             </a:xfrm>
             <a:prstGeom prst="rect">
               <a:avLst/>
@@ -4819,21 +4776,21 @@
                   <a:latin typeface="Helvetica"/>
                   <a:cs typeface="Helvetica"/>
                 </a:rPr>
-                <a:t>0.8</a:t>
+                <a:t>-25</a:t>
               </a:r>
             </a:p>
           </p:txBody>
         </p:sp>
         <p:sp>
           <p:nvSpPr>
-            <p:cNvPr id="33" name="tx33"/>
+            <p:cNvPr id="32" name="tx32"/>
             <p:cNvSpPr/>
             <p:nvPr/>
           </p:nvSpPr>
           <p:spPr>
             <a:xfrm>
-              <a:off x="4196521" y="5785772"/>
-              <a:ext cx="155356" cy="80101"/>
+              <a:off x="4561958" y="5785772"/>
+              <a:ext cx="62179" cy="80101"/>
             </a:xfrm>
             <a:prstGeom prst="rect">
               <a:avLst/>
@@ -4865,21 +4822,21 @@
                   <a:latin typeface="Helvetica"/>
                   <a:cs typeface="Helvetica"/>
                 </a:rPr>
-                <a:t>1.0</a:t>
+                <a:t>0</a:t>
               </a:r>
             </a:p>
           </p:txBody>
         </p:sp>
         <p:sp>
           <p:nvSpPr>
-            <p:cNvPr id="34" name="tx34"/>
+            <p:cNvPr id="33" name="tx33"/>
             <p:cNvSpPr/>
             <p:nvPr/>
           </p:nvSpPr>
           <p:spPr>
             <a:xfrm>
-              <a:off x="5969179" y="5785772"/>
-              <a:ext cx="155356" cy="80101"/>
+              <a:off x="6682478" y="5785772"/>
+              <a:ext cx="124358" cy="80101"/>
             </a:xfrm>
             <a:prstGeom prst="rect">
               <a:avLst/>
@@ -4911,67 +4868,21 @@
                   <a:latin typeface="Helvetica"/>
                   <a:cs typeface="Helvetica"/>
                 </a:rPr>
-                <a:t>1.2</a:t>
+                <a:t>25</a:t>
               </a:r>
             </a:p>
           </p:txBody>
         </p:sp>
         <p:sp>
           <p:nvSpPr>
-            <p:cNvPr id="35" name="tx35"/>
+            <p:cNvPr id="34" name="tx34"/>
             <p:cNvSpPr/>
             <p:nvPr/>
           </p:nvSpPr>
           <p:spPr>
             <a:xfrm>
-              <a:off x="7741836" y="5785772"/>
-              <a:ext cx="155356" cy="80101"/>
-            </a:xfrm>
-            <a:prstGeom prst="rect">
-              <a:avLst/>
-            </a:prstGeom>
-            <a:noFill/>
-          </p:spPr>
-          <p:txBody>
-            <a:bodyPr lIns="0" rIns="0" tIns="0" bIns="0" anchorCtr="1" anchor="ctr" wrap="none"/>
-            <a:lstStyle/>
-            <a:p>
-              <a:pPr algn="l" marL="0" marR="0" indent="0">
-                <a:lnSpc>
-                  <a:spcPts val="880"/>
-                </a:lnSpc>
-                <a:spcBef>
-                  <a:spcPts val="0"/>
-                </a:spcBef>
-                <a:spcAft>
-                  <a:spcPts val="0"/>
-                </a:spcAft>
-              </a:pPr>
-              <a:r>
-                <a:rPr sz="880">
-                  <a:solidFill>
-                    <a:srgbClr val="4D4D4D">
-                      <a:alpha val="100000"/>
-                    </a:srgbClr>
-                  </a:solidFill>
-                  <a:latin typeface="Helvetica"/>
-                  <a:cs typeface="Helvetica"/>
-                </a:rPr>
-                <a:t>1.4</a:t>
-              </a:r>
-            </a:p>
-          </p:txBody>
-        </p:sp>
-        <p:sp>
-          <p:nvSpPr>
-            <p:cNvPr id="36" name="tx36"/>
-            <p:cNvSpPr/>
-            <p:nvPr/>
-          </p:nvSpPr>
-          <p:spPr>
-            <a:xfrm>
-              <a:off x="3879271" y="5925448"/>
-              <a:ext cx="1676186" cy="100218"/>
+              <a:off x="2928340" y="5925448"/>
+              <a:ext cx="3578047" cy="100218"/>
             </a:xfrm>
             <a:prstGeom prst="rect">
               <a:avLst/>
@@ -5003,14 +4914,14 @@
                   <a:latin typeface="Helvetica"/>
                   <a:cs typeface="Helvetica"/>
                 </a:rPr>
-                <a:t>CKD-EPI Cr-Cys / CG ratio</a:t>
+                <a:t>eGFR difference (%): 100 × (CKD-EPI Cr-Cys − CG) / CG</a:t>
               </a:r>
             </a:p>
           </p:txBody>
         </p:sp>
         <p:sp>
           <p:nvSpPr>
-            <p:cNvPr id="37" name="tx37"/>
+            <p:cNvPr id="35" name="tx35"/>
             <p:cNvSpPr/>
             <p:nvPr/>
           </p:nvSpPr>
@@ -5056,14 +4967,14 @@
         </p:sp>
         <p:sp>
           <p:nvSpPr>
-            <p:cNvPr id="38" name="tx38"/>
+            <p:cNvPr id="36" name="tx36"/>
             <p:cNvSpPr/>
             <p:nvPr/>
           </p:nvSpPr>
           <p:spPr>
             <a:xfrm>
               <a:off x="817517" y="1896563"/>
-              <a:ext cx="6169365" cy="82021"/>
+              <a:ext cx="6321612" cy="82021"/>
             </a:xfrm>
             <a:prstGeom prst="rect">
               <a:avLst/>
@@ -5095,14 +5006,14 @@
                   <a:latin typeface="Helvetica"/>
                   <a:cs typeface="Helvetica"/>
                 </a:rPr>
-                <a:t>subHR per 0.1 ratio decline: 1.47 (1.05-2.07), p = 0.026  |  per IQR decline (Δ = 0.29): 3.10 (1.14-8.41)  |  IQR: [0.85, 1.15]</a:t>
+                <a:t>subHR per 10 % decline: 1.47 (1.05-2.07), p = 0.026  |  per IQR decline (Δ = 29.3 %): 3.10 (1.14-8.41)  |  IQR: [-14.6, 14.7] %</a:t>
               </a:r>
             </a:p>
           </p:txBody>
         </p:sp>
         <p:sp>
           <p:nvSpPr>
-            <p:cNvPr id="39" name="tx39"/>
+            <p:cNvPr id="37" name="tx37"/>
             <p:cNvSpPr/>
             <p:nvPr/>
           </p:nvSpPr>

--- a/docs/pptx/whole/jx-linsubhr-ratio-hosp4.pptx
+++ b/docs/pptx/whole/jx-linsubhr-ratio-hosp4.pptx
@@ -2265,34 +2265,26 @@
         </p:sp>
         <p:sp>
           <p:nvSpPr>
-            <p:cNvPr id="4" name="pl4"/>
+            <p:cNvPr id="4" name="rc4"/>
             <p:cNvSpPr/>
             <p:nvPr/>
           </p:nvSpPr>
           <p:spPr>
             <a:xfrm>
-              <a:off x="817517" y="5142518"/>
-              <a:ext cx="7799693" cy="0"/>
+              <a:off x="457200" y="1600200"/>
+              <a:ext cx="8229600" cy="4525962"/>
             </a:xfrm>
-            <a:custGeom>
+            <a:prstGeom prst="rect">
               <a:avLst/>
-              <a:pathLst>
-                <a:path w="7799693" h="0">
-                  <a:moveTo>
-                    <a:pt x="0" y="0"/>
-                  </a:moveTo>
-                  <a:lnTo>
-                    <a:pt x="7799693" y="0"/>
-                  </a:lnTo>
-                  <a:lnTo>
-                    <a:pt x="7799693" y="0"/>
-                  </a:lnTo>
-                </a:path>
-              </a:pathLst>
-            </a:custGeom>
-            <a:ln w="6775" cap="flat">
+            </a:prstGeom>
+            <a:solidFill>
+              <a:srgbClr val="FFFFFF">
+                <a:alpha val="100000"/>
+              </a:srgbClr>
+            </a:solidFill>
+            <a:ln w="13550" cap="rnd">
               <a:solidFill>
-                <a:srgbClr val="EBEBEB">
+                <a:srgbClr val="FFFFFF">
                   <a:alpha val="100000"/>
                 </a:srgbClr>
               </a:solidFill>
@@ -2314,21 +2306,21 @@
           </p:nvSpPr>
           <p:spPr>
             <a:xfrm>
-              <a:off x="817517" y="4313054"/>
-              <a:ext cx="7799693" cy="0"/>
+              <a:off x="887106" y="3250627"/>
+              <a:ext cx="7660515" cy="0"/>
             </a:xfrm>
             <a:custGeom>
               <a:avLst/>
               <a:pathLst>
-                <a:path w="7799693" h="0">
+                <a:path w="7660515" h="0">
                   <a:moveTo>
                     <a:pt x="0" y="0"/>
                   </a:moveTo>
                   <a:lnTo>
-                    <a:pt x="7799693" y="0"/>
-                  </a:lnTo>
-                  <a:lnTo>
-                    <a:pt x="7799693" y="0"/>
+                    <a:pt x="7660515" y="0"/>
+                  </a:lnTo>
+                  <a:lnTo>
+                    <a:pt x="7660515" y="0"/>
                   </a:lnTo>
                 </a:path>
               </a:pathLst>
@@ -2357,21 +2349,21 @@
           </p:nvSpPr>
           <p:spPr>
             <a:xfrm>
-              <a:off x="817517" y="3483591"/>
-              <a:ext cx="7799693" cy="0"/>
+              <a:off x="887106" y="2951293"/>
+              <a:ext cx="7660515" cy="0"/>
             </a:xfrm>
             <a:custGeom>
               <a:avLst/>
               <a:pathLst>
-                <a:path w="7799693" h="0">
+                <a:path w="7660515" h="0">
                   <a:moveTo>
                     <a:pt x="0" y="0"/>
                   </a:moveTo>
                   <a:lnTo>
-                    <a:pt x="7799693" y="0"/>
-                  </a:lnTo>
-                  <a:lnTo>
-                    <a:pt x="7799693" y="0"/>
+                    <a:pt x="7660515" y="0"/>
+                  </a:lnTo>
+                  <a:lnTo>
+                    <a:pt x="7660515" y="0"/>
                   </a:lnTo>
                 </a:path>
               </a:pathLst>
@@ -2400,21 +2392,21 @@
           </p:nvSpPr>
           <p:spPr>
             <a:xfrm>
-              <a:off x="817517" y="2654127"/>
-              <a:ext cx="7799693" cy="0"/>
+              <a:off x="887106" y="2651959"/>
+              <a:ext cx="7660515" cy="0"/>
             </a:xfrm>
             <a:custGeom>
               <a:avLst/>
               <a:pathLst>
-                <a:path w="7799693" h="0">
+                <a:path w="7660515" h="0">
                   <a:moveTo>
                     <a:pt x="0" y="0"/>
                   </a:moveTo>
                   <a:lnTo>
-                    <a:pt x="7799693" y="0"/>
-                  </a:lnTo>
-                  <a:lnTo>
-                    <a:pt x="7799693" y="0"/>
+                    <a:pt x="7660515" y="0"/>
+                  </a:lnTo>
+                  <a:lnTo>
+                    <a:pt x="7660515" y="0"/>
                   </a:lnTo>
                 </a:path>
               </a:pathLst>
@@ -2443,21 +2435,21 @@
           </p:nvSpPr>
           <p:spPr>
             <a:xfrm>
-              <a:off x="1365633" y="2073503"/>
-              <a:ext cx="0" cy="3649639"/>
+              <a:off x="887106" y="2352625"/>
+              <a:ext cx="7660515" cy="0"/>
             </a:xfrm>
             <a:custGeom>
               <a:avLst/>
               <a:pathLst>
-                <a:path w="0" h="3649639">
+                <a:path w="7660515" h="0">
                   <a:moveTo>
-                    <a:pt x="0" y="3649639"/>
+                    <a:pt x="0" y="0"/>
                   </a:moveTo>
                   <a:lnTo>
-                    <a:pt x="0" y="0"/>
-                  </a:lnTo>
-                  <a:lnTo>
-                    <a:pt x="0" y="0"/>
+                    <a:pt x="7660515" y="0"/>
+                  </a:lnTo>
+                  <a:lnTo>
+                    <a:pt x="7660515" y="0"/>
                   </a:lnTo>
                 </a:path>
               </a:pathLst>
@@ -2486,15 +2478,15 @@
           </p:nvSpPr>
           <p:spPr>
             <a:xfrm>
-              <a:off x="3517243" y="2073503"/>
-              <a:ext cx="0" cy="3649639"/>
+              <a:off x="1425442" y="2143092"/>
+              <a:ext cx="0" cy="1317069"/>
             </a:xfrm>
             <a:custGeom>
               <a:avLst/>
               <a:pathLst>
-                <a:path w="0" h="3649639">
+                <a:path w="0" h="1317069">
                   <a:moveTo>
-                    <a:pt x="0" y="3649639"/>
+                    <a:pt x="0" y="1317069"/>
                   </a:moveTo>
                   <a:lnTo>
                     <a:pt x="0" y="0"/>
@@ -2529,15 +2521,15 @@
           </p:nvSpPr>
           <p:spPr>
             <a:xfrm>
-              <a:off x="5668852" y="2073503"/>
-              <a:ext cx="0" cy="3649639"/>
+              <a:off x="3538658" y="2143092"/>
+              <a:ext cx="0" cy="1317069"/>
             </a:xfrm>
             <a:custGeom>
               <a:avLst/>
               <a:pathLst>
-                <a:path w="0" h="3649639">
+                <a:path w="0" h="1317069">
                   <a:moveTo>
-                    <a:pt x="0" y="3649639"/>
+                    <a:pt x="0" y="1317069"/>
                   </a:moveTo>
                   <a:lnTo>
                     <a:pt x="0" y="0"/>
@@ -2572,15 +2564,15 @@
           </p:nvSpPr>
           <p:spPr>
             <a:xfrm>
-              <a:off x="7820461" y="2073503"/>
-              <a:ext cx="0" cy="3649639"/>
+              <a:off x="5651874" y="2143092"/>
+              <a:ext cx="0" cy="1317069"/>
             </a:xfrm>
             <a:custGeom>
               <a:avLst/>
               <a:pathLst>
-                <a:path w="0" h="3649639">
+                <a:path w="0" h="1317069">
                   <a:moveTo>
-                    <a:pt x="0" y="3649639"/>
+                    <a:pt x="0" y="1317069"/>
                   </a:moveTo>
                   <a:lnTo>
                     <a:pt x="0" y="0"/>
@@ -2615,26 +2607,26 @@
           </p:nvSpPr>
           <p:spPr>
             <a:xfrm>
-              <a:off x="817517" y="5557249"/>
-              <a:ext cx="7799693" cy="0"/>
+              <a:off x="7765090" y="2143092"/>
+              <a:ext cx="0" cy="1317069"/>
             </a:xfrm>
             <a:custGeom>
               <a:avLst/>
               <a:pathLst>
-                <a:path w="7799693" h="0">
+                <a:path w="0" h="1317069">
                   <a:moveTo>
+                    <a:pt x="0" y="1317069"/>
+                  </a:moveTo>
+                  <a:lnTo>
                     <a:pt x="0" y="0"/>
-                  </a:moveTo>
-                  <a:lnTo>
-                    <a:pt x="7799693" y="0"/>
-                  </a:lnTo>
-                  <a:lnTo>
-                    <a:pt x="7799693" y="0"/>
+                  </a:lnTo>
+                  <a:lnTo>
+                    <a:pt x="0" y="0"/>
                   </a:lnTo>
                 </a:path>
               </a:pathLst>
             </a:custGeom>
-            <a:ln w="13550" cap="flat">
+            <a:ln w="6775" cap="flat">
               <a:solidFill>
                 <a:srgbClr val="EBEBEB">
                   <a:alpha val="100000"/>
@@ -2658,21 +2650,21 @@
           </p:nvSpPr>
           <p:spPr>
             <a:xfrm>
-              <a:off x="817517" y="4727786"/>
-              <a:ext cx="7799693" cy="0"/>
+              <a:off x="887106" y="3400294"/>
+              <a:ext cx="7660515" cy="0"/>
             </a:xfrm>
             <a:custGeom>
               <a:avLst/>
               <a:pathLst>
-                <a:path w="7799693" h="0">
+                <a:path w="7660515" h="0">
                   <a:moveTo>
                     <a:pt x="0" y="0"/>
                   </a:moveTo>
                   <a:lnTo>
-                    <a:pt x="7799693" y="0"/>
-                  </a:lnTo>
-                  <a:lnTo>
-                    <a:pt x="7799693" y="0"/>
+                    <a:pt x="7660515" y="0"/>
+                  </a:lnTo>
+                  <a:lnTo>
+                    <a:pt x="7660515" y="0"/>
                   </a:lnTo>
                 </a:path>
               </a:pathLst>
@@ -2701,21 +2693,21 @@
           </p:nvSpPr>
           <p:spPr>
             <a:xfrm>
-              <a:off x="817517" y="3898322"/>
-              <a:ext cx="7799693" cy="0"/>
+              <a:off x="887106" y="3100960"/>
+              <a:ext cx="7660515" cy="0"/>
             </a:xfrm>
             <a:custGeom>
               <a:avLst/>
               <a:pathLst>
-                <a:path w="7799693" h="0">
+                <a:path w="7660515" h="0">
                   <a:moveTo>
                     <a:pt x="0" y="0"/>
                   </a:moveTo>
                   <a:lnTo>
-                    <a:pt x="7799693" y="0"/>
-                  </a:lnTo>
-                  <a:lnTo>
-                    <a:pt x="7799693" y="0"/>
+                    <a:pt x="7660515" y="0"/>
+                  </a:lnTo>
+                  <a:lnTo>
+                    <a:pt x="7660515" y="0"/>
                   </a:lnTo>
                 </a:path>
               </a:pathLst>
@@ -2744,21 +2736,21 @@
           </p:nvSpPr>
           <p:spPr>
             <a:xfrm>
-              <a:off x="817517" y="3068859"/>
-              <a:ext cx="7799693" cy="0"/>
+              <a:off x="887106" y="2801626"/>
+              <a:ext cx="7660515" cy="0"/>
             </a:xfrm>
             <a:custGeom>
               <a:avLst/>
               <a:pathLst>
-                <a:path w="7799693" h="0">
+                <a:path w="7660515" h="0">
                   <a:moveTo>
                     <a:pt x="0" y="0"/>
                   </a:moveTo>
                   <a:lnTo>
-                    <a:pt x="7799693" y="0"/>
-                  </a:lnTo>
-                  <a:lnTo>
-                    <a:pt x="7799693" y="0"/>
+                    <a:pt x="7660515" y="0"/>
+                  </a:lnTo>
+                  <a:lnTo>
+                    <a:pt x="7660515" y="0"/>
                   </a:lnTo>
                 </a:path>
               </a:pathLst>
@@ -2787,21 +2779,21 @@
           </p:nvSpPr>
           <p:spPr>
             <a:xfrm>
-              <a:off x="817517" y="2239395"/>
-              <a:ext cx="7799693" cy="0"/>
+              <a:off x="887106" y="2502292"/>
+              <a:ext cx="7660515" cy="0"/>
             </a:xfrm>
             <a:custGeom>
               <a:avLst/>
               <a:pathLst>
-                <a:path w="7799693" h="0">
+                <a:path w="7660515" h="0">
                   <a:moveTo>
                     <a:pt x="0" y="0"/>
                   </a:moveTo>
                   <a:lnTo>
-                    <a:pt x="7799693" y="0"/>
-                  </a:lnTo>
-                  <a:lnTo>
-                    <a:pt x="7799693" y="0"/>
+                    <a:pt x="7660515" y="0"/>
+                  </a:lnTo>
+                  <a:lnTo>
+                    <a:pt x="7660515" y="0"/>
                   </a:lnTo>
                 </a:path>
               </a:pathLst>
@@ -2830,21 +2822,21 @@
           </p:nvSpPr>
           <p:spPr>
             <a:xfrm>
-              <a:off x="2441438" y="2073503"/>
-              <a:ext cx="0" cy="3649639"/>
+              <a:off x="887106" y="2202958"/>
+              <a:ext cx="7660515" cy="0"/>
             </a:xfrm>
             <a:custGeom>
               <a:avLst/>
               <a:pathLst>
-                <a:path w="0" h="3649639">
+                <a:path w="7660515" h="0">
                   <a:moveTo>
-                    <a:pt x="0" y="3649639"/>
+                    <a:pt x="0" y="0"/>
                   </a:moveTo>
                   <a:lnTo>
-                    <a:pt x="0" y="0"/>
-                  </a:lnTo>
-                  <a:lnTo>
-                    <a:pt x="0" y="0"/>
+                    <a:pt x="7660515" y="0"/>
+                  </a:lnTo>
+                  <a:lnTo>
+                    <a:pt x="7660515" y="0"/>
                   </a:lnTo>
                 </a:path>
               </a:pathLst>
@@ -2873,15 +2865,15 @@
           </p:nvSpPr>
           <p:spPr>
             <a:xfrm>
-              <a:off x="4593047" y="2073503"/>
-              <a:ext cx="0" cy="3649639"/>
+              <a:off x="2482050" y="2143092"/>
+              <a:ext cx="0" cy="1317069"/>
             </a:xfrm>
             <a:custGeom>
               <a:avLst/>
               <a:pathLst>
-                <a:path w="0" h="3649639">
+                <a:path w="0" h="1317069">
                   <a:moveTo>
-                    <a:pt x="0" y="3649639"/>
+                    <a:pt x="0" y="1317069"/>
                   </a:moveTo>
                   <a:lnTo>
                     <a:pt x="0" y="0"/>
@@ -2916,15 +2908,15 @@
           </p:nvSpPr>
           <p:spPr>
             <a:xfrm>
-              <a:off x="6744657" y="2073503"/>
-              <a:ext cx="0" cy="3649639"/>
+              <a:off x="4595266" y="2143092"/>
+              <a:ext cx="0" cy="1317069"/>
             </a:xfrm>
             <a:custGeom>
               <a:avLst/>
               <a:pathLst>
-                <a:path w="0" h="3649639">
+                <a:path w="0" h="1317069">
                   <a:moveTo>
-                    <a:pt x="0" y="3649639"/>
+                    <a:pt x="0" y="1317069"/>
                   </a:moveTo>
                   <a:lnTo>
                     <a:pt x="0" y="0"/>
@@ -2953,549 +2945,592 @@
         </p:sp>
         <p:sp>
           <p:nvSpPr>
-            <p:cNvPr id="20" name="pg20"/>
+            <p:cNvPr id="20" name="pl20"/>
             <p:cNvSpPr/>
             <p:nvPr/>
           </p:nvSpPr>
           <p:spPr>
             <a:xfrm>
-              <a:off x="1172049" y="2073503"/>
-              <a:ext cx="7090630" cy="3446589"/>
+              <a:off x="6708482" y="2143092"/>
+              <a:ext cx="0" cy="1317069"/>
             </a:xfrm>
             <a:custGeom>
               <a:avLst/>
               <a:pathLst>
-                <a:path w="7090630" h="3446589">
+                <a:path w="0" h="1317069">
                   <a:moveTo>
-                    <a:pt x="1718154" y="0"/>
+                    <a:pt x="0" y="1317069"/>
                   </a:moveTo>
                   <a:lnTo>
-                    <a:pt x="1718940" y="2384"/>
-                  </a:lnTo>
-                  <a:lnTo>
-                    <a:pt x="1790563" y="206872"/>
-                  </a:lnTo>
-                  <a:lnTo>
-                    <a:pt x="1862185" y="399348"/>
-                  </a:lnTo>
-                  <a:lnTo>
-                    <a:pt x="1933808" y="580519"/>
-                  </a:lnTo>
-                  <a:lnTo>
-                    <a:pt x="2005430" y="751049"/>
-                  </a:lnTo>
-                  <a:lnTo>
-                    <a:pt x="2077053" y="911562"/>
-                  </a:lnTo>
-                  <a:lnTo>
-                    <a:pt x="2148675" y="1062646"/>
-                  </a:lnTo>
-                  <a:lnTo>
-                    <a:pt x="2220298" y="1204857"/>
-                  </a:lnTo>
-                  <a:lnTo>
-                    <a:pt x="2291920" y="1338714"/>
-                  </a:lnTo>
-                  <a:lnTo>
-                    <a:pt x="2363543" y="1464708"/>
-                  </a:lnTo>
-                  <a:lnTo>
-                    <a:pt x="2435165" y="1583302"/>
-                  </a:lnTo>
-                  <a:lnTo>
-                    <a:pt x="2506788" y="1694930"/>
-                  </a:lnTo>
-                  <a:lnTo>
-                    <a:pt x="2578410" y="1800002"/>
-                  </a:lnTo>
-                  <a:lnTo>
-                    <a:pt x="2650033" y="1898901"/>
-                  </a:lnTo>
-                  <a:lnTo>
-                    <a:pt x="2721655" y="1991992"/>
-                  </a:lnTo>
-                  <a:lnTo>
-                    <a:pt x="2793278" y="2079614"/>
-                  </a:lnTo>
-                  <a:lnTo>
-                    <a:pt x="2864901" y="2162090"/>
-                  </a:lnTo>
-                  <a:lnTo>
-                    <a:pt x="2936523" y="2239721"/>
-                  </a:lnTo>
-                  <a:lnTo>
-                    <a:pt x="3008146" y="2312793"/>
-                  </a:lnTo>
-                  <a:lnTo>
-                    <a:pt x="3079768" y="2381572"/>
-                  </a:lnTo>
-                  <a:lnTo>
-                    <a:pt x="3151391" y="2446311"/>
-                  </a:lnTo>
-                  <a:lnTo>
-                    <a:pt x="3223013" y="2507248"/>
-                  </a:lnTo>
-                  <a:lnTo>
-                    <a:pt x="3294636" y="2564606"/>
-                  </a:lnTo>
-                  <a:lnTo>
-                    <a:pt x="3366258" y="2618594"/>
-                  </a:lnTo>
-                  <a:lnTo>
-                    <a:pt x="3437881" y="2655241"/>
-                  </a:lnTo>
-                  <a:lnTo>
-                    <a:pt x="3509503" y="2658386"/>
-                  </a:lnTo>
-                  <a:lnTo>
-                    <a:pt x="3581126" y="2661519"/>
-                  </a:lnTo>
-                  <a:lnTo>
-                    <a:pt x="3652748" y="2664640"/>
-                  </a:lnTo>
-                  <a:lnTo>
-                    <a:pt x="3724371" y="2667749"/>
-                  </a:lnTo>
-                  <a:lnTo>
-                    <a:pt x="3795993" y="2670846"/>
-                  </a:lnTo>
-                  <a:lnTo>
-                    <a:pt x="3867616" y="2673931"/>
-                  </a:lnTo>
-                  <a:lnTo>
-                    <a:pt x="3939238" y="2677005"/>
-                  </a:lnTo>
-                  <a:lnTo>
-                    <a:pt x="4010861" y="2680067"/>
-                  </a:lnTo>
-                  <a:lnTo>
-                    <a:pt x="4082483" y="2683118"/>
-                  </a:lnTo>
-                  <a:lnTo>
-                    <a:pt x="4154106" y="2686157"/>
-                  </a:lnTo>
-                  <a:lnTo>
-                    <a:pt x="4225729" y="2689184"/>
-                  </a:lnTo>
-                  <a:lnTo>
-                    <a:pt x="4297351" y="2692200"/>
-                  </a:lnTo>
-                  <a:lnTo>
-                    <a:pt x="4368974" y="2695204"/>
-                  </a:lnTo>
-                  <a:lnTo>
-                    <a:pt x="4440596" y="2698197"/>
-                  </a:lnTo>
-                  <a:lnTo>
-                    <a:pt x="4512219" y="2701179"/>
-                  </a:lnTo>
-                  <a:lnTo>
-                    <a:pt x="4583841" y="2704149"/>
-                  </a:lnTo>
-                  <a:lnTo>
-                    <a:pt x="4655464" y="2707108"/>
-                  </a:lnTo>
-                  <a:lnTo>
-                    <a:pt x="4727086" y="2710056"/>
-                  </a:lnTo>
-                  <a:lnTo>
-                    <a:pt x="4798709" y="2712993"/>
-                  </a:lnTo>
-                  <a:lnTo>
-                    <a:pt x="4870331" y="2715918"/>
-                  </a:lnTo>
-                  <a:lnTo>
-                    <a:pt x="4941954" y="2718833"/>
-                  </a:lnTo>
-                  <a:lnTo>
-                    <a:pt x="5013576" y="2721736"/>
-                  </a:lnTo>
-                  <a:lnTo>
-                    <a:pt x="5085199" y="2724628"/>
-                  </a:lnTo>
-                  <a:lnTo>
-                    <a:pt x="5156821" y="2727510"/>
-                  </a:lnTo>
-                  <a:lnTo>
-                    <a:pt x="5228444" y="2730380"/>
-                  </a:lnTo>
-                  <a:lnTo>
-                    <a:pt x="5300066" y="2733239"/>
-                  </a:lnTo>
-                  <a:lnTo>
-                    <a:pt x="5371689" y="2736088"/>
-                  </a:lnTo>
-                  <a:lnTo>
-                    <a:pt x="5443311" y="2738926"/>
-                  </a:lnTo>
-                  <a:lnTo>
-                    <a:pt x="5514934" y="2741753"/>
-                  </a:lnTo>
-                  <a:lnTo>
-                    <a:pt x="5586557" y="2744569"/>
-                  </a:lnTo>
-                  <a:lnTo>
-                    <a:pt x="5658179" y="2747375"/>
-                  </a:lnTo>
-                  <a:lnTo>
-                    <a:pt x="5729802" y="2750170"/>
-                  </a:lnTo>
-                  <a:lnTo>
-                    <a:pt x="5801424" y="2752954"/>
-                  </a:lnTo>
-                  <a:lnTo>
-                    <a:pt x="5873047" y="2755728"/>
-                  </a:lnTo>
-                  <a:lnTo>
-                    <a:pt x="5944669" y="2758491"/>
-                  </a:lnTo>
-                  <a:lnTo>
-                    <a:pt x="6016292" y="2761244"/>
-                  </a:lnTo>
-                  <a:lnTo>
-                    <a:pt x="6087914" y="2763987"/>
-                  </a:lnTo>
-                  <a:lnTo>
-                    <a:pt x="6159537" y="2766718"/>
-                  </a:lnTo>
-                  <a:lnTo>
-                    <a:pt x="6231159" y="2769440"/>
-                  </a:lnTo>
-                  <a:lnTo>
-                    <a:pt x="6302782" y="2772151"/>
-                  </a:lnTo>
-                  <a:lnTo>
-                    <a:pt x="6374404" y="2774852"/>
-                  </a:lnTo>
-                  <a:lnTo>
-                    <a:pt x="6446027" y="2777543"/>
-                  </a:lnTo>
-                  <a:lnTo>
-                    <a:pt x="6517649" y="2780223"/>
-                  </a:lnTo>
-                  <a:lnTo>
-                    <a:pt x="6589272" y="2782894"/>
-                  </a:lnTo>
-                  <a:lnTo>
-                    <a:pt x="6660894" y="2785554"/>
-                  </a:lnTo>
-                  <a:lnTo>
-                    <a:pt x="6732517" y="2788204"/>
-                  </a:lnTo>
-                  <a:lnTo>
-                    <a:pt x="6804139" y="2790844"/>
-                  </a:lnTo>
-                  <a:lnTo>
-                    <a:pt x="6875762" y="2793474"/>
-                  </a:lnTo>
-                  <a:lnTo>
-                    <a:pt x="6947385" y="2796094"/>
-                  </a:lnTo>
-                  <a:lnTo>
-                    <a:pt x="7019007" y="2798704"/>
-                  </a:lnTo>
-                  <a:lnTo>
-                    <a:pt x="7090630" y="2801304"/>
-                  </a:lnTo>
-                  <a:lnTo>
-                    <a:pt x="7090630" y="3446589"/>
-                  </a:lnTo>
-                  <a:lnTo>
-                    <a:pt x="7019007" y="3444270"/>
-                  </a:lnTo>
-                  <a:lnTo>
-                    <a:pt x="6947385" y="3441807"/>
-                  </a:lnTo>
-                  <a:lnTo>
-                    <a:pt x="6875762" y="3439190"/>
-                  </a:lnTo>
-                  <a:lnTo>
-                    <a:pt x="6804139" y="3436409"/>
-                  </a:lnTo>
-                  <a:lnTo>
-                    <a:pt x="6732517" y="3433455"/>
-                  </a:lnTo>
-                  <a:lnTo>
-                    <a:pt x="6660894" y="3430317"/>
-                  </a:lnTo>
-                  <a:lnTo>
-                    <a:pt x="6589272" y="3426983"/>
-                  </a:lnTo>
-                  <a:lnTo>
-                    <a:pt x="6517649" y="3423441"/>
-                  </a:lnTo>
-                  <a:lnTo>
-                    <a:pt x="6446027" y="3419677"/>
-                  </a:lnTo>
-                  <a:lnTo>
-                    <a:pt x="6374404" y="3415679"/>
-                  </a:lnTo>
-                  <a:lnTo>
-                    <a:pt x="6302782" y="3411432"/>
-                  </a:lnTo>
-                  <a:lnTo>
-                    <a:pt x="6231159" y="3406919"/>
-                  </a:lnTo>
-                  <a:lnTo>
-                    <a:pt x="6159537" y="3402125"/>
-                  </a:lnTo>
-                  <a:lnTo>
-                    <a:pt x="6087914" y="3397031"/>
-                  </a:lnTo>
-                  <a:lnTo>
-                    <a:pt x="6016292" y="3391620"/>
-                  </a:lnTo>
-                  <a:lnTo>
-                    <a:pt x="5944669" y="3385871"/>
-                  </a:lnTo>
-                  <a:lnTo>
-                    <a:pt x="5873047" y="3379763"/>
-                  </a:lnTo>
-                  <a:lnTo>
-                    <a:pt x="5801424" y="3373274"/>
-                  </a:lnTo>
-                  <a:lnTo>
-                    <a:pt x="5729802" y="3366381"/>
-                  </a:lnTo>
-                  <a:lnTo>
-                    <a:pt x="5658179" y="3359057"/>
-                  </a:lnTo>
-                  <a:lnTo>
-                    <a:pt x="5586557" y="3351275"/>
-                  </a:lnTo>
-                  <a:lnTo>
-                    <a:pt x="5514934" y="3343009"/>
-                  </a:lnTo>
-                  <a:lnTo>
-                    <a:pt x="5443311" y="3334226"/>
-                  </a:lnTo>
-                  <a:lnTo>
-                    <a:pt x="5371689" y="3324896"/>
-                  </a:lnTo>
-                  <a:lnTo>
-                    <a:pt x="5300066" y="3314983"/>
-                  </a:lnTo>
-                  <a:lnTo>
-                    <a:pt x="5228444" y="3304452"/>
-                  </a:lnTo>
-                  <a:lnTo>
-                    <a:pt x="5156821" y="3293263"/>
-                  </a:lnTo>
-                  <a:lnTo>
-                    <a:pt x="5085199" y="3281376"/>
-                  </a:lnTo>
-                  <a:lnTo>
-                    <a:pt x="5013576" y="3268748"/>
-                  </a:lnTo>
-                  <a:lnTo>
-                    <a:pt x="4941954" y="3255331"/>
-                  </a:lnTo>
-                  <a:lnTo>
-                    <a:pt x="4870331" y="3241077"/>
-                  </a:lnTo>
-                  <a:lnTo>
-                    <a:pt x="4798709" y="3225934"/>
-                  </a:lnTo>
-                  <a:lnTo>
-                    <a:pt x="4727086" y="3209845"/>
-                  </a:lnTo>
-                  <a:lnTo>
-                    <a:pt x="4655464" y="3192753"/>
-                  </a:lnTo>
-                  <a:lnTo>
-                    <a:pt x="4583841" y="3174594"/>
-                  </a:lnTo>
-                  <a:lnTo>
-                    <a:pt x="4512219" y="3155302"/>
-                  </a:lnTo>
-                  <a:lnTo>
-                    <a:pt x="4440596" y="3134806"/>
-                  </a:lnTo>
-                  <a:lnTo>
-                    <a:pt x="4368974" y="3113031"/>
-                  </a:lnTo>
-                  <a:lnTo>
-                    <a:pt x="4297351" y="3089897"/>
-                  </a:lnTo>
-                  <a:lnTo>
-                    <a:pt x="4225729" y="3065319"/>
-                  </a:lnTo>
-                  <a:lnTo>
-                    <a:pt x="4154106" y="3039208"/>
-                  </a:lnTo>
-                  <a:lnTo>
-                    <a:pt x="4082483" y="3011468"/>
-                  </a:lnTo>
-                  <a:lnTo>
-                    <a:pt x="4010861" y="2981996"/>
-                  </a:lnTo>
-                  <a:lnTo>
-                    <a:pt x="3939238" y="2950685"/>
-                  </a:lnTo>
-                  <a:lnTo>
-                    <a:pt x="3867616" y="2917420"/>
-                  </a:lnTo>
-                  <a:lnTo>
-                    <a:pt x="3795993" y="2882080"/>
-                  </a:lnTo>
-                  <a:lnTo>
-                    <a:pt x="3724371" y="2844533"/>
-                  </a:lnTo>
-                  <a:lnTo>
-                    <a:pt x="3652748" y="2804644"/>
-                  </a:lnTo>
-                  <a:lnTo>
-                    <a:pt x="3581126" y="2762266"/>
-                  </a:lnTo>
-                  <a:lnTo>
-                    <a:pt x="3509503" y="2717244"/>
-                  </a:lnTo>
-                  <a:lnTo>
-                    <a:pt x="3437881" y="2669411"/>
-                  </a:lnTo>
-                  <a:lnTo>
-                    <a:pt x="3366258" y="2652085"/>
-                  </a:lnTo>
-                  <a:lnTo>
-                    <a:pt x="3294636" y="2648916"/>
-                  </a:lnTo>
-                  <a:lnTo>
-                    <a:pt x="3223013" y="2645735"/>
-                  </a:lnTo>
-                  <a:lnTo>
-                    <a:pt x="3151391" y="2642542"/>
-                  </a:lnTo>
-                  <a:lnTo>
-                    <a:pt x="3079768" y="2639337"/>
-                  </a:lnTo>
-                  <a:lnTo>
-                    <a:pt x="3008146" y="2636120"/>
-                  </a:lnTo>
-                  <a:lnTo>
-                    <a:pt x="2936523" y="2632891"/>
-                  </a:lnTo>
-                  <a:lnTo>
-                    <a:pt x="2864901" y="2629649"/>
-                  </a:lnTo>
-                  <a:lnTo>
-                    <a:pt x="2793278" y="2626395"/>
-                  </a:lnTo>
-                  <a:lnTo>
-                    <a:pt x="2721655" y="2623128"/>
-                  </a:lnTo>
-                  <a:lnTo>
-                    <a:pt x="2650033" y="2619849"/>
-                  </a:lnTo>
-                  <a:lnTo>
-                    <a:pt x="2578410" y="2616557"/>
-                  </a:lnTo>
-                  <a:lnTo>
-                    <a:pt x="2506788" y="2613253"/>
-                  </a:lnTo>
-                  <a:lnTo>
-                    <a:pt x="2435165" y="2609937"/>
-                  </a:lnTo>
-                  <a:lnTo>
-                    <a:pt x="2363543" y="2606607"/>
-                  </a:lnTo>
-                  <a:lnTo>
-                    <a:pt x="2291920" y="2603265"/>
-                  </a:lnTo>
-                  <a:lnTo>
-                    <a:pt x="2220298" y="2599911"/>
-                  </a:lnTo>
-                  <a:lnTo>
-                    <a:pt x="2148675" y="2596543"/>
-                  </a:lnTo>
-                  <a:lnTo>
-                    <a:pt x="2077053" y="2593163"/>
-                  </a:lnTo>
-                  <a:lnTo>
-                    <a:pt x="2005430" y="2589770"/>
-                  </a:lnTo>
-                  <a:lnTo>
-                    <a:pt x="1933808" y="2586364"/>
-                  </a:lnTo>
-                  <a:lnTo>
-                    <a:pt x="1862185" y="2582945"/>
-                  </a:lnTo>
-                  <a:lnTo>
-                    <a:pt x="1790563" y="2579512"/>
-                  </a:lnTo>
-                  <a:lnTo>
-                    <a:pt x="1718940" y="2576067"/>
-                  </a:lnTo>
-                  <a:lnTo>
-                    <a:pt x="1647318" y="2572609"/>
-                  </a:lnTo>
-                  <a:lnTo>
-                    <a:pt x="1575695" y="2569137"/>
-                  </a:lnTo>
-                  <a:lnTo>
-                    <a:pt x="1504073" y="2565653"/>
-                  </a:lnTo>
-                  <a:lnTo>
-                    <a:pt x="1432450" y="2562155"/>
-                  </a:lnTo>
-                  <a:lnTo>
-                    <a:pt x="1360827" y="2558643"/>
-                  </a:lnTo>
-                  <a:lnTo>
-                    <a:pt x="1289205" y="2555119"/>
-                  </a:lnTo>
-                  <a:lnTo>
-                    <a:pt x="1217582" y="2551580"/>
-                  </a:lnTo>
-                  <a:lnTo>
-                    <a:pt x="1145960" y="2548029"/>
-                  </a:lnTo>
-                  <a:lnTo>
-                    <a:pt x="1074337" y="2544464"/>
-                  </a:lnTo>
-                  <a:lnTo>
-                    <a:pt x="1002715" y="2540885"/>
-                  </a:lnTo>
-                  <a:lnTo>
-                    <a:pt x="931092" y="2537293"/>
-                  </a:lnTo>
-                  <a:lnTo>
-                    <a:pt x="859470" y="2533686"/>
-                  </a:lnTo>
-                  <a:lnTo>
-                    <a:pt x="787847" y="2530067"/>
-                  </a:lnTo>
-                  <a:lnTo>
-                    <a:pt x="716225" y="2526433"/>
-                  </a:lnTo>
-                  <a:lnTo>
-                    <a:pt x="644602" y="2522786"/>
-                  </a:lnTo>
-                  <a:lnTo>
-                    <a:pt x="572980" y="2519124"/>
-                  </a:lnTo>
-                  <a:lnTo>
-                    <a:pt x="501357" y="2515449"/>
-                  </a:lnTo>
-                  <a:lnTo>
-                    <a:pt x="429735" y="2511760"/>
-                  </a:lnTo>
-                  <a:lnTo>
-                    <a:pt x="358112" y="2508056"/>
-                  </a:lnTo>
-                  <a:lnTo>
-                    <a:pt x="286490" y="2504339"/>
-                  </a:lnTo>
-                  <a:lnTo>
-                    <a:pt x="214867" y="2500607"/>
-                  </a:lnTo>
-                  <a:lnTo>
-                    <a:pt x="143245" y="2496861"/>
-                  </a:lnTo>
-                  <a:lnTo>
-                    <a:pt x="71622" y="2493101"/>
-                  </a:lnTo>
-                  <a:lnTo>
-                    <a:pt x="0" y="2489327"/>
+                    <a:pt x="0" y="0"/>
+                  </a:lnTo>
+                  <a:lnTo>
+                    <a:pt x="0" y="0"/>
+                  </a:lnTo>
+                </a:path>
+              </a:pathLst>
+            </a:custGeom>
+            <a:ln w="13550" cap="flat">
+              <a:solidFill>
+                <a:srgbClr val="EBEBEB">
+                  <a:alpha val="100000"/>
+                </a:srgbClr>
+              </a:solidFill>
+              <a:prstDash val="solid"/>
+              <a:round/>
+            </a:ln>
+          </p:spPr>
+          <p:txBody>
+            <a:bodyPr/>
+            <a:lstStyle/>
+            <a:p/>
+          </p:txBody>
+        </p:sp>
+        <p:sp>
+          <p:nvSpPr>
+            <p:cNvPr id="21" name="pg21"/>
+            <p:cNvSpPr/>
+            <p:nvPr/>
+          </p:nvSpPr>
+          <p:spPr>
+            <a:xfrm>
+              <a:off x="1235312" y="2143092"/>
+              <a:ext cx="6964104" cy="1243793"/>
+            </a:xfrm>
+            <a:custGeom>
+              <a:avLst/>
+              <a:pathLst>
+                <a:path w="6964104" h="1243793">
+                  <a:moveTo>
+                    <a:pt x="1687495" y="0"/>
+                  </a:moveTo>
+                  <a:lnTo>
+                    <a:pt x="1688267" y="860"/>
+                  </a:lnTo>
+                  <a:lnTo>
+                    <a:pt x="1758612" y="74655"/>
+                  </a:lnTo>
+                  <a:lnTo>
+                    <a:pt x="1828956" y="144115"/>
+                  </a:lnTo>
+                  <a:lnTo>
+                    <a:pt x="1899301" y="209495"/>
+                  </a:lnTo>
+                  <a:lnTo>
+                    <a:pt x="1969645" y="271036"/>
+                  </a:lnTo>
+                  <a:lnTo>
+                    <a:pt x="2039990" y="328961"/>
+                  </a:lnTo>
+                  <a:lnTo>
+                    <a:pt x="2110334" y="383484"/>
+                  </a:lnTo>
+                  <a:lnTo>
+                    <a:pt x="2180679" y="434804"/>
+                  </a:lnTo>
+                  <a:lnTo>
+                    <a:pt x="2251023" y="483110"/>
+                  </a:lnTo>
+                  <a:lnTo>
+                    <a:pt x="2321368" y="528578"/>
+                  </a:lnTo>
+                  <a:lnTo>
+                    <a:pt x="2391712" y="571376"/>
+                  </a:lnTo>
+                  <a:lnTo>
+                    <a:pt x="2462057" y="611660"/>
+                  </a:lnTo>
+                  <a:lnTo>
+                    <a:pt x="2532401" y="649578"/>
+                  </a:lnTo>
+                  <a:lnTo>
+                    <a:pt x="2602746" y="685268"/>
+                  </a:lnTo>
+                  <a:lnTo>
+                    <a:pt x="2673090" y="718863"/>
+                  </a:lnTo>
+                  <a:lnTo>
+                    <a:pt x="2743435" y="750484"/>
+                  </a:lnTo>
+                  <a:lnTo>
+                    <a:pt x="2813779" y="780247"/>
+                  </a:lnTo>
+                  <a:lnTo>
+                    <a:pt x="2884124" y="808262"/>
+                  </a:lnTo>
+                  <a:lnTo>
+                    <a:pt x="2954468" y="834632"/>
+                  </a:lnTo>
+                  <a:lnTo>
+                    <a:pt x="3024813" y="859453"/>
+                  </a:lnTo>
+                  <a:lnTo>
+                    <a:pt x="3095157" y="882816"/>
+                  </a:lnTo>
+                  <a:lnTo>
+                    <a:pt x="3165502" y="904807"/>
+                  </a:lnTo>
+                  <a:lnTo>
+                    <a:pt x="3235846" y="925506"/>
+                  </a:lnTo>
+                  <a:lnTo>
+                    <a:pt x="3306191" y="944989"/>
+                  </a:lnTo>
+                  <a:lnTo>
+                    <a:pt x="3376535" y="958214"/>
+                  </a:lnTo>
+                  <a:lnTo>
+                    <a:pt x="3446880" y="959349"/>
+                  </a:lnTo>
+                  <a:lnTo>
+                    <a:pt x="3517224" y="960479"/>
+                  </a:lnTo>
+                  <a:lnTo>
+                    <a:pt x="3587569" y="961605"/>
+                  </a:lnTo>
+                  <a:lnTo>
+                    <a:pt x="3657913" y="962727"/>
+                  </a:lnTo>
+                  <a:lnTo>
+                    <a:pt x="3728257" y="963845"/>
+                  </a:lnTo>
+                  <a:lnTo>
+                    <a:pt x="3798602" y="964959"/>
+                  </a:lnTo>
+                  <a:lnTo>
+                    <a:pt x="3868946" y="966068"/>
+                  </a:lnTo>
+                  <a:lnTo>
+                    <a:pt x="3939291" y="967173"/>
+                  </a:lnTo>
+                  <a:lnTo>
+                    <a:pt x="4009635" y="968274"/>
+                  </a:lnTo>
+                  <a:lnTo>
+                    <a:pt x="4079980" y="969370"/>
+                  </a:lnTo>
+                  <a:lnTo>
+                    <a:pt x="4150324" y="970463"/>
+                  </a:lnTo>
+                  <a:lnTo>
+                    <a:pt x="4220669" y="971551"/>
+                  </a:lnTo>
+                  <a:lnTo>
+                    <a:pt x="4291013" y="972635"/>
+                  </a:lnTo>
+                  <a:lnTo>
+                    <a:pt x="4361358" y="973716"/>
+                  </a:lnTo>
+                  <a:lnTo>
+                    <a:pt x="4431702" y="974792"/>
+                  </a:lnTo>
+                  <a:lnTo>
+                    <a:pt x="4502047" y="975864"/>
+                  </a:lnTo>
+                  <a:lnTo>
+                    <a:pt x="4572391" y="976931"/>
+                  </a:lnTo>
+                  <a:lnTo>
+                    <a:pt x="4642736" y="977995"/>
+                  </a:lnTo>
+                  <a:lnTo>
+                    <a:pt x="4713080" y="979055"/>
+                  </a:lnTo>
+                  <a:lnTo>
+                    <a:pt x="4783425" y="980111"/>
+                  </a:lnTo>
+                  <a:lnTo>
+                    <a:pt x="4853769" y="981162"/>
+                  </a:lnTo>
+                  <a:lnTo>
+                    <a:pt x="4924114" y="982210"/>
+                  </a:lnTo>
+                  <a:lnTo>
+                    <a:pt x="4994458" y="983254"/>
+                  </a:lnTo>
+                  <a:lnTo>
+                    <a:pt x="5064803" y="984294"/>
+                  </a:lnTo>
+                  <a:lnTo>
+                    <a:pt x="5135147" y="985330"/>
+                  </a:lnTo>
+                  <a:lnTo>
+                    <a:pt x="5205492" y="986361"/>
+                  </a:lnTo>
+                  <a:lnTo>
+                    <a:pt x="5275836" y="987390"/>
+                  </a:lnTo>
+                  <a:lnTo>
+                    <a:pt x="5346181" y="988414"/>
+                  </a:lnTo>
+                  <a:lnTo>
+                    <a:pt x="5416525" y="989434"/>
+                  </a:lnTo>
+                  <a:lnTo>
+                    <a:pt x="5486870" y="990450"/>
+                  </a:lnTo>
+                  <a:lnTo>
+                    <a:pt x="5557214" y="991463"/>
+                  </a:lnTo>
+                  <a:lnTo>
+                    <a:pt x="5627559" y="992471"/>
+                  </a:lnTo>
+                  <a:lnTo>
+                    <a:pt x="5697903" y="993476"/>
+                  </a:lnTo>
+                  <a:lnTo>
+                    <a:pt x="5768248" y="994477"/>
+                  </a:lnTo>
+                  <a:lnTo>
+                    <a:pt x="5838592" y="995474"/>
+                  </a:lnTo>
+                  <a:lnTo>
+                    <a:pt x="5908937" y="996468"/>
+                  </a:lnTo>
+                  <a:lnTo>
+                    <a:pt x="5979281" y="997457"/>
+                  </a:lnTo>
+                  <a:lnTo>
+                    <a:pt x="6049626" y="998443"/>
+                  </a:lnTo>
+                  <a:lnTo>
+                    <a:pt x="6119970" y="999425"/>
+                  </a:lnTo>
+                  <a:lnTo>
+                    <a:pt x="6190315" y="1000404"/>
+                  </a:lnTo>
+                  <a:lnTo>
+                    <a:pt x="6260659" y="1001379"/>
+                  </a:lnTo>
+                  <a:lnTo>
+                    <a:pt x="6331004" y="1002350"/>
+                  </a:lnTo>
+                  <a:lnTo>
+                    <a:pt x="6401348" y="1003317"/>
+                  </a:lnTo>
+                  <a:lnTo>
+                    <a:pt x="6471693" y="1004281"/>
+                  </a:lnTo>
+                  <a:lnTo>
+                    <a:pt x="6542037" y="1005241"/>
+                  </a:lnTo>
+                  <a:lnTo>
+                    <a:pt x="6612382" y="1006197"/>
+                  </a:lnTo>
+                  <a:lnTo>
+                    <a:pt x="6682726" y="1007150"/>
+                  </a:lnTo>
+                  <a:lnTo>
+                    <a:pt x="6753071" y="1008099"/>
+                  </a:lnTo>
+                  <a:lnTo>
+                    <a:pt x="6823415" y="1009044"/>
+                  </a:lnTo>
+                  <a:lnTo>
+                    <a:pt x="6893760" y="1009986"/>
+                  </a:lnTo>
+                  <a:lnTo>
+                    <a:pt x="6964104" y="1010924"/>
+                  </a:lnTo>
+                  <a:lnTo>
+                    <a:pt x="6964104" y="1243793"/>
+                  </a:lnTo>
+                  <a:lnTo>
+                    <a:pt x="6893760" y="1242956"/>
+                  </a:lnTo>
+                  <a:lnTo>
+                    <a:pt x="6823415" y="1242067"/>
+                  </a:lnTo>
+                  <a:lnTo>
+                    <a:pt x="6753071" y="1241122"/>
+                  </a:lnTo>
+                  <a:lnTo>
+                    <a:pt x="6682726" y="1240119"/>
+                  </a:lnTo>
+                  <a:lnTo>
+                    <a:pt x="6612382" y="1239053"/>
+                  </a:lnTo>
+                  <a:lnTo>
+                    <a:pt x="6542037" y="1237920"/>
+                  </a:lnTo>
+                  <a:lnTo>
+                    <a:pt x="6471693" y="1236717"/>
+                  </a:lnTo>
+                  <a:lnTo>
+                    <a:pt x="6401348" y="1235439"/>
+                  </a:lnTo>
+                  <a:lnTo>
+                    <a:pt x="6331004" y="1234081"/>
+                  </a:lnTo>
+                  <a:lnTo>
+                    <a:pt x="6260659" y="1232638"/>
+                  </a:lnTo>
+                  <a:lnTo>
+                    <a:pt x="6190315" y="1231105"/>
+                  </a:lnTo>
+                  <a:lnTo>
+                    <a:pt x="6119970" y="1229477"/>
+                  </a:lnTo>
+                  <a:lnTo>
+                    <a:pt x="6049626" y="1227746"/>
+                  </a:lnTo>
+                  <a:lnTo>
+                    <a:pt x="5979281" y="1225908"/>
+                  </a:lnTo>
+                  <a:lnTo>
+                    <a:pt x="5908937" y="1223956"/>
+                  </a:lnTo>
+                  <a:lnTo>
+                    <a:pt x="5838592" y="1221881"/>
+                  </a:lnTo>
+                  <a:lnTo>
+                    <a:pt x="5768248" y="1219677"/>
+                  </a:lnTo>
+                  <a:lnTo>
+                    <a:pt x="5697903" y="1217335"/>
+                  </a:lnTo>
+                  <a:lnTo>
+                    <a:pt x="5627559" y="1214847"/>
+                  </a:lnTo>
+                  <a:lnTo>
+                    <a:pt x="5557214" y="1212204"/>
+                  </a:lnTo>
+                  <a:lnTo>
+                    <a:pt x="5486870" y="1209396"/>
+                  </a:lnTo>
+                  <a:lnTo>
+                    <a:pt x="5416525" y="1206413"/>
+                  </a:lnTo>
+                  <a:lnTo>
+                    <a:pt x="5346181" y="1203244"/>
+                  </a:lnTo>
+                  <a:lnTo>
+                    <a:pt x="5275836" y="1199876"/>
+                  </a:lnTo>
+                  <a:lnTo>
+                    <a:pt x="5205492" y="1196299"/>
+                  </a:lnTo>
+                  <a:lnTo>
+                    <a:pt x="5135147" y="1192499"/>
+                  </a:lnTo>
+                  <a:lnTo>
+                    <a:pt x="5064803" y="1188461"/>
+                  </a:lnTo>
+                  <a:lnTo>
+                    <a:pt x="4994458" y="1184171"/>
+                  </a:lnTo>
+                  <a:lnTo>
+                    <a:pt x="4924114" y="1179614"/>
+                  </a:lnTo>
+                  <a:lnTo>
+                    <a:pt x="4853769" y="1174772"/>
+                  </a:lnTo>
+                  <a:lnTo>
+                    <a:pt x="4783425" y="1169628"/>
+                  </a:lnTo>
+                  <a:lnTo>
+                    <a:pt x="4713080" y="1164163"/>
+                  </a:lnTo>
+                  <a:lnTo>
+                    <a:pt x="4642736" y="1158357"/>
+                  </a:lnTo>
+                  <a:lnTo>
+                    <a:pt x="4572391" y="1152189"/>
+                  </a:lnTo>
+                  <a:lnTo>
+                    <a:pt x="4502047" y="1145636"/>
+                  </a:lnTo>
+                  <a:lnTo>
+                    <a:pt x="4431702" y="1138674"/>
+                  </a:lnTo>
+                  <a:lnTo>
+                    <a:pt x="4361358" y="1131277"/>
+                  </a:lnTo>
+                  <a:lnTo>
+                    <a:pt x="4291013" y="1123419"/>
+                  </a:lnTo>
+                  <a:lnTo>
+                    <a:pt x="4220669" y="1115071"/>
+                  </a:lnTo>
+                  <a:lnTo>
+                    <a:pt x="4150324" y="1106201"/>
+                  </a:lnTo>
+                  <a:lnTo>
+                    <a:pt x="4079980" y="1096778"/>
+                  </a:lnTo>
+                  <a:lnTo>
+                    <a:pt x="4009635" y="1086767"/>
+                  </a:lnTo>
+                  <a:lnTo>
+                    <a:pt x="3939291" y="1076132"/>
+                  </a:lnTo>
+                  <a:lnTo>
+                    <a:pt x="3868946" y="1064832"/>
+                  </a:lnTo>
+                  <a:lnTo>
+                    <a:pt x="3798602" y="1052828"/>
+                  </a:lnTo>
+                  <a:lnTo>
+                    <a:pt x="3728257" y="1040074"/>
+                  </a:lnTo>
+                  <a:lnTo>
+                    <a:pt x="3657913" y="1026525"/>
+                  </a:lnTo>
+                  <a:lnTo>
+                    <a:pt x="3587569" y="1012130"/>
+                  </a:lnTo>
+                  <a:lnTo>
+                    <a:pt x="3517224" y="996837"/>
+                  </a:lnTo>
+                  <a:lnTo>
+                    <a:pt x="3446880" y="980589"/>
+                  </a:lnTo>
+                  <a:lnTo>
+                    <a:pt x="3376535" y="963327"/>
+                  </a:lnTo>
+                  <a:lnTo>
+                    <a:pt x="3306191" y="957075"/>
+                  </a:lnTo>
+                  <a:lnTo>
+                    <a:pt x="3235846" y="955931"/>
+                  </a:lnTo>
+                  <a:lnTo>
+                    <a:pt x="3165502" y="954783"/>
+                  </a:lnTo>
+                  <a:lnTo>
+                    <a:pt x="3095157" y="953631"/>
+                  </a:lnTo>
+                  <a:lnTo>
+                    <a:pt x="3024813" y="952474"/>
+                  </a:lnTo>
+                  <a:lnTo>
+                    <a:pt x="2954468" y="951313"/>
+                  </a:lnTo>
+                  <a:lnTo>
+                    <a:pt x="2884124" y="950148"/>
+                  </a:lnTo>
+                  <a:lnTo>
+                    <a:pt x="2813779" y="948978"/>
+                  </a:lnTo>
+                  <a:lnTo>
+                    <a:pt x="2743435" y="947804"/>
+                  </a:lnTo>
+                  <a:lnTo>
+                    <a:pt x="2673090" y="946625"/>
+                  </a:lnTo>
+                  <a:lnTo>
+                    <a:pt x="2602746" y="945442"/>
+                  </a:lnTo>
+                  <a:lnTo>
+                    <a:pt x="2532401" y="944254"/>
+                  </a:lnTo>
+                  <a:lnTo>
+                    <a:pt x="2462057" y="943061"/>
+                  </a:lnTo>
+                  <a:lnTo>
+                    <a:pt x="2391712" y="941864"/>
+                  </a:lnTo>
+                  <a:lnTo>
+                    <a:pt x="2321368" y="940663"/>
+                  </a:lnTo>
+                  <a:lnTo>
+                    <a:pt x="2251023" y="939457"/>
+                  </a:lnTo>
+                  <a:lnTo>
+                    <a:pt x="2180679" y="938246"/>
+                  </a:lnTo>
+                  <a:lnTo>
+                    <a:pt x="2110334" y="937031"/>
+                  </a:lnTo>
+                  <a:lnTo>
+                    <a:pt x="2039990" y="935811"/>
+                  </a:lnTo>
+                  <a:lnTo>
+                    <a:pt x="1969645" y="934587"/>
+                  </a:lnTo>
+                  <a:lnTo>
+                    <a:pt x="1899301" y="933357"/>
+                  </a:lnTo>
+                  <a:lnTo>
+                    <a:pt x="1828956" y="932124"/>
+                  </a:lnTo>
+                  <a:lnTo>
+                    <a:pt x="1758612" y="930885"/>
+                  </a:lnTo>
+                  <a:lnTo>
+                    <a:pt x="1688267" y="929642"/>
+                  </a:lnTo>
+                  <a:lnTo>
+                    <a:pt x="1617923" y="928394"/>
+                  </a:lnTo>
+                  <a:lnTo>
+                    <a:pt x="1547578" y="927141"/>
+                  </a:lnTo>
+                  <a:lnTo>
+                    <a:pt x="1477234" y="925883"/>
+                  </a:lnTo>
+                  <a:lnTo>
+                    <a:pt x="1406889" y="924621"/>
+                  </a:lnTo>
+                  <a:lnTo>
+                    <a:pt x="1336545" y="923354"/>
+                  </a:lnTo>
+                  <a:lnTo>
+                    <a:pt x="1266200" y="922082"/>
+                  </a:lnTo>
+                  <a:lnTo>
+                    <a:pt x="1195856" y="920805"/>
+                  </a:lnTo>
+                  <a:lnTo>
+                    <a:pt x="1125511" y="919523"/>
+                  </a:lnTo>
+                  <a:lnTo>
+                    <a:pt x="1055167" y="918237"/>
+                  </a:lnTo>
+                  <a:lnTo>
+                    <a:pt x="984822" y="916945"/>
+                  </a:lnTo>
+                  <a:lnTo>
+                    <a:pt x="914478" y="915649"/>
+                  </a:lnTo>
+                  <a:lnTo>
+                    <a:pt x="844133" y="914348"/>
+                  </a:lnTo>
+                  <a:lnTo>
+                    <a:pt x="773789" y="913041"/>
+                  </a:lnTo>
+                  <a:lnTo>
+                    <a:pt x="703444" y="911730"/>
+                  </a:lnTo>
+                  <a:lnTo>
+                    <a:pt x="633100" y="910414"/>
+                  </a:lnTo>
+                  <a:lnTo>
+                    <a:pt x="562755" y="909092"/>
+                  </a:lnTo>
+                  <a:lnTo>
+                    <a:pt x="492411" y="907766"/>
+                  </a:lnTo>
+                  <a:lnTo>
+                    <a:pt x="422066" y="906435"/>
+                  </a:lnTo>
+                  <a:lnTo>
+                    <a:pt x="351722" y="905098"/>
+                  </a:lnTo>
+                  <a:lnTo>
+                    <a:pt x="281377" y="903757"/>
+                  </a:lnTo>
+                  <a:lnTo>
+                    <a:pt x="211033" y="902410"/>
+                  </a:lnTo>
+                  <a:lnTo>
+                    <a:pt x="140688" y="901058"/>
+                  </a:lnTo>
+                  <a:lnTo>
+                    <a:pt x="70344" y="899701"/>
+                  </a:lnTo>
+                  <a:lnTo>
+                    <a:pt x="0" y="898339"/>
                   </a:lnTo>
                   <a:close/>
                 </a:path>
@@ -3515,574 +3550,249 @@
         </p:sp>
         <p:sp>
           <p:nvSpPr>
-            <p:cNvPr id="21" name="pl21"/>
-            <p:cNvSpPr/>
-            <p:nvPr/>
-          </p:nvSpPr>
-          <p:spPr>
-            <a:xfrm>
-              <a:off x="2890203" y="2073503"/>
-              <a:ext cx="5372475" cy="2801304"/>
-            </a:xfrm>
-            <a:custGeom>
-              <a:avLst/>
-              <a:pathLst>
-                <a:path w="5372475" h="2801304">
-                  <a:moveTo>
-                    <a:pt x="0" y="0"/>
-                  </a:moveTo>
-                  <a:lnTo>
-                    <a:pt x="786" y="2384"/>
-                  </a:lnTo>
-                  <a:lnTo>
-                    <a:pt x="72408" y="206872"/>
-                  </a:lnTo>
-                  <a:lnTo>
-                    <a:pt x="144031" y="399348"/>
-                  </a:lnTo>
-                  <a:lnTo>
-                    <a:pt x="215653" y="580519"/>
-                  </a:lnTo>
-                  <a:lnTo>
-                    <a:pt x="287276" y="751049"/>
-                  </a:lnTo>
-                  <a:lnTo>
-                    <a:pt x="358898" y="911562"/>
-                  </a:lnTo>
-                  <a:lnTo>
-                    <a:pt x="430521" y="1062646"/>
-                  </a:lnTo>
-                  <a:lnTo>
-                    <a:pt x="502143" y="1204857"/>
-                  </a:lnTo>
-                  <a:lnTo>
-                    <a:pt x="573766" y="1338714"/>
-                  </a:lnTo>
-                  <a:lnTo>
-                    <a:pt x="645388" y="1464708"/>
-                  </a:lnTo>
-                  <a:lnTo>
-                    <a:pt x="717011" y="1583302"/>
-                  </a:lnTo>
-                  <a:lnTo>
-                    <a:pt x="788633" y="1694930"/>
-                  </a:lnTo>
-                  <a:lnTo>
-                    <a:pt x="860256" y="1800002"/>
-                  </a:lnTo>
-                  <a:lnTo>
-                    <a:pt x="931878" y="1898901"/>
-                  </a:lnTo>
-                  <a:lnTo>
-                    <a:pt x="1003501" y="1991992"/>
-                  </a:lnTo>
-                  <a:lnTo>
-                    <a:pt x="1075123" y="2079614"/>
-                  </a:lnTo>
-                  <a:lnTo>
-                    <a:pt x="1146746" y="2162090"/>
-                  </a:lnTo>
-                  <a:lnTo>
-                    <a:pt x="1218369" y="2239721"/>
-                  </a:lnTo>
-                  <a:lnTo>
-                    <a:pt x="1289991" y="2312793"/>
-                  </a:lnTo>
-                  <a:lnTo>
-                    <a:pt x="1361614" y="2381572"/>
-                  </a:lnTo>
-                  <a:lnTo>
-                    <a:pt x="1433236" y="2446311"/>
-                  </a:lnTo>
-                  <a:lnTo>
-                    <a:pt x="1504859" y="2507248"/>
-                  </a:lnTo>
-                  <a:lnTo>
-                    <a:pt x="1576481" y="2564606"/>
-                  </a:lnTo>
-                  <a:lnTo>
-                    <a:pt x="1648104" y="2618594"/>
-                  </a:lnTo>
-                  <a:lnTo>
-                    <a:pt x="1719726" y="2655241"/>
-                  </a:lnTo>
-                  <a:lnTo>
-                    <a:pt x="1791349" y="2658386"/>
-                  </a:lnTo>
-                  <a:lnTo>
-                    <a:pt x="1862971" y="2661519"/>
-                  </a:lnTo>
-                  <a:lnTo>
-                    <a:pt x="1934594" y="2664640"/>
-                  </a:lnTo>
-                  <a:lnTo>
-                    <a:pt x="2006216" y="2667749"/>
-                  </a:lnTo>
-                  <a:lnTo>
-                    <a:pt x="2077839" y="2670846"/>
-                  </a:lnTo>
-                  <a:lnTo>
-                    <a:pt x="2149461" y="2673931"/>
-                  </a:lnTo>
-                  <a:lnTo>
-                    <a:pt x="2221084" y="2677005"/>
-                  </a:lnTo>
-                  <a:lnTo>
-                    <a:pt x="2292706" y="2680067"/>
-                  </a:lnTo>
-                  <a:lnTo>
-                    <a:pt x="2364329" y="2683118"/>
-                  </a:lnTo>
-                  <a:lnTo>
-                    <a:pt x="2435951" y="2686157"/>
-                  </a:lnTo>
-                  <a:lnTo>
-                    <a:pt x="2507574" y="2689184"/>
-                  </a:lnTo>
-                  <a:lnTo>
-                    <a:pt x="2579197" y="2692200"/>
-                  </a:lnTo>
-                  <a:lnTo>
-                    <a:pt x="2650819" y="2695204"/>
-                  </a:lnTo>
-                  <a:lnTo>
-                    <a:pt x="2722442" y="2698197"/>
-                  </a:lnTo>
-                  <a:lnTo>
-                    <a:pt x="2794064" y="2701179"/>
-                  </a:lnTo>
-                  <a:lnTo>
-                    <a:pt x="2865687" y="2704149"/>
-                  </a:lnTo>
-                  <a:lnTo>
-                    <a:pt x="2937309" y="2707108"/>
-                  </a:lnTo>
-                  <a:lnTo>
-                    <a:pt x="3008932" y="2710056"/>
-                  </a:lnTo>
-                  <a:lnTo>
-                    <a:pt x="3080554" y="2712993"/>
-                  </a:lnTo>
-                  <a:lnTo>
-                    <a:pt x="3152177" y="2715918"/>
-                  </a:lnTo>
-                  <a:lnTo>
-                    <a:pt x="3223799" y="2718833"/>
-                  </a:lnTo>
-                  <a:lnTo>
-                    <a:pt x="3295422" y="2721736"/>
-                  </a:lnTo>
-                  <a:lnTo>
-                    <a:pt x="3367044" y="2724628"/>
-                  </a:lnTo>
-                  <a:lnTo>
-                    <a:pt x="3438667" y="2727510"/>
-                  </a:lnTo>
-                  <a:lnTo>
-                    <a:pt x="3510289" y="2730380"/>
-                  </a:lnTo>
-                  <a:lnTo>
-                    <a:pt x="3581912" y="2733239"/>
-                  </a:lnTo>
-                  <a:lnTo>
-                    <a:pt x="3653534" y="2736088"/>
-                  </a:lnTo>
-                  <a:lnTo>
-                    <a:pt x="3725157" y="2738926"/>
-                  </a:lnTo>
-                  <a:lnTo>
-                    <a:pt x="3796779" y="2741753"/>
-                  </a:lnTo>
-                  <a:lnTo>
-                    <a:pt x="3868402" y="2744569"/>
-                  </a:lnTo>
-                  <a:lnTo>
-                    <a:pt x="3940024" y="2747375"/>
-                  </a:lnTo>
-                  <a:lnTo>
-                    <a:pt x="4011647" y="2750170"/>
-                  </a:lnTo>
-                  <a:lnTo>
-                    <a:pt x="4083270" y="2752954"/>
-                  </a:lnTo>
-                  <a:lnTo>
-                    <a:pt x="4154892" y="2755728"/>
-                  </a:lnTo>
-                  <a:lnTo>
-                    <a:pt x="4226515" y="2758491"/>
-                  </a:lnTo>
-                  <a:lnTo>
-                    <a:pt x="4298137" y="2761244"/>
-                  </a:lnTo>
-                  <a:lnTo>
-                    <a:pt x="4369760" y="2763987"/>
-                  </a:lnTo>
-                  <a:lnTo>
-                    <a:pt x="4441382" y="2766718"/>
-                  </a:lnTo>
-                  <a:lnTo>
-                    <a:pt x="4513005" y="2769440"/>
-                  </a:lnTo>
-                  <a:lnTo>
-                    <a:pt x="4584627" y="2772151"/>
-                  </a:lnTo>
-                  <a:lnTo>
-                    <a:pt x="4656250" y="2774852"/>
-                  </a:lnTo>
-                  <a:lnTo>
-                    <a:pt x="4727872" y="2777543"/>
-                  </a:lnTo>
-                  <a:lnTo>
-                    <a:pt x="4799495" y="2780223"/>
-                  </a:lnTo>
-                  <a:lnTo>
-                    <a:pt x="4871117" y="2782894"/>
-                  </a:lnTo>
-                  <a:lnTo>
-                    <a:pt x="4942740" y="2785554"/>
-                  </a:lnTo>
-                  <a:lnTo>
-                    <a:pt x="5014362" y="2788204"/>
-                  </a:lnTo>
-                  <a:lnTo>
-                    <a:pt x="5085985" y="2790844"/>
-                  </a:lnTo>
-                  <a:lnTo>
-                    <a:pt x="5157607" y="2793474"/>
-                  </a:lnTo>
-                  <a:lnTo>
-                    <a:pt x="5229230" y="2796094"/>
-                  </a:lnTo>
-                  <a:lnTo>
-                    <a:pt x="5300852" y="2798704"/>
-                  </a:lnTo>
-                  <a:lnTo>
-                    <a:pt x="5372475" y="2801304"/>
-                  </a:lnTo>
-                </a:path>
-              </a:pathLst>
-            </a:custGeom>
-          </p:spPr>
-          <p:txBody>
-            <a:bodyPr/>
-            <a:lstStyle/>
-            <a:p/>
-          </p:txBody>
-        </p:sp>
-        <p:sp>
-          <p:nvSpPr>
             <p:cNvPr id="22" name="pl22"/>
             <p:cNvSpPr/>
             <p:nvPr/>
           </p:nvSpPr>
           <p:spPr>
             <a:xfrm>
-              <a:off x="1172049" y="4562830"/>
-              <a:ext cx="7090630" cy="957262"/>
+              <a:off x="2922807" y="2143092"/>
+              <a:ext cx="5276608" cy="1010924"/>
             </a:xfrm>
             <a:custGeom>
               <a:avLst/>
               <a:pathLst>
-                <a:path w="7090630" h="957262">
+                <a:path w="5276608" h="1010924">
                   <a:moveTo>
-                    <a:pt x="7090630" y="957262"/>
+                    <a:pt x="0" y="0"/>
                   </a:moveTo>
                   <a:lnTo>
-                    <a:pt x="7019007" y="954943"/>
-                  </a:lnTo>
-                  <a:lnTo>
-                    <a:pt x="6947385" y="952480"/>
-                  </a:lnTo>
-                  <a:lnTo>
-                    <a:pt x="6875762" y="949863"/>
-                  </a:lnTo>
-                  <a:lnTo>
-                    <a:pt x="6804139" y="947082"/>
-                  </a:lnTo>
-                  <a:lnTo>
-                    <a:pt x="6732517" y="944128"/>
-                  </a:lnTo>
-                  <a:lnTo>
-                    <a:pt x="6660894" y="940990"/>
-                  </a:lnTo>
-                  <a:lnTo>
-                    <a:pt x="6589272" y="937656"/>
-                  </a:lnTo>
-                  <a:lnTo>
-                    <a:pt x="6517649" y="934113"/>
-                  </a:lnTo>
-                  <a:lnTo>
-                    <a:pt x="6446027" y="930350"/>
-                  </a:lnTo>
-                  <a:lnTo>
-                    <a:pt x="6374404" y="926352"/>
-                  </a:lnTo>
-                  <a:lnTo>
-                    <a:pt x="6302782" y="922104"/>
-                  </a:lnTo>
-                  <a:lnTo>
-                    <a:pt x="6231159" y="917592"/>
-                  </a:lnTo>
-                  <a:lnTo>
-                    <a:pt x="6159537" y="912797"/>
-                  </a:lnTo>
-                  <a:lnTo>
-                    <a:pt x="6087914" y="907704"/>
-                  </a:lnTo>
-                  <a:lnTo>
-                    <a:pt x="6016292" y="902293"/>
-                  </a:lnTo>
-                  <a:lnTo>
-                    <a:pt x="5944669" y="896544"/>
-                  </a:lnTo>
-                  <a:lnTo>
-                    <a:pt x="5873047" y="890436"/>
-                  </a:lnTo>
-                  <a:lnTo>
-                    <a:pt x="5801424" y="883947"/>
-                  </a:lnTo>
-                  <a:lnTo>
-                    <a:pt x="5729802" y="877053"/>
-                  </a:lnTo>
-                  <a:lnTo>
-                    <a:pt x="5658179" y="869729"/>
-                  </a:lnTo>
-                  <a:lnTo>
-                    <a:pt x="5586557" y="861948"/>
-                  </a:lnTo>
-                  <a:lnTo>
-                    <a:pt x="5514934" y="853681"/>
-                  </a:lnTo>
-                  <a:lnTo>
-                    <a:pt x="5443311" y="844899"/>
-                  </a:lnTo>
-                  <a:lnTo>
-                    <a:pt x="5371689" y="835568"/>
-                  </a:lnTo>
-                  <a:lnTo>
-                    <a:pt x="5300066" y="825656"/>
-                  </a:lnTo>
-                  <a:lnTo>
-                    <a:pt x="5228444" y="815124"/>
-                  </a:lnTo>
-                  <a:lnTo>
-                    <a:pt x="5156821" y="803936"/>
-                  </a:lnTo>
-                  <a:lnTo>
-                    <a:pt x="5085199" y="792049"/>
-                  </a:lnTo>
-                  <a:lnTo>
-                    <a:pt x="5013576" y="779420"/>
-                  </a:lnTo>
-                  <a:lnTo>
-                    <a:pt x="4941954" y="766004"/>
-                  </a:lnTo>
-                  <a:lnTo>
-                    <a:pt x="4870331" y="751750"/>
-                  </a:lnTo>
-                  <a:lnTo>
-                    <a:pt x="4798709" y="736606"/>
-                  </a:lnTo>
-                  <a:lnTo>
-                    <a:pt x="4727086" y="720518"/>
-                  </a:lnTo>
-                  <a:lnTo>
-                    <a:pt x="4655464" y="703426"/>
-                  </a:lnTo>
-                  <a:lnTo>
-                    <a:pt x="4583841" y="685267"/>
-                  </a:lnTo>
-                  <a:lnTo>
-                    <a:pt x="4512219" y="665975"/>
-                  </a:lnTo>
-                  <a:lnTo>
-                    <a:pt x="4440596" y="645479"/>
-                  </a:lnTo>
-                  <a:lnTo>
-                    <a:pt x="4368974" y="623704"/>
-                  </a:lnTo>
-                  <a:lnTo>
-                    <a:pt x="4297351" y="600570"/>
-                  </a:lnTo>
-                  <a:lnTo>
-                    <a:pt x="4225729" y="575992"/>
-                  </a:lnTo>
-                  <a:lnTo>
-                    <a:pt x="4154106" y="549881"/>
-                  </a:lnTo>
-                  <a:lnTo>
-                    <a:pt x="4082483" y="522140"/>
-                  </a:lnTo>
-                  <a:lnTo>
-                    <a:pt x="4010861" y="492668"/>
-                  </a:lnTo>
-                  <a:lnTo>
-                    <a:pt x="3939238" y="461358"/>
-                  </a:lnTo>
-                  <a:lnTo>
-                    <a:pt x="3867616" y="428093"/>
-                  </a:lnTo>
-                  <a:lnTo>
-                    <a:pt x="3795993" y="392752"/>
-                  </a:lnTo>
-                  <a:lnTo>
-                    <a:pt x="3724371" y="355206"/>
-                  </a:lnTo>
-                  <a:lnTo>
-                    <a:pt x="3652748" y="315317"/>
-                  </a:lnTo>
-                  <a:lnTo>
-                    <a:pt x="3581126" y="272939"/>
-                  </a:lnTo>
-                  <a:lnTo>
-                    <a:pt x="3509503" y="227916"/>
-                  </a:lnTo>
-                  <a:lnTo>
-                    <a:pt x="3437881" y="180084"/>
-                  </a:lnTo>
-                  <a:lnTo>
-                    <a:pt x="3366258" y="162757"/>
-                  </a:lnTo>
-                  <a:lnTo>
-                    <a:pt x="3294636" y="159589"/>
-                  </a:lnTo>
-                  <a:lnTo>
-                    <a:pt x="3223013" y="156408"/>
-                  </a:lnTo>
-                  <a:lnTo>
-                    <a:pt x="3151391" y="153215"/>
-                  </a:lnTo>
-                  <a:lnTo>
-                    <a:pt x="3079768" y="150010"/>
-                  </a:lnTo>
-                  <a:lnTo>
-                    <a:pt x="3008146" y="146793"/>
-                  </a:lnTo>
-                  <a:lnTo>
-                    <a:pt x="2936523" y="143563"/>
-                  </a:lnTo>
-                  <a:lnTo>
-                    <a:pt x="2864901" y="140321"/>
-                  </a:lnTo>
-                  <a:lnTo>
-                    <a:pt x="2793278" y="137067"/>
-                  </a:lnTo>
-                  <a:lnTo>
-                    <a:pt x="2721655" y="133801"/>
-                  </a:lnTo>
-                  <a:lnTo>
-                    <a:pt x="2650033" y="130522"/>
-                  </a:lnTo>
-                  <a:lnTo>
-                    <a:pt x="2578410" y="127230"/>
-                  </a:lnTo>
-                  <a:lnTo>
-                    <a:pt x="2506788" y="123926"/>
-                  </a:lnTo>
-                  <a:lnTo>
-                    <a:pt x="2435165" y="120609"/>
-                  </a:lnTo>
-                  <a:lnTo>
-                    <a:pt x="2363543" y="117280"/>
-                  </a:lnTo>
-                  <a:lnTo>
-                    <a:pt x="2291920" y="113938"/>
-                  </a:lnTo>
-                  <a:lnTo>
-                    <a:pt x="2220298" y="110583"/>
-                  </a:lnTo>
-                  <a:lnTo>
-                    <a:pt x="2148675" y="107216"/>
-                  </a:lnTo>
-                  <a:lnTo>
-                    <a:pt x="2077053" y="103836"/>
-                  </a:lnTo>
-                  <a:lnTo>
-                    <a:pt x="2005430" y="100442"/>
-                  </a:lnTo>
-                  <a:lnTo>
-                    <a:pt x="1933808" y="97036"/>
-                  </a:lnTo>
-                  <a:lnTo>
-                    <a:pt x="1862185" y="93617"/>
-                  </a:lnTo>
-                  <a:lnTo>
-                    <a:pt x="1790563" y="90185"/>
-                  </a:lnTo>
-                  <a:lnTo>
-                    <a:pt x="1718940" y="86740"/>
-                  </a:lnTo>
-                  <a:lnTo>
-                    <a:pt x="1647318" y="83282"/>
-                  </a:lnTo>
-                  <a:lnTo>
-                    <a:pt x="1575695" y="79810"/>
-                  </a:lnTo>
-                  <a:lnTo>
-                    <a:pt x="1504073" y="76325"/>
-                  </a:lnTo>
-                  <a:lnTo>
-                    <a:pt x="1432450" y="72827"/>
-                  </a:lnTo>
-                  <a:lnTo>
-                    <a:pt x="1360827" y="69316"/>
-                  </a:lnTo>
-                  <a:lnTo>
-                    <a:pt x="1289205" y="65791"/>
-                  </a:lnTo>
-                  <a:lnTo>
-                    <a:pt x="1217582" y="62253"/>
-                  </a:lnTo>
-                  <a:lnTo>
-                    <a:pt x="1145960" y="58701"/>
-                  </a:lnTo>
-                  <a:lnTo>
-                    <a:pt x="1074337" y="55136"/>
-                  </a:lnTo>
-                  <a:lnTo>
-                    <a:pt x="1002715" y="51558"/>
-                  </a:lnTo>
-                  <a:lnTo>
-                    <a:pt x="931092" y="47965"/>
-                  </a:lnTo>
-                  <a:lnTo>
-                    <a:pt x="859470" y="44359"/>
-                  </a:lnTo>
-                  <a:lnTo>
-                    <a:pt x="787847" y="40739"/>
-                  </a:lnTo>
-                  <a:lnTo>
-                    <a:pt x="716225" y="37106"/>
-                  </a:lnTo>
-                  <a:lnTo>
-                    <a:pt x="644602" y="33458"/>
-                  </a:lnTo>
-                  <a:lnTo>
-                    <a:pt x="572980" y="29797"/>
-                  </a:lnTo>
-                  <a:lnTo>
-                    <a:pt x="501357" y="26122"/>
-                  </a:lnTo>
-                  <a:lnTo>
-                    <a:pt x="429735" y="22432"/>
-                  </a:lnTo>
-                  <a:lnTo>
-                    <a:pt x="358112" y="18729"/>
-                  </a:lnTo>
-                  <a:lnTo>
-                    <a:pt x="286490" y="15012"/>
-                  </a:lnTo>
-                  <a:lnTo>
-                    <a:pt x="214867" y="11280"/>
-                  </a:lnTo>
-                  <a:lnTo>
-                    <a:pt x="143245" y="7534"/>
-                  </a:lnTo>
-                  <a:lnTo>
-                    <a:pt x="71622" y="3774"/>
-                  </a:lnTo>
-                  <a:lnTo>
-                    <a:pt x="0" y="0"/>
+                    <a:pt x="772" y="860"/>
+                  </a:lnTo>
+                  <a:lnTo>
+                    <a:pt x="71116" y="74655"/>
+                  </a:lnTo>
+                  <a:lnTo>
+                    <a:pt x="141461" y="144115"/>
+                  </a:lnTo>
+                  <a:lnTo>
+                    <a:pt x="211805" y="209495"/>
+                  </a:lnTo>
+                  <a:lnTo>
+                    <a:pt x="282149" y="271036"/>
+                  </a:lnTo>
+                  <a:lnTo>
+                    <a:pt x="352494" y="328961"/>
+                  </a:lnTo>
+                  <a:lnTo>
+                    <a:pt x="422838" y="383484"/>
+                  </a:lnTo>
+                  <a:lnTo>
+                    <a:pt x="493183" y="434804"/>
+                  </a:lnTo>
+                  <a:lnTo>
+                    <a:pt x="563527" y="483110"/>
+                  </a:lnTo>
+                  <a:lnTo>
+                    <a:pt x="633872" y="528578"/>
+                  </a:lnTo>
+                  <a:lnTo>
+                    <a:pt x="704216" y="571376"/>
+                  </a:lnTo>
+                  <a:lnTo>
+                    <a:pt x="774561" y="611660"/>
+                  </a:lnTo>
+                  <a:lnTo>
+                    <a:pt x="844905" y="649578"/>
+                  </a:lnTo>
+                  <a:lnTo>
+                    <a:pt x="915250" y="685268"/>
+                  </a:lnTo>
+                  <a:lnTo>
+                    <a:pt x="985594" y="718863"/>
+                  </a:lnTo>
+                  <a:lnTo>
+                    <a:pt x="1055939" y="750484"/>
+                  </a:lnTo>
+                  <a:lnTo>
+                    <a:pt x="1126283" y="780247"/>
+                  </a:lnTo>
+                  <a:lnTo>
+                    <a:pt x="1196628" y="808262"/>
+                  </a:lnTo>
+                  <a:lnTo>
+                    <a:pt x="1266972" y="834632"/>
+                  </a:lnTo>
+                  <a:lnTo>
+                    <a:pt x="1337317" y="859453"/>
+                  </a:lnTo>
+                  <a:lnTo>
+                    <a:pt x="1407661" y="882816"/>
+                  </a:lnTo>
+                  <a:lnTo>
+                    <a:pt x="1478006" y="904807"/>
+                  </a:lnTo>
+                  <a:lnTo>
+                    <a:pt x="1548350" y="925506"/>
+                  </a:lnTo>
+                  <a:lnTo>
+                    <a:pt x="1618695" y="944989"/>
+                  </a:lnTo>
+                  <a:lnTo>
+                    <a:pt x="1689039" y="958214"/>
+                  </a:lnTo>
+                  <a:lnTo>
+                    <a:pt x="1759384" y="959349"/>
+                  </a:lnTo>
+                  <a:lnTo>
+                    <a:pt x="1829728" y="960479"/>
+                  </a:lnTo>
+                  <a:lnTo>
+                    <a:pt x="1900073" y="961605"/>
+                  </a:lnTo>
+                  <a:lnTo>
+                    <a:pt x="1970417" y="962727"/>
+                  </a:lnTo>
+                  <a:lnTo>
+                    <a:pt x="2040762" y="963845"/>
+                  </a:lnTo>
+                  <a:lnTo>
+                    <a:pt x="2111106" y="964959"/>
+                  </a:lnTo>
+                  <a:lnTo>
+                    <a:pt x="2181451" y="966068"/>
+                  </a:lnTo>
+                  <a:lnTo>
+                    <a:pt x="2251795" y="967173"/>
+                  </a:lnTo>
+                  <a:lnTo>
+                    <a:pt x="2322140" y="968274"/>
+                  </a:lnTo>
+                  <a:lnTo>
+                    <a:pt x="2392484" y="969370"/>
+                  </a:lnTo>
+                  <a:lnTo>
+                    <a:pt x="2462829" y="970463"/>
+                  </a:lnTo>
+                  <a:lnTo>
+                    <a:pt x="2533173" y="971551"/>
+                  </a:lnTo>
+                  <a:lnTo>
+                    <a:pt x="2603518" y="972635"/>
+                  </a:lnTo>
+                  <a:lnTo>
+                    <a:pt x="2673862" y="973716"/>
+                  </a:lnTo>
+                  <a:lnTo>
+                    <a:pt x="2744207" y="974792"/>
+                  </a:lnTo>
+                  <a:lnTo>
+                    <a:pt x="2814551" y="975864"/>
+                  </a:lnTo>
+                  <a:lnTo>
+                    <a:pt x="2884896" y="976931"/>
+                  </a:lnTo>
+                  <a:lnTo>
+                    <a:pt x="2955240" y="977995"/>
+                  </a:lnTo>
+                  <a:lnTo>
+                    <a:pt x="3025585" y="979055"/>
+                  </a:lnTo>
+                  <a:lnTo>
+                    <a:pt x="3095929" y="980111"/>
+                  </a:lnTo>
+                  <a:lnTo>
+                    <a:pt x="3166274" y="981162"/>
+                  </a:lnTo>
+                  <a:lnTo>
+                    <a:pt x="3236618" y="982210"/>
+                  </a:lnTo>
+                  <a:lnTo>
+                    <a:pt x="3306963" y="983254"/>
+                  </a:lnTo>
+                  <a:lnTo>
+                    <a:pt x="3377307" y="984294"/>
+                  </a:lnTo>
+                  <a:lnTo>
+                    <a:pt x="3447652" y="985330"/>
+                  </a:lnTo>
+                  <a:lnTo>
+                    <a:pt x="3517996" y="986361"/>
+                  </a:lnTo>
+                  <a:lnTo>
+                    <a:pt x="3588341" y="987390"/>
+                  </a:lnTo>
+                  <a:lnTo>
+                    <a:pt x="3658685" y="988414"/>
+                  </a:lnTo>
+                  <a:lnTo>
+                    <a:pt x="3729030" y="989434"/>
+                  </a:lnTo>
+                  <a:lnTo>
+                    <a:pt x="3799374" y="990450"/>
+                  </a:lnTo>
+                  <a:lnTo>
+                    <a:pt x="3869719" y="991463"/>
+                  </a:lnTo>
+                  <a:lnTo>
+                    <a:pt x="3940063" y="992471"/>
+                  </a:lnTo>
+                  <a:lnTo>
+                    <a:pt x="4010407" y="993476"/>
+                  </a:lnTo>
+                  <a:lnTo>
+                    <a:pt x="4080752" y="994477"/>
+                  </a:lnTo>
+                  <a:lnTo>
+                    <a:pt x="4151096" y="995474"/>
+                  </a:lnTo>
+                  <a:lnTo>
+                    <a:pt x="4221441" y="996468"/>
+                  </a:lnTo>
+                  <a:lnTo>
+                    <a:pt x="4291785" y="997457"/>
+                  </a:lnTo>
+                  <a:lnTo>
+                    <a:pt x="4362130" y="998443"/>
+                  </a:lnTo>
+                  <a:lnTo>
+                    <a:pt x="4432474" y="999425"/>
+                  </a:lnTo>
+                  <a:lnTo>
+                    <a:pt x="4502819" y="1000404"/>
+                  </a:lnTo>
+                  <a:lnTo>
+                    <a:pt x="4573163" y="1001379"/>
+                  </a:lnTo>
+                  <a:lnTo>
+                    <a:pt x="4643508" y="1002350"/>
+                  </a:lnTo>
+                  <a:lnTo>
+                    <a:pt x="4713852" y="1003317"/>
+                  </a:lnTo>
+                  <a:lnTo>
+                    <a:pt x="4784197" y="1004281"/>
+                  </a:lnTo>
+                  <a:lnTo>
+                    <a:pt x="4854541" y="1005241"/>
+                  </a:lnTo>
+                  <a:lnTo>
+                    <a:pt x="4924886" y="1006197"/>
+                  </a:lnTo>
+                  <a:lnTo>
+                    <a:pt x="4995230" y="1007150"/>
+                  </a:lnTo>
+                  <a:lnTo>
+                    <a:pt x="5065575" y="1008099"/>
+                  </a:lnTo>
+                  <a:lnTo>
+                    <a:pt x="5135919" y="1009044"/>
+                  </a:lnTo>
+                  <a:lnTo>
+                    <a:pt x="5206264" y="1009986"/>
+                  </a:lnTo>
+                  <a:lnTo>
+                    <a:pt x="5276608" y="1010924"/>
                   </a:lnTo>
                 </a:path>
               </a:pathLst>
@@ -4102,303 +3812,628 @@
           </p:nvSpPr>
           <p:spPr>
             <a:xfrm>
-              <a:off x="1393026" y="2073503"/>
-              <a:ext cx="6869652" cy="3324506"/>
+              <a:off x="1235312" y="3041431"/>
+              <a:ext cx="6964104" cy="345453"/>
             </a:xfrm>
             <a:custGeom>
               <a:avLst/>
               <a:pathLst>
-                <a:path w="6869652" h="3324506">
+                <a:path w="6964104" h="345453">
+                  <a:moveTo>
+                    <a:pt x="6964104" y="345453"/>
+                  </a:moveTo>
+                  <a:lnTo>
+                    <a:pt x="6893760" y="344616"/>
+                  </a:lnTo>
+                  <a:lnTo>
+                    <a:pt x="6823415" y="343727"/>
+                  </a:lnTo>
+                  <a:lnTo>
+                    <a:pt x="6753071" y="342783"/>
+                  </a:lnTo>
+                  <a:lnTo>
+                    <a:pt x="6682726" y="341779"/>
+                  </a:lnTo>
+                  <a:lnTo>
+                    <a:pt x="6612382" y="340713"/>
+                  </a:lnTo>
+                  <a:lnTo>
+                    <a:pt x="6542037" y="339581"/>
+                  </a:lnTo>
+                  <a:lnTo>
+                    <a:pt x="6471693" y="338378"/>
+                  </a:lnTo>
+                  <a:lnTo>
+                    <a:pt x="6401348" y="337099"/>
+                  </a:lnTo>
+                  <a:lnTo>
+                    <a:pt x="6331004" y="335741"/>
+                  </a:lnTo>
+                  <a:lnTo>
+                    <a:pt x="6260659" y="334298"/>
+                  </a:lnTo>
+                  <a:lnTo>
+                    <a:pt x="6190315" y="332765"/>
+                  </a:lnTo>
+                  <a:lnTo>
+                    <a:pt x="6119970" y="331137"/>
+                  </a:lnTo>
+                  <a:lnTo>
+                    <a:pt x="6049626" y="329407"/>
+                  </a:lnTo>
+                  <a:lnTo>
+                    <a:pt x="5979281" y="327569"/>
+                  </a:lnTo>
+                  <a:lnTo>
+                    <a:pt x="5908937" y="325616"/>
+                  </a:lnTo>
+                  <a:lnTo>
+                    <a:pt x="5838592" y="323541"/>
+                  </a:lnTo>
+                  <a:lnTo>
+                    <a:pt x="5768248" y="321337"/>
+                  </a:lnTo>
+                  <a:lnTo>
+                    <a:pt x="5697903" y="318995"/>
+                  </a:lnTo>
+                  <a:lnTo>
+                    <a:pt x="5627559" y="316508"/>
+                  </a:lnTo>
+                  <a:lnTo>
+                    <a:pt x="5557214" y="313864"/>
+                  </a:lnTo>
+                  <a:lnTo>
+                    <a:pt x="5486870" y="311056"/>
+                  </a:lnTo>
+                  <a:lnTo>
+                    <a:pt x="5416525" y="308073"/>
+                  </a:lnTo>
+                  <a:lnTo>
+                    <a:pt x="5346181" y="304904"/>
+                  </a:lnTo>
+                  <a:lnTo>
+                    <a:pt x="5275836" y="301537"/>
+                  </a:lnTo>
+                  <a:lnTo>
+                    <a:pt x="5205492" y="297959"/>
+                  </a:lnTo>
+                  <a:lnTo>
+                    <a:pt x="5135147" y="294159"/>
+                  </a:lnTo>
+                  <a:lnTo>
+                    <a:pt x="5064803" y="290121"/>
+                  </a:lnTo>
+                  <a:lnTo>
+                    <a:pt x="4994458" y="285831"/>
+                  </a:lnTo>
+                  <a:lnTo>
+                    <a:pt x="4924114" y="281274"/>
+                  </a:lnTo>
+                  <a:lnTo>
+                    <a:pt x="4853769" y="276432"/>
+                  </a:lnTo>
+                  <a:lnTo>
+                    <a:pt x="4783425" y="271288"/>
+                  </a:lnTo>
+                  <a:lnTo>
+                    <a:pt x="4713080" y="265824"/>
+                  </a:lnTo>
+                  <a:lnTo>
+                    <a:pt x="4642736" y="260018"/>
+                  </a:lnTo>
+                  <a:lnTo>
+                    <a:pt x="4572391" y="253849"/>
+                  </a:lnTo>
+                  <a:lnTo>
+                    <a:pt x="4502047" y="247296"/>
+                  </a:lnTo>
+                  <a:lnTo>
+                    <a:pt x="4431702" y="240334"/>
+                  </a:lnTo>
+                  <a:lnTo>
+                    <a:pt x="4361358" y="232938"/>
+                  </a:lnTo>
+                  <a:lnTo>
+                    <a:pt x="4291013" y="225080"/>
+                  </a:lnTo>
+                  <a:lnTo>
+                    <a:pt x="4220669" y="216731"/>
+                  </a:lnTo>
+                  <a:lnTo>
+                    <a:pt x="4150324" y="207862"/>
+                  </a:lnTo>
+                  <a:lnTo>
+                    <a:pt x="4079980" y="198439"/>
+                  </a:lnTo>
+                  <a:lnTo>
+                    <a:pt x="4009635" y="188428"/>
+                  </a:lnTo>
+                  <a:lnTo>
+                    <a:pt x="3939291" y="177792"/>
+                  </a:lnTo>
+                  <a:lnTo>
+                    <a:pt x="3868946" y="166493"/>
+                  </a:lnTo>
+                  <a:lnTo>
+                    <a:pt x="3798602" y="154488"/>
+                  </a:lnTo>
+                  <a:lnTo>
+                    <a:pt x="3728257" y="141735"/>
+                  </a:lnTo>
+                  <a:lnTo>
+                    <a:pt x="3657913" y="128185"/>
+                  </a:lnTo>
+                  <a:lnTo>
+                    <a:pt x="3587569" y="113790"/>
+                  </a:lnTo>
+                  <a:lnTo>
+                    <a:pt x="3517224" y="98497"/>
+                  </a:lnTo>
+                  <a:lnTo>
+                    <a:pt x="3446880" y="82249"/>
+                  </a:lnTo>
+                  <a:lnTo>
+                    <a:pt x="3376535" y="64988"/>
+                  </a:lnTo>
+                  <a:lnTo>
+                    <a:pt x="3306191" y="58735"/>
+                  </a:lnTo>
+                  <a:lnTo>
+                    <a:pt x="3235846" y="57592"/>
+                  </a:lnTo>
+                  <a:lnTo>
+                    <a:pt x="3165502" y="56444"/>
+                  </a:lnTo>
+                  <a:lnTo>
+                    <a:pt x="3095157" y="55291"/>
+                  </a:lnTo>
+                  <a:lnTo>
+                    <a:pt x="3024813" y="54135"/>
+                  </a:lnTo>
+                  <a:lnTo>
+                    <a:pt x="2954468" y="52974"/>
+                  </a:lnTo>
+                  <a:lnTo>
+                    <a:pt x="2884124" y="51808"/>
+                  </a:lnTo>
+                  <a:lnTo>
+                    <a:pt x="2813779" y="50638"/>
+                  </a:lnTo>
+                  <a:lnTo>
+                    <a:pt x="2743435" y="49464"/>
+                  </a:lnTo>
+                  <a:lnTo>
+                    <a:pt x="2673090" y="48285"/>
+                  </a:lnTo>
+                  <a:lnTo>
+                    <a:pt x="2602746" y="47102"/>
+                  </a:lnTo>
+                  <a:lnTo>
+                    <a:pt x="2532401" y="45914"/>
+                  </a:lnTo>
+                  <a:lnTo>
+                    <a:pt x="2462057" y="44722"/>
+                  </a:lnTo>
+                  <a:lnTo>
+                    <a:pt x="2391712" y="43525"/>
+                  </a:lnTo>
+                  <a:lnTo>
+                    <a:pt x="2321368" y="42323"/>
+                  </a:lnTo>
+                  <a:lnTo>
+                    <a:pt x="2251023" y="41117"/>
+                  </a:lnTo>
+                  <a:lnTo>
+                    <a:pt x="2180679" y="39907"/>
+                  </a:lnTo>
+                  <a:lnTo>
+                    <a:pt x="2110334" y="38691"/>
+                  </a:lnTo>
+                  <a:lnTo>
+                    <a:pt x="2039990" y="37472"/>
+                  </a:lnTo>
+                  <a:lnTo>
+                    <a:pt x="1969645" y="36247"/>
+                  </a:lnTo>
+                  <a:lnTo>
+                    <a:pt x="1899301" y="35018"/>
+                  </a:lnTo>
+                  <a:lnTo>
+                    <a:pt x="1828956" y="33784"/>
+                  </a:lnTo>
+                  <a:lnTo>
+                    <a:pt x="1758612" y="32545"/>
+                  </a:lnTo>
+                  <a:lnTo>
+                    <a:pt x="1688267" y="31302"/>
+                  </a:lnTo>
+                  <a:lnTo>
+                    <a:pt x="1617923" y="30054"/>
+                  </a:lnTo>
+                  <a:lnTo>
+                    <a:pt x="1547578" y="28801"/>
+                  </a:lnTo>
+                  <a:lnTo>
+                    <a:pt x="1477234" y="27544"/>
+                  </a:lnTo>
+                  <a:lnTo>
+                    <a:pt x="1406889" y="26281"/>
+                  </a:lnTo>
+                  <a:lnTo>
+                    <a:pt x="1336545" y="25014"/>
+                  </a:lnTo>
+                  <a:lnTo>
+                    <a:pt x="1266200" y="23742"/>
+                  </a:lnTo>
+                  <a:lnTo>
+                    <a:pt x="1195856" y="22465"/>
+                  </a:lnTo>
+                  <a:lnTo>
+                    <a:pt x="1125511" y="21184"/>
+                  </a:lnTo>
+                  <a:lnTo>
+                    <a:pt x="1055167" y="19897"/>
+                  </a:lnTo>
+                  <a:lnTo>
+                    <a:pt x="984822" y="18606"/>
+                  </a:lnTo>
+                  <a:lnTo>
+                    <a:pt x="914478" y="17309"/>
+                  </a:lnTo>
+                  <a:lnTo>
+                    <a:pt x="844133" y="16008"/>
+                  </a:lnTo>
+                  <a:lnTo>
+                    <a:pt x="773789" y="14702"/>
+                  </a:lnTo>
+                  <a:lnTo>
+                    <a:pt x="703444" y="13390"/>
+                  </a:lnTo>
+                  <a:lnTo>
+                    <a:pt x="633100" y="12074"/>
+                  </a:lnTo>
+                  <a:lnTo>
+                    <a:pt x="562755" y="10753"/>
+                  </a:lnTo>
+                  <a:lnTo>
+                    <a:pt x="492411" y="9426"/>
+                  </a:lnTo>
+                  <a:lnTo>
+                    <a:pt x="422066" y="8095"/>
+                  </a:lnTo>
+                  <a:lnTo>
+                    <a:pt x="351722" y="6759"/>
+                  </a:lnTo>
+                  <a:lnTo>
+                    <a:pt x="281377" y="5417"/>
+                  </a:lnTo>
+                  <a:lnTo>
+                    <a:pt x="211033" y="4070"/>
+                  </a:lnTo>
+                  <a:lnTo>
+                    <a:pt x="140688" y="2719"/>
+                  </a:lnTo>
+                  <a:lnTo>
+                    <a:pt x="70344" y="1362"/>
+                  </a:lnTo>
+                  <a:lnTo>
+                    <a:pt x="0" y="0"/>
+                  </a:lnTo>
+                </a:path>
+              </a:pathLst>
+            </a:custGeom>
+          </p:spPr>
+          <p:txBody>
+            <a:bodyPr/>
+            <a:lstStyle/>
+            <a:p/>
+          </p:txBody>
+        </p:sp>
+        <p:sp>
+          <p:nvSpPr>
+            <p:cNvPr id="24" name="pl24"/>
+            <p:cNvSpPr/>
+            <p:nvPr/>
+          </p:nvSpPr>
+          <p:spPr>
+            <a:xfrm>
+              <a:off x="1452346" y="2143092"/>
+              <a:ext cx="6747070" cy="1199736"/>
+            </a:xfrm>
+            <a:custGeom>
+              <a:avLst/>
+              <a:pathLst>
+                <a:path w="6747070" h="1199736">
                   <a:moveTo>
                     <a:pt x="0" y="0"/>
                   </a:moveTo>
                   <a:lnTo>
-                    <a:pt x="65512" y="101147"/>
-                  </a:lnTo>
-                  <a:lnTo>
-                    <a:pt x="137135" y="208228"/>
-                  </a:lnTo>
-                  <a:lnTo>
-                    <a:pt x="208757" y="311919"/>
-                  </a:lnTo>
-                  <a:lnTo>
-                    <a:pt x="280380" y="412327"/>
-                  </a:lnTo>
-                  <a:lnTo>
-                    <a:pt x="352002" y="509557"/>
-                  </a:lnTo>
-                  <a:lnTo>
-                    <a:pt x="423625" y="603709"/>
-                  </a:lnTo>
-                  <a:lnTo>
-                    <a:pt x="495247" y="694881"/>
-                  </a:lnTo>
-                  <a:lnTo>
-                    <a:pt x="566870" y="783166"/>
-                  </a:lnTo>
-                  <a:lnTo>
-                    <a:pt x="638492" y="868656"/>
-                  </a:lnTo>
-                  <a:lnTo>
-                    <a:pt x="710115" y="951441"/>
-                  </a:lnTo>
-                  <a:lnTo>
-                    <a:pt x="781737" y="1031604"/>
-                  </a:lnTo>
-                  <a:lnTo>
-                    <a:pt x="853360" y="1109230"/>
-                  </a:lnTo>
-                  <a:lnTo>
-                    <a:pt x="924982" y="1184398"/>
-                  </a:lnTo>
-                  <a:lnTo>
-                    <a:pt x="996605" y="1257187"/>
-                  </a:lnTo>
-                  <a:lnTo>
-                    <a:pt x="1068227" y="1327672"/>
-                  </a:lnTo>
-                  <a:lnTo>
-                    <a:pt x="1139850" y="1395925"/>
-                  </a:lnTo>
-                  <a:lnTo>
-                    <a:pt x="1211472" y="1462018"/>
-                  </a:lnTo>
-                  <a:lnTo>
-                    <a:pt x="1283095" y="1526019"/>
-                  </a:lnTo>
-                  <a:lnTo>
-                    <a:pt x="1354717" y="1587993"/>
-                  </a:lnTo>
-                  <a:lnTo>
-                    <a:pt x="1426340" y="1648006"/>
-                  </a:lnTo>
-                  <a:lnTo>
-                    <a:pt x="1497963" y="1706119"/>
-                  </a:lnTo>
-                  <a:lnTo>
-                    <a:pt x="1569585" y="1762392"/>
-                  </a:lnTo>
-                  <a:lnTo>
-                    <a:pt x="1641208" y="1816884"/>
-                  </a:lnTo>
-                  <a:lnTo>
-                    <a:pt x="1712830" y="1869650"/>
-                  </a:lnTo>
-                  <a:lnTo>
-                    <a:pt x="1784453" y="1920747"/>
-                  </a:lnTo>
-                  <a:lnTo>
-                    <a:pt x="1856075" y="1970226"/>
-                  </a:lnTo>
-                  <a:lnTo>
-                    <a:pt x="1927698" y="2018138"/>
-                  </a:lnTo>
-                  <a:lnTo>
-                    <a:pt x="1999320" y="2064534"/>
-                  </a:lnTo>
-                  <a:lnTo>
-                    <a:pt x="2070943" y="2109461"/>
-                  </a:lnTo>
-                  <a:lnTo>
-                    <a:pt x="2142565" y="2152966"/>
-                  </a:lnTo>
-                  <a:lnTo>
-                    <a:pt x="2214188" y="2195093"/>
-                  </a:lnTo>
-                  <a:lnTo>
-                    <a:pt x="2285810" y="2235888"/>
-                  </a:lnTo>
-                  <a:lnTo>
-                    <a:pt x="2357433" y="2275390"/>
-                  </a:lnTo>
-                  <a:lnTo>
-                    <a:pt x="2429055" y="2313642"/>
-                  </a:lnTo>
-                  <a:lnTo>
-                    <a:pt x="2500678" y="2350684"/>
-                  </a:lnTo>
-                  <a:lnTo>
-                    <a:pt x="2572300" y="2386552"/>
-                  </a:lnTo>
-                  <a:lnTo>
-                    <a:pt x="2643923" y="2421285"/>
-                  </a:lnTo>
-                  <a:lnTo>
-                    <a:pt x="2715545" y="2454919"/>
-                  </a:lnTo>
-                  <a:lnTo>
-                    <a:pt x="2787168" y="2487488"/>
-                  </a:lnTo>
-                  <a:lnTo>
-                    <a:pt x="2858791" y="2519026"/>
-                  </a:lnTo>
-                  <a:lnTo>
-                    <a:pt x="2930413" y="2549565"/>
-                  </a:lnTo>
-                  <a:lnTo>
-                    <a:pt x="3002036" y="2579138"/>
-                  </a:lnTo>
-                  <a:lnTo>
-                    <a:pt x="3073658" y="2607775"/>
-                  </a:lnTo>
-                  <a:lnTo>
-                    <a:pt x="3145281" y="2635505"/>
-                  </a:lnTo>
-                  <a:lnTo>
-                    <a:pt x="3216903" y="2662357"/>
-                  </a:lnTo>
-                  <a:lnTo>
-                    <a:pt x="3288526" y="2688359"/>
-                  </a:lnTo>
-                  <a:lnTo>
-                    <a:pt x="3360148" y="2713538"/>
-                  </a:lnTo>
-                  <a:lnTo>
-                    <a:pt x="3431771" y="2737920"/>
-                  </a:lnTo>
-                  <a:lnTo>
-                    <a:pt x="3503393" y="2761530"/>
-                  </a:lnTo>
-                  <a:lnTo>
-                    <a:pt x="3575016" y="2784393"/>
-                  </a:lnTo>
-                  <a:lnTo>
-                    <a:pt x="3646638" y="2806532"/>
-                  </a:lnTo>
-                  <a:lnTo>
-                    <a:pt x="3718261" y="2827970"/>
-                  </a:lnTo>
-                  <a:lnTo>
-                    <a:pt x="3789883" y="2848730"/>
-                  </a:lnTo>
-                  <a:lnTo>
-                    <a:pt x="3861506" y="2868832"/>
-                  </a:lnTo>
-                  <a:lnTo>
-                    <a:pt x="3933128" y="2888298"/>
-                  </a:lnTo>
-                  <a:lnTo>
-                    <a:pt x="4004751" y="2907148"/>
-                  </a:lnTo>
-                  <a:lnTo>
-                    <a:pt x="4076373" y="2925401"/>
-                  </a:lnTo>
-                  <a:lnTo>
-                    <a:pt x="4147996" y="2943076"/>
-                  </a:lnTo>
-                  <a:lnTo>
-                    <a:pt x="4219619" y="2960191"/>
-                  </a:lnTo>
-                  <a:lnTo>
-                    <a:pt x="4291241" y="2976765"/>
-                  </a:lnTo>
-                  <a:lnTo>
-                    <a:pt x="4362864" y="2992814"/>
-                  </a:lnTo>
-                  <a:lnTo>
-                    <a:pt x="4434486" y="3008355"/>
-                  </a:lnTo>
-                  <a:lnTo>
-                    <a:pt x="4506109" y="3023405"/>
-                  </a:lnTo>
-                  <a:lnTo>
-                    <a:pt x="4577731" y="3037977"/>
-                  </a:lnTo>
-                  <a:lnTo>
-                    <a:pt x="4649354" y="3052089"/>
-                  </a:lnTo>
-                  <a:lnTo>
-                    <a:pt x="4720976" y="3065753"/>
-                  </a:lnTo>
-                  <a:lnTo>
-                    <a:pt x="4792599" y="3078986"/>
-                  </a:lnTo>
-                  <a:lnTo>
-                    <a:pt x="4864221" y="3091799"/>
-                  </a:lnTo>
-                  <a:lnTo>
-                    <a:pt x="4935844" y="3104206"/>
-                  </a:lnTo>
-                  <a:lnTo>
-                    <a:pt x="5007466" y="3116221"/>
-                  </a:lnTo>
-                  <a:lnTo>
-                    <a:pt x="5079089" y="3127856"/>
-                  </a:lnTo>
-                  <a:lnTo>
-                    <a:pt x="5150711" y="3139122"/>
-                  </a:lnTo>
-                  <a:lnTo>
-                    <a:pt x="5222334" y="3150032"/>
-                  </a:lnTo>
-                  <a:lnTo>
-                    <a:pt x="5293956" y="3160596"/>
-                  </a:lnTo>
-                  <a:lnTo>
-                    <a:pt x="5365579" y="3170825"/>
-                  </a:lnTo>
-                  <a:lnTo>
-                    <a:pt x="5437201" y="3180731"/>
-                  </a:lnTo>
-                  <a:lnTo>
-                    <a:pt x="5508824" y="3190324"/>
-                  </a:lnTo>
-                  <a:lnTo>
-                    <a:pt x="5580447" y="3199612"/>
-                  </a:lnTo>
-                  <a:lnTo>
-                    <a:pt x="5652069" y="3208607"/>
-                  </a:lnTo>
-                  <a:lnTo>
-                    <a:pt x="5723692" y="3217317"/>
-                  </a:lnTo>
-                  <a:lnTo>
-                    <a:pt x="5795314" y="3225751"/>
-                  </a:lnTo>
-                  <a:lnTo>
-                    <a:pt x="5866937" y="3233918"/>
-                  </a:lnTo>
-                  <a:lnTo>
-                    <a:pt x="5938559" y="3241827"/>
-                  </a:lnTo>
-                  <a:lnTo>
-                    <a:pt x="6010182" y="3249485"/>
-                  </a:lnTo>
-                  <a:lnTo>
-                    <a:pt x="6081804" y="3256901"/>
-                  </a:lnTo>
-                  <a:lnTo>
-                    <a:pt x="6153427" y="3264082"/>
-                  </a:lnTo>
-                  <a:lnTo>
-                    <a:pt x="6225049" y="3271036"/>
-                  </a:lnTo>
-                  <a:lnTo>
-                    <a:pt x="6296672" y="3277770"/>
-                  </a:lnTo>
-                  <a:lnTo>
-                    <a:pt x="6368294" y="3284290"/>
-                  </a:lnTo>
-                  <a:lnTo>
-                    <a:pt x="6439917" y="3290604"/>
-                  </a:lnTo>
-                  <a:lnTo>
-                    <a:pt x="6511539" y="3296718"/>
-                  </a:lnTo>
-                  <a:lnTo>
-                    <a:pt x="6583162" y="3302639"/>
-                  </a:lnTo>
-                  <a:lnTo>
-                    <a:pt x="6654784" y="3308372"/>
-                  </a:lnTo>
-                  <a:lnTo>
-                    <a:pt x="6726407" y="3313924"/>
-                  </a:lnTo>
-                  <a:lnTo>
-                    <a:pt x="6798029" y="3319300"/>
-                  </a:lnTo>
-                  <a:lnTo>
-                    <a:pt x="6869652" y="3324506"/>
+                    <a:pt x="64343" y="36501"/>
+                  </a:lnTo>
+                  <a:lnTo>
+                    <a:pt x="134687" y="75144"/>
+                  </a:lnTo>
+                  <a:lnTo>
+                    <a:pt x="205032" y="112564"/>
+                  </a:lnTo>
+                  <a:lnTo>
+                    <a:pt x="275376" y="148799"/>
+                  </a:lnTo>
+                  <a:lnTo>
+                    <a:pt x="345721" y="183887"/>
+                  </a:lnTo>
+                  <a:lnTo>
+                    <a:pt x="416065" y="217864"/>
+                  </a:lnTo>
+                  <a:lnTo>
+                    <a:pt x="486410" y="250766"/>
+                  </a:lnTo>
+                  <a:lnTo>
+                    <a:pt x="556754" y="282626"/>
+                  </a:lnTo>
+                  <a:lnTo>
+                    <a:pt x="627099" y="313477"/>
+                  </a:lnTo>
+                  <a:lnTo>
+                    <a:pt x="697443" y="343352"/>
+                  </a:lnTo>
+                  <a:lnTo>
+                    <a:pt x="767788" y="372281"/>
+                  </a:lnTo>
+                  <a:lnTo>
+                    <a:pt x="838132" y="400295"/>
+                  </a:lnTo>
+                  <a:lnTo>
+                    <a:pt x="908477" y="427421"/>
+                  </a:lnTo>
+                  <a:lnTo>
+                    <a:pt x="978821" y="453689"/>
+                  </a:lnTo>
+                  <a:lnTo>
+                    <a:pt x="1049166" y="479125"/>
+                  </a:lnTo>
+                  <a:lnTo>
+                    <a:pt x="1119510" y="503756"/>
+                  </a:lnTo>
+                  <a:lnTo>
+                    <a:pt x="1189855" y="527608"/>
+                  </a:lnTo>
+                  <a:lnTo>
+                    <a:pt x="1260199" y="550704"/>
+                  </a:lnTo>
+                  <a:lnTo>
+                    <a:pt x="1330544" y="573069"/>
+                  </a:lnTo>
+                  <a:lnTo>
+                    <a:pt x="1400888" y="594726"/>
+                  </a:lnTo>
+                  <a:lnTo>
+                    <a:pt x="1471233" y="615698"/>
+                  </a:lnTo>
+                  <a:lnTo>
+                    <a:pt x="1541577" y="636005"/>
+                  </a:lnTo>
+                  <a:lnTo>
+                    <a:pt x="1611922" y="655670"/>
+                  </a:lnTo>
+                  <a:lnTo>
+                    <a:pt x="1682266" y="674713"/>
+                  </a:lnTo>
+                  <a:lnTo>
+                    <a:pt x="1752611" y="693152"/>
+                  </a:lnTo>
+                  <a:lnTo>
+                    <a:pt x="1822955" y="711008"/>
+                  </a:lnTo>
+                  <a:lnTo>
+                    <a:pt x="1893300" y="728298"/>
+                  </a:lnTo>
+                  <a:lnTo>
+                    <a:pt x="1963644" y="745041"/>
+                  </a:lnTo>
+                  <a:lnTo>
+                    <a:pt x="2033989" y="761255"/>
+                  </a:lnTo>
+                  <a:lnTo>
+                    <a:pt x="2104333" y="776954"/>
+                  </a:lnTo>
+                  <a:lnTo>
+                    <a:pt x="2174678" y="792157"/>
+                  </a:lnTo>
+                  <a:lnTo>
+                    <a:pt x="2245022" y="806879"/>
+                  </a:lnTo>
+                  <a:lnTo>
+                    <a:pt x="2315367" y="821134"/>
+                  </a:lnTo>
+                  <a:lnTo>
+                    <a:pt x="2385711" y="834939"/>
+                  </a:lnTo>
+                  <a:lnTo>
+                    <a:pt x="2456056" y="848306"/>
+                  </a:lnTo>
+                  <a:lnTo>
+                    <a:pt x="2526400" y="861250"/>
+                  </a:lnTo>
+                  <a:lnTo>
+                    <a:pt x="2596745" y="873785"/>
+                  </a:lnTo>
+                  <a:lnTo>
+                    <a:pt x="2667089" y="885922"/>
+                  </a:lnTo>
+                  <a:lnTo>
+                    <a:pt x="2737434" y="897676"/>
+                  </a:lnTo>
+                  <a:lnTo>
+                    <a:pt x="2807778" y="909057"/>
+                  </a:lnTo>
+                  <a:lnTo>
+                    <a:pt x="2878123" y="920078"/>
+                  </a:lnTo>
+                  <a:lnTo>
+                    <a:pt x="2948467" y="930750"/>
+                  </a:lnTo>
+                  <a:lnTo>
+                    <a:pt x="3018812" y="941084"/>
+                  </a:lnTo>
+                  <a:lnTo>
+                    <a:pt x="3089156" y="951091"/>
+                  </a:lnTo>
+                  <a:lnTo>
+                    <a:pt x="3159501" y="960782"/>
+                  </a:lnTo>
+                  <a:lnTo>
+                    <a:pt x="3229845" y="970165"/>
+                  </a:lnTo>
+                  <a:lnTo>
+                    <a:pt x="3300190" y="979252"/>
+                  </a:lnTo>
+                  <a:lnTo>
+                    <a:pt x="3370534" y="988051"/>
+                  </a:lnTo>
+                  <a:lnTo>
+                    <a:pt x="3440879" y="996571"/>
+                  </a:lnTo>
+                  <a:lnTo>
+                    <a:pt x="3511223" y="1004822"/>
+                  </a:lnTo>
+                  <a:lnTo>
+                    <a:pt x="3581568" y="1012811"/>
+                  </a:lnTo>
+                  <a:lnTo>
+                    <a:pt x="3651912" y="1020548"/>
+                  </a:lnTo>
+                  <a:lnTo>
+                    <a:pt x="3722257" y="1028039"/>
+                  </a:lnTo>
+                  <a:lnTo>
+                    <a:pt x="3792601" y="1035294"/>
+                  </a:lnTo>
+                  <a:lnTo>
+                    <a:pt x="3862945" y="1042318"/>
+                  </a:lnTo>
+                  <a:lnTo>
+                    <a:pt x="3933290" y="1049121"/>
+                  </a:lnTo>
+                  <a:lnTo>
+                    <a:pt x="4003634" y="1055708"/>
+                  </a:lnTo>
+                  <a:lnTo>
+                    <a:pt x="4073979" y="1062086"/>
+                  </a:lnTo>
+                  <a:lnTo>
+                    <a:pt x="4144323" y="1068263"/>
+                  </a:lnTo>
+                  <a:lnTo>
+                    <a:pt x="4214668" y="1074244"/>
+                  </a:lnTo>
+                  <a:lnTo>
+                    <a:pt x="4285012" y="1080036"/>
+                  </a:lnTo>
+                  <a:lnTo>
+                    <a:pt x="4355357" y="1085644"/>
+                  </a:lnTo>
+                  <a:lnTo>
+                    <a:pt x="4425701" y="1091075"/>
+                  </a:lnTo>
+                  <a:lnTo>
+                    <a:pt x="4496046" y="1096334"/>
+                  </a:lnTo>
+                  <a:lnTo>
+                    <a:pt x="4566390" y="1101427"/>
+                  </a:lnTo>
+                  <a:lnTo>
+                    <a:pt x="4636735" y="1106358"/>
+                  </a:lnTo>
+                  <a:lnTo>
+                    <a:pt x="4707079" y="1111133"/>
+                  </a:lnTo>
+                  <a:lnTo>
+                    <a:pt x="4777424" y="1115757"/>
+                  </a:lnTo>
+                  <a:lnTo>
+                    <a:pt x="4847768" y="1120235"/>
+                  </a:lnTo>
+                  <a:lnTo>
+                    <a:pt x="4918113" y="1124571"/>
+                  </a:lnTo>
+                  <a:lnTo>
+                    <a:pt x="4988457" y="1128769"/>
+                  </a:lnTo>
+                  <a:lnTo>
+                    <a:pt x="5058802" y="1132835"/>
+                  </a:lnTo>
+                  <a:lnTo>
+                    <a:pt x="5129146" y="1136772"/>
+                  </a:lnTo>
+                  <a:lnTo>
+                    <a:pt x="5199491" y="1140584"/>
+                  </a:lnTo>
+                  <a:lnTo>
+                    <a:pt x="5269835" y="1144276"/>
+                  </a:lnTo>
+                  <a:lnTo>
+                    <a:pt x="5340180" y="1147851"/>
+                  </a:lnTo>
+                  <a:lnTo>
+                    <a:pt x="5410524" y="1151312"/>
+                  </a:lnTo>
+                  <a:lnTo>
+                    <a:pt x="5480869" y="1154665"/>
+                  </a:lnTo>
+                  <a:lnTo>
+                    <a:pt x="5551213" y="1157910"/>
+                  </a:lnTo>
+                  <a:lnTo>
+                    <a:pt x="5621558" y="1161054"/>
+                  </a:lnTo>
+                  <a:lnTo>
+                    <a:pt x="5691902" y="1164097"/>
+                  </a:lnTo>
+                  <a:lnTo>
+                    <a:pt x="5762247" y="1167045"/>
+                  </a:lnTo>
+                  <a:lnTo>
+                    <a:pt x="5832591" y="1169899"/>
+                  </a:lnTo>
+                  <a:lnTo>
+                    <a:pt x="5902936" y="1172662"/>
+                  </a:lnTo>
+                  <a:lnTo>
+                    <a:pt x="5973280" y="1175339"/>
+                  </a:lnTo>
+                  <a:lnTo>
+                    <a:pt x="6043625" y="1177930"/>
+                  </a:lnTo>
+                  <a:lnTo>
+                    <a:pt x="6113969" y="1180440"/>
+                  </a:lnTo>
+                  <a:lnTo>
+                    <a:pt x="6184314" y="1182870"/>
+                  </a:lnTo>
+                  <a:lnTo>
+                    <a:pt x="6254658" y="1185223"/>
+                  </a:lnTo>
+                  <a:lnTo>
+                    <a:pt x="6325003" y="1187501"/>
+                  </a:lnTo>
+                  <a:lnTo>
+                    <a:pt x="6395347" y="1189708"/>
+                  </a:lnTo>
+                  <a:lnTo>
+                    <a:pt x="6465692" y="1191844"/>
+                  </a:lnTo>
+                  <a:lnTo>
+                    <a:pt x="6536036" y="1193913"/>
+                  </a:lnTo>
+                  <a:lnTo>
+                    <a:pt x="6606381" y="1195917"/>
+                  </a:lnTo>
+                  <a:lnTo>
+                    <a:pt x="6676725" y="1197857"/>
+                  </a:lnTo>
+                  <a:lnTo>
+                    <a:pt x="6747070" y="1199736"/>
                   </a:lnTo>
                 </a:path>
               </a:pathLst>
@@ -4421,27 +4456,27 @@
         </p:sp>
         <p:sp>
           <p:nvSpPr>
-            <p:cNvPr id="24" name="pl24"/>
+            <p:cNvPr id="25" name="pl25"/>
             <p:cNvSpPr/>
             <p:nvPr/>
           </p:nvSpPr>
           <p:spPr>
             <a:xfrm>
-              <a:off x="817517" y="4727786"/>
-              <a:ext cx="7799693" cy="0"/>
+              <a:off x="887106" y="3100960"/>
+              <a:ext cx="7660515" cy="0"/>
             </a:xfrm>
             <a:custGeom>
               <a:avLst/>
               <a:pathLst>
-                <a:path w="7799693" h="0">
+                <a:path w="7660515" h="0">
                   <a:moveTo>
                     <a:pt x="0" y="0"/>
                   </a:moveTo>
                   <a:lnTo>
-                    <a:pt x="7799693" y="0"/>
-                  </a:lnTo>
-                  <a:lnTo>
-                    <a:pt x="7799693" y="0"/>
+                    <a:pt x="7660515" y="0"/>
+                  </a:lnTo>
+                  <a:lnTo>
+                    <a:pt x="7660515" y="0"/>
                   </a:lnTo>
                 </a:path>
               </a:pathLst>
@@ -4464,21 +4499,21 @@
         </p:sp>
         <p:sp>
           <p:nvSpPr>
-            <p:cNvPr id="25" name="pl25"/>
+            <p:cNvPr id="26" name="pl26"/>
             <p:cNvSpPr/>
             <p:nvPr/>
           </p:nvSpPr>
           <p:spPr>
             <a:xfrm>
-              <a:off x="4588151" y="2073503"/>
-              <a:ext cx="0" cy="3649639"/>
+              <a:off x="4590457" y="2143092"/>
+              <a:ext cx="0" cy="1317069"/>
             </a:xfrm>
             <a:custGeom>
               <a:avLst/>
               <a:pathLst>
-                <a:path w="0" h="3649639">
+                <a:path w="0" h="1317069">
                   <a:moveTo>
-                    <a:pt x="0" y="3649639"/>
+                    <a:pt x="0" y="1317069"/>
                   </a:moveTo>
                   <a:lnTo>
                     <a:pt x="0" y="0"/>
@@ -4507,13 +4542,13 @@
         </p:sp>
         <p:sp>
           <p:nvSpPr>
-            <p:cNvPr id="26" name="tx26"/>
+            <p:cNvPr id="27" name="tx27"/>
             <p:cNvSpPr/>
             <p:nvPr/>
           </p:nvSpPr>
           <p:spPr>
             <a:xfrm>
-              <a:off x="692708" y="5517199"/>
+              <a:off x="762297" y="3360243"/>
               <a:ext cx="62179" cy="80101"/>
             </a:xfrm>
             <a:prstGeom prst="rect">
@@ -4553,13 +4588,13 @@
         </p:sp>
         <p:sp>
           <p:nvSpPr>
-            <p:cNvPr id="27" name="tx27"/>
+            <p:cNvPr id="28" name="tx28"/>
             <p:cNvSpPr/>
             <p:nvPr/>
           </p:nvSpPr>
           <p:spPr>
             <a:xfrm>
-              <a:off x="692708" y="4687735"/>
+              <a:off x="762297" y="3060909"/>
               <a:ext cx="62179" cy="80101"/>
             </a:xfrm>
             <a:prstGeom prst="rect">
@@ -4599,13 +4634,13 @@
         </p:sp>
         <p:sp>
           <p:nvSpPr>
-            <p:cNvPr id="28" name="tx28"/>
+            <p:cNvPr id="29" name="tx29"/>
             <p:cNvSpPr/>
             <p:nvPr/>
           </p:nvSpPr>
           <p:spPr>
             <a:xfrm>
-              <a:off x="692708" y="3858272"/>
+              <a:off x="762297" y="2761575"/>
               <a:ext cx="62179" cy="80101"/>
             </a:xfrm>
             <a:prstGeom prst="rect">
@@ -4645,13 +4680,13 @@
         </p:sp>
         <p:sp>
           <p:nvSpPr>
-            <p:cNvPr id="29" name="tx29"/>
+            <p:cNvPr id="30" name="tx30"/>
             <p:cNvSpPr/>
             <p:nvPr/>
           </p:nvSpPr>
           <p:spPr>
             <a:xfrm>
-              <a:off x="692708" y="3028808"/>
+              <a:off x="762297" y="2462242"/>
               <a:ext cx="62179" cy="80101"/>
             </a:xfrm>
             <a:prstGeom prst="rect">
@@ -4691,13 +4726,13 @@
         </p:sp>
         <p:sp>
           <p:nvSpPr>
-            <p:cNvPr id="30" name="tx30"/>
+            <p:cNvPr id="31" name="tx31"/>
             <p:cNvSpPr/>
             <p:nvPr/>
           </p:nvSpPr>
           <p:spPr>
             <a:xfrm>
-              <a:off x="692708" y="2199345"/>
+              <a:off x="762297" y="2162908"/>
               <a:ext cx="62179" cy="80101"/>
             </a:xfrm>
             <a:prstGeom prst="rect">
@@ -4737,13 +4772,13 @@
         </p:sp>
         <p:sp>
           <p:nvSpPr>
-            <p:cNvPr id="31" name="tx31"/>
+            <p:cNvPr id="32" name="tx32"/>
             <p:cNvSpPr/>
             <p:nvPr/>
           </p:nvSpPr>
           <p:spPr>
             <a:xfrm>
-              <a:off x="2360651" y="5785772"/>
+              <a:off x="2401262" y="3522791"/>
               <a:ext cx="161574" cy="80101"/>
             </a:xfrm>
             <a:prstGeom prst="rect">
@@ -4783,13 +4818,13 @@
         </p:sp>
         <p:sp>
           <p:nvSpPr>
-            <p:cNvPr id="32" name="tx32"/>
+            <p:cNvPr id="33" name="tx33"/>
             <p:cNvSpPr/>
             <p:nvPr/>
           </p:nvSpPr>
           <p:spPr>
             <a:xfrm>
-              <a:off x="4561958" y="5785772"/>
+              <a:off x="4564176" y="3522791"/>
               <a:ext cx="62179" cy="80101"/>
             </a:xfrm>
             <a:prstGeom prst="rect">
@@ -4829,13 +4864,13 @@
         </p:sp>
         <p:sp>
           <p:nvSpPr>
-            <p:cNvPr id="33" name="tx33"/>
+            <p:cNvPr id="34" name="tx34"/>
             <p:cNvSpPr/>
             <p:nvPr/>
           </p:nvSpPr>
           <p:spPr>
             <a:xfrm>
-              <a:off x="6682478" y="5785772"/>
+              <a:off x="6646302" y="3522791"/>
               <a:ext cx="124358" cy="80101"/>
             </a:xfrm>
             <a:prstGeom prst="rect">
@@ -4875,13 +4910,13 @@
         </p:sp>
         <p:sp>
           <p:nvSpPr>
-            <p:cNvPr id="34" name="tx34"/>
+            <p:cNvPr id="35" name="tx35"/>
             <p:cNvSpPr/>
             <p:nvPr/>
           </p:nvSpPr>
           <p:spPr>
             <a:xfrm>
-              <a:off x="2928340" y="5925448"/>
+              <a:off x="2928340" y="3662467"/>
               <a:ext cx="3578047" cy="100218"/>
             </a:xfrm>
             <a:prstGeom prst="rect">
@@ -4921,13 +4956,13 @@
         </p:sp>
         <p:sp>
           <p:nvSpPr>
-            <p:cNvPr id="35" name="tx35"/>
+            <p:cNvPr id="36" name="tx36"/>
             <p:cNvSpPr/>
             <p:nvPr/>
           </p:nvSpPr>
           <p:spPr>
             <a:xfrm rot="-5400000">
-              <a:off x="68446" y="3848213"/>
+              <a:off x="138035" y="2751517"/>
               <a:ext cx="1016904" cy="100218"/>
             </a:xfrm>
             <a:prstGeom prst="rect">
@@ -4967,13 +5002,13 @@
         </p:sp>
         <p:sp>
           <p:nvSpPr>
-            <p:cNvPr id="36" name="tx36"/>
+            <p:cNvPr id="37" name="tx37"/>
             <p:cNvSpPr/>
             <p:nvPr/>
           </p:nvSpPr>
           <p:spPr>
             <a:xfrm>
-              <a:off x="817517" y="1896563"/>
+              <a:off x="887106" y="1966152"/>
               <a:ext cx="6321612" cy="82021"/>
             </a:xfrm>
             <a:prstGeom prst="rect">
@@ -5013,13 +5048,3556 @@
         </p:sp>
         <p:sp>
           <p:nvSpPr>
-            <p:cNvPr id="37" name="tx37"/>
+            <p:cNvPr id="38" name="tx38"/>
             <p:cNvSpPr/>
             <p:nvPr/>
           </p:nvSpPr>
           <p:spPr>
             <a:xfrm>
-              <a:off x="817517" y="1669789"/>
+              <a:off x="887106" y="1739378"/>
+              <a:ext cx="1843521" cy="120152"/>
+            </a:xfrm>
+            <a:prstGeom prst="rect">
+              <a:avLst/>
+            </a:prstGeom>
+            <a:noFill/>
+          </p:spPr>
+          <p:txBody>
+            <a:bodyPr lIns="0" rIns="0" tIns="0" bIns="0" anchorCtr="1" anchor="ctr" wrap="none"/>
+            <a:lstStyle/>
+            <a:p>
+              <a:pPr algn="l" marL="0" marR="0" indent="0">
+                <a:lnSpc>
+                  <a:spcPts val="1320"/>
+                </a:lnSpc>
+                <a:spcBef>
+                  <a:spcPts val="0"/>
+                </a:spcBef>
+                <a:spcAft>
+                  <a:spcPts val="0"/>
+                </a:spcAft>
+              </a:pPr>
+              <a:r>
+                <a:rPr sz="1320">
+                  <a:solidFill>
+                    <a:srgbClr val="000000">
+                      <a:alpha val="100000"/>
+                    </a:srgbClr>
+                  </a:solidFill>
+                  <a:latin typeface="Helvetica"/>
+                  <a:cs typeface="Helvetica"/>
+                </a:rPr>
+                <a:t>Electrolyte Abnormalities</a:t>
+              </a:r>
+            </a:p>
+          </p:txBody>
+        </p:sp>
+        <p:sp>
+          <p:nvSpPr>
+            <p:cNvPr id="39" name="pl39"/>
+            <p:cNvSpPr/>
+            <p:nvPr/>
+          </p:nvSpPr>
+          <p:spPr>
+            <a:xfrm>
+              <a:off x="887106" y="5444019"/>
+              <a:ext cx="7660515" cy="0"/>
+            </a:xfrm>
+            <a:custGeom>
+              <a:avLst/>
+              <a:pathLst>
+                <a:path w="7660515" h="0">
+                  <a:moveTo>
+                    <a:pt x="0" y="0"/>
+                  </a:moveTo>
+                  <a:lnTo>
+                    <a:pt x="7660515" y="0"/>
+                  </a:lnTo>
+                  <a:lnTo>
+                    <a:pt x="7660515" y="0"/>
+                  </a:lnTo>
+                </a:path>
+              </a:pathLst>
+            </a:custGeom>
+            <a:ln w="6775" cap="flat">
+              <a:solidFill>
+                <a:srgbClr val="EBEBEB">
+                  <a:alpha val="100000"/>
+                </a:srgbClr>
+              </a:solidFill>
+              <a:prstDash val="solid"/>
+              <a:round/>
+            </a:ln>
+          </p:spPr>
+          <p:txBody>
+            <a:bodyPr/>
+            <a:lstStyle/>
+            <a:p/>
+          </p:txBody>
+        </p:sp>
+        <p:sp>
+          <p:nvSpPr>
+            <p:cNvPr id="40" name="pl40"/>
+            <p:cNvSpPr/>
+            <p:nvPr/>
+          </p:nvSpPr>
+          <p:spPr>
+            <a:xfrm>
+              <a:off x="887106" y="5144686"/>
+              <a:ext cx="7660515" cy="0"/>
+            </a:xfrm>
+            <a:custGeom>
+              <a:avLst/>
+              <a:pathLst>
+                <a:path w="7660515" h="0">
+                  <a:moveTo>
+                    <a:pt x="0" y="0"/>
+                  </a:moveTo>
+                  <a:lnTo>
+                    <a:pt x="7660515" y="0"/>
+                  </a:lnTo>
+                  <a:lnTo>
+                    <a:pt x="7660515" y="0"/>
+                  </a:lnTo>
+                </a:path>
+              </a:pathLst>
+            </a:custGeom>
+            <a:ln w="6775" cap="flat">
+              <a:solidFill>
+                <a:srgbClr val="EBEBEB">
+                  <a:alpha val="100000"/>
+                </a:srgbClr>
+              </a:solidFill>
+              <a:prstDash val="solid"/>
+              <a:round/>
+            </a:ln>
+          </p:spPr>
+          <p:txBody>
+            <a:bodyPr/>
+            <a:lstStyle/>
+            <a:p/>
+          </p:txBody>
+        </p:sp>
+        <p:sp>
+          <p:nvSpPr>
+            <p:cNvPr id="41" name="pl41"/>
+            <p:cNvSpPr/>
+            <p:nvPr/>
+          </p:nvSpPr>
+          <p:spPr>
+            <a:xfrm>
+              <a:off x="887106" y="4845352"/>
+              <a:ext cx="7660515" cy="0"/>
+            </a:xfrm>
+            <a:custGeom>
+              <a:avLst/>
+              <a:pathLst>
+                <a:path w="7660515" h="0">
+                  <a:moveTo>
+                    <a:pt x="0" y="0"/>
+                  </a:moveTo>
+                  <a:lnTo>
+                    <a:pt x="7660515" y="0"/>
+                  </a:lnTo>
+                  <a:lnTo>
+                    <a:pt x="7660515" y="0"/>
+                  </a:lnTo>
+                </a:path>
+              </a:pathLst>
+            </a:custGeom>
+            <a:ln w="6775" cap="flat">
+              <a:solidFill>
+                <a:srgbClr val="EBEBEB">
+                  <a:alpha val="100000"/>
+                </a:srgbClr>
+              </a:solidFill>
+              <a:prstDash val="solid"/>
+              <a:round/>
+            </a:ln>
+          </p:spPr>
+          <p:txBody>
+            <a:bodyPr/>
+            <a:lstStyle/>
+            <a:p/>
+          </p:txBody>
+        </p:sp>
+        <p:sp>
+          <p:nvSpPr>
+            <p:cNvPr id="42" name="pl42"/>
+            <p:cNvSpPr/>
+            <p:nvPr/>
+          </p:nvSpPr>
+          <p:spPr>
+            <a:xfrm>
+              <a:off x="887106" y="4546018"/>
+              <a:ext cx="7660515" cy="0"/>
+            </a:xfrm>
+            <a:custGeom>
+              <a:avLst/>
+              <a:pathLst>
+                <a:path w="7660515" h="0">
+                  <a:moveTo>
+                    <a:pt x="0" y="0"/>
+                  </a:moveTo>
+                  <a:lnTo>
+                    <a:pt x="7660515" y="0"/>
+                  </a:lnTo>
+                  <a:lnTo>
+                    <a:pt x="7660515" y="0"/>
+                  </a:lnTo>
+                </a:path>
+              </a:pathLst>
+            </a:custGeom>
+            <a:ln w="6775" cap="flat">
+              <a:solidFill>
+                <a:srgbClr val="EBEBEB">
+                  <a:alpha val="100000"/>
+                </a:srgbClr>
+              </a:solidFill>
+              <a:prstDash val="solid"/>
+              <a:round/>
+            </a:ln>
+          </p:spPr>
+          <p:txBody>
+            <a:bodyPr/>
+            <a:lstStyle/>
+            <a:p/>
+          </p:txBody>
+        </p:sp>
+        <p:sp>
+          <p:nvSpPr>
+            <p:cNvPr id="43" name="pl43"/>
+            <p:cNvSpPr/>
+            <p:nvPr/>
+          </p:nvSpPr>
+          <p:spPr>
+            <a:xfrm>
+              <a:off x="1636763" y="4336484"/>
+              <a:ext cx="0" cy="1317069"/>
+            </a:xfrm>
+            <a:custGeom>
+              <a:avLst/>
+              <a:pathLst>
+                <a:path w="0" h="1317069">
+                  <a:moveTo>
+                    <a:pt x="0" y="1317069"/>
+                  </a:moveTo>
+                  <a:lnTo>
+                    <a:pt x="0" y="0"/>
+                  </a:lnTo>
+                  <a:lnTo>
+                    <a:pt x="0" y="0"/>
+                  </a:lnTo>
+                </a:path>
+              </a:pathLst>
+            </a:custGeom>
+            <a:ln w="6775" cap="flat">
+              <a:solidFill>
+                <a:srgbClr val="EBEBEB">
+                  <a:alpha val="100000"/>
+                </a:srgbClr>
+              </a:solidFill>
+              <a:prstDash val="solid"/>
+              <a:round/>
+            </a:ln>
+          </p:spPr>
+          <p:txBody>
+            <a:bodyPr/>
+            <a:lstStyle/>
+            <a:p/>
+          </p:txBody>
+        </p:sp>
+        <p:sp>
+          <p:nvSpPr>
+            <p:cNvPr id="44" name="pl44"/>
+            <p:cNvSpPr/>
+            <p:nvPr/>
+          </p:nvSpPr>
+          <p:spPr>
+            <a:xfrm>
+              <a:off x="2482050" y="4336484"/>
+              <a:ext cx="0" cy="1317069"/>
+            </a:xfrm>
+            <a:custGeom>
+              <a:avLst/>
+              <a:pathLst>
+                <a:path w="0" h="1317069">
+                  <a:moveTo>
+                    <a:pt x="0" y="1317069"/>
+                  </a:moveTo>
+                  <a:lnTo>
+                    <a:pt x="0" y="0"/>
+                  </a:lnTo>
+                  <a:lnTo>
+                    <a:pt x="0" y="0"/>
+                  </a:lnTo>
+                </a:path>
+              </a:pathLst>
+            </a:custGeom>
+            <a:ln w="6775" cap="flat">
+              <a:solidFill>
+                <a:srgbClr val="EBEBEB">
+                  <a:alpha val="100000"/>
+                </a:srgbClr>
+              </a:solidFill>
+              <a:prstDash val="solid"/>
+              <a:round/>
+            </a:ln>
+          </p:spPr>
+          <p:txBody>
+            <a:bodyPr/>
+            <a:lstStyle/>
+            <a:p/>
+          </p:txBody>
+        </p:sp>
+        <p:sp>
+          <p:nvSpPr>
+            <p:cNvPr id="45" name="pl45"/>
+            <p:cNvSpPr/>
+            <p:nvPr/>
+          </p:nvSpPr>
+          <p:spPr>
+            <a:xfrm>
+              <a:off x="3327336" y="4336484"/>
+              <a:ext cx="0" cy="1317069"/>
+            </a:xfrm>
+            <a:custGeom>
+              <a:avLst/>
+              <a:pathLst>
+                <a:path w="0" h="1317069">
+                  <a:moveTo>
+                    <a:pt x="0" y="1317069"/>
+                  </a:moveTo>
+                  <a:lnTo>
+                    <a:pt x="0" y="0"/>
+                  </a:lnTo>
+                  <a:lnTo>
+                    <a:pt x="0" y="0"/>
+                  </a:lnTo>
+                </a:path>
+              </a:pathLst>
+            </a:custGeom>
+            <a:ln w="6775" cap="flat">
+              <a:solidFill>
+                <a:srgbClr val="EBEBEB">
+                  <a:alpha val="100000"/>
+                </a:srgbClr>
+              </a:solidFill>
+              <a:prstDash val="solid"/>
+              <a:round/>
+            </a:ln>
+          </p:spPr>
+          <p:txBody>
+            <a:bodyPr/>
+            <a:lstStyle/>
+            <a:p/>
+          </p:txBody>
+        </p:sp>
+        <p:sp>
+          <p:nvSpPr>
+            <p:cNvPr id="46" name="pl46"/>
+            <p:cNvSpPr/>
+            <p:nvPr/>
+          </p:nvSpPr>
+          <p:spPr>
+            <a:xfrm>
+              <a:off x="4172622" y="4336484"/>
+              <a:ext cx="0" cy="1317069"/>
+            </a:xfrm>
+            <a:custGeom>
+              <a:avLst/>
+              <a:pathLst>
+                <a:path w="0" h="1317069">
+                  <a:moveTo>
+                    <a:pt x="0" y="1317069"/>
+                  </a:moveTo>
+                  <a:lnTo>
+                    <a:pt x="0" y="0"/>
+                  </a:lnTo>
+                  <a:lnTo>
+                    <a:pt x="0" y="0"/>
+                  </a:lnTo>
+                </a:path>
+              </a:pathLst>
+            </a:custGeom>
+            <a:ln w="6775" cap="flat">
+              <a:solidFill>
+                <a:srgbClr val="EBEBEB">
+                  <a:alpha val="100000"/>
+                </a:srgbClr>
+              </a:solidFill>
+              <a:prstDash val="solid"/>
+              <a:round/>
+            </a:ln>
+          </p:spPr>
+          <p:txBody>
+            <a:bodyPr/>
+            <a:lstStyle/>
+            <a:p/>
+          </p:txBody>
+        </p:sp>
+        <p:sp>
+          <p:nvSpPr>
+            <p:cNvPr id="47" name="pl47"/>
+            <p:cNvSpPr/>
+            <p:nvPr/>
+          </p:nvSpPr>
+          <p:spPr>
+            <a:xfrm>
+              <a:off x="5017909" y="4336484"/>
+              <a:ext cx="0" cy="1317069"/>
+            </a:xfrm>
+            <a:custGeom>
+              <a:avLst/>
+              <a:pathLst>
+                <a:path w="0" h="1317069">
+                  <a:moveTo>
+                    <a:pt x="0" y="1317069"/>
+                  </a:moveTo>
+                  <a:lnTo>
+                    <a:pt x="0" y="0"/>
+                  </a:lnTo>
+                  <a:lnTo>
+                    <a:pt x="0" y="0"/>
+                  </a:lnTo>
+                </a:path>
+              </a:pathLst>
+            </a:custGeom>
+            <a:ln w="6775" cap="flat">
+              <a:solidFill>
+                <a:srgbClr val="EBEBEB">
+                  <a:alpha val="100000"/>
+                </a:srgbClr>
+              </a:solidFill>
+              <a:prstDash val="solid"/>
+              <a:round/>
+            </a:ln>
+          </p:spPr>
+          <p:txBody>
+            <a:bodyPr/>
+            <a:lstStyle/>
+            <a:p/>
+          </p:txBody>
+        </p:sp>
+        <p:sp>
+          <p:nvSpPr>
+            <p:cNvPr id="48" name="pl48"/>
+            <p:cNvSpPr/>
+            <p:nvPr/>
+          </p:nvSpPr>
+          <p:spPr>
+            <a:xfrm>
+              <a:off x="5863195" y="4336484"/>
+              <a:ext cx="0" cy="1317069"/>
+            </a:xfrm>
+            <a:custGeom>
+              <a:avLst/>
+              <a:pathLst>
+                <a:path w="0" h="1317069">
+                  <a:moveTo>
+                    <a:pt x="0" y="1317069"/>
+                  </a:moveTo>
+                  <a:lnTo>
+                    <a:pt x="0" y="0"/>
+                  </a:lnTo>
+                  <a:lnTo>
+                    <a:pt x="0" y="0"/>
+                  </a:lnTo>
+                </a:path>
+              </a:pathLst>
+            </a:custGeom>
+            <a:ln w="6775" cap="flat">
+              <a:solidFill>
+                <a:srgbClr val="EBEBEB">
+                  <a:alpha val="100000"/>
+                </a:srgbClr>
+              </a:solidFill>
+              <a:prstDash val="solid"/>
+              <a:round/>
+            </a:ln>
+          </p:spPr>
+          <p:txBody>
+            <a:bodyPr/>
+            <a:lstStyle/>
+            <a:p/>
+          </p:txBody>
+        </p:sp>
+        <p:sp>
+          <p:nvSpPr>
+            <p:cNvPr id="49" name="pl49"/>
+            <p:cNvSpPr/>
+            <p:nvPr/>
+          </p:nvSpPr>
+          <p:spPr>
+            <a:xfrm>
+              <a:off x="6708482" y="4336484"/>
+              <a:ext cx="0" cy="1317069"/>
+            </a:xfrm>
+            <a:custGeom>
+              <a:avLst/>
+              <a:pathLst>
+                <a:path w="0" h="1317069">
+                  <a:moveTo>
+                    <a:pt x="0" y="1317069"/>
+                  </a:moveTo>
+                  <a:lnTo>
+                    <a:pt x="0" y="0"/>
+                  </a:lnTo>
+                  <a:lnTo>
+                    <a:pt x="0" y="0"/>
+                  </a:lnTo>
+                </a:path>
+              </a:pathLst>
+            </a:custGeom>
+            <a:ln w="6775" cap="flat">
+              <a:solidFill>
+                <a:srgbClr val="EBEBEB">
+                  <a:alpha val="100000"/>
+                </a:srgbClr>
+              </a:solidFill>
+              <a:prstDash val="solid"/>
+              <a:round/>
+            </a:ln>
+          </p:spPr>
+          <p:txBody>
+            <a:bodyPr/>
+            <a:lstStyle/>
+            <a:p/>
+          </p:txBody>
+        </p:sp>
+        <p:sp>
+          <p:nvSpPr>
+            <p:cNvPr id="50" name="pl50"/>
+            <p:cNvSpPr/>
+            <p:nvPr/>
+          </p:nvSpPr>
+          <p:spPr>
+            <a:xfrm>
+              <a:off x="7553768" y="4336484"/>
+              <a:ext cx="0" cy="1317069"/>
+            </a:xfrm>
+            <a:custGeom>
+              <a:avLst/>
+              <a:pathLst>
+                <a:path w="0" h="1317069">
+                  <a:moveTo>
+                    <a:pt x="0" y="1317069"/>
+                  </a:moveTo>
+                  <a:lnTo>
+                    <a:pt x="0" y="0"/>
+                  </a:lnTo>
+                  <a:lnTo>
+                    <a:pt x="0" y="0"/>
+                  </a:lnTo>
+                </a:path>
+              </a:pathLst>
+            </a:custGeom>
+            <a:ln w="6775" cap="flat">
+              <a:solidFill>
+                <a:srgbClr val="EBEBEB">
+                  <a:alpha val="100000"/>
+                </a:srgbClr>
+              </a:solidFill>
+              <a:prstDash val="solid"/>
+              <a:round/>
+            </a:ln>
+          </p:spPr>
+          <p:txBody>
+            <a:bodyPr/>
+            <a:lstStyle/>
+            <a:p/>
+          </p:txBody>
+        </p:sp>
+        <p:sp>
+          <p:nvSpPr>
+            <p:cNvPr id="51" name="pl51"/>
+            <p:cNvSpPr/>
+            <p:nvPr/>
+          </p:nvSpPr>
+          <p:spPr>
+            <a:xfrm>
+              <a:off x="8399054" y="4336484"/>
+              <a:ext cx="0" cy="1317069"/>
+            </a:xfrm>
+            <a:custGeom>
+              <a:avLst/>
+              <a:pathLst>
+                <a:path w="0" h="1317069">
+                  <a:moveTo>
+                    <a:pt x="0" y="1317069"/>
+                  </a:moveTo>
+                  <a:lnTo>
+                    <a:pt x="0" y="0"/>
+                  </a:lnTo>
+                  <a:lnTo>
+                    <a:pt x="0" y="0"/>
+                  </a:lnTo>
+                </a:path>
+              </a:pathLst>
+            </a:custGeom>
+            <a:ln w="6775" cap="flat">
+              <a:solidFill>
+                <a:srgbClr val="EBEBEB">
+                  <a:alpha val="100000"/>
+                </a:srgbClr>
+              </a:solidFill>
+              <a:prstDash val="solid"/>
+              <a:round/>
+            </a:ln>
+          </p:spPr>
+          <p:txBody>
+            <a:bodyPr/>
+            <a:lstStyle/>
+            <a:p/>
+          </p:txBody>
+        </p:sp>
+        <p:sp>
+          <p:nvSpPr>
+            <p:cNvPr id="52" name="pl52"/>
+            <p:cNvSpPr/>
+            <p:nvPr/>
+          </p:nvSpPr>
+          <p:spPr>
+            <a:xfrm>
+              <a:off x="887106" y="5593686"/>
+              <a:ext cx="7660515" cy="0"/>
+            </a:xfrm>
+            <a:custGeom>
+              <a:avLst/>
+              <a:pathLst>
+                <a:path w="7660515" h="0">
+                  <a:moveTo>
+                    <a:pt x="0" y="0"/>
+                  </a:moveTo>
+                  <a:lnTo>
+                    <a:pt x="7660515" y="0"/>
+                  </a:lnTo>
+                  <a:lnTo>
+                    <a:pt x="7660515" y="0"/>
+                  </a:lnTo>
+                </a:path>
+              </a:pathLst>
+            </a:custGeom>
+            <a:ln w="13550" cap="flat">
+              <a:solidFill>
+                <a:srgbClr val="EBEBEB">
+                  <a:alpha val="100000"/>
+                </a:srgbClr>
+              </a:solidFill>
+              <a:prstDash val="solid"/>
+              <a:round/>
+            </a:ln>
+          </p:spPr>
+          <p:txBody>
+            <a:bodyPr/>
+            <a:lstStyle/>
+            <a:p/>
+          </p:txBody>
+        </p:sp>
+        <p:sp>
+          <p:nvSpPr>
+            <p:cNvPr id="53" name="pl53"/>
+            <p:cNvSpPr/>
+            <p:nvPr/>
+          </p:nvSpPr>
+          <p:spPr>
+            <a:xfrm>
+              <a:off x="887106" y="5294352"/>
+              <a:ext cx="7660515" cy="0"/>
+            </a:xfrm>
+            <a:custGeom>
+              <a:avLst/>
+              <a:pathLst>
+                <a:path w="7660515" h="0">
+                  <a:moveTo>
+                    <a:pt x="0" y="0"/>
+                  </a:moveTo>
+                  <a:lnTo>
+                    <a:pt x="7660515" y="0"/>
+                  </a:lnTo>
+                  <a:lnTo>
+                    <a:pt x="7660515" y="0"/>
+                  </a:lnTo>
+                </a:path>
+              </a:pathLst>
+            </a:custGeom>
+            <a:ln w="13550" cap="flat">
+              <a:solidFill>
+                <a:srgbClr val="EBEBEB">
+                  <a:alpha val="100000"/>
+                </a:srgbClr>
+              </a:solidFill>
+              <a:prstDash val="solid"/>
+              <a:round/>
+            </a:ln>
+          </p:spPr>
+          <p:txBody>
+            <a:bodyPr/>
+            <a:lstStyle/>
+            <a:p/>
+          </p:txBody>
+        </p:sp>
+        <p:sp>
+          <p:nvSpPr>
+            <p:cNvPr id="54" name="pl54"/>
+            <p:cNvSpPr/>
+            <p:nvPr/>
+          </p:nvSpPr>
+          <p:spPr>
+            <a:xfrm>
+              <a:off x="887106" y="4995019"/>
+              <a:ext cx="7660515" cy="0"/>
+            </a:xfrm>
+            <a:custGeom>
+              <a:avLst/>
+              <a:pathLst>
+                <a:path w="7660515" h="0">
+                  <a:moveTo>
+                    <a:pt x="0" y="0"/>
+                  </a:moveTo>
+                  <a:lnTo>
+                    <a:pt x="7660515" y="0"/>
+                  </a:lnTo>
+                  <a:lnTo>
+                    <a:pt x="7660515" y="0"/>
+                  </a:lnTo>
+                </a:path>
+              </a:pathLst>
+            </a:custGeom>
+            <a:ln w="13550" cap="flat">
+              <a:solidFill>
+                <a:srgbClr val="EBEBEB">
+                  <a:alpha val="100000"/>
+                </a:srgbClr>
+              </a:solidFill>
+              <a:prstDash val="solid"/>
+              <a:round/>
+            </a:ln>
+          </p:spPr>
+          <p:txBody>
+            <a:bodyPr/>
+            <a:lstStyle/>
+            <a:p/>
+          </p:txBody>
+        </p:sp>
+        <p:sp>
+          <p:nvSpPr>
+            <p:cNvPr id="55" name="pl55"/>
+            <p:cNvSpPr/>
+            <p:nvPr/>
+          </p:nvSpPr>
+          <p:spPr>
+            <a:xfrm>
+              <a:off x="887106" y="4695685"/>
+              <a:ext cx="7660515" cy="0"/>
+            </a:xfrm>
+            <a:custGeom>
+              <a:avLst/>
+              <a:pathLst>
+                <a:path w="7660515" h="0">
+                  <a:moveTo>
+                    <a:pt x="0" y="0"/>
+                  </a:moveTo>
+                  <a:lnTo>
+                    <a:pt x="7660515" y="0"/>
+                  </a:lnTo>
+                  <a:lnTo>
+                    <a:pt x="7660515" y="0"/>
+                  </a:lnTo>
+                </a:path>
+              </a:pathLst>
+            </a:custGeom>
+            <a:ln w="13550" cap="flat">
+              <a:solidFill>
+                <a:srgbClr val="EBEBEB">
+                  <a:alpha val="100000"/>
+                </a:srgbClr>
+              </a:solidFill>
+              <a:prstDash val="solid"/>
+              <a:round/>
+            </a:ln>
+          </p:spPr>
+          <p:txBody>
+            <a:bodyPr/>
+            <a:lstStyle/>
+            <a:p/>
+          </p:txBody>
+        </p:sp>
+        <p:sp>
+          <p:nvSpPr>
+            <p:cNvPr id="56" name="pl56"/>
+            <p:cNvSpPr/>
+            <p:nvPr/>
+          </p:nvSpPr>
+          <p:spPr>
+            <a:xfrm>
+              <a:off x="887106" y="4396351"/>
+              <a:ext cx="7660515" cy="0"/>
+            </a:xfrm>
+            <a:custGeom>
+              <a:avLst/>
+              <a:pathLst>
+                <a:path w="7660515" h="0">
+                  <a:moveTo>
+                    <a:pt x="0" y="0"/>
+                  </a:moveTo>
+                  <a:lnTo>
+                    <a:pt x="7660515" y="0"/>
+                  </a:lnTo>
+                  <a:lnTo>
+                    <a:pt x="7660515" y="0"/>
+                  </a:lnTo>
+                </a:path>
+              </a:pathLst>
+            </a:custGeom>
+            <a:ln w="13550" cap="flat">
+              <a:solidFill>
+                <a:srgbClr val="EBEBEB">
+                  <a:alpha val="100000"/>
+                </a:srgbClr>
+              </a:solidFill>
+              <a:prstDash val="solid"/>
+              <a:round/>
+            </a:ln>
+          </p:spPr>
+          <p:txBody>
+            <a:bodyPr/>
+            <a:lstStyle/>
+            <a:p/>
+          </p:txBody>
+        </p:sp>
+        <p:sp>
+          <p:nvSpPr>
+            <p:cNvPr id="57" name="pl57"/>
+            <p:cNvSpPr/>
+            <p:nvPr/>
+          </p:nvSpPr>
+          <p:spPr>
+            <a:xfrm>
+              <a:off x="1214120" y="4336484"/>
+              <a:ext cx="0" cy="1317069"/>
+            </a:xfrm>
+            <a:custGeom>
+              <a:avLst/>
+              <a:pathLst>
+                <a:path w="0" h="1317069">
+                  <a:moveTo>
+                    <a:pt x="0" y="1317069"/>
+                  </a:moveTo>
+                  <a:lnTo>
+                    <a:pt x="0" y="0"/>
+                  </a:lnTo>
+                  <a:lnTo>
+                    <a:pt x="0" y="0"/>
+                  </a:lnTo>
+                </a:path>
+              </a:pathLst>
+            </a:custGeom>
+            <a:ln w="13550" cap="flat">
+              <a:solidFill>
+                <a:srgbClr val="EBEBEB">
+                  <a:alpha val="100000"/>
+                </a:srgbClr>
+              </a:solidFill>
+              <a:prstDash val="solid"/>
+              <a:round/>
+            </a:ln>
+          </p:spPr>
+          <p:txBody>
+            <a:bodyPr/>
+            <a:lstStyle/>
+            <a:p/>
+          </p:txBody>
+        </p:sp>
+        <p:sp>
+          <p:nvSpPr>
+            <p:cNvPr id="58" name="pl58"/>
+            <p:cNvSpPr/>
+            <p:nvPr/>
+          </p:nvSpPr>
+          <p:spPr>
+            <a:xfrm>
+              <a:off x="2059406" y="4336484"/>
+              <a:ext cx="0" cy="1317069"/>
+            </a:xfrm>
+            <a:custGeom>
+              <a:avLst/>
+              <a:pathLst>
+                <a:path w="0" h="1317069">
+                  <a:moveTo>
+                    <a:pt x="0" y="1317069"/>
+                  </a:moveTo>
+                  <a:lnTo>
+                    <a:pt x="0" y="0"/>
+                  </a:lnTo>
+                  <a:lnTo>
+                    <a:pt x="0" y="0"/>
+                  </a:lnTo>
+                </a:path>
+              </a:pathLst>
+            </a:custGeom>
+            <a:ln w="13550" cap="flat">
+              <a:solidFill>
+                <a:srgbClr val="EBEBEB">
+                  <a:alpha val="100000"/>
+                </a:srgbClr>
+              </a:solidFill>
+              <a:prstDash val="solid"/>
+              <a:round/>
+            </a:ln>
+          </p:spPr>
+          <p:txBody>
+            <a:bodyPr/>
+            <a:lstStyle/>
+            <a:p/>
+          </p:txBody>
+        </p:sp>
+        <p:sp>
+          <p:nvSpPr>
+            <p:cNvPr id="59" name="pl59"/>
+            <p:cNvSpPr/>
+            <p:nvPr/>
+          </p:nvSpPr>
+          <p:spPr>
+            <a:xfrm>
+              <a:off x="2904693" y="4336484"/>
+              <a:ext cx="0" cy="1317069"/>
+            </a:xfrm>
+            <a:custGeom>
+              <a:avLst/>
+              <a:pathLst>
+                <a:path w="0" h="1317069">
+                  <a:moveTo>
+                    <a:pt x="0" y="1317069"/>
+                  </a:moveTo>
+                  <a:lnTo>
+                    <a:pt x="0" y="0"/>
+                  </a:lnTo>
+                  <a:lnTo>
+                    <a:pt x="0" y="0"/>
+                  </a:lnTo>
+                </a:path>
+              </a:pathLst>
+            </a:custGeom>
+            <a:ln w="13550" cap="flat">
+              <a:solidFill>
+                <a:srgbClr val="EBEBEB">
+                  <a:alpha val="100000"/>
+                </a:srgbClr>
+              </a:solidFill>
+              <a:prstDash val="solid"/>
+              <a:round/>
+            </a:ln>
+          </p:spPr>
+          <p:txBody>
+            <a:bodyPr/>
+            <a:lstStyle/>
+            <a:p/>
+          </p:txBody>
+        </p:sp>
+        <p:sp>
+          <p:nvSpPr>
+            <p:cNvPr id="60" name="pl60"/>
+            <p:cNvSpPr/>
+            <p:nvPr/>
+          </p:nvSpPr>
+          <p:spPr>
+            <a:xfrm>
+              <a:off x="3749979" y="4336484"/>
+              <a:ext cx="0" cy="1317069"/>
+            </a:xfrm>
+            <a:custGeom>
+              <a:avLst/>
+              <a:pathLst>
+                <a:path w="0" h="1317069">
+                  <a:moveTo>
+                    <a:pt x="0" y="1317069"/>
+                  </a:moveTo>
+                  <a:lnTo>
+                    <a:pt x="0" y="0"/>
+                  </a:lnTo>
+                  <a:lnTo>
+                    <a:pt x="0" y="0"/>
+                  </a:lnTo>
+                </a:path>
+              </a:pathLst>
+            </a:custGeom>
+            <a:ln w="13550" cap="flat">
+              <a:solidFill>
+                <a:srgbClr val="EBEBEB">
+                  <a:alpha val="100000"/>
+                </a:srgbClr>
+              </a:solidFill>
+              <a:prstDash val="solid"/>
+              <a:round/>
+            </a:ln>
+          </p:spPr>
+          <p:txBody>
+            <a:bodyPr/>
+            <a:lstStyle/>
+            <a:p/>
+          </p:txBody>
+        </p:sp>
+        <p:sp>
+          <p:nvSpPr>
+            <p:cNvPr id="61" name="pl61"/>
+            <p:cNvSpPr/>
+            <p:nvPr/>
+          </p:nvSpPr>
+          <p:spPr>
+            <a:xfrm>
+              <a:off x="4595266" y="4336484"/>
+              <a:ext cx="0" cy="1317069"/>
+            </a:xfrm>
+            <a:custGeom>
+              <a:avLst/>
+              <a:pathLst>
+                <a:path w="0" h="1317069">
+                  <a:moveTo>
+                    <a:pt x="0" y="1317069"/>
+                  </a:moveTo>
+                  <a:lnTo>
+                    <a:pt x="0" y="0"/>
+                  </a:lnTo>
+                  <a:lnTo>
+                    <a:pt x="0" y="0"/>
+                  </a:lnTo>
+                </a:path>
+              </a:pathLst>
+            </a:custGeom>
+            <a:ln w="13550" cap="flat">
+              <a:solidFill>
+                <a:srgbClr val="EBEBEB">
+                  <a:alpha val="100000"/>
+                </a:srgbClr>
+              </a:solidFill>
+              <a:prstDash val="solid"/>
+              <a:round/>
+            </a:ln>
+          </p:spPr>
+          <p:txBody>
+            <a:bodyPr/>
+            <a:lstStyle/>
+            <a:p/>
+          </p:txBody>
+        </p:sp>
+        <p:sp>
+          <p:nvSpPr>
+            <p:cNvPr id="62" name="pl62"/>
+            <p:cNvSpPr/>
+            <p:nvPr/>
+          </p:nvSpPr>
+          <p:spPr>
+            <a:xfrm>
+              <a:off x="5440552" y="4336484"/>
+              <a:ext cx="0" cy="1317069"/>
+            </a:xfrm>
+            <a:custGeom>
+              <a:avLst/>
+              <a:pathLst>
+                <a:path w="0" h="1317069">
+                  <a:moveTo>
+                    <a:pt x="0" y="1317069"/>
+                  </a:moveTo>
+                  <a:lnTo>
+                    <a:pt x="0" y="0"/>
+                  </a:lnTo>
+                  <a:lnTo>
+                    <a:pt x="0" y="0"/>
+                  </a:lnTo>
+                </a:path>
+              </a:pathLst>
+            </a:custGeom>
+            <a:ln w="13550" cap="flat">
+              <a:solidFill>
+                <a:srgbClr val="EBEBEB">
+                  <a:alpha val="100000"/>
+                </a:srgbClr>
+              </a:solidFill>
+              <a:prstDash val="solid"/>
+              <a:round/>
+            </a:ln>
+          </p:spPr>
+          <p:txBody>
+            <a:bodyPr/>
+            <a:lstStyle/>
+            <a:p/>
+          </p:txBody>
+        </p:sp>
+        <p:sp>
+          <p:nvSpPr>
+            <p:cNvPr id="63" name="pl63"/>
+            <p:cNvSpPr/>
+            <p:nvPr/>
+          </p:nvSpPr>
+          <p:spPr>
+            <a:xfrm>
+              <a:off x="6285838" y="4336484"/>
+              <a:ext cx="0" cy="1317069"/>
+            </a:xfrm>
+            <a:custGeom>
+              <a:avLst/>
+              <a:pathLst>
+                <a:path w="0" h="1317069">
+                  <a:moveTo>
+                    <a:pt x="0" y="1317069"/>
+                  </a:moveTo>
+                  <a:lnTo>
+                    <a:pt x="0" y="0"/>
+                  </a:lnTo>
+                  <a:lnTo>
+                    <a:pt x="0" y="0"/>
+                  </a:lnTo>
+                </a:path>
+              </a:pathLst>
+            </a:custGeom>
+            <a:ln w="13550" cap="flat">
+              <a:solidFill>
+                <a:srgbClr val="EBEBEB">
+                  <a:alpha val="100000"/>
+                </a:srgbClr>
+              </a:solidFill>
+              <a:prstDash val="solid"/>
+              <a:round/>
+            </a:ln>
+          </p:spPr>
+          <p:txBody>
+            <a:bodyPr/>
+            <a:lstStyle/>
+            <a:p/>
+          </p:txBody>
+        </p:sp>
+        <p:sp>
+          <p:nvSpPr>
+            <p:cNvPr id="64" name="pl64"/>
+            <p:cNvSpPr/>
+            <p:nvPr/>
+          </p:nvSpPr>
+          <p:spPr>
+            <a:xfrm>
+              <a:off x="7131125" y="4336484"/>
+              <a:ext cx="0" cy="1317069"/>
+            </a:xfrm>
+            <a:custGeom>
+              <a:avLst/>
+              <a:pathLst>
+                <a:path w="0" h="1317069">
+                  <a:moveTo>
+                    <a:pt x="0" y="1317069"/>
+                  </a:moveTo>
+                  <a:lnTo>
+                    <a:pt x="0" y="0"/>
+                  </a:lnTo>
+                  <a:lnTo>
+                    <a:pt x="0" y="0"/>
+                  </a:lnTo>
+                </a:path>
+              </a:pathLst>
+            </a:custGeom>
+            <a:ln w="13550" cap="flat">
+              <a:solidFill>
+                <a:srgbClr val="EBEBEB">
+                  <a:alpha val="100000"/>
+                </a:srgbClr>
+              </a:solidFill>
+              <a:prstDash val="solid"/>
+              <a:round/>
+            </a:ln>
+          </p:spPr>
+          <p:txBody>
+            <a:bodyPr/>
+            <a:lstStyle/>
+            <a:p/>
+          </p:txBody>
+        </p:sp>
+        <p:sp>
+          <p:nvSpPr>
+            <p:cNvPr id="65" name="pl65"/>
+            <p:cNvSpPr/>
+            <p:nvPr/>
+          </p:nvSpPr>
+          <p:spPr>
+            <a:xfrm>
+              <a:off x="7976411" y="4336484"/>
+              <a:ext cx="0" cy="1317069"/>
+            </a:xfrm>
+            <a:custGeom>
+              <a:avLst/>
+              <a:pathLst>
+                <a:path w="0" h="1317069">
+                  <a:moveTo>
+                    <a:pt x="0" y="1317069"/>
+                  </a:moveTo>
+                  <a:lnTo>
+                    <a:pt x="0" y="0"/>
+                  </a:lnTo>
+                  <a:lnTo>
+                    <a:pt x="0" y="0"/>
+                  </a:lnTo>
+                </a:path>
+              </a:pathLst>
+            </a:custGeom>
+            <a:ln w="13550" cap="flat">
+              <a:solidFill>
+                <a:srgbClr val="EBEBEB">
+                  <a:alpha val="100000"/>
+                </a:srgbClr>
+              </a:solidFill>
+              <a:prstDash val="solid"/>
+              <a:round/>
+            </a:ln>
+          </p:spPr>
+          <p:txBody>
+            <a:bodyPr/>
+            <a:lstStyle/>
+            <a:p/>
+          </p:txBody>
+        </p:sp>
+        <p:sp>
+          <p:nvSpPr>
+            <p:cNvPr id="66" name="pg66"/>
+            <p:cNvSpPr/>
+            <p:nvPr/>
+          </p:nvSpPr>
+          <p:spPr>
+            <a:xfrm>
+              <a:off x="1235312" y="4336484"/>
+              <a:ext cx="6964104" cy="1243793"/>
+            </a:xfrm>
+            <a:custGeom>
+              <a:avLst/>
+              <a:pathLst>
+                <a:path w="6964104" h="1243793">
+                  <a:moveTo>
+                    <a:pt x="1687495" y="0"/>
+                  </a:moveTo>
+                  <a:lnTo>
+                    <a:pt x="1688267" y="860"/>
+                  </a:lnTo>
+                  <a:lnTo>
+                    <a:pt x="1758612" y="74655"/>
+                  </a:lnTo>
+                  <a:lnTo>
+                    <a:pt x="1828956" y="144115"/>
+                  </a:lnTo>
+                  <a:lnTo>
+                    <a:pt x="1899301" y="209495"/>
+                  </a:lnTo>
+                  <a:lnTo>
+                    <a:pt x="1969645" y="271036"/>
+                  </a:lnTo>
+                  <a:lnTo>
+                    <a:pt x="2039990" y="328961"/>
+                  </a:lnTo>
+                  <a:lnTo>
+                    <a:pt x="2110334" y="383484"/>
+                  </a:lnTo>
+                  <a:lnTo>
+                    <a:pt x="2180679" y="434804"/>
+                  </a:lnTo>
+                  <a:lnTo>
+                    <a:pt x="2251023" y="483110"/>
+                  </a:lnTo>
+                  <a:lnTo>
+                    <a:pt x="2321368" y="528578"/>
+                  </a:lnTo>
+                  <a:lnTo>
+                    <a:pt x="2391712" y="571376"/>
+                  </a:lnTo>
+                  <a:lnTo>
+                    <a:pt x="2462057" y="611660"/>
+                  </a:lnTo>
+                  <a:lnTo>
+                    <a:pt x="2532401" y="649578"/>
+                  </a:lnTo>
+                  <a:lnTo>
+                    <a:pt x="2602746" y="685268"/>
+                  </a:lnTo>
+                  <a:lnTo>
+                    <a:pt x="2673090" y="718863"/>
+                  </a:lnTo>
+                  <a:lnTo>
+                    <a:pt x="2743435" y="750484"/>
+                  </a:lnTo>
+                  <a:lnTo>
+                    <a:pt x="2813779" y="780247"/>
+                  </a:lnTo>
+                  <a:lnTo>
+                    <a:pt x="2884124" y="808262"/>
+                  </a:lnTo>
+                  <a:lnTo>
+                    <a:pt x="2954468" y="834632"/>
+                  </a:lnTo>
+                  <a:lnTo>
+                    <a:pt x="3024813" y="859453"/>
+                  </a:lnTo>
+                  <a:lnTo>
+                    <a:pt x="3095157" y="882816"/>
+                  </a:lnTo>
+                  <a:lnTo>
+                    <a:pt x="3165502" y="904807"/>
+                  </a:lnTo>
+                  <a:lnTo>
+                    <a:pt x="3235846" y="925506"/>
+                  </a:lnTo>
+                  <a:lnTo>
+                    <a:pt x="3306191" y="944989"/>
+                  </a:lnTo>
+                  <a:lnTo>
+                    <a:pt x="3376535" y="958214"/>
+                  </a:lnTo>
+                  <a:lnTo>
+                    <a:pt x="3446880" y="959349"/>
+                  </a:lnTo>
+                  <a:lnTo>
+                    <a:pt x="3517224" y="960479"/>
+                  </a:lnTo>
+                  <a:lnTo>
+                    <a:pt x="3587569" y="961605"/>
+                  </a:lnTo>
+                  <a:lnTo>
+                    <a:pt x="3657913" y="962727"/>
+                  </a:lnTo>
+                  <a:lnTo>
+                    <a:pt x="3728257" y="963845"/>
+                  </a:lnTo>
+                  <a:lnTo>
+                    <a:pt x="3798602" y="964959"/>
+                  </a:lnTo>
+                  <a:lnTo>
+                    <a:pt x="3868946" y="966068"/>
+                  </a:lnTo>
+                  <a:lnTo>
+                    <a:pt x="3939291" y="967173"/>
+                  </a:lnTo>
+                  <a:lnTo>
+                    <a:pt x="4009635" y="968274"/>
+                  </a:lnTo>
+                  <a:lnTo>
+                    <a:pt x="4079980" y="969370"/>
+                  </a:lnTo>
+                  <a:lnTo>
+                    <a:pt x="4150324" y="970463"/>
+                  </a:lnTo>
+                  <a:lnTo>
+                    <a:pt x="4220669" y="971551"/>
+                  </a:lnTo>
+                  <a:lnTo>
+                    <a:pt x="4291013" y="972635"/>
+                  </a:lnTo>
+                  <a:lnTo>
+                    <a:pt x="4361358" y="973716"/>
+                  </a:lnTo>
+                  <a:lnTo>
+                    <a:pt x="4431702" y="974792"/>
+                  </a:lnTo>
+                  <a:lnTo>
+                    <a:pt x="4502047" y="975864"/>
+                  </a:lnTo>
+                  <a:lnTo>
+                    <a:pt x="4572391" y="976931"/>
+                  </a:lnTo>
+                  <a:lnTo>
+                    <a:pt x="4642736" y="977995"/>
+                  </a:lnTo>
+                  <a:lnTo>
+                    <a:pt x="4713080" y="979055"/>
+                  </a:lnTo>
+                  <a:lnTo>
+                    <a:pt x="4783425" y="980111"/>
+                  </a:lnTo>
+                  <a:lnTo>
+                    <a:pt x="4853769" y="981162"/>
+                  </a:lnTo>
+                  <a:lnTo>
+                    <a:pt x="4924114" y="982210"/>
+                  </a:lnTo>
+                  <a:lnTo>
+                    <a:pt x="4994458" y="983254"/>
+                  </a:lnTo>
+                  <a:lnTo>
+                    <a:pt x="5064803" y="984294"/>
+                  </a:lnTo>
+                  <a:lnTo>
+                    <a:pt x="5135147" y="985330"/>
+                  </a:lnTo>
+                  <a:lnTo>
+                    <a:pt x="5205492" y="986361"/>
+                  </a:lnTo>
+                  <a:lnTo>
+                    <a:pt x="5275836" y="987390"/>
+                  </a:lnTo>
+                  <a:lnTo>
+                    <a:pt x="5346181" y="988414"/>
+                  </a:lnTo>
+                  <a:lnTo>
+                    <a:pt x="5416525" y="989434"/>
+                  </a:lnTo>
+                  <a:lnTo>
+                    <a:pt x="5486870" y="990450"/>
+                  </a:lnTo>
+                  <a:lnTo>
+                    <a:pt x="5557214" y="991463"/>
+                  </a:lnTo>
+                  <a:lnTo>
+                    <a:pt x="5627559" y="992471"/>
+                  </a:lnTo>
+                  <a:lnTo>
+                    <a:pt x="5697903" y="993476"/>
+                  </a:lnTo>
+                  <a:lnTo>
+                    <a:pt x="5768248" y="994477"/>
+                  </a:lnTo>
+                  <a:lnTo>
+                    <a:pt x="5838592" y="995474"/>
+                  </a:lnTo>
+                  <a:lnTo>
+                    <a:pt x="5908937" y="996468"/>
+                  </a:lnTo>
+                  <a:lnTo>
+                    <a:pt x="5979281" y="997457"/>
+                  </a:lnTo>
+                  <a:lnTo>
+                    <a:pt x="6049626" y="998443"/>
+                  </a:lnTo>
+                  <a:lnTo>
+                    <a:pt x="6119970" y="999425"/>
+                  </a:lnTo>
+                  <a:lnTo>
+                    <a:pt x="6190315" y="1000404"/>
+                  </a:lnTo>
+                  <a:lnTo>
+                    <a:pt x="6260659" y="1001379"/>
+                  </a:lnTo>
+                  <a:lnTo>
+                    <a:pt x="6331004" y="1002350"/>
+                  </a:lnTo>
+                  <a:lnTo>
+                    <a:pt x="6401348" y="1003317"/>
+                  </a:lnTo>
+                  <a:lnTo>
+                    <a:pt x="6471693" y="1004281"/>
+                  </a:lnTo>
+                  <a:lnTo>
+                    <a:pt x="6542037" y="1005241"/>
+                  </a:lnTo>
+                  <a:lnTo>
+                    <a:pt x="6612382" y="1006197"/>
+                  </a:lnTo>
+                  <a:lnTo>
+                    <a:pt x="6682726" y="1007150"/>
+                  </a:lnTo>
+                  <a:lnTo>
+                    <a:pt x="6753071" y="1008099"/>
+                  </a:lnTo>
+                  <a:lnTo>
+                    <a:pt x="6823415" y="1009044"/>
+                  </a:lnTo>
+                  <a:lnTo>
+                    <a:pt x="6893760" y="1009986"/>
+                  </a:lnTo>
+                  <a:lnTo>
+                    <a:pt x="6964104" y="1010924"/>
+                  </a:lnTo>
+                  <a:lnTo>
+                    <a:pt x="6964104" y="1243793"/>
+                  </a:lnTo>
+                  <a:lnTo>
+                    <a:pt x="6893760" y="1242956"/>
+                  </a:lnTo>
+                  <a:lnTo>
+                    <a:pt x="6823415" y="1242067"/>
+                  </a:lnTo>
+                  <a:lnTo>
+                    <a:pt x="6753071" y="1241122"/>
+                  </a:lnTo>
+                  <a:lnTo>
+                    <a:pt x="6682726" y="1240119"/>
+                  </a:lnTo>
+                  <a:lnTo>
+                    <a:pt x="6612382" y="1239053"/>
+                  </a:lnTo>
+                  <a:lnTo>
+                    <a:pt x="6542037" y="1237920"/>
+                  </a:lnTo>
+                  <a:lnTo>
+                    <a:pt x="6471693" y="1236717"/>
+                  </a:lnTo>
+                  <a:lnTo>
+                    <a:pt x="6401348" y="1235439"/>
+                  </a:lnTo>
+                  <a:lnTo>
+                    <a:pt x="6331004" y="1234081"/>
+                  </a:lnTo>
+                  <a:lnTo>
+                    <a:pt x="6260659" y="1232638"/>
+                  </a:lnTo>
+                  <a:lnTo>
+                    <a:pt x="6190315" y="1231105"/>
+                  </a:lnTo>
+                  <a:lnTo>
+                    <a:pt x="6119970" y="1229477"/>
+                  </a:lnTo>
+                  <a:lnTo>
+                    <a:pt x="6049626" y="1227746"/>
+                  </a:lnTo>
+                  <a:lnTo>
+                    <a:pt x="5979281" y="1225908"/>
+                  </a:lnTo>
+                  <a:lnTo>
+                    <a:pt x="5908937" y="1223956"/>
+                  </a:lnTo>
+                  <a:lnTo>
+                    <a:pt x="5838592" y="1221881"/>
+                  </a:lnTo>
+                  <a:lnTo>
+                    <a:pt x="5768248" y="1219677"/>
+                  </a:lnTo>
+                  <a:lnTo>
+                    <a:pt x="5697903" y="1217335"/>
+                  </a:lnTo>
+                  <a:lnTo>
+                    <a:pt x="5627559" y="1214847"/>
+                  </a:lnTo>
+                  <a:lnTo>
+                    <a:pt x="5557214" y="1212204"/>
+                  </a:lnTo>
+                  <a:lnTo>
+                    <a:pt x="5486870" y="1209396"/>
+                  </a:lnTo>
+                  <a:lnTo>
+                    <a:pt x="5416525" y="1206413"/>
+                  </a:lnTo>
+                  <a:lnTo>
+                    <a:pt x="5346181" y="1203244"/>
+                  </a:lnTo>
+                  <a:lnTo>
+                    <a:pt x="5275836" y="1199876"/>
+                  </a:lnTo>
+                  <a:lnTo>
+                    <a:pt x="5205492" y="1196299"/>
+                  </a:lnTo>
+                  <a:lnTo>
+                    <a:pt x="5135147" y="1192499"/>
+                  </a:lnTo>
+                  <a:lnTo>
+                    <a:pt x="5064803" y="1188461"/>
+                  </a:lnTo>
+                  <a:lnTo>
+                    <a:pt x="4994458" y="1184171"/>
+                  </a:lnTo>
+                  <a:lnTo>
+                    <a:pt x="4924114" y="1179614"/>
+                  </a:lnTo>
+                  <a:lnTo>
+                    <a:pt x="4853769" y="1174772"/>
+                  </a:lnTo>
+                  <a:lnTo>
+                    <a:pt x="4783425" y="1169628"/>
+                  </a:lnTo>
+                  <a:lnTo>
+                    <a:pt x="4713080" y="1164163"/>
+                  </a:lnTo>
+                  <a:lnTo>
+                    <a:pt x="4642736" y="1158357"/>
+                  </a:lnTo>
+                  <a:lnTo>
+                    <a:pt x="4572391" y="1152189"/>
+                  </a:lnTo>
+                  <a:lnTo>
+                    <a:pt x="4502047" y="1145636"/>
+                  </a:lnTo>
+                  <a:lnTo>
+                    <a:pt x="4431702" y="1138674"/>
+                  </a:lnTo>
+                  <a:lnTo>
+                    <a:pt x="4361358" y="1131277"/>
+                  </a:lnTo>
+                  <a:lnTo>
+                    <a:pt x="4291013" y="1123419"/>
+                  </a:lnTo>
+                  <a:lnTo>
+                    <a:pt x="4220669" y="1115071"/>
+                  </a:lnTo>
+                  <a:lnTo>
+                    <a:pt x="4150324" y="1106201"/>
+                  </a:lnTo>
+                  <a:lnTo>
+                    <a:pt x="4079980" y="1096778"/>
+                  </a:lnTo>
+                  <a:lnTo>
+                    <a:pt x="4009635" y="1086767"/>
+                  </a:lnTo>
+                  <a:lnTo>
+                    <a:pt x="3939291" y="1076132"/>
+                  </a:lnTo>
+                  <a:lnTo>
+                    <a:pt x="3868946" y="1064832"/>
+                  </a:lnTo>
+                  <a:lnTo>
+                    <a:pt x="3798602" y="1052828"/>
+                  </a:lnTo>
+                  <a:lnTo>
+                    <a:pt x="3728257" y="1040074"/>
+                  </a:lnTo>
+                  <a:lnTo>
+                    <a:pt x="3657913" y="1026525"/>
+                  </a:lnTo>
+                  <a:lnTo>
+                    <a:pt x="3587569" y="1012130"/>
+                  </a:lnTo>
+                  <a:lnTo>
+                    <a:pt x="3517224" y="996837"/>
+                  </a:lnTo>
+                  <a:lnTo>
+                    <a:pt x="3446880" y="980589"/>
+                  </a:lnTo>
+                  <a:lnTo>
+                    <a:pt x="3376535" y="963327"/>
+                  </a:lnTo>
+                  <a:lnTo>
+                    <a:pt x="3306191" y="957075"/>
+                  </a:lnTo>
+                  <a:lnTo>
+                    <a:pt x="3235846" y="955931"/>
+                  </a:lnTo>
+                  <a:lnTo>
+                    <a:pt x="3165502" y="954783"/>
+                  </a:lnTo>
+                  <a:lnTo>
+                    <a:pt x="3095157" y="953631"/>
+                  </a:lnTo>
+                  <a:lnTo>
+                    <a:pt x="3024813" y="952474"/>
+                  </a:lnTo>
+                  <a:lnTo>
+                    <a:pt x="2954468" y="951313"/>
+                  </a:lnTo>
+                  <a:lnTo>
+                    <a:pt x="2884124" y="950148"/>
+                  </a:lnTo>
+                  <a:lnTo>
+                    <a:pt x="2813779" y="948978"/>
+                  </a:lnTo>
+                  <a:lnTo>
+                    <a:pt x="2743435" y="947804"/>
+                  </a:lnTo>
+                  <a:lnTo>
+                    <a:pt x="2673090" y="946625"/>
+                  </a:lnTo>
+                  <a:lnTo>
+                    <a:pt x="2602746" y="945442"/>
+                  </a:lnTo>
+                  <a:lnTo>
+                    <a:pt x="2532401" y="944254"/>
+                  </a:lnTo>
+                  <a:lnTo>
+                    <a:pt x="2462057" y="943061"/>
+                  </a:lnTo>
+                  <a:lnTo>
+                    <a:pt x="2391712" y="941864"/>
+                  </a:lnTo>
+                  <a:lnTo>
+                    <a:pt x="2321368" y="940663"/>
+                  </a:lnTo>
+                  <a:lnTo>
+                    <a:pt x="2251023" y="939457"/>
+                  </a:lnTo>
+                  <a:lnTo>
+                    <a:pt x="2180679" y="938246"/>
+                  </a:lnTo>
+                  <a:lnTo>
+                    <a:pt x="2110334" y="937031"/>
+                  </a:lnTo>
+                  <a:lnTo>
+                    <a:pt x="2039990" y="935811"/>
+                  </a:lnTo>
+                  <a:lnTo>
+                    <a:pt x="1969645" y="934587"/>
+                  </a:lnTo>
+                  <a:lnTo>
+                    <a:pt x="1899301" y="933357"/>
+                  </a:lnTo>
+                  <a:lnTo>
+                    <a:pt x="1828956" y="932124"/>
+                  </a:lnTo>
+                  <a:lnTo>
+                    <a:pt x="1758612" y="930885"/>
+                  </a:lnTo>
+                  <a:lnTo>
+                    <a:pt x="1688267" y="929642"/>
+                  </a:lnTo>
+                  <a:lnTo>
+                    <a:pt x="1617923" y="928394"/>
+                  </a:lnTo>
+                  <a:lnTo>
+                    <a:pt x="1547578" y="927141"/>
+                  </a:lnTo>
+                  <a:lnTo>
+                    <a:pt x="1477234" y="925883"/>
+                  </a:lnTo>
+                  <a:lnTo>
+                    <a:pt x="1406889" y="924621"/>
+                  </a:lnTo>
+                  <a:lnTo>
+                    <a:pt x="1336545" y="923354"/>
+                  </a:lnTo>
+                  <a:lnTo>
+                    <a:pt x="1266200" y="922082"/>
+                  </a:lnTo>
+                  <a:lnTo>
+                    <a:pt x="1195856" y="920805"/>
+                  </a:lnTo>
+                  <a:lnTo>
+                    <a:pt x="1125511" y="919523"/>
+                  </a:lnTo>
+                  <a:lnTo>
+                    <a:pt x="1055167" y="918237"/>
+                  </a:lnTo>
+                  <a:lnTo>
+                    <a:pt x="984822" y="916945"/>
+                  </a:lnTo>
+                  <a:lnTo>
+                    <a:pt x="914478" y="915649"/>
+                  </a:lnTo>
+                  <a:lnTo>
+                    <a:pt x="844133" y="914348"/>
+                  </a:lnTo>
+                  <a:lnTo>
+                    <a:pt x="773789" y="913041"/>
+                  </a:lnTo>
+                  <a:lnTo>
+                    <a:pt x="703444" y="911730"/>
+                  </a:lnTo>
+                  <a:lnTo>
+                    <a:pt x="633100" y="910414"/>
+                  </a:lnTo>
+                  <a:lnTo>
+                    <a:pt x="562755" y="909092"/>
+                  </a:lnTo>
+                  <a:lnTo>
+                    <a:pt x="492411" y="907766"/>
+                  </a:lnTo>
+                  <a:lnTo>
+                    <a:pt x="422066" y="906435"/>
+                  </a:lnTo>
+                  <a:lnTo>
+                    <a:pt x="351722" y="905098"/>
+                  </a:lnTo>
+                  <a:lnTo>
+                    <a:pt x="281377" y="903757"/>
+                  </a:lnTo>
+                  <a:lnTo>
+                    <a:pt x="211033" y="902410"/>
+                  </a:lnTo>
+                  <a:lnTo>
+                    <a:pt x="140688" y="901058"/>
+                  </a:lnTo>
+                  <a:lnTo>
+                    <a:pt x="70344" y="899701"/>
+                  </a:lnTo>
+                  <a:lnTo>
+                    <a:pt x="0" y="898339"/>
+                  </a:lnTo>
+                  <a:close/>
+                </a:path>
+              </a:pathLst>
+            </a:custGeom>
+            <a:solidFill>
+              <a:srgbClr val="FF8C00">
+                <a:alpha val="20000"/>
+              </a:srgbClr>
+            </a:solidFill>
+          </p:spPr>
+          <p:txBody>
+            <a:bodyPr/>
+            <a:lstStyle/>
+            <a:p/>
+          </p:txBody>
+        </p:sp>
+        <p:sp>
+          <p:nvSpPr>
+            <p:cNvPr id="67" name="pl67"/>
+            <p:cNvSpPr/>
+            <p:nvPr/>
+          </p:nvSpPr>
+          <p:spPr>
+            <a:xfrm>
+              <a:off x="2922807" y="4336484"/>
+              <a:ext cx="5276608" cy="1010924"/>
+            </a:xfrm>
+            <a:custGeom>
+              <a:avLst/>
+              <a:pathLst>
+                <a:path w="5276608" h="1010924">
+                  <a:moveTo>
+                    <a:pt x="0" y="0"/>
+                  </a:moveTo>
+                  <a:lnTo>
+                    <a:pt x="772" y="860"/>
+                  </a:lnTo>
+                  <a:lnTo>
+                    <a:pt x="71116" y="74655"/>
+                  </a:lnTo>
+                  <a:lnTo>
+                    <a:pt x="141461" y="144115"/>
+                  </a:lnTo>
+                  <a:lnTo>
+                    <a:pt x="211805" y="209495"/>
+                  </a:lnTo>
+                  <a:lnTo>
+                    <a:pt x="282149" y="271036"/>
+                  </a:lnTo>
+                  <a:lnTo>
+                    <a:pt x="352494" y="328961"/>
+                  </a:lnTo>
+                  <a:lnTo>
+                    <a:pt x="422838" y="383484"/>
+                  </a:lnTo>
+                  <a:lnTo>
+                    <a:pt x="493183" y="434804"/>
+                  </a:lnTo>
+                  <a:lnTo>
+                    <a:pt x="563527" y="483110"/>
+                  </a:lnTo>
+                  <a:lnTo>
+                    <a:pt x="633872" y="528578"/>
+                  </a:lnTo>
+                  <a:lnTo>
+                    <a:pt x="704216" y="571376"/>
+                  </a:lnTo>
+                  <a:lnTo>
+                    <a:pt x="774561" y="611660"/>
+                  </a:lnTo>
+                  <a:lnTo>
+                    <a:pt x="844905" y="649578"/>
+                  </a:lnTo>
+                  <a:lnTo>
+                    <a:pt x="915250" y="685268"/>
+                  </a:lnTo>
+                  <a:lnTo>
+                    <a:pt x="985594" y="718863"/>
+                  </a:lnTo>
+                  <a:lnTo>
+                    <a:pt x="1055939" y="750484"/>
+                  </a:lnTo>
+                  <a:lnTo>
+                    <a:pt x="1126283" y="780247"/>
+                  </a:lnTo>
+                  <a:lnTo>
+                    <a:pt x="1196628" y="808262"/>
+                  </a:lnTo>
+                  <a:lnTo>
+                    <a:pt x="1266972" y="834632"/>
+                  </a:lnTo>
+                  <a:lnTo>
+                    <a:pt x="1337317" y="859453"/>
+                  </a:lnTo>
+                  <a:lnTo>
+                    <a:pt x="1407661" y="882816"/>
+                  </a:lnTo>
+                  <a:lnTo>
+                    <a:pt x="1478006" y="904807"/>
+                  </a:lnTo>
+                  <a:lnTo>
+                    <a:pt x="1548350" y="925506"/>
+                  </a:lnTo>
+                  <a:lnTo>
+                    <a:pt x="1618695" y="944989"/>
+                  </a:lnTo>
+                  <a:lnTo>
+                    <a:pt x="1689039" y="958214"/>
+                  </a:lnTo>
+                  <a:lnTo>
+                    <a:pt x="1759384" y="959349"/>
+                  </a:lnTo>
+                  <a:lnTo>
+                    <a:pt x="1829728" y="960479"/>
+                  </a:lnTo>
+                  <a:lnTo>
+                    <a:pt x="1900073" y="961605"/>
+                  </a:lnTo>
+                  <a:lnTo>
+                    <a:pt x="1970417" y="962727"/>
+                  </a:lnTo>
+                  <a:lnTo>
+                    <a:pt x="2040762" y="963845"/>
+                  </a:lnTo>
+                  <a:lnTo>
+                    <a:pt x="2111106" y="964959"/>
+                  </a:lnTo>
+                  <a:lnTo>
+                    <a:pt x="2181451" y="966068"/>
+                  </a:lnTo>
+                  <a:lnTo>
+                    <a:pt x="2251795" y="967173"/>
+                  </a:lnTo>
+                  <a:lnTo>
+                    <a:pt x="2322140" y="968274"/>
+                  </a:lnTo>
+                  <a:lnTo>
+                    <a:pt x="2392484" y="969370"/>
+                  </a:lnTo>
+                  <a:lnTo>
+                    <a:pt x="2462829" y="970463"/>
+                  </a:lnTo>
+                  <a:lnTo>
+                    <a:pt x="2533173" y="971551"/>
+                  </a:lnTo>
+                  <a:lnTo>
+                    <a:pt x="2603518" y="972635"/>
+                  </a:lnTo>
+                  <a:lnTo>
+                    <a:pt x="2673862" y="973716"/>
+                  </a:lnTo>
+                  <a:lnTo>
+                    <a:pt x="2744207" y="974792"/>
+                  </a:lnTo>
+                  <a:lnTo>
+                    <a:pt x="2814551" y="975864"/>
+                  </a:lnTo>
+                  <a:lnTo>
+                    <a:pt x="2884896" y="976931"/>
+                  </a:lnTo>
+                  <a:lnTo>
+                    <a:pt x="2955240" y="977995"/>
+                  </a:lnTo>
+                  <a:lnTo>
+                    <a:pt x="3025585" y="979055"/>
+                  </a:lnTo>
+                  <a:lnTo>
+                    <a:pt x="3095929" y="980111"/>
+                  </a:lnTo>
+                  <a:lnTo>
+                    <a:pt x="3166274" y="981162"/>
+                  </a:lnTo>
+                  <a:lnTo>
+                    <a:pt x="3236618" y="982210"/>
+                  </a:lnTo>
+                  <a:lnTo>
+                    <a:pt x="3306963" y="983254"/>
+                  </a:lnTo>
+                  <a:lnTo>
+                    <a:pt x="3377307" y="984294"/>
+                  </a:lnTo>
+                  <a:lnTo>
+                    <a:pt x="3447652" y="985330"/>
+                  </a:lnTo>
+                  <a:lnTo>
+                    <a:pt x="3517996" y="986361"/>
+                  </a:lnTo>
+                  <a:lnTo>
+                    <a:pt x="3588341" y="987390"/>
+                  </a:lnTo>
+                  <a:lnTo>
+                    <a:pt x="3658685" y="988414"/>
+                  </a:lnTo>
+                  <a:lnTo>
+                    <a:pt x="3729030" y="989434"/>
+                  </a:lnTo>
+                  <a:lnTo>
+                    <a:pt x="3799374" y="990450"/>
+                  </a:lnTo>
+                  <a:lnTo>
+                    <a:pt x="3869719" y="991463"/>
+                  </a:lnTo>
+                  <a:lnTo>
+                    <a:pt x="3940063" y="992471"/>
+                  </a:lnTo>
+                  <a:lnTo>
+                    <a:pt x="4010407" y="993476"/>
+                  </a:lnTo>
+                  <a:lnTo>
+                    <a:pt x="4080752" y="994477"/>
+                  </a:lnTo>
+                  <a:lnTo>
+                    <a:pt x="4151096" y="995474"/>
+                  </a:lnTo>
+                  <a:lnTo>
+                    <a:pt x="4221441" y="996468"/>
+                  </a:lnTo>
+                  <a:lnTo>
+                    <a:pt x="4291785" y="997457"/>
+                  </a:lnTo>
+                  <a:lnTo>
+                    <a:pt x="4362130" y="998443"/>
+                  </a:lnTo>
+                  <a:lnTo>
+                    <a:pt x="4432474" y="999425"/>
+                  </a:lnTo>
+                  <a:lnTo>
+                    <a:pt x="4502819" y="1000404"/>
+                  </a:lnTo>
+                  <a:lnTo>
+                    <a:pt x="4573163" y="1001379"/>
+                  </a:lnTo>
+                  <a:lnTo>
+                    <a:pt x="4643508" y="1002350"/>
+                  </a:lnTo>
+                  <a:lnTo>
+                    <a:pt x="4713852" y="1003317"/>
+                  </a:lnTo>
+                  <a:lnTo>
+                    <a:pt x="4784197" y="1004281"/>
+                  </a:lnTo>
+                  <a:lnTo>
+                    <a:pt x="4854541" y="1005241"/>
+                  </a:lnTo>
+                  <a:lnTo>
+                    <a:pt x="4924886" y="1006197"/>
+                  </a:lnTo>
+                  <a:lnTo>
+                    <a:pt x="4995230" y="1007150"/>
+                  </a:lnTo>
+                  <a:lnTo>
+                    <a:pt x="5065575" y="1008099"/>
+                  </a:lnTo>
+                  <a:lnTo>
+                    <a:pt x="5135919" y="1009044"/>
+                  </a:lnTo>
+                  <a:lnTo>
+                    <a:pt x="5206264" y="1009986"/>
+                  </a:lnTo>
+                  <a:lnTo>
+                    <a:pt x="5276608" y="1010924"/>
+                  </a:lnTo>
+                </a:path>
+              </a:pathLst>
+            </a:custGeom>
+          </p:spPr>
+          <p:txBody>
+            <a:bodyPr/>
+            <a:lstStyle/>
+            <a:p/>
+          </p:txBody>
+        </p:sp>
+        <p:sp>
+          <p:nvSpPr>
+            <p:cNvPr id="68" name="pl68"/>
+            <p:cNvSpPr/>
+            <p:nvPr/>
+          </p:nvSpPr>
+          <p:spPr>
+            <a:xfrm>
+              <a:off x="1235312" y="5234824"/>
+              <a:ext cx="6964104" cy="345453"/>
+            </a:xfrm>
+            <a:custGeom>
+              <a:avLst/>
+              <a:pathLst>
+                <a:path w="6964104" h="345453">
+                  <a:moveTo>
+                    <a:pt x="6964104" y="345453"/>
+                  </a:moveTo>
+                  <a:lnTo>
+                    <a:pt x="6893760" y="344616"/>
+                  </a:lnTo>
+                  <a:lnTo>
+                    <a:pt x="6823415" y="343727"/>
+                  </a:lnTo>
+                  <a:lnTo>
+                    <a:pt x="6753071" y="342783"/>
+                  </a:lnTo>
+                  <a:lnTo>
+                    <a:pt x="6682726" y="341779"/>
+                  </a:lnTo>
+                  <a:lnTo>
+                    <a:pt x="6612382" y="340713"/>
+                  </a:lnTo>
+                  <a:lnTo>
+                    <a:pt x="6542037" y="339581"/>
+                  </a:lnTo>
+                  <a:lnTo>
+                    <a:pt x="6471693" y="338378"/>
+                  </a:lnTo>
+                  <a:lnTo>
+                    <a:pt x="6401348" y="337099"/>
+                  </a:lnTo>
+                  <a:lnTo>
+                    <a:pt x="6331004" y="335741"/>
+                  </a:lnTo>
+                  <a:lnTo>
+                    <a:pt x="6260659" y="334298"/>
+                  </a:lnTo>
+                  <a:lnTo>
+                    <a:pt x="6190315" y="332765"/>
+                  </a:lnTo>
+                  <a:lnTo>
+                    <a:pt x="6119970" y="331137"/>
+                  </a:lnTo>
+                  <a:lnTo>
+                    <a:pt x="6049626" y="329407"/>
+                  </a:lnTo>
+                  <a:lnTo>
+                    <a:pt x="5979281" y="327569"/>
+                  </a:lnTo>
+                  <a:lnTo>
+                    <a:pt x="5908937" y="325616"/>
+                  </a:lnTo>
+                  <a:lnTo>
+                    <a:pt x="5838592" y="323541"/>
+                  </a:lnTo>
+                  <a:lnTo>
+                    <a:pt x="5768248" y="321337"/>
+                  </a:lnTo>
+                  <a:lnTo>
+                    <a:pt x="5697903" y="318995"/>
+                  </a:lnTo>
+                  <a:lnTo>
+                    <a:pt x="5627559" y="316508"/>
+                  </a:lnTo>
+                  <a:lnTo>
+                    <a:pt x="5557214" y="313864"/>
+                  </a:lnTo>
+                  <a:lnTo>
+                    <a:pt x="5486870" y="311056"/>
+                  </a:lnTo>
+                  <a:lnTo>
+                    <a:pt x="5416525" y="308073"/>
+                  </a:lnTo>
+                  <a:lnTo>
+                    <a:pt x="5346181" y="304904"/>
+                  </a:lnTo>
+                  <a:lnTo>
+                    <a:pt x="5275836" y="301537"/>
+                  </a:lnTo>
+                  <a:lnTo>
+                    <a:pt x="5205492" y="297959"/>
+                  </a:lnTo>
+                  <a:lnTo>
+                    <a:pt x="5135147" y="294159"/>
+                  </a:lnTo>
+                  <a:lnTo>
+                    <a:pt x="5064803" y="290121"/>
+                  </a:lnTo>
+                  <a:lnTo>
+                    <a:pt x="4994458" y="285831"/>
+                  </a:lnTo>
+                  <a:lnTo>
+                    <a:pt x="4924114" y="281274"/>
+                  </a:lnTo>
+                  <a:lnTo>
+                    <a:pt x="4853769" y="276432"/>
+                  </a:lnTo>
+                  <a:lnTo>
+                    <a:pt x="4783425" y="271288"/>
+                  </a:lnTo>
+                  <a:lnTo>
+                    <a:pt x="4713080" y="265824"/>
+                  </a:lnTo>
+                  <a:lnTo>
+                    <a:pt x="4642736" y="260018"/>
+                  </a:lnTo>
+                  <a:lnTo>
+                    <a:pt x="4572391" y="253849"/>
+                  </a:lnTo>
+                  <a:lnTo>
+                    <a:pt x="4502047" y="247296"/>
+                  </a:lnTo>
+                  <a:lnTo>
+                    <a:pt x="4431702" y="240334"/>
+                  </a:lnTo>
+                  <a:lnTo>
+                    <a:pt x="4361358" y="232938"/>
+                  </a:lnTo>
+                  <a:lnTo>
+                    <a:pt x="4291013" y="225080"/>
+                  </a:lnTo>
+                  <a:lnTo>
+                    <a:pt x="4220669" y="216731"/>
+                  </a:lnTo>
+                  <a:lnTo>
+                    <a:pt x="4150324" y="207862"/>
+                  </a:lnTo>
+                  <a:lnTo>
+                    <a:pt x="4079980" y="198439"/>
+                  </a:lnTo>
+                  <a:lnTo>
+                    <a:pt x="4009635" y="188428"/>
+                  </a:lnTo>
+                  <a:lnTo>
+                    <a:pt x="3939291" y="177792"/>
+                  </a:lnTo>
+                  <a:lnTo>
+                    <a:pt x="3868946" y="166493"/>
+                  </a:lnTo>
+                  <a:lnTo>
+                    <a:pt x="3798602" y="154488"/>
+                  </a:lnTo>
+                  <a:lnTo>
+                    <a:pt x="3728257" y="141735"/>
+                  </a:lnTo>
+                  <a:lnTo>
+                    <a:pt x="3657913" y="128185"/>
+                  </a:lnTo>
+                  <a:lnTo>
+                    <a:pt x="3587569" y="113790"/>
+                  </a:lnTo>
+                  <a:lnTo>
+                    <a:pt x="3517224" y="98497"/>
+                  </a:lnTo>
+                  <a:lnTo>
+                    <a:pt x="3446880" y="82249"/>
+                  </a:lnTo>
+                  <a:lnTo>
+                    <a:pt x="3376535" y="64988"/>
+                  </a:lnTo>
+                  <a:lnTo>
+                    <a:pt x="3306191" y="58735"/>
+                  </a:lnTo>
+                  <a:lnTo>
+                    <a:pt x="3235846" y="57592"/>
+                  </a:lnTo>
+                  <a:lnTo>
+                    <a:pt x="3165502" y="56444"/>
+                  </a:lnTo>
+                  <a:lnTo>
+                    <a:pt x="3095157" y="55291"/>
+                  </a:lnTo>
+                  <a:lnTo>
+                    <a:pt x="3024813" y="54135"/>
+                  </a:lnTo>
+                  <a:lnTo>
+                    <a:pt x="2954468" y="52974"/>
+                  </a:lnTo>
+                  <a:lnTo>
+                    <a:pt x="2884124" y="51808"/>
+                  </a:lnTo>
+                  <a:lnTo>
+                    <a:pt x="2813779" y="50638"/>
+                  </a:lnTo>
+                  <a:lnTo>
+                    <a:pt x="2743435" y="49464"/>
+                  </a:lnTo>
+                  <a:lnTo>
+                    <a:pt x="2673090" y="48285"/>
+                  </a:lnTo>
+                  <a:lnTo>
+                    <a:pt x="2602746" y="47102"/>
+                  </a:lnTo>
+                  <a:lnTo>
+                    <a:pt x="2532401" y="45914"/>
+                  </a:lnTo>
+                  <a:lnTo>
+                    <a:pt x="2462057" y="44722"/>
+                  </a:lnTo>
+                  <a:lnTo>
+                    <a:pt x="2391712" y="43525"/>
+                  </a:lnTo>
+                  <a:lnTo>
+                    <a:pt x="2321368" y="42323"/>
+                  </a:lnTo>
+                  <a:lnTo>
+                    <a:pt x="2251023" y="41117"/>
+                  </a:lnTo>
+                  <a:lnTo>
+                    <a:pt x="2180679" y="39907"/>
+                  </a:lnTo>
+                  <a:lnTo>
+                    <a:pt x="2110334" y="38691"/>
+                  </a:lnTo>
+                  <a:lnTo>
+                    <a:pt x="2039990" y="37472"/>
+                  </a:lnTo>
+                  <a:lnTo>
+                    <a:pt x="1969645" y="36247"/>
+                  </a:lnTo>
+                  <a:lnTo>
+                    <a:pt x="1899301" y="35018"/>
+                  </a:lnTo>
+                  <a:lnTo>
+                    <a:pt x="1828956" y="33784"/>
+                  </a:lnTo>
+                  <a:lnTo>
+                    <a:pt x="1758612" y="32545"/>
+                  </a:lnTo>
+                  <a:lnTo>
+                    <a:pt x="1688267" y="31302"/>
+                  </a:lnTo>
+                  <a:lnTo>
+                    <a:pt x="1617923" y="30054"/>
+                  </a:lnTo>
+                  <a:lnTo>
+                    <a:pt x="1547578" y="28801"/>
+                  </a:lnTo>
+                  <a:lnTo>
+                    <a:pt x="1477234" y="27544"/>
+                  </a:lnTo>
+                  <a:lnTo>
+                    <a:pt x="1406889" y="26281"/>
+                  </a:lnTo>
+                  <a:lnTo>
+                    <a:pt x="1336545" y="25014"/>
+                  </a:lnTo>
+                  <a:lnTo>
+                    <a:pt x="1266200" y="23742"/>
+                  </a:lnTo>
+                  <a:lnTo>
+                    <a:pt x="1195856" y="22465"/>
+                  </a:lnTo>
+                  <a:lnTo>
+                    <a:pt x="1125511" y="21184"/>
+                  </a:lnTo>
+                  <a:lnTo>
+                    <a:pt x="1055167" y="19897"/>
+                  </a:lnTo>
+                  <a:lnTo>
+                    <a:pt x="984822" y="18606"/>
+                  </a:lnTo>
+                  <a:lnTo>
+                    <a:pt x="914478" y="17309"/>
+                  </a:lnTo>
+                  <a:lnTo>
+                    <a:pt x="844133" y="16008"/>
+                  </a:lnTo>
+                  <a:lnTo>
+                    <a:pt x="773789" y="14702"/>
+                  </a:lnTo>
+                  <a:lnTo>
+                    <a:pt x="703444" y="13390"/>
+                  </a:lnTo>
+                  <a:lnTo>
+                    <a:pt x="633100" y="12074"/>
+                  </a:lnTo>
+                  <a:lnTo>
+                    <a:pt x="562755" y="10753"/>
+                  </a:lnTo>
+                  <a:lnTo>
+                    <a:pt x="492411" y="9426"/>
+                  </a:lnTo>
+                  <a:lnTo>
+                    <a:pt x="422066" y="8095"/>
+                  </a:lnTo>
+                  <a:lnTo>
+                    <a:pt x="351722" y="6759"/>
+                  </a:lnTo>
+                  <a:lnTo>
+                    <a:pt x="281377" y="5417"/>
+                  </a:lnTo>
+                  <a:lnTo>
+                    <a:pt x="211033" y="4070"/>
+                  </a:lnTo>
+                  <a:lnTo>
+                    <a:pt x="140688" y="2719"/>
+                  </a:lnTo>
+                  <a:lnTo>
+                    <a:pt x="70344" y="1362"/>
+                  </a:lnTo>
+                  <a:lnTo>
+                    <a:pt x="0" y="0"/>
+                  </a:lnTo>
+                </a:path>
+              </a:pathLst>
+            </a:custGeom>
+          </p:spPr>
+          <p:txBody>
+            <a:bodyPr/>
+            <a:lstStyle/>
+            <a:p/>
+          </p:txBody>
+        </p:sp>
+        <p:sp>
+          <p:nvSpPr>
+            <p:cNvPr id="69" name="pl69"/>
+            <p:cNvSpPr/>
+            <p:nvPr/>
+          </p:nvSpPr>
+          <p:spPr>
+            <a:xfrm>
+              <a:off x="1452346" y="4336484"/>
+              <a:ext cx="6747070" cy="1199736"/>
+            </a:xfrm>
+            <a:custGeom>
+              <a:avLst/>
+              <a:pathLst>
+                <a:path w="6747070" h="1199736">
+                  <a:moveTo>
+                    <a:pt x="0" y="0"/>
+                  </a:moveTo>
+                  <a:lnTo>
+                    <a:pt x="64343" y="36501"/>
+                  </a:lnTo>
+                  <a:lnTo>
+                    <a:pt x="134687" y="75144"/>
+                  </a:lnTo>
+                  <a:lnTo>
+                    <a:pt x="205032" y="112564"/>
+                  </a:lnTo>
+                  <a:lnTo>
+                    <a:pt x="275376" y="148799"/>
+                  </a:lnTo>
+                  <a:lnTo>
+                    <a:pt x="345721" y="183887"/>
+                  </a:lnTo>
+                  <a:lnTo>
+                    <a:pt x="416065" y="217864"/>
+                  </a:lnTo>
+                  <a:lnTo>
+                    <a:pt x="486410" y="250766"/>
+                  </a:lnTo>
+                  <a:lnTo>
+                    <a:pt x="556754" y="282626"/>
+                  </a:lnTo>
+                  <a:lnTo>
+                    <a:pt x="627099" y="313477"/>
+                  </a:lnTo>
+                  <a:lnTo>
+                    <a:pt x="697443" y="343352"/>
+                  </a:lnTo>
+                  <a:lnTo>
+                    <a:pt x="767788" y="372281"/>
+                  </a:lnTo>
+                  <a:lnTo>
+                    <a:pt x="838132" y="400295"/>
+                  </a:lnTo>
+                  <a:lnTo>
+                    <a:pt x="908477" y="427421"/>
+                  </a:lnTo>
+                  <a:lnTo>
+                    <a:pt x="978821" y="453689"/>
+                  </a:lnTo>
+                  <a:lnTo>
+                    <a:pt x="1049166" y="479125"/>
+                  </a:lnTo>
+                  <a:lnTo>
+                    <a:pt x="1119510" y="503756"/>
+                  </a:lnTo>
+                  <a:lnTo>
+                    <a:pt x="1189855" y="527608"/>
+                  </a:lnTo>
+                  <a:lnTo>
+                    <a:pt x="1260199" y="550704"/>
+                  </a:lnTo>
+                  <a:lnTo>
+                    <a:pt x="1330544" y="573069"/>
+                  </a:lnTo>
+                  <a:lnTo>
+                    <a:pt x="1400888" y="594726"/>
+                  </a:lnTo>
+                  <a:lnTo>
+                    <a:pt x="1471233" y="615698"/>
+                  </a:lnTo>
+                  <a:lnTo>
+                    <a:pt x="1541577" y="636005"/>
+                  </a:lnTo>
+                  <a:lnTo>
+                    <a:pt x="1611922" y="655670"/>
+                  </a:lnTo>
+                  <a:lnTo>
+                    <a:pt x="1682266" y="674713"/>
+                  </a:lnTo>
+                  <a:lnTo>
+                    <a:pt x="1752611" y="693152"/>
+                  </a:lnTo>
+                  <a:lnTo>
+                    <a:pt x="1822955" y="711008"/>
+                  </a:lnTo>
+                  <a:lnTo>
+                    <a:pt x="1893300" y="728298"/>
+                  </a:lnTo>
+                  <a:lnTo>
+                    <a:pt x="1963644" y="745041"/>
+                  </a:lnTo>
+                  <a:lnTo>
+                    <a:pt x="2033989" y="761255"/>
+                  </a:lnTo>
+                  <a:lnTo>
+                    <a:pt x="2104333" y="776954"/>
+                  </a:lnTo>
+                  <a:lnTo>
+                    <a:pt x="2174678" y="792157"/>
+                  </a:lnTo>
+                  <a:lnTo>
+                    <a:pt x="2245022" y="806879"/>
+                  </a:lnTo>
+                  <a:lnTo>
+                    <a:pt x="2315367" y="821134"/>
+                  </a:lnTo>
+                  <a:lnTo>
+                    <a:pt x="2385711" y="834939"/>
+                  </a:lnTo>
+                  <a:lnTo>
+                    <a:pt x="2456056" y="848306"/>
+                  </a:lnTo>
+                  <a:lnTo>
+                    <a:pt x="2526400" y="861250"/>
+                  </a:lnTo>
+                  <a:lnTo>
+                    <a:pt x="2596745" y="873785"/>
+                  </a:lnTo>
+                  <a:lnTo>
+                    <a:pt x="2667089" y="885922"/>
+                  </a:lnTo>
+                  <a:lnTo>
+                    <a:pt x="2737434" y="897676"/>
+                  </a:lnTo>
+                  <a:lnTo>
+                    <a:pt x="2807778" y="909057"/>
+                  </a:lnTo>
+                  <a:lnTo>
+                    <a:pt x="2878123" y="920078"/>
+                  </a:lnTo>
+                  <a:lnTo>
+                    <a:pt x="2948467" y="930750"/>
+                  </a:lnTo>
+                  <a:lnTo>
+                    <a:pt x="3018812" y="941084"/>
+                  </a:lnTo>
+                  <a:lnTo>
+                    <a:pt x="3089156" y="951091"/>
+                  </a:lnTo>
+                  <a:lnTo>
+                    <a:pt x="3159501" y="960782"/>
+                  </a:lnTo>
+                  <a:lnTo>
+                    <a:pt x="3229845" y="970165"/>
+                  </a:lnTo>
+                  <a:lnTo>
+                    <a:pt x="3300190" y="979252"/>
+                  </a:lnTo>
+                  <a:lnTo>
+                    <a:pt x="3370534" y="988051"/>
+                  </a:lnTo>
+                  <a:lnTo>
+                    <a:pt x="3440879" y="996571"/>
+                  </a:lnTo>
+                  <a:lnTo>
+                    <a:pt x="3511223" y="1004822"/>
+                  </a:lnTo>
+                  <a:lnTo>
+                    <a:pt x="3581568" y="1012811"/>
+                  </a:lnTo>
+                  <a:lnTo>
+                    <a:pt x="3651912" y="1020548"/>
+                  </a:lnTo>
+                  <a:lnTo>
+                    <a:pt x="3722257" y="1028039"/>
+                  </a:lnTo>
+                  <a:lnTo>
+                    <a:pt x="3792601" y="1035294"/>
+                  </a:lnTo>
+                  <a:lnTo>
+                    <a:pt x="3862945" y="1042318"/>
+                  </a:lnTo>
+                  <a:lnTo>
+                    <a:pt x="3933290" y="1049121"/>
+                  </a:lnTo>
+                  <a:lnTo>
+                    <a:pt x="4003634" y="1055708"/>
+                  </a:lnTo>
+                  <a:lnTo>
+                    <a:pt x="4073979" y="1062086"/>
+                  </a:lnTo>
+                  <a:lnTo>
+                    <a:pt x="4144323" y="1068263"/>
+                  </a:lnTo>
+                  <a:lnTo>
+                    <a:pt x="4214668" y="1074244"/>
+                  </a:lnTo>
+                  <a:lnTo>
+                    <a:pt x="4285012" y="1080036"/>
+                  </a:lnTo>
+                  <a:lnTo>
+                    <a:pt x="4355357" y="1085644"/>
+                  </a:lnTo>
+                  <a:lnTo>
+                    <a:pt x="4425701" y="1091075"/>
+                  </a:lnTo>
+                  <a:lnTo>
+                    <a:pt x="4496046" y="1096334"/>
+                  </a:lnTo>
+                  <a:lnTo>
+                    <a:pt x="4566390" y="1101427"/>
+                  </a:lnTo>
+                  <a:lnTo>
+                    <a:pt x="4636735" y="1106358"/>
+                  </a:lnTo>
+                  <a:lnTo>
+                    <a:pt x="4707079" y="1111133"/>
+                  </a:lnTo>
+                  <a:lnTo>
+                    <a:pt x="4777424" y="1115757"/>
+                  </a:lnTo>
+                  <a:lnTo>
+                    <a:pt x="4847768" y="1120235"/>
+                  </a:lnTo>
+                  <a:lnTo>
+                    <a:pt x="4918113" y="1124571"/>
+                  </a:lnTo>
+                  <a:lnTo>
+                    <a:pt x="4988457" y="1128769"/>
+                  </a:lnTo>
+                  <a:lnTo>
+                    <a:pt x="5058802" y="1132835"/>
+                  </a:lnTo>
+                  <a:lnTo>
+                    <a:pt x="5129146" y="1136772"/>
+                  </a:lnTo>
+                  <a:lnTo>
+                    <a:pt x="5199491" y="1140584"/>
+                  </a:lnTo>
+                  <a:lnTo>
+                    <a:pt x="5269835" y="1144276"/>
+                  </a:lnTo>
+                  <a:lnTo>
+                    <a:pt x="5340180" y="1147851"/>
+                  </a:lnTo>
+                  <a:lnTo>
+                    <a:pt x="5410524" y="1151312"/>
+                  </a:lnTo>
+                  <a:lnTo>
+                    <a:pt x="5480869" y="1154665"/>
+                  </a:lnTo>
+                  <a:lnTo>
+                    <a:pt x="5551213" y="1157910"/>
+                  </a:lnTo>
+                  <a:lnTo>
+                    <a:pt x="5621558" y="1161054"/>
+                  </a:lnTo>
+                  <a:lnTo>
+                    <a:pt x="5691902" y="1164097"/>
+                  </a:lnTo>
+                  <a:lnTo>
+                    <a:pt x="5762247" y="1167045"/>
+                  </a:lnTo>
+                  <a:lnTo>
+                    <a:pt x="5832591" y="1169899"/>
+                  </a:lnTo>
+                  <a:lnTo>
+                    <a:pt x="5902936" y="1172662"/>
+                  </a:lnTo>
+                  <a:lnTo>
+                    <a:pt x="5973280" y="1175339"/>
+                  </a:lnTo>
+                  <a:lnTo>
+                    <a:pt x="6043625" y="1177930"/>
+                  </a:lnTo>
+                  <a:lnTo>
+                    <a:pt x="6113969" y="1180440"/>
+                  </a:lnTo>
+                  <a:lnTo>
+                    <a:pt x="6184314" y="1182870"/>
+                  </a:lnTo>
+                  <a:lnTo>
+                    <a:pt x="6254658" y="1185223"/>
+                  </a:lnTo>
+                  <a:lnTo>
+                    <a:pt x="6325003" y="1187501"/>
+                  </a:lnTo>
+                  <a:lnTo>
+                    <a:pt x="6395347" y="1189708"/>
+                  </a:lnTo>
+                  <a:lnTo>
+                    <a:pt x="6465692" y="1191844"/>
+                  </a:lnTo>
+                  <a:lnTo>
+                    <a:pt x="6536036" y="1193913"/>
+                  </a:lnTo>
+                  <a:lnTo>
+                    <a:pt x="6606381" y="1195917"/>
+                  </a:lnTo>
+                  <a:lnTo>
+                    <a:pt x="6676725" y="1197857"/>
+                  </a:lnTo>
+                  <a:lnTo>
+                    <a:pt x="6747070" y="1199736"/>
+                  </a:lnTo>
+                </a:path>
+              </a:pathLst>
+            </a:custGeom>
+            <a:ln w="27101" cap="flat">
+              <a:solidFill>
+                <a:srgbClr val="FF8C00">
+                  <a:alpha val="100000"/>
+                </a:srgbClr>
+              </a:solidFill>
+              <a:prstDash val="solid"/>
+              <a:round/>
+            </a:ln>
+          </p:spPr>
+          <p:txBody>
+            <a:bodyPr/>
+            <a:lstStyle/>
+            <a:p/>
+          </p:txBody>
+        </p:sp>
+        <p:sp>
+          <p:nvSpPr>
+            <p:cNvPr id="70" name="pl70"/>
+            <p:cNvSpPr/>
+            <p:nvPr/>
+          </p:nvSpPr>
+          <p:spPr>
+            <a:xfrm>
+              <a:off x="887106" y="5294352"/>
+              <a:ext cx="7660515" cy="0"/>
+            </a:xfrm>
+            <a:custGeom>
+              <a:avLst/>
+              <a:pathLst>
+                <a:path w="7660515" h="0">
+                  <a:moveTo>
+                    <a:pt x="0" y="0"/>
+                  </a:moveTo>
+                  <a:lnTo>
+                    <a:pt x="7660515" y="0"/>
+                  </a:lnTo>
+                  <a:lnTo>
+                    <a:pt x="7660515" y="0"/>
+                  </a:lnTo>
+                </a:path>
+              </a:pathLst>
+            </a:custGeom>
+            <a:ln w="13550" cap="flat">
+              <a:solidFill>
+                <a:srgbClr val="7F7F7F">
+                  <a:alpha val="100000"/>
+                </a:srgbClr>
+              </a:solidFill>
+              <a:prstDash val="dash"/>
+              <a:round/>
+            </a:ln>
+          </p:spPr>
+          <p:txBody>
+            <a:bodyPr/>
+            <a:lstStyle/>
+            <a:p/>
+          </p:txBody>
+        </p:sp>
+        <p:sp>
+          <p:nvSpPr>
+            <p:cNvPr id="71" name="pl71"/>
+            <p:cNvSpPr/>
+            <p:nvPr/>
+          </p:nvSpPr>
+          <p:spPr>
+            <a:xfrm>
+              <a:off x="4590457" y="4336484"/>
+              <a:ext cx="0" cy="1317069"/>
+            </a:xfrm>
+            <a:custGeom>
+              <a:avLst/>
+              <a:pathLst>
+                <a:path w="0" h="1317069">
+                  <a:moveTo>
+                    <a:pt x="0" y="1317069"/>
+                  </a:moveTo>
+                  <a:lnTo>
+                    <a:pt x="0" y="0"/>
+                  </a:lnTo>
+                  <a:lnTo>
+                    <a:pt x="0" y="0"/>
+                  </a:lnTo>
+                </a:path>
+              </a:pathLst>
+            </a:custGeom>
+            <a:ln w="13550" cap="flat">
+              <a:solidFill>
+                <a:srgbClr val="666666">
+                  <a:alpha val="100000"/>
+                </a:srgbClr>
+              </a:solidFill>
+              <a:prstDash val="dot"/>
+              <a:round/>
+            </a:ln>
+          </p:spPr>
+          <p:txBody>
+            <a:bodyPr/>
+            <a:lstStyle/>
+            <a:p/>
+          </p:txBody>
+        </p:sp>
+        <p:sp>
+          <p:nvSpPr>
+            <p:cNvPr id="72" name="tx72"/>
+            <p:cNvSpPr/>
+            <p:nvPr/>
+          </p:nvSpPr>
+          <p:spPr>
+            <a:xfrm>
+              <a:off x="762297" y="5553636"/>
+              <a:ext cx="62179" cy="80101"/>
+            </a:xfrm>
+            <a:prstGeom prst="rect">
+              <a:avLst/>
+            </a:prstGeom>
+            <a:noFill/>
+          </p:spPr>
+          <p:txBody>
+            <a:bodyPr lIns="0" rIns="0" tIns="0" bIns="0" anchorCtr="1" anchor="ctr" wrap="none"/>
+            <a:lstStyle/>
+            <a:p>
+              <a:pPr algn="l" marL="0" marR="0" indent="0">
+                <a:lnSpc>
+                  <a:spcPts val="880"/>
+                </a:lnSpc>
+                <a:spcBef>
+                  <a:spcPts val="0"/>
+                </a:spcBef>
+                <a:spcAft>
+                  <a:spcPts val="0"/>
+                </a:spcAft>
+              </a:pPr>
+              <a:r>
+                <a:rPr sz="880">
+                  <a:solidFill>
+                    <a:srgbClr val="4D4D4D">
+                      <a:alpha val="100000"/>
+                    </a:srgbClr>
+                  </a:solidFill>
+                  <a:latin typeface="Helvetica"/>
+                  <a:cs typeface="Helvetica"/>
+                </a:rPr>
+                <a:t>0</a:t>
+              </a:r>
+            </a:p>
+          </p:txBody>
+        </p:sp>
+        <p:sp>
+          <p:nvSpPr>
+            <p:cNvPr id="73" name="tx73"/>
+            <p:cNvSpPr/>
+            <p:nvPr/>
+          </p:nvSpPr>
+          <p:spPr>
+            <a:xfrm>
+              <a:off x="762297" y="5254302"/>
+              <a:ext cx="62179" cy="80101"/>
+            </a:xfrm>
+            <a:prstGeom prst="rect">
+              <a:avLst/>
+            </a:prstGeom>
+            <a:noFill/>
+          </p:spPr>
+          <p:txBody>
+            <a:bodyPr lIns="0" rIns="0" tIns="0" bIns="0" anchorCtr="1" anchor="ctr" wrap="none"/>
+            <a:lstStyle/>
+            <a:p>
+              <a:pPr algn="l" marL="0" marR="0" indent="0">
+                <a:lnSpc>
+                  <a:spcPts val="880"/>
+                </a:lnSpc>
+                <a:spcBef>
+                  <a:spcPts val="0"/>
+                </a:spcBef>
+                <a:spcAft>
+                  <a:spcPts val="0"/>
+                </a:spcAft>
+              </a:pPr>
+              <a:r>
+                <a:rPr sz="880">
+                  <a:solidFill>
+                    <a:srgbClr val="4D4D4D">
+                      <a:alpha val="100000"/>
+                    </a:srgbClr>
+                  </a:solidFill>
+                  <a:latin typeface="Helvetica"/>
+                  <a:cs typeface="Helvetica"/>
+                </a:rPr>
+                <a:t>1</a:t>
+              </a:r>
+            </a:p>
+          </p:txBody>
+        </p:sp>
+        <p:sp>
+          <p:nvSpPr>
+            <p:cNvPr id="74" name="tx74"/>
+            <p:cNvSpPr/>
+            <p:nvPr/>
+          </p:nvSpPr>
+          <p:spPr>
+            <a:xfrm>
+              <a:off x="762297" y="4954968"/>
+              <a:ext cx="62179" cy="80101"/>
+            </a:xfrm>
+            <a:prstGeom prst="rect">
+              <a:avLst/>
+            </a:prstGeom>
+            <a:noFill/>
+          </p:spPr>
+          <p:txBody>
+            <a:bodyPr lIns="0" rIns="0" tIns="0" bIns="0" anchorCtr="1" anchor="ctr" wrap="none"/>
+            <a:lstStyle/>
+            <a:p>
+              <a:pPr algn="l" marL="0" marR="0" indent="0">
+                <a:lnSpc>
+                  <a:spcPts val="880"/>
+                </a:lnSpc>
+                <a:spcBef>
+                  <a:spcPts val="0"/>
+                </a:spcBef>
+                <a:spcAft>
+                  <a:spcPts val="0"/>
+                </a:spcAft>
+              </a:pPr>
+              <a:r>
+                <a:rPr sz="880">
+                  <a:solidFill>
+                    <a:srgbClr val="4D4D4D">
+                      <a:alpha val="100000"/>
+                    </a:srgbClr>
+                  </a:solidFill>
+                  <a:latin typeface="Helvetica"/>
+                  <a:cs typeface="Helvetica"/>
+                </a:rPr>
+                <a:t>2</a:t>
+              </a:r>
+            </a:p>
+          </p:txBody>
+        </p:sp>
+        <p:sp>
+          <p:nvSpPr>
+            <p:cNvPr id="75" name="tx75"/>
+            <p:cNvSpPr/>
+            <p:nvPr/>
+          </p:nvSpPr>
+          <p:spPr>
+            <a:xfrm>
+              <a:off x="762297" y="4655634"/>
+              <a:ext cx="62179" cy="80101"/>
+            </a:xfrm>
+            <a:prstGeom prst="rect">
+              <a:avLst/>
+            </a:prstGeom>
+            <a:noFill/>
+          </p:spPr>
+          <p:txBody>
+            <a:bodyPr lIns="0" rIns="0" tIns="0" bIns="0" anchorCtr="1" anchor="ctr" wrap="none"/>
+            <a:lstStyle/>
+            <a:p>
+              <a:pPr algn="l" marL="0" marR="0" indent="0">
+                <a:lnSpc>
+                  <a:spcPts val="880"/>
+                </a:lnSpc>
+                <a:spcBef>
+                  <a:spcPts val="0"/>
+                </a:spcBef>
+                <a:spcAft>
+                  <a:spcPts val="0"/>
+                </a:spcAft>
+              </a:pPr>
+              <a:r>
+                <a:rPr sz="880">
+                  <a:solidFill>
+                    <a:srgbClr val="4D4D4D">
+                      <a:alpha val="100000"/>
+                    </a:srgbClr>
+                  </a:solidFill>
+                  <a:latin typeface="Helvetica"/>
+                  <a:cs typeface="Helvetica"/>
+                </a:rPr>
+                <a:t>3</a:t>
+              </a:r>
+            </a:p>
+          </p:txBody>
+        </p:sp>
+        <p:sp>
+          <p:nvSpPr>
+            <p:cNvPr id="76" name="tx76"/>
+            <p:cNvSpPr/>
+            <p:nvPr/>
+          </p:nvSpPr>
+          <p:spPr>
+            <a:xfrm>
+              <a:off x="762297" y="4356300"/>
+              <a:ext cx="62179" cy="80101"/>
+            </a:xfrm>
+            <a:prstGeom prst="rect">
+              <a:avLst/>
+            </a:prstGeom>
+            <a:noFill/>
+          </p:spPr>
+          <p:txBody>
+            <a:bodyPr lIns="0" rIns="0" tIns="0" bIns="0" anchorCtr="1" anchor="ctr" wrap="none"/>
+            <a:lstStyle/>
+            <a:p>
+              <a:pPr algn="l" marL="0" marR="0" indent="0">
+                <a:lnSpc>
+                  <a:spcPts val="880"/>
+                </a:lnSpc>
+                <a:spcBef>
+                  <a:spcPts val="0"/>
+                </a:spcBef>
+                <a:spcAft>
+                  <a:spcPts val="0"/>
+                </a:spcAft>
+              </a:pPr>
+              <a:r>
+                <a:rPr sz="880">
+                  <a:solidFill>
+                    <a:srgbClr val="4D4D4D">
+                      <a:alpha val="100000"/>
+                    </a:srgbClr>
+                  </a:solidFill>
+                  <a:latin typeface="Helvetica"/>
+                  <a:cs typeface="Helvetica"/>
+                </a:rPr>
+                <a:t>4</a:t>
+              </a:r>
+            </a:p>
+          </p:txBody>
+        </p:sp>
+        <p:sp>
+          <p:nvSpPr>
+            <p:cNvPr id="77" name="tx77"/>
+            <p:cNvSpPr/>
+            <p:nvPr/>
+          </p:nvSpPr>
+          <p:spPr>
+            <a:xfrm>
+              <a:off x="1133333" y="5716183"/>
+              <a:ext cx="161574" cy="80101"/>
+            </a:xfrm>
+            <a:prstGeom prst="rect">
+              <a:avLst/>
+            </a:prstGeom>
+            <a:noFill/>
+          </p:spPr>
+          <p:txBody>
+            <a:bodyPr lIns="0" rIns="0" tIns="0" bIns="0" anchorCtr="1" anchor="ctr" wrap="none"/>
+            <a:lstStyle/>
+            <a:p>
+              <a:pPr algn="l" marL="0" marR="0" indent="0">
+                <a:lnSpc>
+                  <a:spcPts val="880"/>
+                </a:lnSpc>
+                <a:spcBef>
+                  <a:spcPts val="0"/>
+                </a:spcBef>
+                <a:spcAft>
+                  <a:spcPts val="0"/>
+                </a:spcAft>
+              </a:pPr>
+              <a:r>
+                <a:rPr sz="880">
+                  <a:solidFill>
+                    <a:srgbClr val="4D4D4D">
+                      <a:alpha val="100000"/>
+                    </a:srgbClr>
+                  </a:solidFill>
+                  <a:latin typeface="Helvetica"/>
+                  <a:cs typeface="Helvetica"/>
+                </a:rPr>
+                <a:t>-40</a:t>
+              </a:r>
+            </a:p>
+          </p:txBody>
+        </p:sp>
+        <p:sp>
+          <p:nvSpPr>
+            <p:cNvPr id="78" name="tx78"/>
+            <p:cNvSpPr/>
+            <p:nvPr/>
+          </p:nvSpPr>
+          <p:spPr>
+            <a:xfrm>
+              <a:off x="1978619" y="5716183"/>
+              <a:ext cx="161574" cy="80101"/>
+            </a:xfrm>
+            <a:prstGeom prst="rect">
+              <a:avLst/>
+            </a:prstGeom>
+            <a:noFill/>
+          </p:spPr>
+          <p:txBody>
+            <a:bodyPr lIns="0" rIns="0" tIns="0" bIns="0" anchorCtr="1" anchor="ctr" wrap="none"/>
+            <a:lstStyle/>
+            <a:p>
+              <a:pPr algn="l" marL="0" marR="0" indent="0">
+                <a:lnSpc>
+                  <a:spcPts val="880"/>
+                </a:lnSpc>
+                <a:spcBef>
+                  <a:spcPts val="0"/>
+                </a:spcBef>
+                <a:spcAft>
+                  <a:spcPts val="0"/>
+                </a:spcAft>
+              </a:pPr>
+              <a:r>
+                <a:rPr sz="880">
+                  <a:solidFill>
+                    <a:srgbClr val="4D4D4D">
+                      <a:alpha val="100000"/>
+                    </a:srgbClr>
+                  </a:solidFill>
+                  <a:latin typeface="Helvetica"/>
+                  <a:cs typeface="Helvetica"/>
+                </a:rPr>
+                <a:t>-30</a:t>
+              </a:r>
+            </a:p>
+          </p:txBody>
+        </p:sp>
+        <p:sp>
+          <p:nvSpPr>
+            <p:cNvPr id="79" name="tx79"/>
+            <p:cNvSpPr/>
+            <p:nvPr/>
+          </p:nvSpPr>
+          <p:spPr>
+            <a:xfrm>
+              <a:off x="2823906" y="5716183"/>
+              <a:ext cx="161574" cy="80101"/>
+            </a:xfrm>
+            <a:prstGeom prst="rect">
+              <a:avLst/>
+            </a:prstGeom>
+            <a:noFill/>
+          </p:spPr>
+          <p:txBody>
+            <a:bodyPr lIns="0" rIns="0" tIns="0" bIns="0" anchorCtr="1" anchor="ctr" wrap="none"/>
+            <a:lstStyle/>
+            <a:p>
+              <a:pPr algn="l" marL="0" marR="0" indent="0">
+                <a:lnSpc>
+                  <a:spcPts val="880"/>
+                </a:lnSpc>
+                <a:spcBef>
+                  <a:spcPts val="0"/>
+                </a:spcBef>
+                <a:spcAft>
+                  <a:spcPts val="0"/>
+                </a:spcAft>
+              </a:pPr>
+              <a:r>
+                <a:rPr sz="880">
+                  <a:solidFill>
+                    <a:srgbClr val="4D4D4D">
+                      <a:alpha val="100000"/>
+                    </a:srgbClr>
+                  </a:solidFill>
+                  <a:latin typeface="Helvetica"/>
+                  <a:cs typeface="Helvetica"/>
+                </a:rPr>
+                <a:t>-20</a:t>
+              </a:r>
+            </a:p>
+          </p:txBody>
+        </p:sp>
+        <p:sp>
+          <p:nvSpPr>
+            <p:cNvPr id="80" name="tx80"/>
+            <p:cNvSpPr/>
+            <p:nvPr/>
+          </p:nvSpPr>
+          <p:spPr>
+            <a:xfrm>
+              <a:off x="3669192" y="5716183"/>
+              <a:ext cx="161574" cy="80101"/>
+            </a:xfrm>
+            <a:prstGeom prst="rect">
+              <a:avLst/>
+            </a:prstGeom>
+            <a:noFill/>
+          </p:spPr>
+          <p:txBody>
+            <a:bodyPr lIns="0" rIns="0" tIns="0" bIns="0" anchorCtr="1" anchor="ctr" wrap="none"/>
+            <a:lstStyle/>
+            <a:p>
+              <a:pPr algn="l" marL="0" marR="0" indent="0">
+                <a:lnSpc>
+                  <a:spcPts val="880"/>
+                </a:lnSpc>
+                <a:spcBef>
+                  <a:spcPts val="0"/>
+                </a:spcBef>
+                <a:spcAft>
+                  <a:spcPts val="0"/>
+                </a:spcAft>
+              </a:pPr>
+              <a:r>
+                <a:rPr sz="880">
+                  <a:solidFill>
+                    <a:srgbClr val="4D4D4D">
+                      <a:alpha val="100000"/>
+                    </a:srgbClr>
+                  </a:solidFill>
+                  <a:latin typeface="Helvetica"/>
+                  <a:cs typeface="Helvetica"/>
+                </a:rPr>
+                <a:t>-10</a:t>
+              </a:r>
+            </a:p>
+          </p:txBody>
+        </p:sp>
+        <p:sp>
+          <p:nvSpPr>
+            <p:cNvPr id="81" name="tx81"/>
+            <p:cNvSpPr/>
+            <p:nvPr/>
+          </p:nvSpPr>
+          <p:spPr>
+            <a:xfrm>
+              <a:off x="4564176" y="5716183"/>
+              <a:ext cx="62179" cy="80101"/>
+            </a:xfrm>
+            <a:prstGeom prst="rect">
+              <a:avLst/>
+            </a:prstGeom>
+            <a:noFill/>
+          </p:spPr>
+          <p:txBody>
+            <a:bodyPr lIns="0" rIns="0" tIns="0" bIns="0" anchorCtr="1" anchor="ctr" wrap="none"/>
+            <a:lstStyle/>
+            <a:p>
+              <a:pPr algn="l" marL="0" marR="0" indent="0">
+                <a:lnSpc>
+                  <a:spcPts val="880"/>
+                </a:lnSpc>
+                <a:spcBef>
+                  <a:spcPts val="0"/>
+                </a:spcBef>
+                <a:spcAft>
+                  <a:spcPts val="0"/>
+                </a:spcAft>
+              </a:pPr>
+              <a:r>
+                <a:rPr sz="880">
+                  <a:solidFill>
+                    <a:srgbClr val="4D4D4D">
+                      <a:alpha val="100000"/>
+                    </a:srgbClr>
+                  </a:solidFill>
+                  <a:latin typeface="Helvetica"/>
+                  <a:cs typeface="Helvetica"/>
+                </a:rPr>
+                <a:t>0</a:t>
+              </a:r>
+            </a:p>
+          </p:txBody>
+        </p:sp>
+        <p:sp>
+          <p:nvSpPr>
+            <p:cNvPr id="82" name="tx82"/>
+            <p:cNvSpPr/>
+            <p:nvPr/>
+          </p:nvSpPr>
+          <p:spPr>
+            <a:xfrm>
+              <a:off x="5378373" y="5716183"/>
+              <a:ext cx="124358" cy="80101"/>
+            </a:xfrm>
+            <a:prstGeom prst="rect">
+              <a:avLst/>
+            </a:prstGeom>
+            <a:noFill/>
+          </p:spPr>
+          <p:txBody>
+            <a:bodyPr lIns="0" rIns="0" tIns="0" bIns="0" anchorCtr="1" anchor="ctr" wrap="none"/>
+            <a:lstStyle/>
+            <a:p>
+              <a:pPr algn="l" marL="0" marR="0" indent="0">
+                <a:lnSpc>
+                  <a:spcPts val="880"/>
+                </a:lnSpc>
+                <a:spcBef>
+                  <a:spcPts val="0"/>
+                </a:spcBef>
+                <a:spcAft>
+                  <a:spcPts val="0"/>
+                </a:spcAft>
+              </a:pPr>
+              <a:r>
+                <a:rPr sz="880">
+                  <a:solidFill>
+                    <a:srgbClr val="4D4D4D">
+                      <a:alpha val="100000"/>
+                    </a:srgbClr>
+                  </a:solidFill>
+                  <a:latin typeface="Helvetica"/>
+                  <a:cs typeface="Helvetica"/>
+                </a:rPr>
+                <a:t>10</a:t>
+              </a:r>
+            </a:p>
+          </p:txBody>
+        </p:sp>
+        <p:sp>
+          <p:nvSpPr>
+            <p:cNvPr id="83" name="tx83"/>
+            <p:cNvSpPr/>
+            <p:nvPr/>
+          </p:nvSpPr>
+          <p:spPr>
+            <a:xfrm>
+              <a:off x="6223659" y="5716183"/>
+              <a:ext cx="124358" cy="80101"/>
+            </a:xfrm>
+            <a:prstGeom prst="rect">
+              <a:avLst/>
+            </a:prstGeom>
+            <a:noFill/>
+          </p:spPr>
+          <p:txBody>
+            <a:bodyPr lIns="0" rIns="0" tIns="0" bIns="0" anchorCtr="1" anchor="ctr" wrap="none"/>
+            <a:lstStyle/>
+            <a:p>
+              <a:pPr algn="l" marL="0" marR="0" indent="0">
+                <a:lnSpc>
+                  <a:spcPts val="880"/>
+                </a:lnSpc>
+                <a:spcBef>
+                  <a:spcPts val="0"/>
+                </a:spcBef>
+                <a:spcAft>
+                  <a:spcPts val="0"/>
+                </a:spcAft>
+              </a:pPr>
+              <a:r>
+                <a:rPr sz="880">
+                  <a:solidFill>
+                    <a:srgbClr val="4D4D4D">
+                      <a:alpha val="100000"/>
+                    </a:srgbClr>
+                  </a:solidFill>
+                  <a:latin typeface="Helvetica"/>
+                  <a:cs typeface="Helvetica"/>
+                </a:rPr>
+                <a:t>20</a:t>
+              </a:r>
+            </a:p>
+          </p:txBody>
+        </p:sp>
+        <p:sp>
+          <p:nvSpPr>
+            <p:cNvPr id="84" name="tx84"/>
+            <p:cNvSpPr/>
+            <p:nvPr/>
+          </p:nvSpPr>
+          <p:spPr>
+            <a:xfrm>
+              <a:off x="7068946" y="5716183"/>
+              <a:ext cx="124358" cy="80101"/>
+            </a:xfrm>
+            <a:prstGeom prst="rect">
+              <a:avLst/>
+            </a:prstGeom>
+            <a:noFill/>
+          </p:spPr>
+          <p:txBody>
+            <a:bodyPr lIns="0" rIns="0" tIns="0" bIns="0" anchorCtr="1" anchor="ctr" wrap="none"/>
+            <a:lstStyle/>
+            <a:p>
+              <a:pPr algn="l" marL="0" marR="0" indent="0">
+                <a:lnSpc>
+                  <a:spcPts val="880"/>
+                </a:lnSpc>
+                <a:spcBef>
+                  <a:spcPts val="0"/>
+                </a:spcBef>
+                <a:spcAft>
+                  <a:spcPts val="0"/>
+                </a:spcAft>
+              </a:pPr>
+              <a:r>
+                <a:rPr sz="880">
+                  <a:solidFill>
+                    <a:srgbClr val="4D4D4D">
+                      <a:alpha val="100000"/>
+                    </a:srgbClr>
+                  </a:solidFill>
+                  <a:latin typeface="Helvetica"/>
+                  <a:cs typeface="Helvetica"/>
+                </a:rPr>
+                <a:t>30</a:t>
+              </a:r>
+            </a:p>
+          </p:txBody>
+        </p:sp>
+        <p:sp>
+          <p:nvSpPr>
+            <p:cNvPr id="85" name="tx85"/>
+            <p:cNvSpPr/>
+            <p:nvPr/>
+          </p:nvSpPr>
+          <p:spPr>
+            <a:xfrm>
+              <a:off x="7914232" y="5716183"/>
+              <a:ext cx="124358" cy="80101"/>
+            </a:xfrm>
+            <a:prstGeom prst="rect">
+              <a:avLst/>
+            </a:prstGeom>
+            <a:noFill/>
+          </p:spPr>
+          <p:txBody>
+            <a:bodyPr lIns="0" rIns="0" tIns="0" bIns="0" anchorCtr="1" anchor="ctr" wrap="none"/>
+            <a:lstStyle/>
+            <a:p>
+              <a:pPr algn="l" marL="0" marR="0" indent="0">
+                <a:lnSpc>
+                  <a:spcPts val="880"/>
+                </a:lnSpc>
+                <a:spcBef>
+                  <a:spcPts val="0"/>
+                </a:spcBef>
+                <a:spcAft>
+                  <a:spcPts val="0"/>
+                </a:spcAft>
+              </a:pPr>
+              <a:r>
+                <a:rPr sz="880">
+                  <a:solidFill>
+                    <a:srgbClr val="4D4D4D">
+                      <a:alpha val="100000"/>
+                    </a:srgbClr>
+                  </a:solidFill>
+                  <a:latin typeface="Helvetica"/>
+                  <a:cs typeface="Helvetica"/>
+                </a:rPr>
+                <a:t>40</a:t>
+              </a:r>
+            </a:p>
+          </p:txBody>
+        </p:sp>
+        <p:sp>
+          <p:nvSpPr>
+            <p:cNvPr id="86" name="tx86"/>
+            <p:cNvSpPr/>
+            <p:nvPr/>
+          </p:nvSpPr>
+          <p:spPr>
+            <a:xfrm>
+              <a:off x="2928340" y="5855859"/>
+              <a:ext cx="3578047" cy="100218"/>
+            </a:xfrm>
+            <a:prstGeom prst="rect">
+              <a:avLst/>
+            </a:prstGeom>
+            <a:noFill/>
+          </p:spPr>
+          <p:txBody>
+            <a:bodyPr lIns="0" rIns="0" tIns="0" bIns="0" anchorCtr="1" anchor="ctr" wrap="none"/>
+            <a:lstStyle/>
+            <a:p>
+              <a:pPr algn="l" marL="0" marR="0" indent="0">
+                <a:lnSpc>
+                  <a:spcPts val="1100"/>
+                </a:lnSpc>
+                <a:spcBef>
+                  <a:spcPts val="0"/>
+                </a:spcBef>
+                <a:spcAft>
+                  <a:spcPts val="0"/>
+                </a:spcAft>
+              </a:pPr>
+              <a:r>
+                <a:rPr sz="1100">
+                  <a:solidFill>
+                    <a:srgbClr val="000000">
+                      <a:alpha val="100000"/>
+                    </a:srgbClr>
+                  </a:solidFill>
+                  <a:latin typeface="Helvetica"/>
+                  <a:cs typeface="Helvetica"/>
+                </a:rPr>
+                <a:t>eGFR difference (%): 100 × (CKD-EPI Cr-Cys − CG) / CG</a:t>
+              </a:r>
+            </a:p>
+          </p:txBody>
+        </p:sp>
+        <p:sp>
+          <p:nvSpPr>
+            <p:cNvPr id="87" name="tx87"/>
+            <p:cNvSpPr/>
+            <p:nvPr/>
+          </p:nvSpPr>
+          <p:spPr>
+            <a:xfrm rot="-5400000">
+              <a:off x="138035" y="4944909"/>
+              <a:ext cx="1016904" cy="100218"/>
+            </a:xfrm>
+            <a:prstGeom prst="rect">
+              <a:avLst/>
+            </a:prstGeom>
+            <a:noFill/>
+          </p:spPr>
+          <p:txBody>
+            <a:bodyPr lIns="0" rIns="0" tIns="0" bIns="0" anchorCtr="1" anchor="ctr" wrap="none"/>
+            <a:lstStyle/>
+            <a:p>
+              <a:pPr algn="l" marL="0" marR="0" indent="0">
+                <a:lnSpc>
+                  <a:spcPts val="1100"/>
+                </a:lnSpc>
+                <a:spcBef>
+                  <a:spcPts val="0"/>
+                </a:spcBef>
+                <a:spcAft>
+                  <a:spcPts val="0"/>
+                </a:spcAft>
+              </a:pPr>
+              <a:r>
+                <a:rPr sz="1100">
+                  <a:solidFill>
+                    <a:srgbClr val="000000">
+                      <a:alpha val="100000"/>
+                    </a:srgbClr>
+                  </a:solidFill>
+                  <a:latin typeface="Helvetica"/>
+                  <a:cs typeface="Helvetica"/>
+                </a:rPr>
+                <a:t>subHR (95% CI)</a:t>
+              </a:r>
+            </a:p>
+          </p:txBody>
+        </p:sp>
+        <p:sp>
+          <p:nvSpPr>
+            <p:cNvPr id="88" name="tx88"/>
+            <p:cNvSpPr/>
+            <p:nvPr/>
+          </p:nvSpPr>
+          <p:spPr>
+            <a:xfrm>
+              <a:off x="887106" y="4159544"/>
+              <a:ext cx="6321612" cy="82021"/>
+            </a:xfrm>
+            <a:prstGeom prst="rect">
+              <a:avLst/>
+            </a:prstGeom>
+            <a:noFill/>
+          </p:spPr>
+          <p:txBody>
+            <a:bodyPr lIns="0" rIns="0" tIns="0" bIns="0" anchorCtr="1" anchor="ctr" wrap="none"/>
+            <a:lstStyle/>
+            <a:p>
+              <a:pPr algn="l" marL="0" marR="0" indent="0">
+                <a:lnSpc>
+                  <a:spcPts val="900"/>
+                </a:lnSpc>
+                <a:spcBef>
+                  <a:spcPts val="0"/>
+                </a:spcBef>
+                <a:spcAft>
+                  <a:spcPts val="0"/>
+                </a:spcAft>
+              </a:pPr>
+              <a:r>
+                <a:rPr sz="900">
+                  <a:solidFill>
+                    <a:srgbClr val="404040">
+                      <a:alpha val="100000"/>
+                    </a:srgbClr>
+                  </a:solidFill>
+                  <a:latin typeface="Helvetica"/>
+                  <a:cs typeface="Helvetica"/>
+                </a:rPr>
+                <a:t>subHR per 10 % decline: 1.47 (1.05-2.07), p = 0.026  |  per IQR decline (Δ = 29.3 %): 3.10 (1.14-8.41)  |  IQR: [-14.6, 14.7] %</a:t>
+              </a:r>
+            </a:p>
+          </p:txBody>
+        </p:sp>
+        <p:sp>
+          <p:nvSpPr>
+            <p:cNvPr id="89" name="tx89"/>
+            <p:cNvSpPr/>
+            <p:nvPr/>
+          </p:nvSpPr>
+          <p:spPr>
+            <a:xfrm>
+              <a:off x="887106" y="3932770"/>
               <a:ext cx="1843521" cy="120152"/>
             </a:xfrm>
             <a:prstGeom prst="rect">
